--- a/presentation/DH308_HIS_Billing_Final.pptx
+++ b/presentation/DH308_HIS_Billing_Final.pptx
@@ -1,39 +1,2079 @@
 
 <file path=ppt/presentation.xml><?xml version="1.0" encoding="utf-8"?>
-<ns0:presentation xmlns:ns0="http://schemas.openxmlformats.org/presentationml/2006/main" xmlns:ns1="http://schemas.openxmlformats.org/officeDocument/2006/relationships">
-  <ns0:sldMasterIdLst>
-    <ns0:sldMasterId id="2147483648" ns1:id="R41de15c969d34bef"/>
-  </ns0:sldMasterIdLst>
-  <ns0:sldIdLst>
-    <ns0:sldId id="256" ns1:id="R1f4917d3a5964d3a"/>
-    <ns0:sldId id="257" ns1:id="R8d89196d040a43d8"/>
-    <ns0:sldId id="258" ns1:id="R7fa48a7daa664af2"/>
-    <ns0:sldId id="259" ns1:id="R70cc84507d7d4558"/>
-    <ns0:sldId id="260" ns1:id="R4331f9dcc8234f32"/>
-    <ns0:sldId id="261" ns1:id="R59e38f9908364651"/>
-    <ns0:sldId id="262" ns1:id="R14f0f498f2134d3d"/>
-    <ns0:sldId id="263" ns1:id="R648d31bbd23942f1"/>
-    <ns0:sldId id="264" ns1:id="R1c904c37e962423f"/>
-    <ns0:sldId id="265" ns1:id="Rccab3b17282d48df"/>
-    <ns0:sldId id="266" ns1:id="R7074ce02c5864224"/>
-    <ns0:sldId id="267" ns1:id="Re3875a130df74f82"/>
-    <ns0:sldId id="268" ns1:id="Rc2108e55bb2046b1"/>
-    <ns0:sldId id="269" ns1:id="R8b4a5166cde04dc7"/>
-    <ns0:sldId id="270" ns1:id="R47797c7a2bdb4627"/>
-    <ns0:sldId id="271" ns1:id="R4799fc1fc26949b2"/>
-    <ns0:sldId id="272" ns1:id="R4fc1c2c72da84181"/>
-    <ns0:sldId id="273" ns1:id="R45c2adacb0a34168"/>
-    <ns0:sldId id="274" ns1:id="R203a98c44bfe4399"/>
-    <ns0:sldId id="275" ns1:id="Rf2616b7736814098"/>
-    <ns0:sldId id="276" ns1:id="Raa5937080a074f7c"/>
-    <ns0:sldId id="277" ns1:id="Rc184acf0c20644c1"/>
-    <ns0:sldId id="278" ns1:id="R751234076d484b32"/>
-    <ns0:sldId id="279" ns1:id="R57bcfa0aa8934f2f"/>
-    <ns0:sldId id="280" ns1:id="R136be5cc821e4b69"/>
-  </ns0:sldIdLst>
-  <ns0:sldSz cx="12192000" cy="6858000"/>
-  <ns0:notesSz cx="6858000" cy="9144000"/>
-</ns0:presentation>
+<p:presentation xmlns:p="http://schemas.openxmlformats.org/presentationml/2006/main">
+  <p:sldMasterIdLst>
+    <p:sldMasterId xmlns:r="http://schemas.openxmlformats.org/officeDocument/2006/relationships" id="2147483648" r:id="R7f138ff3d38b4122"/>
+  </p:sldMasterIdLst>
+  <p:notesMasterIdLst>
+    <p:notesMasterId xmlns:r="http://schemas.openxmlformats.org/officeDocument/2006/relationships" r:id="Rf43e6dca2ae14ec8"/>
+  </p:notesMasterIdLst>
+  <p:sldIdLst>
+    <p:sldId xmlns:r="http://schemas.openxmlformats.org/officeDocument/2006/relationships" id="256" r:id="R76318f9c4ca4414d"/>
+    <p:sldId xmlns:r="http://schemas.openxmlformats.org/officeDocument/2006/relationships" id="257" r:id="Rb02701311ffc4f65"/>
+    <p:sldId xmlns:r="http://schemas.openxmlformats.org/officeDocument/2006/relationships" id="258" r:id="R513f07252fb84038"/>
+    <p:sldId xmlns:r="http://schemas.openxmlformats.org/officeDocument/2006/relationships" id="259" r:id="Rff570bbdac3c47b7"/>
+    <p:sldId xmlns:r="http://schemas.openxmlformats.org/officeDocument/2006/relationships" id="260" r:id="R28ffac073d644fbd"/>
+    <p:sldId xmlns:r="http://schemas.openxmlformats.org/officeDocument/2006/relationships" id="261" r:id="R4131c04047d94255"/>
+    <p:sldId xmlns:r="http://schemas.openxmlformats.org/officeDocument/2006/relationships" id="262" r:id="Rfaef8501df6b4b2d"/>
+    <p:sldId xmlns:r="http://schemas.openxmlformats.org/officeDocument/2006/relationships" id="263" r:id="Rd0efce415ab74240"/>
+    <p:sldId xmlns:r="http://schemas.openxmlformats.org/officeDocument/2006/relationships" id="264" r:id="Rc1426490386947fc"/>
+    <p:sldId xmlns:r="http://schemas.openxmlformats.org/officeDocument/2006/relationships" id="265" r:id="Redd4378435b048bf"/>
+    <p:sldId xmlns:r="http://schemas.openxmlformats.org/officeDocument/2006/relationships" id="266" r:id="R1089d0079fd94fd6"/>
+    <p:sldId xmlns:r="http://schemas.openxmlformats.org/officeDocument/2006/relationships" id="267" r:id="Rb022dcf73c6448dd"/>
+    <p:sldId xmlns:r="http://schemas.openxmlformats.org/officeDocument/2006/relationships" id="268" r:id="Rcdc3d9c2a3d54d76"/>
+    <p:sldId xmlns:r="http://schemas.openxmlformats.org/officeDocument/2006/relationships" id="269" r:id="R8f6fe9cd3dea4bb4"/>
+    <p:sldId xmlns:r="http://schemas.openxmlformats.org/officeDocument/2006/relationships" id="270" r:id="Ra617fe884f3d439c"/>
+    <p:sldId xmlns:r="http://schemas.openxmlformats.org/officeDocument/2006/relationships" id="271" r:id="Rea76b73536b4417a"/>
+    <p:sldId xmlns:r="http://schemas.openxmlformats.org/officeDocument/2006/relationships" id="272" r:id="Rd178e0caf29c4931"/>
+    <p:sldId xmlns:r="http://schemas.openxmlformats.org/officeDocument/2006/relationships" id="273" r:id="Rf3b3b908c768448b"/>
+    <p:sldId xmlns:r="http://schemas.openxmlformats.org/officeDocument/2006/relationships" id="274" r:id="R364d9b4d5adc49fb"/>
+    <p:sldId xmlns:r="http://schemas.openxmlformats.org/officeDocument/2006/relationships" id="275" r:id="R9fe8118d8ed246d7"/>
+    <p:sldId xmlns:r="http://schemas.openxmlformats.org/officeDocument/2006/relationships" id="276" r:id="Ra9e9e116be3848f9"/>
+    <p:sldId xmlns:r="http://schemas.openxmlformats.org/officeDocument/2006/relationships" id="277" r:id="R25fdff45f57f4f0c"/>
+    <p:sldId xmlns:r="http://schemas.openxmlformats.org/officeDocument/2006/relationships" id="278" r:id="R3affa51d4d744838"/>
+    <p:sldId xmlns:r="http://schemas.openxmlformats.org/officeDocument/2006/relationships" id="279" r:id="Rb22c7be89572474f"/>
+    <p:sldId xmlns:r="http://schemas.openxmlformats.org/officeDocument/2006/relationships" id="280" r:id="Rcb23130f159c4fa1"/>
+  </p:sldIdLst>
+  <p:sldSz cx="12192000" cy="6858000"/>
+  <p:notesSz cx="6858000" cy="9144000"/>
+</p:presentation>
+</file>
+
+<file path=ppt/notesMasters/notesMaster1.xml><?xml version="1.0" encoding="utf-8"?>
+<p:notesMaster xmlns:p="http://schemas.openxmlformats.org/presentationml/2006/main">
+  <p:cSld>
+    <p:bg>
+      <p:bgRef idx="1001">
+        <a:schemeClr xmlns:a="http://schemas.openxmlformats.org/drawingml/2006/main" val="bg1"/>
+      </p:bgRef>
+    </p:bg>
+    <p:spTree>
+      <p:nvGrpSpPr>
+        <p:cNvPr id="1" name=""/>
+        <p:cNvGrpSpPr/>
+        <p:nvPr/>
+      </p:nvGrpSpPr>
+      <p:grpSpPr>
+        <a:xfrm xmlns:a="http://schemas.openxmlformats.org/drawingml/2006/main"/>
+      </p:grpSpPr>
+      <p:sp>
+        <p:nvSpPr>
+          <p:cNvPr id="2" name="Header Placeholder"/>
+          <p:cNvSpPr/>
+          <p:nvPr>
+            <p:ph type="hdr" sz="quarter"/>
+          </p:nvPr>
+        </p:nvSpPr>
+        <p:spPr>
+          <a:prstGeom xmlns:a="http://schemas.openxmlformats.org/drawingml/2006/main" prst="rect">
+            <a:avLst/>
+          </a:prstGeom>
+        </p:spPr>
+        <p:txBody>
+          <a:bodyPr xmlns:a="http://schemas.openxmlformats.org/drawingml/2006/main"/>
+          <a:lstStyle xmlns:a="http://schemas.openxmlformats.org/drawingml/2006/main"/>
+          <a:p xmlns:a="http://schemas.openxmlformats.org/drawingml/2006/main"/>
+        </p:txBody>
+      </p:sp>
+      <p:sp>
+        <p:nvSpPr>
+          <p:cNvPr id="3" name="Date Placeholder"/>
+          <p:cNvSpPr/>
+          <p:nvPr>
+            <p:ph type="dt" sz="quarter" idx="1"/>
+          </p:nvPr>
+        </p:nvSpPr>
+        <p:spPr>
+          <a:prstGeom xmlns:a="http://schemas.openxmlformats.org/drawingml/2006/main" prst="rect">
+            <a:avLst/>
+          </a:prstGeom>
+        </p:spPr>
+        <p:txBody>
+          <a:bodyPr xmlns:a="http://schemas.openxmlformats.org/drawingml/2006/main"/>
+          <a:lstStyle xmlns:a="http://schemas.openxmlformats.org/drawingml/2006/main"/>
+          <a:p xmlns:a="http://schemas.openxmlformats.org/drawingml/2006/main"/>
+        </p:txBody>
+      </p:sp>
+      <p:sp>
+        <p:nvSpPr>
+          <p:cNvPr id="4" name="Slide Image Placeholder"/>
+          <p:cNvSpPr/>
+          <p:nvPr>
+            <p:ph type="sldImg" idx="2"/>
+          </p:nvPr>
+        </p:nvSpPr>
+        <p:spPr>
+          <a:prstGeom xmlns:a="http://schemas.openxmlformats.org/drawingml/2006/main" prst="rect">
+            <a:avLst/>
+          </a:prstGeom>
+        </p:spPr>
+        <p:txBody>
+          <a:bodyPr xmlns:a="http://schemas.openxmlformats.org/drawingml/2006/main"/>
+          <a:lstStyle xmlns:a="http://schemas.openxmlformats.org/drawingml/2006/main"/>
+          <a:p xmlns:a="http://schemas.openxmlformats.org/drawingml/2006/main"/>
+        </p:txBody>
+      </p:sp>
+      <p:sp>
+        <p:nvSpPr>
+          <p:cNvPr id="5" name="Notes Placeholder"/>
+          <p:cNvSpPr/>
+          <p:nvPr>
+            <p:ph type="body" sz="quarter" idx="3"/>
+          </p:nvPr>
+        </p:nvSpPr>
+        <p:spPr>
+          <a:prstGeom xmlns:a="http://schemas.openxmlformats.org/drawingml/2006/main" prst="rect">
+            <a:avLst/>
+          </a:prstGeom>
+        </p:spPr>
+        <p:txBody>
+          <a:bodyPr xmlns:a="http://schemas.openxmlformats.org/drawingml/2006/main"/>
+          <a:lstStyle xmlns:a="http://schemas.openxmlformats.org/drawingml/2006/main"/>
+          <a:p xmlns:a="http://schemas.openxmlformats.org/drawingml/2006/main"/>
+        </p:txBody>
+      </p:sp>
+      <p:sp>
+        <p:nvSpPr>
+          <p:cNvPr id="6" name="Footer Placeholder"/>
+          <p:cNvSpPr/>
+          <p:nvPr>
+            <p:ph type="ftr" sz="quarter" idx="4"/>
+          </p:nvPr>
+        </p:nvSpPr>
+        <p:spPr>
+          <a:prstGeom xmlns:a="http://schemas.openxmlformats.org/drawingml/2006/main" prst="rect">
+            <a:avLst/>
+          </a:prstGeom>
+        </p:spPr>
+        <p:txBody>
+          <a:bodyPr xmlns:a="http://schemas.openxmlformats.org/drawingml/2006/main"/>
+          <a:lstStyle xmlns:a="http://schemas.openxmlformats.org/drawingml/2006/main"/>
+          <a:p xmlns:a="http://schemas.openxmlformats.org/drawingml/2006/main"/>
+        </p:txBody>
+      </p:sp>
+      <p:sp>
+        <p:nvSpPr>
+          <p:cNvPr id="7" name="Slide Number Placeholder"/>
+          <p:cNvSpPr/>
+          <p:nvPr>
+            <p:ph type="sldNum" sz="quarter" idx="5"/>
+          </p:nvPr>
+        </p:nvSpPr>
+        <p:spPr>
+          <a:prstGeom xmlns:a="http://schemas.openxmlformats.org/drawingml/2006/main" prst="rect">
+            <a:avLst/>
+          </a:prstGeom>
+        </p:spPr>
+        <p:txBody>
+          <a:bodyPr xmlns:a="http://schemas.openxmlformats.org/drawingml/2006/main"/>
+          <a:lstStyle xmlns:a="http://schemas.openxmlformats.org/drawingml/2006/main"/>
+          <a:p xmlns:a="http://schemas.openxmlformats.org/drawingml/2006/main"/>
+        </p:txBody>
+      </p:sp>
+    </p:spTree>
+  </p:cSld>
+  <p:clrMap bg1="lt1" tx1="dk1" bg2="lt2" tx2="dk2" accent1="accent1" accent2="accent2" accent3="accent3" accent4="accent4" accent5="accent5" accent6="accent6" hlink="hlink" folHlink="folHlink"/>
+  <p:notesStyle>
+    <a:lvl1pPr xmlns:a="http://schemas.openxmlformats.org/drawingml/2006/main" marL="0" algn="l" defTabSz="914400" rtl="0" eaLnBrk="1" latinLnBrk="0" hangingPunct="1">
+      <a:defRPr sz="1200" kern="1200"/>
+    </a:lvl1pPr>
+  </p:notesStyle>
+</p:notesMaster>
+</file>
+
+<file path=ppt/notesMasters/theme/theme3.xml><?xml version="1.0" encoding="utf-8"?>
+<a:theme xmlns:a="http://schemas.openxmlformats.org/drawingml/2006/main" name="ChatGPT">
+  <a:themeElements>
+    <a:clrScheme name="ChatGPT">
+      <a:dk1>
+        <a:srgbClr val="000000"/>
+      </a:dk1>
+      <a:lt1>
+        <a:srgbClr val="FFFFFF"/>
+      </a:lt1>
+      <a:dk2>
+        <a:srgbClr val="0E2841"/>
+      </a:dk2>
+      <a:lt2>
+        <a:srgbClr val="E8E8E8"/>
+      </a:lt2>
+      <a:accent1>
+        <a:srgbClr val="156082"/>
+      </a:accent1>
+      <a:accent2>
+        <a:srgbClr val="E97132"/>
+      </a:accent2>
+      <a:accent3>
+        <a:srgbClr val="196B24"/>
+      </a:accent3>
+      <a:accent4>
+        <a:srgbClr val="0F9ED5"/>
+      </a:accent4>
+      <a:accent5>
+        <a:srgbClr val="A02B93"/>
+      </a:accent5>
+      <a:accent6>
+        <a:srgbClr val="4EA72E"/>
+      </a:accent6>
+      <a:hlink>
+        <a:srgbClr val="467886"/>
+      </a:hlink>
+      <a:folHlink>
+        <a:srgbClr val="96607D"/>
+      </a:folHlink>
+    </a:clrScheme>
+    <a:fontScheme name="">
+      <a:majorFont>
+        <a:latin typeface="Aptos"/>
+        <a:ea typeface=""/>
+        <a:cs typeface=""/>
+      </a:majorFont>
+      <a:minorFont>
+        <a:latin typeface="Aptos"/>
+        <a:ea typeface=""/>
+        <a:cs typeface=""/>
+      </a:minorFont>
+    </a:fontScheme>
+    <a:fmtScheme name="ChatGPT">
+      <a:fillStyleLst>
+        <a:solidFill>
+          <a:schemeClr val="phClr"/>
+        </a:solidFill>
+        <a:gradFill>
+          <a:gsLst>
+            <a:gs pos="0">
+              <a:schemeClr val="phClr">
+                <a:tint val="67000"/>
+                <a:lumMod val="110000"/>
+                <a:satMod val="105000"/>
+              </a:schemeClr>
+            </a:gs>
+            <a:gs pos="50000">
+              <a:schemeClr val="phClr">
+                <a:tint val="73000"/>
+                <a:lumMod val="105000"/>
+                <a:satMod val="103000"/>
+              </a:schemeClr>
+            </a:gs>
+            <a:gs pos="100000">
+              <a:schemeClr val="phClr">
+                <a:tint val="81000"/>
+                <a:lumMod val="105000"/>
+                <a:satMod val="109000"/>
+              </a:schemeClr>
+            </a:gs>
+          </a:gsLst>
+          <a:lin ang="5400000" scaled="0"/>
+        </a:gradFill>
+        <a:gradFill>
+          <a:gsLst>
+            <a:gs pos="0">
+              <a:schemeClr val="phClr">
+                <a:tint val="94000"/>
+                <a:lumMod val="102000"/>
+                <a:satMod val="103000"/>
+              </a:schemeClr>
+            </a:gs>
+            <a:gs pos="50000">
+              <a:schemeClr val="phClr">
+                <a:shade val="100000"/>
+                <a:lumMod val="100000"/>
+                <a:satMod val="110000"/>
+              </a:schemeClr>
+            </a:gs>
+            <a:gs pos="100000">
+              <a:schemeClr val="phClr">
+                <a:shade val="78000"/>
+                <a:lumMod val="99000"/>
+                <a:satMod val="120000"/>
+              </a:schemeClr>
+            </a:gs>
+          </a:gsLst>
+          <a:lin ang="5400000" scaled="0"/>
+        </a:gradFill>
+      </a:fillStyleLst>
+      <a:lnStyleLst>
+        <a:ln w="12700">
+          <a:solidFill>
+            <a:schemeClr val="phClr"/>
+          </a:solidFill>
+          <a:prstDash val="solid"/>
+        </a:ln>
+        <a:ln w="19050">
+          <a:solidFill>
+            <a:schemeClr val="phClr"/>
+          </a:solidFill>
+          <a:prstDash val="solid"/>
+        </a:ln>
+        <a:ln w="25400">
+          <a:solidFill>
+            <a:schemeClr val="phClr"/>
+          </a:solidFill>
+          <a:prstDash val="solid"/>
+        </a:ln>
+      </a:lnStyleLst>
+      <a:effectStyleLst>
+        <a:effectStyle>
+          <a:effectLst/>
+        </a:effectStyle>
+        <a:effectStyle>
+          <a:effectLst/>
+        </a:effectStyle>
+        <a:effectStyle>
+          <a:effectLst>
+            <a:outerShdw blurRad="57150" dist="19050" dir="5400000">
+              <a:srgbClr val="000000">
+                <a:alpha val="16000"/>
+              </a:srgbClr>
+            </a:outerShdw>
+          </a:effectLst>
+        </a:effectStyle>
+        <a:effectStyle>
+          <a:effectLst>
+            <a:outerShdw blurRad="19050" dist="9525" dir="5400000">
+              <a:srgbClr val="000000">
+                <a:alpha val="6000"/>
+              </a:srgbClr>
+            </a:outerShdw>
+          </a:effectLst>
+        </a:effectStyle>
+        <a:effectStyle>
+          <a:effectLst>
+            <a:outerShdw blurRad="28575" dist="9525" dir="5400000">
+              <a:srgbClr val="000000">
+                <a:alpha val="8000"/>
+              </a:srgbClr>
+            </a:outerShdw>
+          </a:effectLst>
+        </a:effectStyle>
+        <a:effectStyle>
+          <a:effectLst>
+            <a:outerShdw blurRad="57150" dist="19050" dir="5400000">
+              <a:srgbClr val="000000">
+                <a:alpha val="10000"/>
+              </a:srgbClr>
+            </a:outerShdw>
+          </a:effectLst>
+        </a:effectStyle>
+        <a:effectStyle>
+          <a:effectLst>
+            <a:outerShdw blurRad="114300" dist="38100" dir="5400000">
+              <a:srgbClr val="000000">
+                <a:alpha val="12000"/>
+              </a:srgbClr>
+            </a:outerShdw>
+          </a:effectLst>
+        </a:effectStyle>
+        <a:effectStyle>
+          <a:effectLst>
+            <a:outerShdw blurRad="171450" dist="57150" dir="5400000">
+              <a:srgbClr val="000000">
+                <a:alpha val="16000"/>
+              </a:srgbClr>
+            </a:outerShdw>
+          </a:effectLst>
+        </a:effectStyle>
+        <a:effectStyle>
+          <a:effectLst>
+            <a:outerShdw blurRad="266700" dist="95250" dir="5400000">
+              <a:srgbClr val="000000">
+                <a:alpha val="24000"/>
+              </a:srgbClr>
+            </a:outerShdw>
+          </a:effectLst>
+        </a:effectStyle>
+      </a:effectStyleLst>
+      <a:bgFillStyleLst>
+        <a:solidFill>
+          <a:schemeClr val="phClr"/>
+        </a:solidFill>
+        <a:solidFill>
+          <a:schemeClr val="phClr">
+            <a:tint val="95000"/>
+            <a:satMod val="170000"/>
+          </a:schemeClr>
+        </a:solidFill>
+        <a:gradFill>
+          <a:gsLst>
+            <a:gs pos="0">
+              <a:schemeClr val="phClr">
+                <a:tint val="93000"/>
+                <a:shade val="98000"/>
+                <a:lumMod val="102000"/>
+                <a:satMod val="150000"/>
+              </a:schemeClr>
+            </a:gs>
+            <a:gs pos="50000">
+              <a:schemeClr val="phClr">
+                <a:tint val="98000"/>
+                <a:shade val="90000"/>
+                <a:lumMod val="103000"/>
+                <a:satMod val="130000"/>
+              </a:schemeClr>
+            </a:gs>
+            <a:gs pos="100000">
+              <a:schemeClr val="phClr">
+                <a:shade val="63000"/>
+                <a:satMod val="120000"/>
+              </a:schemeClr>
+            </a:gs>
+          </a:gsLst>
+          <a:lin ang="5400000" scaled="0"/>
+        </a:gradFill>
+      </a:bgFillStyleLst>
+    </a:fmtScheme>
+  </a:themeElements>
+</a:theme>
+</file>
+
+<file path=ppt/notesSlides/notesSlide1.xml><?xml version="1.0" encoding="utf-8"?>
+<p:notes xmlns:p="http://schemas.openxmlformats.org/presentationml/2006/main">
+  <p:cSld>
+    <p:spTree>
+      <p:nvGrpSpPr>
+        <p:cNvPr id="1" name=""/>
+        <p:cNvGrpSpPr/>
+        <p:nvPr/>
+      </p:nvGrpSpPr>
+      <p:grpSpPr>
+        <a:xfrm xmlns:a="http://schemas.openxmlformats.org/drawingml/2006/main"/>
+      </p:grpSpPr>
+      <p:sp>
+        <p:nvSpPr>
+          <p:cNvPr id="2" name="Slide Image Placeholder 1"/>
+          <p:cNvSpPr>
+            <a:spLocks xmlns:a="http://schemas.openxmlformats.org/drawingml/2006/main" noGrp="1"/>
+          </p:cNvSpPr>
+          <p:nvPr>
+            <p:ph type="sldImg" idx="0"/>
+          </p:nvPr>
+        </p:nvSpPr>
+        <p:spPr/>
+      </p:sp>
+      <p:sp>
+        <p:nvSpPr>
+          <p:cNvPr id="3" name="Notes Placeholder 2"/>
+          <p:cNvSpPr>
+            <a:spLocks xmlns:a="http://schemas.openxmlformats.org/drawingml/2006/main" noGrp="1"/>
+          </p:cNvSpPr>
+          <p:nvPr>
+            <p:ph type="body" idx="1"/>
+          </p:nvPr>
+        </p:nvSpPr>
+        <p:spPr/>
+        <p:txBody>
+          <a:bodyPr xmlns:a="http://schemas.openxmlformats.org/drawingml/2006/main"/>
+          <a:lstStyle xmlns:a="http://schemas.openxmlformats.org/drawingml/2006/main"/>
+          <a:p xmlns:a="http://schemas.openxmlformats.org/drawingml/2006/main"/>
+        </p:txBody>
+      </p:sp>
+      <p:sp>
+        <p:nvSpPr>
+          <p:cNvPr id="4" name="Slide Number Placeholder 3"/>
+          <p:cNvSpPr>
+            <a:spLocks xmlns:a="http://schemas.openxmlformats.org/drawingml/2006/main" noGrp="1"/>
+          </p:cNvSpPr>
+          <p:nvPr>
+            <p:ph type="sldNum" idx="5"/>
+          </p:nvPr>
+        </p:nvSpPr>
+        <p:spPr/>
+        <p:txBody>
+          <a:bodyPr xmlns:a="http://schemas.openxmlformats.org/drawingml/2006/main"/>
+          <a:lstStyle xmlns:a="http://schemas.openxmlformats.org/drawingml/2006/main"/>
+          <a:p xmlns:a="http://schemas.openxmlformats.org/drawingml/2006/main"/>
+        </p:txBody>
+      </p:sp>
+    </p:spTree>
+  </p:cSld>
+  <p:clrMapOvr>
+    <a:masterClrMapping xmlns:a="http://schemas.openxmlformats.org/drawingml/2006/main"/>
+  </p:clrMapOvr>
+</p:notes>
+</file>
+
+<file path=ppt/notesSlides/notesSlide10.xml><?xml version="1.0" encoding="utf-8"?>
+<p:notes xmlns:p="http://schemas.openxmlformats.org/presentationml/2006/main">
+  <p:cSld>
+    <p:spTree>
+      <p:nvGrpSpPr>
+        <p:cNvPr id="1" name=""/>
+        <p:cNvGrpSpPr/>
+        <p:nvPr/>
+      </p:nvGrpSpPr>
+      <p:grpSpPr>
+        <a:xfrm xmlns:a="http://schemas.openxmlformats.org/drawingml/2006/main"/>
+      </p:grpSpPr>
+      <p:sp>
+        <p:nvSpPr>
+          <p:cNvPr id="2" name="Slide Image Placeholder 1"/>
+          <p:cNvSpPr>
+            <a:spLocks xmlns:a="http://schemas.openxmlformats.org/drawingml/2006/main" noGrp="1"/>
+          </p:cNvSpPr>
+          <p:nvPr>
+            <p:ph type="sldImg" idx="0"/>
+          </p:nvPr>
+        </p:nvSpPr>
+        <p:spPr/>
+      </p:sp>
+      <p:sp>
+        <p:nvSpPr>
+          <p:cNvPr id="3" name="Notes Placeholder 2"/>
+          <p:cNvSpPr>
+            <a:spLocks xmlns:a="http://schemas.openxmlformats.org/drawingml/2006/main" noGrp="1"/>
+          </p:cNvSpPr>
+          <p:nvPr>
+            <p:ph type="body" idx="1"/>
+          </p:nvPr>
+        </p:nvSpPr>
+        <p:spPr/>
+        <p:txBody>
+          <a:bodyPr xmlns:a="http://schemas.openxmlformats.org/drawingml/2006/main"/>
+          <a:lstStyle xmlns:a="http://schemas.openxmlformats.org/drawingml/2006/main"/>
+          <a:p xmlns:a="http://schemas.openxmlformats.org/drawingml/2006/main"/>
+        </p:txBody>
+      </p:sp>
+      <p:sp>
+        <p:nvSpPr>
+          <p:cNvPr id="4" name="Slide Number Placeholder 3"/>
+          <p:cNvSpPr>
+            <a:spLocks xmlns:a="http://schemas.openxmlformats.org/drawingml/2006/main" noGrp="1"/>
+          </p:cNvSpPr>
+          <p:nvPr>
+            <p:ph type="sldNum" idx="5"/>
+          </p:nvPr>
+        </p:nvSpPr>
+        <p:spPr/>
+        <p:txBody>
+          <a:bodyPr xmlns:a="http://schemas.openxmlformats.org/drawingml/2006/main"/>
+          <a:lstStyle xmlns:a="http://schemas.openxmlformats.org/drawingml/2006/main"/>
+          <a:p xmlns:a="http://schemas.openxmlformats.org/drawingml/2006/main"/>
+        </p:txBody>
+      </p:sp>
+    </p:spTree>
+  </p:cSld>
+  <p:clrMapOvr>
+    <a:masterClrMapping xmlns:a="http://schemas.openxmlformats.org/drawingml/2006/main"/>
+  </p:clrMapOvr>
+</p:notes>
+</file>
+
+<file path=ppt/notesSlides/notesSlide11.xml><?xml version="1.0" encoding="utf-8"?>
+<p:notes xmlns:p="http://schemas.openxmlformats.org/presentationml/2006/main">
+  <p:cSld>
+    <p:spTree>
+      <p:nvGrpSpPr>
+        <p:cNvPr id="1" name=""/>
+        <p:cNvGrpSpPr/>
+        <p:nvPr/>
+      </p:nvGrpSpPr>
+      <p:grpSpPr>
+        <a:xfrm xmlns:a="http://schemas.openxmlformats.org/drawingml/2006/main"/>
+      </p:grpSpPr>
+      <p:sp>
+        <p:nvSpPr>
+          <p:cNvPr id="2" name="Slide Image Placeholder 1"/>
+          <p:cNvSpPr>
+            <a:spLocks xmlns:a="http://schemas.openxmlformats.org/drawingml/2006/main" noGrp="1"/>
+          </p:cNvSpPr>
+          <p:nvPr>
+            <p:ph type="sldImg" idx="0"/>
+          </p:nvPr>
+        </p:nvSpPr>
+        <p:spPr/>
+      </p:sp>
+      <p:sp>
+        <p:nvSpPr>
+          <p:cNvPr id="3" name="Notes Placeholder 2"/>
+          <p:cNvSpPr>
+            <a:spLocks xmlns:a="http://schemas.openxmlformats.org/drawingml/2006/main" noGrp="1"/>
+          </p:cNvSpPr>
+          <p:nvPr>
+            <p:ph type="body" idx="1"/>
+          </p:nvPr>
+        </p:nvSpPr>
+        <p:spPr/>
+        <p:txBody>
+          <a:bodyPr xmlns:a="http://schemas.openxmlformats.org/drawingml/2006/main"/>
+          <a:lstStyle xmlns:a="http://schemas.openxmlformats.org/drawingml/2006/main"/>
+          <a:p xmlns:a="http://schemas.openxmlformats.org/drawingml/2006/main"/>
+        </p:txBody>
+      </p:sp>
+      <p:sp>
+        <p:nvSpPr>
+          <p:cNvPr id="4" name="Slide Number Placeholder 3"/>
+          <p:cNvSpPr>
+            <a:spLocks xmlns:a="http://schemas.openxmlformats.org/drawingml/2006/main" noGrp="1"/>
+          </p:cNvSpPr>
+          <p:nvPr>
+            <p:ph type="sldNum" idx="5"/>
+          </p:nvPr>
+        </p:nvSpPr>
+        <p:spPr/>
+        <p:txBody>
+          <a:bodyPr xmlns:a="http://schemas.openxmlformats.org/drawingml/2006/main"/>
+          <a:lstStyle xmlns:a="http://schemas.openxmlformats.org/drawingml/2006/main"/>
+          <a:p xmlns:a="http://schemas.openxmlformats.org/drawingml/2006/main"/>
+        </p:txBody>
+      </p:sp>
+    </p:spTree>
+  </p:cSld>
+  <p:clrMapOvr>
+    <a:masterClrMapping xmlns:a="http://schemas.openxmlformats.org/drawingml/2006/main"/>
+  </p:clrMapOvr>
+</p:notes>
+</file>
+
+<file path=ppt/notesSlides/notesSlide12.xml><?xml version="1.0" encoding="utf-8"?>
+<p:notes xmlns:p="http://schemas.openxmlformats.org/presentationml/2006/main">
+  <p:cSld>
+    <p:spTree>
+      <p:nvGrpSpPr>
+        <p:cNvPr id="1" name=""/>
+        <p:cNvGrpSpPr/>
+        <p:nvPr/>
+      </p:nvGrpSpPr>
+      <p:grpSpPr>
+        <a:xfrm xmlns:a="http://schemas.openxmlformats.org/drawingml/2006/main"/>
+      </p:grpSpPr>
+      <p:sp>
+        <p:nvSpPr>
+          <p:cNvPr id="2" name="Slide Image Placeholder 1"/>
+          <p:cNvSpPr>
+            <a:spLocks xmlns:a="http://schemas.openxmlformats.org/drawingml/2006/main" noGrp="1"/>
+          </p:cNvSpPr>
+          <p:nvPr>
+            <p:ph type="sldImg" idx="0"/>
+          </p:nvPr>
+        </p:nvSpPr>
+        <p:spPr/>
+      </p:sp>
+      <p:sp>
+        <p:nvSpPr>
+          <p:cNvPr id="3" name="Notes Placeholder 2"/>
+          <p:cNvSpPr>
+            <a:spLocks xmlns:a="http://schemas.openxmlformats.org/drawingml/2006/main" noGrp="1"/>
+          </p:cNvSpPr>
+          <p:nvPr>
+            <p:ph type="body" idx="1"/>
+          </p:nvPr>
+        </p:nvSpPr>
+        <p:spPr/>
+        <p:txBody>
+          <a:bodyPr xmlns:a="http://schemas.openxmlformats.org/drawingml/2006/main"/>
+          <a:lstStyle xmlns:a="http://schemas.openxmlformats.org/drawingml/2006/main"/>
+          <a:p xmlns:a="http://schemas.openxmlformats.org/drawingml/2006/main"/>
+        </p:txBody>
+      </p:sp>
+      <p:sp>
+        <p:nvSpPr>
+          <p:cNvPr id="4" name="Slide Number Placeholder 3"/>
+          <p:cNvSpPr>
+            <a:spLocks xmlns:a="http://schemas.openxmlformats.org/drawingml/2006/main" noGrp="1"/>
+          </p:cNvSpPr>
+          <p:nvPr>
+            <p:ph type="sldNum" idx="5"/>
+          </p:nvPr>
+        </p:nvSpPr>
+        <p:spPr/>
+        <p:txBody>
+          <a:bodyPr xmlns:a="http://schemas.openxmlformats.org/drawingml/2006/main"/>
+          <a:lstStyle xmlns:a="http://schemas.openxmlformats.org/drawingml/2006/main"/>
+          <a:p xmlns:a="http://schemas.openxmlformats.org/drawingml/2006/main"/>
+        </p:txBody>
+      </p:sp>
+    </p:spTree>
+  </p:cSld>
+  <p:clrMapOvr>
+    <a:masterClrMapping xmlns:a="http://schemas.openxmlformats.org/drawingml/2006/main"/>
+  </p:clrMapOvr>
+</p:notes>
+</file>
+
+<file path=ppt/notesSlides/notesSlide13.xml><?xml version="1.0" encoding="utf-8"?>
+<p:notes xmlns:p="http://schemas.openxmlformats.org/presentationml/2006/main">
+  <p:cSld>
+    <p:spTree>
+      <p:nvGrpSpPr>
+        <p:cNvPr id="1" name=""/>
+        <p:cNvGrpSpPr/>
+        <p:nvPr/>
+      </p:nvGrpSpPr>
+      <p:grpSpPr>
+        <a:xfrm xmlns:a="http://schemas.openxmlformats.org/drawingml/2006/main"/>
+      </p:grpSpPr>
+      <p:sp>
+        <p:nvSpPr>
+          <p:cNvPr id="2" name="Slide Image Placeholder 1"/>
+          <p:cNvSpPr>
+            <a:spLocks xmlns:a="http://schemas.openxmlformats.org/drawingml/2006/main" noGrp="1"/>
+          </p:cNvSpPr>
+          <p:nvPr>
+            <p:ph type="sldImg" idx="0"/>
+          </p:nvPr>
+        </p:nvSpPr>
+        <p:spPr/>
+      </p:sp>
+      <p:sp>
+        <p:nvSpPr>
+          <p:cNvPr id="3" name="Notes Placeholder 2"/>
+          <p:cNvSpPr>
+            <a:spLocks xmlns:a="http://schemas.openxmlformats.org/drawingml/2006/main" noGrp="1"/>
+          </p:cNvSpPr>
+          <p:nvPr>
+            <p:ph type="body" idx="1"/>
+          </p:nvPr>
+        </p:nvSpPr>
+        <p:spPr/>
+        <p:txBody>
+          <a:bodyPr xmlns:a="http://schemas.openxmlformats.org/drawingml/2006/main"/>
+          <a:lstStyle xmlns:a="http://schemas.openxmlformats.org/drawingml/2006/main"/>
+          <a:p xmlns:a="http://schemas.openxmlformats.org/drawingml/2006/main"/>
+        </p:txBody>
+      </p:sp>
+      <p:sp>
+        <p:nvSpPr>
+          <p:cNvPr id="4" name="Slide Number Placeholder 3"/>
+          <p:cNvSpPr>
+            <a:spLocks xmlns:a="http://schemas.openxmlformats.org/drawingml/2006/main" noGrp="1"/>
+          </p:cNvSpPr>
+          <p:nvPr>
+            <p:ph type="sldNum" idx="5"/>
+          </p:nvPr>
+        </p:nvSpPr>
+        <p:spPr/>
+        <p:txBody>
+          <a:bodyPr xmlns:a="http://schemas.openxmlformats.org/drawingml/2006/main"/>
+          <a:lstStyle xmlns:a="http://schemas.openxmlformats.org/drawingml/2006/main"/>
+          <a:p xmlns:a="http://schemas.openxmlformats.org/drawingml/2006/main"/>
+        </p:txBody>
+      </p:sp>
+    </p:spTree>
+  </p:cSld>
+  <p:clrMapOvr>
+    <a:masterClrMapping xmlns:a="http://schemas.openxmlformats.org/drawingml/2006/main"/>
+  </p:clrMapOvr>
+</p:notes>
+</file>
+
+<file path=ppt/notesSlides/notesSlide14.xml><?xml version="1.0" encoding="utf-8"?>
+<p:notes xmlns:p="http://schemas.openxmlformats.org/presentationml/2006/main">
+  <p:cSld>
+    <p:spTree>
+      <p:nvGrpSpPr>
+        <p:cNvPr id="1" name=""/>
+        <p:cNvGrpSpPr/>
+        <p:nvPr/>
+      </p:nvGrpSpPr>
+      <p:grpSpPr>
+        <a:xfrm xmlns:a="http://schemas.openxmlformats.org/drawingml/2006/main"/>
+      </p:grpSpPr>
+      <p:sp>
+        <p:nvSpPr>
+          <p:cNvPr id="2" name="Slide Image Placeholder 1"/>
+          <p:cNvSpPr>
+            <a:spLocks xmlns:a="http://schemas.openxmlformats.org/drawingml/2006/main" noGrp="1"/>
+          </p:cNvSpPr>
+          <p:nvPr>
+            <p:ph type="sldImg" idx="0"/>
+          </p:nvPr>
+        </p:nvSpPr>
+        <p:spPr/>
+      </p:sp>
+      <p:sp>
+        <p:nvSpPr>
+          <p:cNvPr id="3" name="Notes Placeholder 2"/>
+          <p:cNvSpPr>
+            <a:spLocks xmlns:a="http://schemas.openxmlformats.org/drawingml/2006/main" noGrp="1"/>
+          </p:cNvSpPr>
+          <p:nvPr>
+            <p:ph type="body" idx="1"/>
+          </p:nvPr>
+        </p:nvSpPr>
+        <p:spPr/>
+        <p:txBody>
+          <a:bodyPr xmlns:a="http://schemas.openxmlformats.org/drawingml/2006/main"/>
+          <a:lstStyle xmlns:a="http://schemas.openxmlformats.org/drawingml/2006/main"/>
+          <a:p xmlns:a="http://schemas.openxmlformats.org/drawingml/2006/main"/>
+        </p:txBody>
+      </p:sp>
+      <p:sp>
+        <p:nvSpPr>
+          <p:cNvPr id="4" name="Slide Number Placeholder 3"/>
+          <p:cNvSpPr>
+            <a:spLocks xmlns:a="http://schemas.openxmlformats.org/drawingml/2006/main" noGrp="1"/>
+          </p:cNvSpPr>
+          <p:nvPr>
+            <p:ph type="sldNum" idx="5"/>
+          </p:nvPr>
+        </p:nvSpPr>
+        <p:spPr/>
+        <p:txBody>
+          <a:bodyPr xmlns:a="http://schemas.openxmlformats.org/drawingml/2006/main"/>
+          <a:lstStyle xmlns:a="http://schemas.openxmlformats.org/drawingml/2006/main"/>
+          <a:p xmlns:a="http://schemas.openxmlformats.org/drawingml/2006/main"/>
+        </p:txBody>
+      </p:sp>
+    </p:spTree>
+  </p:cSld>
+  <p:clrMapOvr>
+    <a:masterClrMapping xmlns:a="http://schemas.openxmlformats.org/drawingml/2006/main"/>
+  </p:clrMapOvr>
+</p:notes>
+</file>
+
+<file path=ppt/notesSlides/notesSlide15.xml><?xml version="1.0" encoding="utf-8"?>
+<p:notes xmlns:p="http://schemas.openxmlformats.org/presentationml/2006/main">
+  <p:cSld>
+    <p:spTree>
+      <p:nvGrpSpPr>
+        <p:cNvPr id="1" name=""/>
+        <p:cNvGrpSpPr/>
+        <p:nvPr/>
+      </p:nvGrpSpPr>
+      <p:grpSpPr>
+        <a:xfrm xmlns:a="http://schemas.openxmlformats.org/drawingml/2006/main"/>
+      </p:grpSpPr>
+      <p:sp>
+        <p:nvSpPr>
+          <p:cNvPr id="2" name="Slide Image Placeholder 1"/>
+          <p:cNvSpPr>
+            <a:spLocks xmlns:a="http://schemas.openxmlformats.org/drawingml/2006/main" noGrp="1"/>
+          </p:cNvSpPr>
+          <p:nvPr>
+            <p:ph type="sldImg" idx="0"/>
+          </p:nvPr>
+        </p:nvSpPr>
+        <p:spPr/>
+      </p:sp>
+      <p:sp>
+        <p:nvSpPr>
+          <p:cNvPr id="3" name="Notes Placeholder 2"/>
+          <p:cNvSpPr>
+            <a:spLocks xmlns:a="http://schemas.openxmlformats.org/drawingml/2006/main" noGrp="1"/>
+          </p:cNvSpPr>
+          <p:nvPr>
+            <p:ph type="body" idx="1"/>
+          </p:nvPr>
+        </p:nvSpPr>
+        <p:spPr/>
+        <p:txBody>
+          <a:bodyPr xmlns:a="http://schemas.openxmlformats.org/drawingml/2006/main"/>
+          <a:lstStyle xmlns:a="http://schemas.openxmlformats.org/drawingml/2006/main"/>
+          <a:p xmlns:a="http://schemas.openxmlformats.org/drawingml/2006/main"/>
+        </p:txBody>
+      </p:sp>
+      <p:sp>
+        <p:nvSpPr>
+          <p:cNvPr id="4" name="Slide Number Placeholder 3"/>
+          <p:cNvSpPr>
+            <a:spLocks xmlns:a="http://schemas.openxmlformats.org/drawingml/2006/main" noGrp="1"/>
+          </p:cNvSpPr>
+          <p:nvPr>
+            <p:ph type="sldNum" idx="5"/>
+          </p:nvPr>
+        </p:nvSpPr>
+        <p:spPr/>
+        <p:txBody>
+          <a:bodyPr xmlns:a="http://schemas.openxmlformats.org/drawingml/2006/main"/>
+          <a:lstStyle xmlns:a="http://schemas.openxmlformats.org/drawingml/2006/main"/>
+          <a:p xmlns:a="http://schemas.openxmlformats.org/drawingml/2006/main"/>
+        </p:txBody>
+      </p:sp>
+    </p:spTree>
+  </p:cSld>
+  <p:clrMapOvr>
+    <a:masterClrMapping xmlns:a="http://schemas.openxmlformats.org/drawingml/2006/main"/>
+  </p:clrMapOvr>
+</p:notes>
+</file>
+
+<file path=ppt/notesSlides/notesSlide16.xml><?xml version="1.0" encoding="utf-8"?>
+<p:notes xmlns:p="http://schemas.openxmlformats.org/presentationml/2006/main">
+  <p:cSld>
+    <p:spTree>
+      <p:nvGrpSpPr>
+        <p:cNvPr id="1" name=""/>
+        <p:cNvGrpSpPr/>
+        <p:nvPr/>
+      </p:nvGrpSpPr>
+      <p:grpSpPr>
+        <a:xfrm xmlns:a="http://schemas.openxmlformats.org/drawingml/2006/main"/>
+      </p:grpSpPr>
+      <p:sp>
+        <p:nvSpPr>
+          <p:cNvPr id="2" name="Slide Image Placeholder 1"/>
+          <p:cNvSpPr>
+            <a:spLocks xmlns:a="http://schemas.openxmlformats.org/drawingml/2006/main" noGrp="1"/>
+          </p:cNvSpPr>
+          <p:nvPr>
+            <p:ph type="sldImg" idx="0"/>
+          </p:nvPr>
+        </p:nvSpPr>
+        <p:spPr/>
+      </p:sp>
+      <p:sp>
+        <p:nvSpPr>
+          <p:cNvPr id="3" name="Notes Placeholder 2"/>
+          <p:cNvSpPr>
+            <a:spLocks xmlns:a="http://schemas.openxmlformats.org/drawingml/2006/main" noGrp="1"/>
+          </p:cNvSpPr>
+          <p:nvPr>
+            <p:ph type="body" idx="1"/>
+          </p:nvPr>
+        </p:nvSpPr>
+        <p:spPr/>
+        <p:txBody>
+          <a:bodyPr xmlns:a="http://schemas.openxmlformats.org/drawingml/2006/main"/>
+          <a:lstStyle xmlns:a="http://schemas.openxmlformats.org/drawingml/2006/main"/>
+          <a:p xmlns:a="http://schemas.openxmlformats.org/drawingml/2006/main"/>
+        </p:txBody>
+      </p:sp>
+      <p:sp>
+        <p:nvSpPr>
+          <p:cNvPr id="4" name="Slide Number Placeholder 3"/>
+          <p:cNvSpPr>
+            <a:spLocks xmlns:a="http://schemas.openxmlformats.org/drawingml/2006/main" noGrp="1"/>
+          </p:cNvSpPr>
+          <p:nvPr>
+            <p:ph type="sldNum" idx="5"/>
+          </p:nvPr>
+        </p:nvSpPr>
+        <p:spPr/>
+        <p:txBody>
+          <a:bodyPr xmlns:a="http://schemas.openxmlformats.org/drawingml/2006/main"/>
+          <a:lstStyle xmlns:a="http://schemas.openxmlformats.org/drawingml/2006/main"/>
+          <a:p xmlns:a="http://schemas.openxmlformats.org/drawingml/2006/main"/>
+        </p:txBody>
+      </p:sp>
+    </p:spTree>
+  </p:cSld>
+  <p:clrMapOvr>
+    <a:masterClrMapping xmlns:a="http://schemas.openxmlformats.org/drawingml/2006/main"/>
+  </p:clrMapOvr>
+</p:notes>
+</file>
+
+<file path=ppt/notesSlides/notesSlide17.xml><?xml version="1.0" encoding="utf-8"?>
+<p:notes xmlns:p="http://schemas.openxmlformats.org/presentationml/2006/main">
+  <p:cSld>
+    <p:spTree>
+      <p:nvGrpSpPr>
+        <p:cNvPr id="1" name=""/>
+        <p:cNvGrpSpPr/>
+        <p:nvPr/>
+      </p:nvGrpSpPr>
+      <p:grpSpPr>
+        <a:xfrm xmlns:a="http://schemas.openxmlformats.org/drawingml/2006/main"/>
+      </p:grpSpPr>
+      <p:sp>
+        <p:nvSpPr>
+          <p:cNvPr id="2" name="Slide Image Placeholder 1"/>
+          <p:cNvSpPr>
+            <a:spLocks xmlns:a="http://schemas.openxmlformats.org/drawingml/2006/main" noGrp="1"/>
+          </p:cNvSpPr>
+          <p:nvPr>
+            <p:ph type="sldImg" idx="0"/>
+          </p:nvPr>
+        </p:nvSpPr>
+        <p:spPr/>
+      </p:sp>
+      <p:sp>
+        <p:nvSpPr>
+          <p:cNvPr id="3" name="Notes Placeholder 2"/>
+          <p:cNvSpPr>
+            <a:spLocks xmlns:a="http://schemas.openxmlformats.org/drawingml/2006/main" noGrp="1"/>
+          </p:cNvSpPr>
+          <p:nvPr>
+            <p:ph type="body" idx="1"/>
+          </p:nvPr>
+        </p:nvSpPr>
+        <p:spPr/>
+        <p:txBody>
+          <a:bodyPr xmlns:a="http://schemas.openxmlformats.org/drawingml/2006/main"/>
+          <a:lstStyle xmlns:a="http://schemas.openxmlformats.org/drawingml/2006/main"/>
+          <a:p xmlns:a="http://schemas.openxmlformats.org/drawingml/2006/main"/>
+        </p:txBody>
+      </p:sp>
+      <p:sp>
+        <p:nvSpPr>
+          <p:cNvPr id="4" name="Slide Number Placeholder 3"/>
+          <p:cNvSpPr>
+            <a:spLocks xmlns:a="http://schemas.openxmlformats.org/drawingml/2006/main" noGrp="1"/>
+          </p:cNvSpPr>
+          <p:nvPr>
+            <p:ph type="sldNum" idx="5"/>
+          </p:nvPr>
+        </p:nvSpPr>
+        <p:spPr/>
+        <p:txBody>
+          <a:bodyPr xmlns:a="http://schemas.openxmlformats.org/drawingml/2006/main"/>
+          <a:lstStyle xmlns:a="http://schemas.openxmlformats.org/drawingml/2006/main"/>
+          <a:p xmlns:a="http://schemas.openxmlformats.org/drawingml/2006/main"/>
+        </p:txBody>
+      </p:sp>
+    </p:spTree>
+  </p:cSld>
+  <p:clrMapOvr>
+    <a:masterClrMapping xmlns:a="http://schemas.openxmlformats.org/drawingml/2006/main"/>
+  </p:clrMapOvr>
+</p:notes>
+</file>
+
+<file path=ppt/notesSlides/notesSlide18.xml><?xml version="1.0" encoding="utf-8"?>
+<p:notes xmlns:p="http://schemas.openxmlformats.org/presentationml/2006/main">
+  <p:cSld>
+    <p:spTree>
+      <p:nvGrpSpPr>
+        <p:cNvPr id="1" name=""/>
+        <p:cNvGrpSpPr/>
+        <p:nvPr/>
+      </p:nvGrpSpPr>
+      <p:grpSpPr>
+        <a:xfrm xmlns:a="http://schemas.openxmlformats.org/drawingml/2006/main"/>
+      </p:grpSpPr>
+      <p:sp>
+        <p:nvSpPr>
+          <p:cNvPr id="2" name="Slide Image Placeholder 1"/>
+          <p:cNvSpPr>
+            <a:spLocks xmlns:a="http://schemas.openxmlformats.org/drawingml/2006/main" noGrp="1"/>
+          </p:cNvSpPr>
+          <p:nvPr>
+            <p:ph type="sldImg" idx="0"/>
+          </p:nvPr>
+        </p:nvSpPr>
+        <p:spPr/>
+      </p:sp>
+      <p:sp>
+        <p:nvSpPr>
+          <p:cNvPr id="3" name="Notes Placeholder 2"/>
+          <p:cNvSpPr>
+            <a:spLocks xmlns:a="http://schemas.openxmlformats.org/drawingml/2006/main" noGrp="1"/>
+          </p:cNvSpPr>
+          <p:nvPr>
+            <p:ph type="body" idx="1"/>
+          </p:nvPr>
+        </p:nvSpPr>
+        <p:spPr/>
+        <p:txBody>
+          <a:bodyPr xmlns:a="http://schemas.openxmlformats.org/drawingml/2006/main"/>
+          <a:lstStyle xmlns:a="http://schemas.openxmlformats.org/drawingml/2006/main"/>
+          <a:p xmlns:a="http://schemas.openxmlformats.org/drawingml/2006/main"/>
+        </p:txBody>
+      </p:sp>
+      <p:sp>
+        <p:nvSpPr>
+          <p:cNvPr id="4" name="Slide Number Placeholder 3"/>
+          <p:cNvSpPr>
+            <a:spLocks xmlns:a="http://schemas.openxmlformats.org/drawingml/2006/main" noGrp="1"/>
+          </p:cNvSpPr>
+          <p:nvPr>
+            <p:ph type="sldNum" idx="5"/>
+          </p:nvPr>
+        </p:nvSpPr>
+        <p:spPr/>
+        <p:txBody>
+          <a:bodyPr xmlns:a="http://schemas.openxmlformats.org/drawingml/2006/main"/>
+          <a:lstStyle xmlns:a="http://schemas.openxmlformats.org/drawingml/2006/main"/>
+          <a:p xmlns:a="http://schemas.openxmlformats.org/drawingml/2006/main"/>
+        </p:txBody>
+      </p:sp>
+    </p:spTree>
+  </p:cSld>
+  <p:clrMapOvr>
+    <a:masterClrMapping xmlns:a="http://schemas.openxmlformats.org/drawingml/2006/main"/>
+  </p:clrMapOvr>
+</p:notes>
+</file>
+
+<file path=ppt/notesSlides/notesSlide19.xml><?xml version="1.0" encoding="utf-8"?>
+<p:notes xmlns:p="http://schemas.openxmlformats.org/presentationml/2006/main">
+  <p:cSld>
+    <p:spTree>
+      <p:nvGrpSpPr>
+        <p:cNvPr id="1" name=""/>
+        <p:cNvGrpSpPr/>
+        <p:nvPr/>
+      </p:nvGrpSpPr>
+      <p:grpSpPr>
+        <a:xfrm xmlns:a="http://schemas.openxmlformats.org/drawingml/2006/main"/>
+      </p:grpSpPr>
+      <p:sp>
+        <p:nvSpPr>
+          <p:cNvPr id="2" name="Slide Image Placeholder 1"/>
+          <p:cNvSpPr>
+            <a:spLocks xmlns:a="http://schemas.openxmlformats.org/drawingml/2006/main" noGrp="1"/>
+          </p:cNvSpPr>
+          <p:nvPr>
+            <p:ph type="sldImg" idx="0"/>
+          </p:nvPr>
+        </p:nvSpPr>
+        <p:spPr/>
+      </p:sp>
+      <p:sp>
+        <p:nvSpPr>
+          <p:cNvPr id="3" name="Notes Placeholder 2"/>
+          <p:cNvSpPr>
+            <a:spLocks xmlns:a="http://schemas.openxmlformats.org/drawingml/2006/main" noGrp="1"/>
+          </p:cNvSpPr>
+          <p:nvPr>
+            <p:ph type="body" idx="1"/>
+          </p:nvPr>
+        </p:nvSpPr>
+        <p:spPr/>
+        <p:txBody>
+          <a:bodyPr xmlns:a="http://schemas.openxmlformats.org/drawingml/2006/main"/>
+          <a:lstStyle xmlns:a="http://schemas.openxmlformats.org/drawingml/2006/main"/>
+          <a:p xmlns:a="http://schemas.openxmlformats.org/drawingml/2006/main"/>
+        </p:txBody>
+      </p:sp>
+      <p:sp>
+        <p:nvSpPr>
+          <p:cNvPr id="4" name="Slide Number Placeholder 3"/>
+          <p:cNvSpPr>
+            <a:spLocks xmlns:a="http://schemas.openxmlformats.org/drawingml/2006/main" noGrp="1"/>
+          </p:cNvSpPr>
+          <p:nvPr>
+            <p:ph type="sldNum" idx="5"/>
+          </p:nvPr>
+        </p:nvSpPr>
+        <p:spPr/>
+        <p:txBody>
+          <a:bodyPr xmlns:a="http://schemas.openxmlformats.org/drawingml/2006/main"/>
+          <a:lstStyle xmlns:a="http://schemas.openxmlformats.org/drawingml/2006/main"/>
+          <a:p xmlns:a="http://schemas.openxmlformats.org/drawingml/2006/main"/>
+        </p:txBody>
+      </p:sp>
+    </p:spTree>
+  </p:cSld>
+  <p:clrMapOvr>
+    <a:masterClrMapping xmlns:a="http://schemas.openxmlformats.org/drawingml/2006/main"/>
+  </p:clrMapOvr>
+</p:notes>
+</file>
+
+<file path=ppt/notesSlides/notesSlide2.xml><?xml version="1.0" encoding="utf-8"?>
+<p:notes xmlns:p="http://schemas.openxmlformats.org/presentationml/2006/main">
+  <p:cSld>
+    <p:spTree>
+      <p:nvGrpSpPr>
+        <p:cNvPr id="1" name=""/>
+        <p:cNvGrpSpPr/>
+        <p:nvPr/>
+      </p:nvGrpSpPr>
+      <p:grpSpPr>
+        <a:xfrm xmlns:a="http://schemas.openxmlformats.org/drawingml/2006/main"/>
+      </p:grpSpPr>
+      <p:sp>
+        <p:nvSpPr>
+          <p:cNvPr id="2" name="Slide Image Placeholder 1"/>
+          <p:cNvSpPr>
+            <a:spLocks xmlns:a="http://schemas.openxmlformats.org/drawingml/2006/main" noGrp="1"/>
+          </p:cNvSpPr>
+          <p:nvPr>
+            <p:ph type="sldImg" idx="0"/>
+          </p:nvPr>
+        </p:nvSpPr>
+        <p:spPr/>
+      </p:sp>
+      <p:sp>
+        <p:nvSpPr>
+          <p:cNvPr id="3" name="Notes Placeholder 2"/>
+          <p:cNvSpPr>
+            <a:spLocks xmlns:a="http://schemas.openxmlformats.org/drawingml/2006/main" noGrp="1"/>
+          </p:cNvSpPr>
+          <p:nvPr>
+            <p:ph type="body" idx="1"/>
+          </p:nvPr>
+        </p:nvSpPr>
+        <p:spPr/>
+        <p:txBody>
+          <a:bodyPr xmlns:a="http://schemas.openxmlformats.org/drawingml/2006/main"/>
+          <a:lstStyle xmlns:a="http://schemas.openxmlformats.org/drawingml/2006/main"/>
+          <a:p xmlns:a="http://schemas.openxmlformats.org/drawingml/2006/main"/>
+        </p:txBody>
+      </p:sp>
+      <p:sp>
+        <p:nvSpPr>
+          <p:cNvPr id="4" name="Slide Number Placeholder 3"/>
+          <p:cNvSpPr>
+            <a:spLocks xmlns:a="http://schemas.openxmlformats.org/drawingml/2006/main" noGrp="1"/>
+          </p:cNvSpPr>
+          <p:nvPr>
+            <p:ph type="sldNum" idx="5"/>
+          </p:nvPr>
+        </p:nvSpPr>
+        <p:spPr/>
+        <p:txBody>
+          <a:bodyPr xmlns:a="http://schemas.openxmlformats.org/drawingml/2006/main"/>
+          <a:lstStyle xmlns:a="http://schemas.openxmlformats.org/drawingml/2006/main"/>
+          <a:p xmlns:a="http://schemas.openxmlformats.org/drawingml/2006/main"/>
+        </p:txBody>
+      </p:sp>
+    </p:spTree>
+  </p:cSld>
+  <p:clrMapOvr>
+    <a:masterClrMapping xmlns:a="http://schemas.openxmlformats.org/drawingml/2006/main"/>
+  </p:clrMapOvr>
+</p:notes>
+</file>
+
+<file path=ppt/notesSlides/notesSlide20.xml><?xml version="1.0" encoding="utf-8"?>
+<p:notes xmlns:p="http://schemas.openxmlformats.org/presentationml/2006/main">
+  <p:cSld>
+    <p:spTree>
+      <p:nvGrpSpPr>
+        <p:cNvPr id="1" name=""/>
+        <p:cNvGrpSpPr/>
+        <p:nvPr/>
+      </p:nvGrpSpPr>
+      <p:grpSpPr>
+        <a:xfrm xmlns:a="http://schemas.openxmlformats.org/drawingml/2006/main"/>
+      </p:grpSpPr>
+      <p:sp>
+        <p:nvSpPr>
+          <p:cNvPr id="2" name="Slide Image Placeholder 1"/>
+          <p:cNvSpPr>
+            <a:spLocks xmlns:a="http://schemas.openxmlformats.org/drawingml/2006/main" noGrp="1"/>
+          </p:cNvSpPr>
+          <p:nvPr>
+            <p:ph type="sldImg" idx="0"/>
+          </p:nvPr>
+        </p:nvSpPr>
+        <p:spPr/>
+      </p:sp>
+      <p:sp>
+        <p:nvSpPr>
+          <p:cNvPr id="3" name="Notes Placeholder 2"/>
+          <p:cNvSpPr>
+            <a:spLocks xmlns:a="http://schemas.openxmlformats.org/drawingml/2006/main" noGrp="1"/>
+          </p:cNvSpPr>
+          <p:nvPr>
+            <p:ph type="body" idx="1"/>
+          </p:nvPr>
+        </p:nvSpPr>
+        <p:spPr/>
+        <p:txBody>
+          <a:bodyPr xmlns:a="http://schemas.openxmlformats.org/drawingml/2006/main"/>
+          <a:lstStyle xmlns:a="http://schemas.openxmlformats.org/drawingml/2006/main"/>
+          <a:p xmlns:a="http://schemas.openxmlformats.org/drawingml/2006/main"/>
+        </p:txBody>
+      </p:sp>
+      <p:sp>
+        <p:nvSpPr>
+          <p:cNvPr id="4" name="Slide Number Placeholder 3"/>
+          <p:cNvSpPr>
+            <a:spLocks xmlns:a="http://schemas.openxmlformats.org/drawingml/2006/main" noGrp="1"/>
+          </p:cNvSpPr>
+          <p:nvPr>
+            <p:ph type="sldNum" idx="5"/>
+          </p:nvPr>
+        </p:nvSpPr>
+        <p:spPr/>
+        <p:txBody>
+          <a:bodyPr xmlns:a="http://schemas.openxmlformats.org/drawingml/2006/main"/>
+          <a:lstStyle xmlns:a="http://schemas.openxmlformats.org/drawingml/2006/main"/>
+          <a:p xmlns:a="http://schemas.openxmlformats.org/drawingml/2006/main"/>
+        </p:txBody>
+      </p:sp>
+    </p:spTree>
+  </p:cSld>
+  <p:clrMapOvr>
+    <a:masterClrMapping xmlns:a="http://schemas.openxmlformats.org/drawingml/2006/main"/>
+  </p:clrMapOvr>
+</p:notes>
+</file>
+
+<file path=ppt/notesSlides/notesSlide21.xml><?xml version="1.0" encoding="utf-8"?>
+<p:notes xmlns:p="http://schemas.openxmlformats.org/presentationml/2006/main">
+  <p:cSld>
+    <p:spTree>
+      <p:nvGrpSpPr>
+        <p:cNvPr id="1" name=""/>
+        <p:cNvGrpSpPr/>
+        <p:nvPr/>
+      </p:nvGrpSpPr>
+      <p:grpSpPr>
+        <a:xfrm xmlns:a="http://schemas.openxmlformats.org/drawingml/2006/main"/>
+      </p:grpSpPr>
+      <p:sp>
+        <p:nvSpPr>
+          <p:cNvPr id="2" name="Slide Image Placeholder 1"/>
+          <p:cNvSpPr>
+            <a:spLocks xmlns:a="http://schemas.openxmlformats.org/drawingml/2006/main" noGrp="1"/>
+          </p:cNvSpPr>
+          <p:nvPr>
+            <p:ph type="sldImg" idx="0"/>
+          </p:nvPr>
+        </p:nvSpPr>
+        <p:spPr/>
+      </p:sp>
+      <p:sp>
+        <p:nvSpPr>
+          <p:cNvPr id="3" name="Notes Placeholder 2"/>
+          <p:cNvSpPr>
+            <a:spLocks xmlns:a="http://schemas.openxmlformats.org/drawingml/2006/main" noGrp="1"/>
+          </p:cNvSpPr>
+          <p:nvPr>
+            <p:ph type="body" idx="1"/>
+          </p:nvPr>
+        </p:nvSpPr>
+        <p:spPr/>
+        <p:txBody>
+          <a:bodyPr xmlns:a="http://schemas.openxmlformats.org/drawingml/2006/main"/>
+          <a:lstStyle xmlns:a="http://schemas.openxmlformats.org/drawingml/2006/main"/>
+          <a:p xmlns:a="http://schemas.openxmlformats.org/drawingml/2006/main"/>
+        </p:txBody>
+      </p:sp>
+      <p:sp>
+        <p:nvSpPr>
+          <p:cNvPr id="4" name="Slide Number Placeholder 3"/>
+          <p:cNvSpPr>
+            <a:spLocks xmlns:a="http://schemas.openxmlformats.org/drawingml/2006/main" noGrp="1"/>
+          </p:cNvSpPr>
+          <p:nvPr>
+            <p:ph type="sldNum" idx="5"/>
+          </p:nvPr>
+        </p:nvSpPr>
+        <p:spPr/>
+        <p:txBody>
+          <a:bodyPr xmlns:a="http://schemas.openxmlformats.org/drawingml/2006/main"/>
+          <a:lstStyle xmlns:a="http://schemas.openxmlformats.org/drawingml/2006/main"/>
+          <a:p xmlns:a="http://schemas.openxmlformats.org/drawingml/2006/main"/>
+        </p:txBody>
+      </p:sp>
+    </p:spTree>
+  </p:cSld>
+  <p:clrMapOvr>
+    <a:masterClrMapping xmlns:a="http://schemas.openxmlformats.org/drawingml/2006/main"/>
+  </p:clrMapOvr>
+</p:notes>
+</file>
+
+<file path=ppt/notesSlides/notesSlide22.xml><?xml version="1.0" encoding="utf-8"?>
+<p:notes xmlns:p="http://schemas.openxmlformats.org/presentationml/2006/main">
+  <p:cSld>
+    <p:spTree>
+      <p:nvGrpSpPr>
+        <p:cNvPr id="1" name=""/>
+        <p:cNvGrpSpPr/>
+        <p:nvPr/>
+      </p:nvGrpSpPr>
+      <p:grpSpPr>
+        <a:xfrm xmlns:a="http://schemas.openxmlformats.org/drawingml/2006/main"/>
+      </p:grpSpPr>
+      <p:sp>
+        <p:nvSpPr>
+          <p:cNvPr id="2" name="Slide Image Placeholder 1"/>
+          <p:cNvSpPr>
+            <a:spLocks xmlns:a="http://schemas.openxmlformats.org/drawingml/2006/main" noGrp="1"/>
+          </p:cNvSpPr>
+          <p:nvPr>
+            <p:ph type="sldImg" idx="0"/>
+          </p:nvPr>
+        </p:nvSpPr>
+        <p:spPr/>
+      </p:sp>
+      <p:sp>
+        <p:nvSpPr>
+          <p:cNvPr id="3" name="Notes Placeholder 2"/>
+          <p:cNvSpPr>
+            <a:spLocks xmlns:a="http://schemas.openxmlformats.org/drawingml/2006/main" noGrp="1"/>
+          </p:cNvSpPr>
+          <p:nvPr>
+            <p:ph type="body" idx="1"/>
+          </p:nvPr>
+        </p:nvSpPr>
+        <p:spPr/>
+        <p:txBody>
+          <a:bodyPr xmlns:a="http://schemas.openxmlformats.org/drawingml/2006/main"/>
+          <a:lstStyle xmlns:a="http://schemas.openxmlformats.org/drawingml/2006/main"/>
+          <a:p xmlns:a="http://schemas.openxmlformats.org/drawingml/2006/main"/>
+        </p:txBody>
+      </p:sp>
+      <p:sp>
+        <p:nvSpPr>
+          <p:cNvPr id="4" name="Slide Number Placeholder 3"/>
+          <p:cNvSpPr>
+            <a:spLocks xmlns:a="http://schemas.openxmlformats.org/drawingml/2006/main" noGrp="1"/>
+          </p:cNvSpPr>
+          <p:nvPr>
+            <p:ph type="sldNum" idx="5"/>
+          </p:nvPr>
+        </p:nvSpPr>
+        <p:spPr/>
+        <p:txBody>
+          <a:bodyPr xmlns:a="http://schemas.openxmlformats.org/drawingml/2006/main"/>
+          <a:lstStyle xmlns:a="http://schemas.openxmlformats.org/drawingml/2006/main"/>
+          <a:p xmlns:a="http://schemas.openxmlformats.org/drawingml/2006/main"/>
+        </p:txBody>
+      </p:sp>
+    </p:spTree>
+  </p:cSld>
+  <p:clrMapOvr>
+    <a:masterClrMapping xmlns:a="http://schemas.openxmlformats.org/drawingml/2006/main"/>
+  </p:clrMapOvr>
+</p:notes>
+</file>
+
+<file path=ppt/notesSlides/notesSlide23.xml><?xml version="1.0" encoding="utf-8"?>
+<p:notes xmlns:p="http://schemas.openxmlformats.org/presentationml/2006/main">
+  <p:cSld>
+    <p:spTree>
+      <p:nvGrpSpPr>
+        <p:cNvPr id="1" name=""/>
+        <p:cNvGrpSpPr/>
+        <p:nvPr/>
+      </p:nvGrpSpPr>
+      <p:grpSpPr>
+        <a:xfrm xmlns:a="http://schemas.openxmlformats.org/drawingml/2006/main"/>
+      </p:grpSpPr>
+      <p:sp>
+        <p:nvSpPr>
+          <p:cNvPr id="2" name="Slide Image Placeholder 1"/>
+          <p:cNvSpPr>
+            <a:spLocks xmlns:a="http://schemas.openxmlformats.org/drawingml/2006/main" noGrp="1"/>
+          </p:cNvSpPr>
+          <p:nvPr>
+            <p:ph type="sldImg" idx="0"/>
+          </p:nvPr>
+        </p:nvSpPr>
+        <p:spPr/>
+      </p:sp>
+      <p:sp>
+        <p:nvSpPr>
+          <p:cNvPr id="3" name="Notes Placeholder 2"/>
+          <p:cNvSpPr>
+            <a:spLocks xmlns:a="http://schemas.openxmlformats.org/drawingml/2006/main" noGrp="1"/>
+          </p:cNvSpPr>
+          <p:nvPr>
+            <p:ph type="body" idx="1"/>
+          </p:nvPr>
+        </p:nvSpPr>
+        <p:spPr/>
+        <p:txBody>
+          <a:bodyPr xmlns:a="http://schemas.openxmlformats.org/drawingml/2006/main"/>
+          <a:lstStyle xmlns:a="http://schemas.openxmlformats.org/drawingml/2006/main"/>
+          <a:p xmlns:a="http://schemas.openxmlformats.org/drawingml/2006/main"/>
+        </p:txBody>
+      </p:sp>
+      <p:sp>
+        <p:nvSpPr>
+          <p:cNvPr id="4" name="Slide Number Placeholder 3"/>
+          <p:cNvSpPr>
+            <a:spLocks xmlns:a="http://schemas.openxmlformats.org/drawingml/2006/main" noGrp="1"/>
+          </p:cNvSpPr>
+          <p:nvPr>
+            <p:ph type="sldNum" idx="5"/>
+          </p:nvPr>
+        </p:nvSpPr>
+        <p:spPr/>
+        <p:txBody>
+          <a:bodyPr xmlns:a="http://schemas.openxmlformats.org/drawingml/2006/main"/>
+          <a:lstStyle xmlns:a="http://schemas.openxmlformats.org/drawingml/2006/main"/>
+          <a:p xmlns:a="http://schemas.openxmlformats.org/drawingml/2006/main"/>
+        </p:txBody>
+      </p:sp>
+    </p:spTree>
+  </p:cSld>
+  <p:clrMapOvr>
+    <a:masterClrMapping xmlns:a="http://schemas.openxmlformats.org/drawingml/2006/main"/>
+  </p:clrMapOvr>
+</p:notes>
+</file>
+
+<file path=ppt/notesSlides/notesSlide24.xml><?xml version="1.0" encoding="utf-8"?>
+<p:notes xmlns:p="http://schemas.openxmlformats.org/presentationml/2006/main">
+  <p:cSld>
+    <p:spTree>
+      <p:nvGrpSpPr>
+        <p:cNvPr id="1" name=""/>
+        <p:cNvGrpSpPr/>
+        <p:nvPr/>
+      </p:nvGrpSpPr>
+      <p:grpSpPr>
+        <a:xfrm xmlns:a="http://schemas.openxmlformats.org/drawingml/2006/main"/>
+      </p:grpSpPr>
+      <p:sp>
+        <p:nvSpPr>
+          <p:cNvPr id="2" name="Slide Image Placeholder 1"/>
+          <p:cNvSpPr>
+            <a:spLocks xmlns:a="http://schemas.openxmlformats.org/drawingml/2006/main" noGrp="1"/>
+          </p:cNvSpPr>
+          <p:nvPr>
+            <p:ph type="sldImg" idx="0"/>
+          </p:nvPr>
+        </p:nvSpPr>
+        <p:spPr/>
+      </p:sp>
+      <p:sp>
+        <p:nvSpPr>
+          <p:cNvPr id="3" name="Notes Placeholder 2"/>
+          <p:cNvSpPr>
+            <a:spLocks xmlns:a="http://schemas.openxmlformats.org/drawingml/2006/main" noGrp="1"/>
+          </p:cNvSpPr>
+          <p:nvPr>
+            <p:ph type="body" idx="1"/>
+          </p:nvPr>
+        </p:nvSpPr>
+        <p:spPr/>
+        <p:txBody>
+          <a:bodyPr xmlns:a="http://schemas.openxmlformats.org/drawingml/2006/main"/>
+          <a:lstStyle xmlns:a="http://schemas.openxmlformats.org/drawingml/2006/main"/>
+          <a:p xmlns:a="http://schemas.openxmlformats.org/drawingml/2006/main"/>
+        </p:txBody>
+      </p:sp>
+      <p:sp>
+        <p:nvSpPr>
+          <p:cNvPr id="4" name="Slide Number Placeholder 3"/>
+          <p:cNvSpPr>
+            <a:spLocks xmlns:a="http://schemas.openxmlformats.org/drawingml/2006/main" noGrp="1"/>
+          </p:cNvSpPr>
+          <p:nvPr>
+            <p:ph type="sldNum" idx="5"/>
+          </p:nvPr>
+        </p:nvSpPr>
+        <p:spPr/>
+        <p:txBody>
+          <a:bodyPr xmlns:a="http://schemas.openxmlformats.org/drawingml/2006/main"/>
+          <a:lstStyle xmlns:a="http://schemas.openxmlformats.org/drawingml/2006/main"/>
+          <a:p xmlns:a="http://schemas.openxmlformats.org/drawingml/2006/main"/>
+        </p:txBody>
+      </p:sp>
+    </p:spTree>
+  </p:cSld>
+  <p:clrMapOvr>
+    <a:masterClrMapping xmlns:a="http://schemas.openxmlformats.org/drawingml/2006/main"/>
+  </p:clrMapOvr>
+</p:notes>
+</file>
+
+<file path=ppt/notesSlides/notesSlide25.xml><?xml version="1.0" encoding="utf-8"?>
+<p:notes xmlns:p="http://schemas.openxmlformats.org/presentationml/2006/main">
+  <p:cSld>
+    <p:spTree>
+      <p:nvGrpSpPr>
+        <p:cNvPr id="1" name=""/>
+        <p:cNvGrpSpPr/>
+        <p:nvPr/>
+      </p:nvGrpSpPr>
+      <p:grpSpPr>
+        <a:xfrm xmlns:a="http://schemas.openxmlformats.org/drawingml/2006/main"/>
+      </p:grpSpPr>
+      <p:sp>
+        <p:nvSpPr>
+          <p:cNvPr id="2" name="Slide Image Placeholder 1"/>
+          <p:cNvSpPr>
+            <a:spLocks xmlns:a="http://schemas.openxmlformats.org/drawingml/2006/main" noGrp="1"/>
+          </p:cNvSpPr>
+          <p:nvPr>
+            <p:ph type="sldImg" idx="0"/>
+          </p:nvPr>
+        </p:nvSpPr>
+        <p:spPr/>
+      </p:sp>
+      <p:sp>
+        <p:nvSpPr>
+          <p:cNvPr id="3" name="Notes Placeholder 2"/>
+          <p:cNvSpPr>
+            <a:spLocks xmlns:a="http://schemas.openxmlformats.org/drawingml/2006/main" noGrp="1"/>
+          </p:cNvSpPr>
+          <p:nvPr>
+            <p:ph type="body" idx="1"/>
+          </p:nvPr>
+        </p:nvSpPr>
+        <p:spPr/>
+        <p:txBody>
+          <a:bodyPr xmlns:a="http://schemas.openxmlformats.org/drawingml/2006/main"/>
+          <a:lstStyle xmlns:a="http://schemas.openxmlformats.org/drawingml/2006/main"/>
+          <a:p xmlns:a="http://schemas.openxmlformats.org/drawingml/2006/main"/>
+        </p:txBody>
+      </p:sp>
+      <p:sp>
+        <p:nvSpPr>
+          <p:cNvPr id="4" name="Slide Number Placeholder 3"/>
+          <p:cNvSpPr>
+            <a:spLocks xmlns:a="http://schemas.openxmlformats.org/drawingml/2006/main" noGrp="1"/>
+          </p:cNvSpPr>
+          <p:nvPr>
+            <p:ph type="sldNum" idx="5"/>
+          </p:nvPr>
+        </p:nvSpPr>
+        <p:spPr/>
+        <p:txBody>
+          <a:bodyPr xmlns:a="http://schemas.openxmlformats.org/drawingml/2006/main"/>
+          <a:lstStyle xmlns:a="http://schemas.openxmlformats.org/drawingml/2006/main"/>
+          <a:p xmlns:a="http://schemas.openxmlformats.org/drawingml/2006/main"/>
+        </p:txBody>
+      </p:sp>
+    </p:spTree>
+  </p:cSld>
+  <p:clrMapOvr>
+    <a:masterClrMapping xmlns:a="http://schemas.openxmlformats.org/drawingml/2006/main"/>
+  </p:clrMapOvr>
+</p:notes>
+</file>
+
+<file path=ppt/notesSlides/notesSlide3.xml><?xml version="1.0" encoding="utf-8"?>
+<p:notes xmlns:p="http://schemas.openxmlformats.org/presentationml/2006/main">
+  <p:cSld>
+    <p:spTree>
+      <p:nvGrpSpPr>
+        <p:cNvPr id="1" name=""/>
+        <p:cNvGrpSpPr/>
+        <p:nvPr/>
+      </p:nvGrpSpPr>
+      <p:grpSpPr>
+        <a:xfrm xmlns:a="http://schemas.openxmlformats.org/drawingml/2006/main"/>
+      </p:grpSpPr>
+      <p:sp>
+        <p:nvSpPr>
+          <p:cNvPr id="2" name="Slide Image Placeholder 1"/>
+          <p:cNvSpPr>
+            <a:spLocks xmlns:a="http://schemas.openxmlformats.org/drawingml/2006/main" noGrp="1"/>
+          </p:cNvSpPr>
+          <p:nvPr>
+            <p:ph type="sldImg" idx="0"/>
+          </p:nvPr>
+        </p:nvSpPr>
+        <p:spPr/>
+      </p:sp>
+      <p:sp>
+        <p:nvSpPr>
+          <p:cNvPr id="3" name="Notes Placeholder 2"/>
+          <p:cNvSpPr>
+            <a:spLocks xmlns:a="http://schemas.openxmlformats.org/drawingml/2006/main" noGrp="1"/>
+          </p:cNvSpPr>
+          <p:nvPr>
+            <p:ph type="body" idx="1"/>
+          </p:nvPr>
+        </p:nvSpPr>
+        <p:spPr/>
+        <p:txBody>
+          <a:bodyPr xmlns:a="http://schemas.openxmlformats.org/drawingml/2006/main"/>
+          <a:lstStyle xmlns:a="http://schemas.openxmlformats.org/drawingml/2006/main"/>
+          <a:p xmlns:a="http://schemas.openxmlformats.org/drawingml/2006/main"/>
+        </p:txBody>
+      </p:sp>
+      <p:sp>
+        <p:nvSpPr>
+          <p:cNvPr id="4" name="Slide Number Placeholder 3"/>
+          <p:cNvSpPr>
+            <a:spLocks xmlns:a="http://schemas.openxmlformats.org/drawingml/2006/main" noGrp="1"/>
+          </p:cNvSpPr>
+          <p:nvPr>
+            <p:ph type="sldNum" idx="5"/>
+          </p:nvPr>
+        </p:nvSpPr>
+        <p:spPr/>
+        <p:txBody>
+          <a:bodyPr xmlns:a="http://schemas.openxmlformats.org/drawingml/2006/main"/>
+          <a:lstStyle xmlns:a="http://schemas.openxmlformats.org/drawingml/2006/main"/>
+          <a:p xmlns:a="http://schemas.openxmlformats.org/drawingml/2006/main"/>
+        </p:txBody>
+      </p:sp>
+    </p:spTree>
+  </p:cSld>
+  <p:clrMapOvr>
+    <a:masterClrMapping xmlns:a="http://schemas.openxmlformats.org/drawingml/2006/main"/>
+  </p:clrMapOvr>
+</p:notes>
+</file>
+
+<file path=ppt/notesSlides/notesSlide4.xml><?xml version="1.0" encoding="utf-8"?>
+<p:notes xmlns:p="http://schemas.openxmlformats.org/presentationml/2006/main">
+  <p:cSld>
+    <p:spTree>
+      <p:nvGrpSpPr>
+        <p:cNvPr id="1" name=""/>
+        <p:cNvGrpSpPr/>
+        <p:nvPr/>
+      </p:nvGrpSpPr>
+      <p:grpSpPr>
+        <a:xfrm xmlns:a="http://schemas.openxmlformats.org/drawingml/2006/main"/>
+      </p:grpSpPr>
+      <p:sp>
+        <p:nvSpPr>
+          <p:cNvPr id="2" name="Slide Image Placeholder 1"/>
+          <p:cNvSpPr>
+            <a:spLocks xmlns:a="http://schemas.openxmlformats.org/drawingml/2006/main" noGrp="1"/>
+          </p:cNvSpPr>
+          <p:nvPr>
+            <p:ph type="sldImg" idx="0"/>
+          </p:nvPr>
+        </p:nvSpPr>
+        <p:spPr/>
+      </p:sp>
+      <p:sp>
+        <p:nvSpPr>
+          <p:cNvPr id="3" name="Notes Placeholder 2"/>
+          <p:cNvSpPr>
+            <a:spLocks xmlns:a="http://schemas.openxmlformats.org/drawingml/2006/main" noGrp="1"/>
+          </p:cNvSpPr>
+          <p:nvPr>
+            <p:ph type="body" idx="1"/>
+          </p:nvPr>
+        </p:nvSpPr>
+        <p:spPr/>
+        <p:txBody>
+          <a:bodyPr xmlns:a="http://schemas.openxmlformats.org/drawingml/2006/main"/>
+          <a:lstStyle xmlns:a="http://schemas.openxmlformats.org/drawingml/2006/main"/>
+          <a:p xmlns:a="http://schemas.openxmlformats.org/drawingml/2006/main"/>
+        </p:txBody>
+      </p:sp>
+      <p:sp>
+        <p:nvSpPr>
+          <p:cNvPr id="4" name="Slide Number Placeholder 3"/>
+          <p:cNvSpPr>
+            <a:spLocks xmlns:a="http://schemas.openxmlformats.org/drawingml/2006/main" noGrp="1"/>
+          </p:cNvSpPr>
+          <p:nvPr>
+            <p:ph type="sldNum" idx="5"/>
+          </p:nvPr>
+        </p:nvSpPr>
+        <p:spPr/>
+        <p:txBody>
+          <a:bodyPr xmlns:a="http://schemas.openxmlformats.org/drawingml/2006/main"/>
+          <a:lstStyle xmlns:a="http://schemas.openxmlformats.org/drawingml/2006/main"/>
+          <a:p xmlns:a="http://schemas.openxmlformats.org/drawingml/2006/main"/>
+        </p:txBody>
+      </p:sp>
+    </p:spTree>
+  </p:cSld>
+  <p:clrMapOvr>
+    <a:masterClrMapping xmlns:a="http://schemas.openxmlformats.org/drawingml/2006/main"/>
+  </p:clrMapOvr>
+</p:notes>
+</file>
+
+<file path=ppt/notesSlides/notesSlide5.xml><?xml version="1.0" encoding="utf-8"?>
+<p:notes xmlns:p="http://schemas.openxmlformats.org/presentationml/2006/main">
+  <p:cSld>
+    <p:spTree>
+      <p:nvGrpSpPr>
+        <p:cNvPr id="1" name=""/>
+        <p:cNvGrpSpPr/>
+        <p:nvPr/>
+      </p:nvGrpSpPr>
+      <p:grpSpPr>
+        <a:xfrm xmlns:a="http://schemas.openxmlformats.org/drawingml/2006/main"/>
+      </p:grpSpPr>
+      <p:sp>
+        <p:nvSpPr>
+          <p:cNvPr id="2" name="Slide Image Placeholder 1"/>
+          <p:cNvSpPr>
+            <a:spLocks xmlns:a="http://schemas.openxmlformats.org/drawingml/2006/main" noGrp="1"/>
+          </p:cNvSpPr>
+          <p:nvPr>
+            <p:ph type="sldImg" idx="0"/>
+          </p:nvPr>
+        </p:nvSpPr>
+        <p:spPr/>
+      </p:sp>
+      <p:sp>
+        <p:nvSpPr>
+          <p:cNvPr id="3" name="Notes Placeholder 2"/>
+          <p:cNvSpPr>
+            <a:spLocks xmlns:a="http://schemas.openxmlformats.org/drawingml/2006/main" noGrp="1"/>
+          </p:cNvSpPr>
+          <p:nvPr>
+            <p:ph type="body" idx="1"/>
+          </p:nvPr>
+        </p:nvSpPr>
+        <p:spPr/>
+        <p:txBody>
+          <a:bodyPr xmlns:a="http://schemas.openxmlformats.org/drawingml/2006/main"/>
+          <a:lstStyle xmlns:a="http://schemas.openxmlformats.org/drawingml/2006/main"/>
+          <a:p xmlns:a="http://schemas.openxmlformats.org/drawingml/2006/main"/>
+        </p:txBody>
+      </p:sp>
+      <p:sp>
+        <p:nvSpPr>
+          <p:cNvPr id="4" name="Slide Number Placeholder 3"/>
+          <p:cNvSpPr>
+            <a:spLocks xmlns:a="http://schemas.openxmlformats.org/drawingml/2006/main" noGrp="1"/>
+          </p:cNvSpPr>
+          <p:nvPr>
+            <p:ph type="sldNum" idx="5"/>
+          </p:nvPr>
+        </p:nvSpPr>
+        <p:spPr/>
+        <p:txBody>
+          <a:bodyPr xmlns:a="http://schemas.openxmlformats.org/drawingml/2006/main"/>
+          <a:lstStyle xmlns:a="http://schemas.openxmlformats.org/drawingml/2006/main"/>
+          <a:p xmlns:a="http://schemas.openxmlformats.org/drawingml/2006/main"/>
+        </p:txBody>
+      </p:sp>
+    </p:spTree>
+  </p:cSld>
+  <p:clrMapOvr>
+    <a:masterClrMapping xmlns:a="http://schemas.openxmlformats.org/drawingml/2006/main"/>
+  </p:clrMapOvr>
+</p:notes>
+</file>
+
+<file path=ppt/notesSlides/notesSlide6.xml><?xml version="1.0" encoding="utf-8"?>
+<p:notes xmlns:p="http://schemas.openxmlformats.org/presentationml/2006/main">
+  <p:cSld>
+    <p:spTree>
+      <p:nvGrpSpPr>
+        <p:cNvPr id="1" name=""/>
+        <p:cNvGrpSpPr/>
+        <p:nvPr/>
+      </p:nvGrpSpPr>
+      <p:grpSpPr>
+        <a:xfrm xmlns:a="http://schemas.openxmlformats.org/drawingml/2006/main"/>
+      </p:grpSpPr>
+      <p:sp>
+        <p:nvSpPr>
+          <p:cNvPr id="2" name="Slide Image Placeholder 1"/>
+          <p:cNvSpPr>
+            <a:spLocks xmlns:a="http://schemas.openxmlformats.org/drawingml/2006/main" noGrp="1"/>
+          </p:cNvSpPr>
+          <p:nvPr>
+            <p:ph type="sldImg" idx="0"/>
+          </p:nvPr>
+        </p:nvSpPr>
+        <p:spPr/>
+      </p:sp>
+      <p:sp>
+        <p:nvSpPr>
+          <p:cNvPr id="3" name="Notes Placeholder 2"/>
+          <p:cNvSpPr>
+            <a:spLocks xmlns:a="http://schemas.openxmlformats.org/drawingml/2006/main" noGrp="1"/>
+          </p:cNvSpPr>
+          <p:nvPr>
+            <p:ph type="body" idx="1"/>
+          </p:nvPr>
+        </p:nvSpPr>
+        <p:spPr/>
+        <p:txBody>
+          <a:bodyPr xmlns:a="http://schemas.openxmlformats.org/drawingml/2006/main"/>
+          <a:lstStyle xmlns:a="http://schemas.openxmlformats.org/drawingml/2006/main"/>
+          <a:p xmlns:a="http://schemas.openxmlformats.org/drawingml/2006/main"/>
+        </p:txBody>
+      </p:sp>
+      <p:sp>
+        <p:nvSpPr>
+          <p:cNvPr id="4" name="Slide Number Placeholder 3"/>
+          <p:cNvSpPr>
+            <a:spLocks xmlns:a="http://schemas.openxmlformats.org/drawingml/2006/main" noGrp="1"/>
+          </p:cNvSpPr>
+          <p:nvPr>
+            <p:ph type="sldNum" idx="5"/>
+          </p:nvPr>
+        </p:nvSpPr>
+        <p:spPr/>
+        <p:txBody>
+          <a:bodyPr xmlns:a="http://schemas.openxmlformats.org/drawingml/2006/main"/>
+          <a:lstStyle xmlns:a="http://schemas.openxmlformats.org/drawingml/2006/main"/>
+          <a:p xmlns:a="http://schemas.openxmlformats.org/drawingml/2006/main"/>
+        </p:txBody>
+      </p:sp>
+    </p:spTree>
+  </p:cSld>
+  <p:clrMapOvr>
+    <a:masterClrMapping xmlns:a="http://schemas.openxmlformats.org/drawingml/2006/main"/>
+  </p:clrMapOvr>
+</p:notes>
+</file>
+
+<file path=ppt/notesSlides/notesSlide7.xml><?xml version="1.0" encoding="utf-8"?>
+<p:notes xmlns:p="http://schemas.openxmlformats.org/presentationml/2006/main">
+  <p:cSld>
+    <p:spTree>
+      <p:nvGrpSpPr>
+        <p:cNvPr id="1" name=""/>
+        <p:cNvGrpSpPr/>
+        <p:nvPr/>
+      </p:nvGrpSpPr>
+      <p:grpSpPr>
+        <a:xfrm xmlns:a="http://schemas.openxmlformats.org/drawingml/2006/main"/>
+      </p:grpSpPr>
+      <p:sp>
+        <p:nvSpPr>
+          <p:cNvPr id="2" name="Slide Image Placeholder 1"/>
+          <p:cNvSpPr>
+            <a:spLocks xmlns:a="http://schemas.openxmlformats.org/drawingml/2006/main" noGrp="1"/>
+          </p:cNvSpPr>
+          <p:nvPr>
+            <p:ph type="sldImg" idx="0"/>
+          </p:nvPr>
+        </p:nvSpPr>
+        <p:spPr/>
+      </p:sp>
+      <p:sp>
+        <p:nvSpPr>
+          <p:cNvPr id="3" name="Notes Placeholder 2"/>
+          <p:cNvSpPr>
+            <a:spLocks xmlns:a="http://schemas.openxmlformats.org/drawingml/2006/main" noGrp="1"/>
+          </p:cNvSpPr>
+          <p:nvPr>
+            <p:ph type="body" idx="1"/>
+          </p:nvPr>
+        </p:nvSpPr>
+        <p:spPr/>
+        <p:txBody>
+          <a:bodyPr xmlns:a="http://schemas.openxmlformats.org/drawingml/2006/main"/>
+          <a:lstStyle xmlns:a="http://schemas.openxmlformats.org/drawingml/2006/main"/>
+          <a:p xmlns:a="http://schemas.openxmlformats.org/drawingml/2006/main"/>
+        </p:txBody>
+      </p:sp>
+      <p:sp>
+        <p:nvSpPr>
+          <p:cNvPr id="4" name="Slide Number Placeholder 3"/>
+          <p:cNvSpPr>
+            <a:spLocks xmlns:a="http://schemas.openxmlformats.org/drawingml/2006/main" noGrp="1"/>
+          </p:cNvSpPr>
+          <p:nvPr>
+            <p:ph type="sldNum" idx="5"/>
+          </p:nvPr>
+        </p:nvSpPr>
+        <p:spPr/>
+        <p:txBody>
+          <a:bodyPr xmlns:a="http://schemas.openxmlformats.org/drawingml/2006/main"/>
+          <a:lstStyle xmlns:a="http://schemas.openxmlformats.org/drawingml/2006/main"/>
+          <a:p xmlns:a="http://schemas.openxmlformats.org/drawingml/2006/main"/>
+        </p:txBody>
+      </p:sp>
+    </p:spTree>
+  </p:cSld>
+  <p:clrMapOvr>
+    <a:masterClrMapping xmlns:a="http://schemas.openxmlformats.org/drawingml/2006/main"/>
+  </p:clrMapOvr>
+</p:notes>
+</file>
+
+<file path=ppt/notesSlides/notesSlide8.xml><?xml version="1.0" encoding="utf-8"?>
+<p:notes xmlns:p="http://schemas.openxmlformats.org/presentationml/2006/main">
+  <p:cSld>
+    <p:spTree>
+      <p:nvGrpSpPr>
+        <p:cNvPr id="1" name=""/>
+        <p:cNvGrpSpPr/>
+        <p:nvPr/>
+      </p:nvGrpSpPr>
+      <p:grpSpPr>
+        <a:xfrm xmlns:a="http://schemas.openxmlformats.org/drawingml/2006/main"/>
+      </p:grpSpPr>
+      <p:sp>
+        <p:nvSpPr>
+          <p:cNvPr id="2" name="Slide Image Placeholder 1"/>
+          <p:cNvSpPr>
+            <a:spLocks xmlns:a="http://schemas.openxmlformats.org/drawingml/2006/main" noGrp="1"/>
+          </p:cNvSpPr>
+          <p:nvPr>
+            <p:ph type="sldImg" idx="0"/>
+          </p:nvPr>
+        </p:nvSpPr>
+        <p:spPr/>
+      </p:sp>
+      <p:sp>
+        <p:nvSpPr>
+          <p:cNvPr id="3" name="Notes Placeholder 2"/>
+          <p:cNvSpPr>
+            <a:spLocks xmlns:a="http://schemas.openxmlformats.org/drawingml/2006/main" noGrp="1"/>
+          </p:cNvSpPr>
+          <p:nvPr>
+            <p:ph type="body" idx="1"/>
+          </p:nvPr>
+        </p:nvSpPr>
+        <p:spPr/>
+        <p:txBody>
+          <a:bodyPr xmlns:a="http://schemas.openxmlformats.org/drawingml/2006/main"/>
+          <a:lstStyle xmlns:a="http://schemas.openxmlformats.org/drawingml/2006/main"/>
+          <a:p xmlns:a="http://schemas.openxmlformats.org/drawingml/2006/main"/>
+        </p:txBody>
+      </p:sp>
+      <p:sp>
+        <p:nvSpPr>
+          <p:cNvPr id="4" name="Slide Number Placeholder 3"/>
+          <p:cNvSpPr>
+            <a:spLocks xmlns:a="http://schemas.openxmlformats.org/drawingml/2006/main" noGrp="1"/>
+          </p:cNvSpPr>
+          <p:nvPr>
+            <p:ph type="sldNum" idx="5"/>
+          </p:nvPr>
+        </p:nvSpPr>
+        <p:spPr/>
+        <p:txBody>
+          <a:bodyPr xmlns:a="http://schemas.openxmlformats.org/drawingml/2006/main"/>
+          <a:lstStyle xmlns:a="http://schemas.openxmlformats.org/drawingml/2006/main"/>
+          <a:p xmlns:a="http://schemas.openxmlformats.org/drawingml/2006/main"/>
+        </p:txBody>
+      </p:sp>
+    </p:spTree>
+  </p:cSld>
+  <p:clrMapOvr>
+    <a:masterClrMapping xmlns:a="http://schemas.openxmlformats.org/drawingml/2006/main"/>
+  </p:clrMapOvr>
+</p:notes>
+</file>
+
+<file path=ppt/notesSlides/notesSlide9.xml><?xml version="1.0" encoding="utf-8"?>
+<p:notes xmlns:p="http://schemas.openxmlformats.org/presentationml/2006/main">
+  <p:cSld>
+    <p:spTree>
+      <p:nvGrpSpPr>
+        <p:cNvPr id="1" name=""/>
+        <p:cNvGrpSpPr/>
+        <p:nvPr/>
+      </p:nvGrpSpPr>
+      <p:grpSpPr>
+        <a:xfrm xmlns:a="http://schemas.openxmlformats.org/drawingml/2006/main"/>
+      </p:grpSpPr>
+      <p:sp>
+        <p:nvSpPr>
+          <p:cNvPr id="2" name="Slide Image Placeholder 1"/>
+          <p:cNvSpPr>
+            <a:spLocks xmlns:a="http://schemas.openxmlformats.org/drawingml/2006/main" noGrp="1"/>
+          </p:cNvSpPr>
+          <p:nvPr>
+            <p:ph type="sldImg" idx="0"/>
+          </p:nvPr>
+        </p:nvSpPr>
+        <p:spPr/>
+      </p:sp>
+      <p:sp>
+        <p:nvSpPr>
+          <p:cNvPr id="3" name="Notes Placeholder 2"/>
+          <p:cNvSpPr>
+            <a:spLocks xmlns:a="http://schemas.openxmlformats.org/drawingml/2006/main" noGrp="1"/>
+          </p:cNvSpPr>
+          <p:nvPr>
+            <p:ph type="body" idx="1"/>
+          </p:nvPr>
+        </p:nvSpPr>
+        <p:spPr/>
+        <p:txBody>
+          <a:bodyPr xmlns:a="http://schemas.openxmlformats.org/drawingml/2006/main"/>
+          <a:lstStyle xmlns:a="http://schemas.openxmlformats.org/drawingml/2006/main"/>
+          <a:p xmlns:a="http://schemas.openxmlformats.org/drawingml/2006/main"/>
+        </p:txBody>
+      </p:sp>
+      <p:sp>
+        <p:nvSpPr>
+          <p:cNvPr id="4" name="Slide Number Placeholder 3"/>
+          <p:cNvSpPr>
+            <a:spLocks xmlns:a="http://schemas.openxmlformats.org/drawingml/2006/main" noGrp="1"/>
+          </p:cNvSpPr>
+          <p:nvPr>
+            <p:ph type="sldNum" idx="5"/>
+          </p:nvPr>
+        </p:nvSpPr>
+        <p:spPr/>
+        <p:txBody>
+          <a:bodyPr xmlns:a="http://schemas.openxmlformats.org/drawingml/2006/main"/>
+          <a:lstStyle xmlns:a="http://schemas.openxmlformats.org/drawingml/2006/main"/>
+          <a:p xmlns:a="http://schemas.openxmlformats.org/drawingml/2006/main"/>
+        </p:txBody>
+      </p:sp>
+    </p:spTree>
+  </p:cSld>
+  <p:clrMapOvr>
+    <a:masterClrMapping xmlns:a="http://schemas.openxmlformats.org/drawingml/2006/main"/>
+  </p:clrMapOvr>
+</p:notes>
 </file>
 
 <file path=ppt/slideLayouts/slideLayout1.xml><?xml version="1.0" encoding="utf-8"?>
@@ -53,7 +2093,7 @@
           <p:cNvPr id="3" name="Title">
             <a:extLst xmlns:a="http://schemas.openxmlformats.org/drawingml/2006/main">
               <a:ext uri="{FF2B5EF4-FFF2-40B4-BE49-F238E27FC236}">
-                <a16:creationId xmlns:a16="http://schemas.microsoft.com/office/drawing/2014/main" id="{B2485231-92F9-47A2-BF91-1513CF6D54DC}"/>
+                <a16:creationId xmlns:a16="http://schemas.microsoft.com/office/drawing/2014/main" id="{AEE1F0F0-4CCF-4D6E-B7C7-65342A281B6D}"/>
               </a:ext>
             </a:extLst>
           </p:cNvPr>
@@ -210,7 +2250,7 @@
           <p:cNvPr id="2" name="Subtitle">
             <a:extLst xmlns:a="http://schemas.openxmlformats.org/drawingml/2006/main">
               <a:ext uri="{FF2B5EF4-FFF2-40B4-BE49-F238E27FC236}">
-                <a16:creationId xmlns:a16="http://schemas.microsoft.com/office/drawing/2014/main" id="{17CA9755-24F6-4042-B7D9-A5FF40566C52}"/>
+                <a16:creationId xmlns:a16="http://schemas.microsoft.com/office/drawing/2014/main" id="{5EC17C33-5207-490E-A51C-971DF8F4C36E}"/>
               </a:ext>
             </a:extLst>
           </p:cNvPr>
@@ -384,7 +2424,7 @@
           <p:cNvPr id="2" name="Section title">
             <a:extLst xmlns:a="http://schemas.openxmlformats.org/drawingml/2006/main">
               <a:ext uri="{FF2B5EF4-FFF2-40B4-BE49-F238E27FC236}">
-                <a16:creationId xmlns:a16="http://schemas.microsoft.com/office/drawing/2014/main" id="{9093154D-85BC-4004-9792-4C62621F4502}"/>
+                <a16:creationId xmlns:a16="http://schemas.microsoft.com/office/drawing/2014/main" id="{7C8C2C5D-F339-43F3-914E-3D46EA7210A8}"/>
               </a:ext>
             </a:extLst>
           </p:cNvPr>
@@ -558,7 +2598,7 @@
           <p:cNvPr id="3" name="Title">
             <a:extLst xmlns:a="http://schemas.openxmlformats.org/drawingml/2006/main">
               <a:ext uri="{FF2B5EF4-FFF2-40B4-BE49-F238E27FC236}">
-                <a16:creationId xmlns:a16="http://schemas.microsoft.com/office/drawing/2014/main" id="{CCA2627A-22EC-452E-B7D3-27E31AF9B918}"/>
+                <a16:creationId xmlns:a16="http://schemas.microsoft.com/office/drawing/2014/main" id="{072790C3-F7AC-4C7C-871B-7BCAE38B8ECE}"/>
               </a:ext>
             </a:extLst>
           </p:cNvPr>
@@ -715,7 +2755,7 @@
           <p:cNvPr id="2" name="Body">
             <a:extLst xmlns:a="http://schemas.openxmlformats.org/drawingml/2006/main">
               <a:ext uri="{FF2B5EF4-FFF2-40B4-BE49-F238E27FC236}">
-                <a16:creationId xmlns:a16="http://schemas.microsoft.com/office/drawing/2014/main" id="{63E436BF-7AB4-4DA3-85A5-D92F59BFE25B}"/>
+                <a16:creationId xmlns:a16="http://schemas.microsoft.com/office/drawing/2014/main" id="{4B619153-DB80-418F-A172-9DC4DEA1F2DA}"/>
               </a:ext>
             </a:extLst>
           </p:cNvPr>
@@ -889,7 +2929,7 @@
           <p:cNvPr id="4" name="Title">
             <a:extLst xmlns:a="http://schemas.openxmlformats.org/drawingml/2006/main">
               <a:ext uri="{FF2B5EF4-FFF2-40B4-BE49-F238E27FC236}">
-                <a16:creationId xmlns:a16="http://schemas.microsoft.com/office/drawing/2014/main" id="{7CC9AEB9-F254-4F97-A227-76CC1281E3E6}"/>
+                <a16:creationId xmlns:a16="http://schemas.microsoft.com/office/drawing/2014/main" id="{411EF80E-53F0-4F41-973F-56A98771D85B}"/>
               </a:ext>
             </a:extLst>
           </p:cNvPr>
@@ -1046,7 +3086,7 @@
           <p:cNvPr id="2" name="Left column">
             <a:extLst xmlns:a="http://schemas.openxmlformats.org/drawingml/2006/main">
               <a:ext uri="{FF2B5EF4-FFF2-40B4-BE49-F238E27FC236}">
-                <a16:creationId xmlns:a16="http://schemas.microsoft.com/office/drawing/2014/main" id="{BE9ED9FC-5D9F-43C1-A427-B2572921561F}"/>
+                <a16:creationId xmlns:a16="http://schemas.microsoft.com/office/drawing/2014/main" id="{77461323-8A1B-40D3-89FD-B511AF01248B}"/>
               </a:ext>
             </a:extLst>
           </p:cNvPr>
@@ -1203,7 +3243,7 @@
           <p:cNvPr id="3" name="Right column">
             <a:extLst xmlns:a="http://schemas.openxmlformats.org/drawingml/2006/main">
               <a:ext uri="{FF2B5EF4-FFF2-40B4-BE49-F238E27FC236}">
-                <a16:creationId xmlns:a16="http://schemas.microsoft.com/office/drawing/2014/main" id="{FC8DB53D-F4E0-4BED-8442-7228EBD782E7}"/>
+                <a16:creationId xmlns:a16="http://schemas.microsoft.com/office/drawing/2014/main" id="{EE8E707E-5EFA-4F5F-85BF-F78288251DF3}"/>
               </a:ext>
             </a:extLst>
           </p:cNvPr>
@@ -1377,7 +3417,7 @@
           <p:cNvPr id="3" name="Title">
             <a:extLst xmlns:a="http://schemas.openxmlformats.org/drawingml/2006/main">
               <a:ext uri="{FF2B5EF4-FFF2-40B4-BE49-F238E27FC236}">
-                <a16:creationId xmlns:a16="http://schemas.microsoft.com/office/drawing/2014/main" id="{6B08DC15-0986-4489-A41C-3BBB1AC0EE31}"/>
+                <a16:creationId xmlns:a16="http://schemas.microsoft.com/office/drawing/2014/main" id="{0114E2D0-E32D-4A5F-9139-F1D97EA9B0D0}"/>
               </a:ext>
             </a:extLst>
           </p:cNvPr>
@@ -1534,7 +3574,7 @@
           <p:cNvPr id="2" name="Left column">
             <a:extLst xmlns:a="http://schemas.openxmlformats.org/drawingml/2006/main">
               <a:ext uri="{FF2B5EF4-FFF2-40B4-BE49-F238E27FC236}">
-                <a16:creationId xmlns:a16="http://schemas.microsoft.com/office/drawing/2014/main" id="{89E8467A-A62A-4F16-9034-A8FDC3CE408F}"/>
+                <a16:creationId xmlns:a16="http://schemas.microsoft.com/office/drawing/2014/main" id="{8DAB0D84-399C-4D3A-927F-062EC8CE9F86}"/>
               </a:ext>
             </a:extLst>
           </p:cNvPr>
@@ -1729,12 +3769,12 @@
   </p:cSld>
   <p:clrMap bg1="lt1" tx1="dk1" bg2="lt2" tx2="dk2" accent1="accent1" accent2="accent2" accent3="accent3" accent4="accent4" accent5="accent5" accent6="accent6" hlink="hlink" folHlink="folHlink"/>
   <p:sldLayoutIdLst>
-    <p:sldLayoutId xmlns:r="http://schemas.openxmlformats.org/officeDocument/2006/relationships" id="2147483649" r:id="Reb6e0dfd61ef494a"/>
-    <p:sldLayoutId xmlns:r="http://schemas.openxmlformats.org/officeDocument/2006/relationships" id="2147483650" r:id="Rcbd4cb9616e0432f"/>
-    <p:sldLayoutId xmlns:r="http://schemas.openxmlformats.org/officeDocument/2006/relationships" id="2147483651" r:id="Rcff63fe931984c55"/>
-    <p:sldLayoutId xmlns:r="http://schemas.openxmlformats.org/officeDocument/2006/relationships" id="2147483652" r:id="Radd8460ac7384834"/>
-    <p:sldLayoutId xmlns:r="http://schemas.openxmlformats.org/officeDocument/2006/relationships" id="2147483653" r:id="Rf72b348788c14561"/>
-    <p:sldLayoutId xmlns:r="http://schemas.openxmlformats.org/officeDocument/2006/relationships" id="2147483654" r:id="R186c838547a24982"/>
+    <p:sldLayoutId xmlns:r="http://schemas.openxmlformats.org/officeDocument/2006/relationships" id="2147483649" r:id="Rce9964a1db564566"/>
+    <p:sldLayoutId xmlns:r="http://schemas.openxmlformats.org/officeDocument/2006/relationships" id="2147483650" r:id="Rb810cdd14990462f"/>
+    <p:sldLayoutId xmlns:r="http://schemas.openxmlformats.org/officeDocument/2006/relationships" id="2147483651" r:id="R4a8736e62fdd4a14"/>
+    <p:sldLayoutId xmlns:r="http://schemas.openxmlformats.org/officeDocument/2006/relationships" id="2147483652" r:id="R0e0aeed102d44281"/>
+    <p:sldLayoutId xmlns:r="http://schemas.openxmlformats.org/officeDocument/2006/relationships" id="2147483653" r:id="R56fc2975e270441e"/>
+    <p:sldLayoutId xmlns:r="http://schemas.openxmlformats.org/officeDocument/2006/relationships" id="2147483654" r:id="Rbda2bbb3354a4cfc"/>
   </p:sldLayoutIdLst>
   <p:txStyles>
     <p:titleStyle>
@@ -2285,7 +4325,7 @@
           <p:cNvPr id="13" name="">
             <a:extLst xmlns:a="http://schemas.openxmlformats.org/drawingml/2006/main">
               <a:ext uri="{FF2B5EF4-FFF2-40B4-BE49-F238E27FC236}">
-                <a16:creationId xmlns:a16="http://schemas.microsoft.com/office/drawing/2014/main" id="{EB50E76B-4CCA-42B9-8464-C83421117850}"/>
+                <a16:creationId xmlns:a16="http://schemas.microsoft.com/office/drawing/2014/main" id="{6070195A-B843-4FBF-8ADC-E71760489C90}"/>
               </a:ext>
             </a:extLst>
           </p:cNvPr>
@@ -2316,7 +4356,7 @@
           <p:cNvPr id="2" name="">
             <a:extLst xmlns:a="http://schemas.openxmlformats.org/drawingml/2006/main">
               <a:ext uri="{FF2B5EF4-FFF2-40B4-BE49-F238E27FC236}">
-                <a16:creationId xmlns:a16="http://schemas.microsoft.com/office/drawing/2014/main" id="{714387FF-23A5-42A2-9193-5930F18096C8}"/>
+                <a16:creationId xmlns:a16="http://schemas.microsoft.com/office/drawing/2014/main" id="{144EE581-3F3A-4583-9E88-D6A9AA17A86C}"/>
               </a:ext>
             </a:extLst>
           </p:cNvPr>
@@ -2347,7 +4387,7 @@
           <p:cNvPr id="3" name="">
             <a:extLst xmlns:a="http://schemas.openxmlformats.org/drawingml/2006/main">
               <a:ext uri="{FF2B5EF4-FFF2-40B4-BE49-F238E27FC236}">
-                <a16:creationId xmlns:a16="http://schemas.microsoft.com/office/drawing/2014/main" id="{BDF720FE-3562-4987-8931-046C409B462A}"/>
+                <a16:creationId xmlns:a16="http://schemas.microsoft.com/office/drawing/2014/main" id="{2A605C48-EF35-4575-843F-0651FEB90AAB}"/>
               </a:ext>
             </a:extLst>
           </p:cNvPr>
@@ -2380,7 +4420,7 @@
           <p:cNvPr id="4" name="">
             <a:extLst xmlns:a="http://schemas.openxmlformats.org/drawingml/2006/main">
               <a:ext uri="{FF2B5EF4-FFF2-40B4-BE49-F238E27FC236}">
-                <a16:creationId xmlns:a16="http://schemas.microsoft.com/office/drawing/2014/main" id="{761A881D-3AD2-448A-BA79-909C8AD830F7}"/>
+                <a16:creationId xmlns:a16="http://schemas.microsoft.com/office/drawing/2014/main" id="{D0D5CB41-BDA5-4019-94CF-C70CAAAC1583}"/>
               </a:ext>
             </a:extLst>
           </p:cNvPr>
@@ -2449,7 +4489,7 @@
           <p:cNvPr id="5" name="">
             <a:extLst xmlns:a="http://schemas.openxmlformats.org/drawingml/2006/main">
               <a:ext uri="{FF2B5EF4-FFF2-40B4-BE49-F238E27FC236}">
-                <a16:creationId xmlns:a16="http://schemas.microsoft.com/office/drawing/2014/main" id="{22264D8F-F151-4E63-91A0-6532A2996F8B}"/>
+                <a16:creationId xmlns:a16="http://schemas.microsoft.com/office/drawing/2014/main" id="{EBEC4BD5-E589-4381-8BBF-C5CD1BFC1839}"/>
               </a:ext>
             </a:extLst>
           </p:cNvPr>
@@ -2518,7 +4558,7 @@
           <p:cNvPr id="6" name="">
             <a:extLst xmlns:a="http://schemas.openxmlformats.org/drawingml/2006/main">
               <a:ext uri="{FF2B5EF4-FFF2-40B4-BE49-F238E27FC236}">
-                <a16:creationId xmlns:a16="http://schemas.microsoft.com/office/drawing/2014/main" id="{84645A10-BF6E-4BAD-BECB-2B0090F5C940}"/>
+                <a16:creationId xmlns:a16="http://schemas.microsoft.com/office/drawing/2014/main" id="{C8CFBE8B-67CE-442A-8DEF-5B4CB9362197}"/>
               </a:ext>
             </a:extLst>
           </p:cNvPr>
@@ -2610,7 +4650,7 @@
           <p:cNvPr id="7" name="">
             <a:extLst xmlns:a="http://schemas.openxmlformats.org/drawingml/2006/main">
               <a:ext uri="{FF2B5EF4-FFF2-40B4-BE49-F238E27FC236}">
-                <a16:creationId xmlns:a16="http://schemas.microsoft.com/office/drawing/2014/main" id="{5F28E5D3-77E5-4AFB-A734-3230EDAB8699}"/>
+                <a16:creationId xmlns:a16="http://schemas.microsoft.com/office/drawing/2014/main" id="{501677AD-07A4-41E0-BCE0-0A82C90857EE}"/>
               </a:ext>
             </a:extLst>
           </p:cNvPr>
@@ -2679,7 +4719,7 @@
           <p:cNvPr id="8" name="">
             <a:extLst xmlns:a="http://schemas.openxmlformats.org/drawingml/2006/main">
               <a:ext uri="{FF2B5EF4-FFF2-40B4-BE49-F238E27FC236}">
-                <a16:creationId xmlns:a16="http://schemas.microsoft.com/office/drawing/2014/main" id="{AA60AAB6-E593-4C41-AF6F-3863A40F03E0}"/>
+                <a16:creationId xmlns:a16="http://schemas.microsoft.com/office/drawing/2014/main" id="{13BEF919-5033-4320-BB76-0ED3CFF7EC28}"/>
               </a:ext>
             </a:extLst>
           </p:cNvPr>
@@ -2712,7 +4752,7 @@
           <p:cNvPr id="9" name="">
             <a:extLst xmlns:a="http://schemas.openxmlformats.org/drawingml/2006/main">
               <a:ext uri="{FF2B5EF4-FFF2-40B4-BE49-F238E27FC236}">
-                <a16:creationId xmlns:a16="http://schemas.microsoft.com/office/drawing/2014/main" id="{985D8F98-E106-4EF8-9061-E2116071DDE5}"/>
+                <a16:creationId xmlns:a16="http://schemas.microsoft.com/office/drawing/2014/main" id="{9BE7CA28-CE70-4A02-A12B-BF65D16B69E4}"/>
               </a:ext>
             </a:extLst>
           </p:cNvPr>
@@ -2781,7 +4821,7 @@
           <p:cNvPr id="10" name="">
             <a:extLst xmlns:a="http://schemas.openxmlformats.org/drawingml/2006/main">
               <a:ext uri="{FF2B5EF4-FFF2-40B4-BE49-F238E27FC236}">
-                <a16:creationId xmlns:a16="http://schemas.microsoft.com/office/drawing/2014/main" id="{04396F1E-5274-4BA0-A50B-C52B979CAA64}"/>
+                <a16:creationId xmlns:a16="http://schemas.microsoft.com/office/drawing/2014/main" id="{9B736A7B-53E8-4557-AAD7-4127B3735315}"/>
               </a:ext>
             </a:extLst>
           </p:cNvPr>
@@ -2850,7 +4890,7 @@
           <p:cNvPr id="11" name="">
             <a:extLst xmlns:a="http://schemas.openxmlformats.org/drawingml/2006/main">
               <a:ext uri="{FF2B5EF4-FFF2-40B4-BE49-F238E27FC236}">
-                <a16:creationId xmlns:a16="http://schemas.microsoft.com/office/drawing/2014/main" id="{A2BE659C-A2BD-41F0-A5C3-DEF3D46CC5EE}"/>
+                <a16:creationId xmlns:a16="http://schemas.microsoft.com/office/drawing/2014/main" id="{3C684DC8-D4DC-49C8-9096-C7155379CB58}"/>
               </a:ext>
             </a:extLst>
           </p:cNvPr>
@@ -2919,7 +4959,7 @@
           <p:cNvPr id="12" name="">
             <a:extLst xmlns:a="http://schemas.openxmlformats.org/drawingml/2006/main">
               <a:ext uri="{FF2B5EF4-FFF2-40B4-BE49-F238E27FC236}">
-                <a16:creationId xmlns:a16="http://schemas.microsoft.com/office/drawing/2014/main" id="{0E7338ED-63DE-4948-B261-0CB6B1083C52}"/>
+                <a16:creationId xmlns:a16="http://schemas.microsoft.com/office/drawing/2014/main" id="{3B812AA9-C7E0-42CE-AB30-7A5E0C63553A}"/>
               </a:ext>
             </a:extLst>
           </p:cNvPr>
@@ -2986,7 +5026,7 @@
     </p:spTree>
     <p:extLst>
       <p:ext uri="{BB962C8B-B14F-4D97-AF65-F5344CB8AC3E}">
-        <p14:creationId xmlns:p14="http://schemas.microsoft.com/office/powerpoint/2010/main" val="479931229"/>
+        <p14:creationId xmlns:p14="http://schemas.microsoft.com/office/powerpoint/2010/main" val="927476881"/>
       </p:ext>
     </p:extLst>
   </p:cSld>
@@ -3017,7 +5057,7 @@
           <p:cNvPr id="26" name="">
             <a:extLst xmlns:a="http://schemas.openxmlformats.org/drawingml/2006/main">
               <a:ext uri="{FF2B5EF4-FFF2-40B4-BE49-F238E27FC236}">
-                <a16:creationId xmlns:a16="http://schemas.microsoft.com/office/drawing/2014/main" id="{F8B092B5-5C8F-4DAF-90B9-E31EAD101D4E}"/>
+                <a16:creationId xmlns:a16="http://schemas.microsoft.com/office/drawing/2014/main" id="{780F08D0-DDA1-4A6A-AD7D-B596A9A65AD7}"/>
               </a:ext>
             </a:extLst>
           </p:cNvPr>
@@ -3048,7 +5088,7 @@
           <p:cNvPr id="2" name="">
             <a:extLst xmlns:a="http://schemas.openxmlformats.org/drawingml/2006/main">
               <a:ext uri="{FF2B5EF4-FFF2-40B4-BE49-F238E27FC236}">
-                <a16:creationId xmlns:a16="http://schemas.microsoft.com/office/drawing/2014/main" id="{77BBA7F7-FB5E-41C2-AA96-5393608032C4}"/>
+                <a16:creationId xmlns:a16="http://schemas.microsoft.com/office/drawing/2014/main" id="{828F751D-70D8-4AA2-A2D5-693D545F9B83}"/>
               </a:ext>
             </a:extLst>
           </p:cNvPr>
@@ -3117,7 +5157,7 @@
           <p:cNvPr id="3" name="">
             <a:extLst xmlns:a="http://schemas.openxmlformats.org/drawingml/2006/main">
               <a:ext uri="{FF2B5EF4-FFF2-40B4-BE49-F238E27FC236}">
-                <a16:creationId xmlns:a16="http://schemas.microsoft.com/office/drawing/2014/main" id="{0338508D-096D-488C-893E-A94BF612C7B3}"/>
+                <a16:creationId xmlns:a16="http://schemas.microsoft.com/office/drawing/2014/main" id="{D48E7BE9-8A7E-450B-AFA6-EA7CD8AC2CF1}"/>
               </a:ext>
             </a:extLst>
           </p:cNvPr>
@@ -3186,7 +5226,7 @@
           <p:cNvPr id="4" name="">
             <a:extLst xmlns:a="http://schemas.openxmlformats.org/drawingml/2006/main">
               <a:ext uri="{FF2B5EF4-FFF2-40B4-BE49-F238E27FC236}">
-                <a16:creationId xmlns:a16="http://schemas.microsoft.com/office/drawing/2014/main" id="{782251CE-8B95-4BCA-AE04-DE95A9648F43}"/>
+                <a16:creationId xmlns:a16="http://schemas.microsoft.com/office/drawing/2014/main" id="{118BF33D-7384-4D8E-8769-6BCF90713542}"/>
               </a:ext>
             </a:extLst>
           </p:cNvPr>
@@ -3217,7 +5257,7 @@
           <p:cNvPr id="5" name="">
             <a:extLst xmlns:a="http://schemas.openxmlformats.org/drawingml/2006/main">
               <a:ext uri="{FF2B5EF4-FFF2-40B4-BE49-F238E27FC236}">
-                <a16:creationId xmlns:a16="http://schemas.microsoft.com/office/drawing/2014/main" id="{1C5D9BD6-C75C-4507-BE3F-2481CF393C0F}"/>
+                <a16:creationId xmlns:a16="http://schemas.microsoft.com/office/drawing/2014/main" id="{1B7E3302-F558-40E0-B408-005927ACA826}"/>
               </a:ext>
             </a:extLst>
           </p:cNvPr>
@@ -3286,7 +5326,7 @@
           <p:cNvPr id="6" name="">
             <a:extLst xmlns:a="http://schemas.openxmlformats.org/drawingml/2006/main">
               <a:ext uri="{FF2B5EF4-FFF2-40B4-BE49-F238E27FC236}">
-                <a16:creationId xmlns:a16="http://schemas.microsoft.com/office/drawing/2014/main" id="{C51A3403-A3A2-48F8-B158-014113AB040F}"/>
+                <a16:creationId xmlns:a16="http://schemas.microsoft.com/office/drawing/2014/main" id="{7EAC6B77-F46D-40B4-9D3A-F4F3E856A24F}"/>
               </a:ext>
             </a:extLst>
           </p:cNvPr>
@@ -3355,7 +5395,7 @@
           <p:cNvPr id="7" name="">
             <a:extLst xmlns:a="http://schemas.openxmlformats.org/drawingml/2006/main">
               <a:ext uri="{FF2B5EF4-FFF2-40B4-BE49-F238E27FC236}">
-                <a16:creationId xmlns:a16="http://schemas.microsoft.com/office/drawing/2014/main" id="{DA077283-7014-47CC-96FD-6DA2F4B1EEEA}"/>
+                <a16:creationId xmlns:a16="http://schemas.microsoft.com/office/drawing/2014/main" id="{9912730A-F910-4F3A-BFEC-CBCF6364DBF4}"/>
               </a:ext>
             </a:extLst>
           </p:cNvPr>
@@ -3424,7 +5464,7 @@
           <p:cNvPr id="8" name="">
             <a:extLst xmlns:a="http://schemas.openxmlformats.org/drawingml/2006/main">
               <a:ext uri="{FF2B5EF4-FFF2-40B4-BE49-F238E27FC236}">
-                <a16:creationId xmlns:a16="http://schemas.microsoft.com/office/drawing/2014/main" id="{663FDB07-106A-4D79-9927-0E7843BA12FB}"/>
+                <a16:creationId xmlns:a16="http://schemas.microsoft.com/office/drawing/2014/main" id="{23FAE5B4-28A2-40CE-9972-66BA6549D167}"/>
               </a:ext>
             </a:extLst>
           </p:cNvPr>
@@ -3457,7 +5497,7 @@
           <p:cNvPr id="9" name="">
             <a:extLst xmlns:a="http://schemas.openxmlformats.org/drawingml/2006/main">
               <a:ext uri="{FF2B5EF4-FFF2-40B4-BE49-F238E27FC236}">
-                <a16:creationId xmlns:a16="http://schemas.microsoft.com/office/drawing/2014/main" id="{1C685A7B-F47F-416A-B04A-04C8C435E8F6}"/>
+                <a16:creationId xmlns:a16="http://schemas.microsoft.com/office/drawing/2014/main" id="{E53E26FC-EE0E-452C-A951-00C2E4C4A24D}"/>
               </a:ext>
             </a:extLst>
           </p:cNvPr>
@@ -3526,7 +5566,7 @@
           <p:cNvPr id="10" name="">
             <a:extLst xmlns:a="http://schemas.openxmlformats.org/drawingml/2006/main">
               <a:ext uri="{FF2B5EF4-FFF2-40B4-BE49-F238E27FC236}">
-                <a16:creationId xmlns:a16="http://schemas.microsoft.com/office/drawing/2014/main" id="{BD44FC69-C94F-4AC6-8759-692BF0D2A874}"/>
+                <a16:creationId xmlns:a16="http://schemas.microsoft.com/office/drawing/2014/main" id="{9112ACA2-8F11-42A9-A4EB-76CEE2FB3CFE}"/>
               </a:ext>
             </a:extLst>
           </p:cNvPr>
@@ -3595,7 +5635,7 @@
           <p:cNvPr id="11" name="">
             <a:extLst xmlns:a="http://schemas.openxmlformats.org/drawingml/2006/main">
               <a:ext uri="{FF2B5EF4-FFF2-40B4-BE49-F238E27FC236}">
-                <a16:creationId xmlns:a16="http://schemas.microsoft.com/office/drawing/2014/main" id="{B880515C-1AF1-4C4A-8DB5-322E01A37CF0}"/>
+                <a16:creationId xmlns:a16="http://schemas.microsoft.com/office/drawing/2014/main" id="{653A188D-261B-4231-B239-8835217B5C5D}"/>
               </a:ext>
             </a:extLst>
           </p:cNvPr>
@@ -3664,7 +5704,7 @@
           <p:cNvPr id="12" name="">
             <a:extLst xmlns:a="http://schemas.openxmlformats.org/drawingml/2006/main">
               <a:ext uri="{FF2B5EF4-FFF2-40B4-BE49-F238E27FC236}">
-                <a16:creationId xmlns:a16="http://schemas.microsoft.com/office/drawing/2014/main" id="{35DFC848-F96A-439C-A2DC-D02028E0A2B8}"/>
+                <a16:creationId xmlns:a16="http://schemas.microsoft.com/office/drawing/2014/main" id="{44658D59-6334-4796-865A-81DF22B143AB}"/>
               </a:ext>
             </a:extLst>
           </p:cNvPr>
@@ -3697,7 +5737,7 @@
           <p:cNvPr id="13" name="">
             <a:extLst xmlns:a="http://schemas.openxmlformats.org/drawingml/2006/main">
               <a:ext uri="{FF2B5EF4-FFF2-40B4-BE49-F238E27FC236}">
-                <a16:creationId xmlns:a16="http://schemas.microsoft.com/office/drawing/2014/main" id="{86A4306C-E485-471F-9DF3-D364C2AD6281}"/>
+                <a16:creationId xmlns:a16="http://schemas.microsoft.com/office/drawing/2014/main" id="{C66BE3ED-437A-4D78-B620-7E808B126174}"/>
               </a:ext>
             </a:extLst>
           </p:cNvPr>
@@ -3766,7 +5806,7 @@
           <p:cNvPr id="14" name="">
             <a:extLst xmlns:a="http://schemas.openxmlformats.org/drawingml/2006/main">
               <a:ext uri="{FF2B5EF4-FFF2-40B4-BE49-F238E27FC236}">
-                <a16:creationId xmlns:a16="http://schemas.microsoft.com/office/drawing/2014/main" id="{63DC2445-0720-4EE3-812F-D80E378258F3}"/>
+                <a16:creationId xmlns:a16="http://schemas.microsoft.com/office/drawing/2014/main" id="{6978A8FA-0F98-41EF-8D65-C49B90B09E34}"/>
               </a:ext>
             </a:extLst>
           </p:cNvPr>
@@ -3835,7 +5875,7 @@
           <p:cNvPr id="15" name="">
             <a:extLst xmlns:a="http://schemas.openxmlformats.org/drawingml/2006/main">
               <a:ext uri="{FF2B5EF4-FFF2-40B4-BE49-F238E27FC236}">
-                <a16:creationId xmlns:a16="http://schemas.microsoft.com/office/drawing/2014/main" id="{455BAE25-E2C8-4F0E-BE20-FB5F17CC9934}"/>
+                <a16:creationId xmlns:a16="http://schemas.microsoft.com/office/drawing/2014/main" id="{B1B22FD7-0BDE-49E6-BA3F-72266A3FA714}"/>
               </a:ext>
             </a:extLst>
           </p:cNvPr>
@@ -3904,7 +5944,7 @@
           <p:cNvPr id="16" name="">
             <a:extLst xmlns:a="http://schemas.openxmlformats.org/drawingml/2006/main">
               <a:ext uri="{FF2B5EF4-FFF2-40B4-BE49-F238E27FC236}">
-                <a16:creationId xmlns:a16="http://schemas.microsoft.com/office/drawing/2014/main" id="{6FAAD13D-4402-4FB4-9681-354AD43405A3}"/>
+                <a16:creationId xmlns:a16="http://schemas.microsoft.com/office/drawing/2014/main" id="{DF8C7B2F-49D7-4B6B-98B2-7F1AC74FA766}"/>
               </a:ext>
             </a:extLst>
           </p:cNvPr>
@@ -3937,7 +5977,7 @@
           <p:cNvPr id="17" name="">
             <a:extLst xmlns:a="http://schemas.openxmlformats.org/drawingml/2006/main">
               <a:ext uri="{FF2B5EF4-FFF2-40B4-BE49-F238E27FC236}">
-                <a16:creationId xmlns:a16="http://schemas.microsoft.com/office/drawing/2014/main" id="{90813422-ABE3-4617-AEB0-06B908DF8F7A}"/>
+                <a16:creationId xmlns:a16="http://schemas.microsoft.com/office/drawing/2014/main" id="{17871B27-D968-4315-87E8-83AB910B5359}"/>
               </a:ext>
             </a:extLst>
           </p:cNvPr>
@@ -4006,7 +6046,7 @@
           <p:cNvPr id="18" name="">
             <a:extLst xmlns:a="http://schemas.openxmlformats.org/drawingml/2006/main">
               <a:ext uri="{FF2B5EF4-FFF2-40B4-BE49-F238E27FC236}">
-                <a16:creationId xmlns:a16="http://schemas.microsoft.com/office/drawing/2014/main" id="{5FD139C5-93C5-4DA5-BF2F-E61B7354096D}"/>
+                <a16:creationId xmlns:a16="http://schemas.microsoft.com/office/drawing/2014/main" id="{28B294B3-4C8C-48A4-BF17-CA67D6BBF092}"/>
               </a:ext>
             </a:extLst>
           </p:cNvPr>
@@ -4075,7 +6115,7 @@
           <p:cNvPr id="19" name="">
             <a:extLst xmlns:a="http://schemas.openxmlformats.org/drawingml/2006/main">
               <a:ext uri="{FF2B5EF4-FFF2-40B4-BE49-F238E27FC236}">
-                <a16:creationId xmlns:a16="http://schemas.microsoft.com/office/drawing/2014/main" id="{16E5FBA5-81C3-4A70-8A9F-2B5418AB133E}"/>
+                <a16:creationId xmlns:a16="http://schemas.microsoft.com/office/drawing/2014/main" id="{99AE942F-70D9-490D-A61E-C029453496F9}"/>
               </a:ext>
             </a:extLst>
           </p:cNvPr>
@@ -4144,7 +6184,7 @@
           <p:cNvPr id="20" name="">
             <a:extLst xmlns:a="http://schemas.openxmlformats.org/drawingml/2006/main">
               <a:ext uri="{FF2B5EF4-FFF2-40B4-BE49-F238E27FC236}">
-                <a16:creationId xmlns:a16="http://schemas.microsoft.com/office/drawing/2014/main" id="{0F1DEFE9-A6D9-4FE6-84AC-0C466AC389FE}"/>
+                <a16:creationId xmlns:a16="http://schemas.microsoft.com/office/drawing/2014/main" id="{B017E46A-98E5-4133-B48F-D8A655344893}"/>
               </a:ext>
             </a:extLst>
           </p:cNvPr>
@@ -4177,7 +6217,7 @@
           <p:cNvPr id="21" name="">
             <a:extLst xmlns:a="http://schemas.openxmlformats.org/drawingml/2006/main">
               <a:ext uri="{FF2B5EF4-FFF2-40B4-BE49-F238E27FC236}">
-                <a16:creationId xmlns:a16="http://schemas.microsoft.com/office/drawing/2014/main" id="{FAD545D5-975D-47AB-8100-D4CFBB75441B}"/>
+                <a16:creationId xmlns:a16="http://schemas.microsoft.com/office/drawing/2014/main" id="{8132B9AB-BB25-47D6-BDA8-625F063EB945}"/>
               </a:ext>
             </a:extLst>
           </p:cNvPr>
@@ -4246,7 +6286,7 @@
           <p:cNvPr id="22" name="">
             <a:extLst xmlns:a="http://schemas.openxmlformats.org/drawingml/2006/main">
               <a:ext uri="{FF2B5EF4-FFF2-40B4-BE49-F238E27FC236}">
-                <a16:creationId xmlns:a16="http://schemas.microsoft.com/office/drawing/2014/main" id="{2F334B40-47C9-4FB3-B02A-E84578673C35}"/>
+                <a16:creationId xmlns:a16="http://schemas.microsoft.com/office/drawing/2014/main" id="{1F9068D5-0162-4DC4-B89C-F7E7A6060DFA}"/>
               </a:ext>
             </a:extLst>
           </p:cNvPr>
@@ -4315,7 +6355,7 @@
           <p:cNvPr id="23" name="">
             <a:extLst xmlns:a="http://schemas.openxmlformats.org/drawingml/2006/main">
               <a:ext uri="{FF2B5EF4-FFF2-40B4-BE49-F238E27FC236}">
-                <a16:creationId xmlns:a16="http://schemas.microsoft.com/office/drawing/2014/main" id="{F63883B6-6075-4FC8-847E-1B0420CE1557}"/>
+                <a16:creationId xmlns:a16="http://schemas.microsoft.com/office/drawing/2014/main" id="{FBD1146A-5117-4651-921C-EB3CD0023131}"/>
               </a:ext>
             </a:extLst>
           </p:cNvPr>
@@ -4384,7 +6424,7 @@
           <p:cNvPr id="24" name="">
             <a:extLst xmlns:a="http://schemas.openxmlformats.org/drawingml/2006/main">
               <a:ext uri="{FF2B5EF4-FFF2-40B4-BE49-F238E27FC236}">
-                <a16:creationId xmlns:a16="http://schemas.microsoft.com/office/drawing/2014/main" id="{4A28829A-7717-413B-8D51-D34E3855E3BD}"/>
+                <a16:creationId xmlns:a16="http://schemas.microsoft.com/office/drawing/2014/main" id="{D1FF437C-7BA3-4A2A-8098-812E3BCE508B}"/>
               </a:ext>
             </a:extLst>
           </p:cNvPr>
@@ -4453,7 +6493,7 @@
           <p:cNvPr id="25" name="">
             <a:extLst xmlns:a="http://schemas.openxmlformats.org/drawingml/2006/main">
               <a:ext uri="{FF2B5EF4-FFF2-40B4-BE49-F238E27FC236}">
-                <a16:creationId xmlns:a16="http://schemas.microsoft.com/office/drawing/2014/main" id="{FF3E1444-5851-48B4-9EDF-B9E851A1FE45}"/>
+                <a16:creationId xmlns:a16="http://schemas.microsoft.com/office/drawing/2014/main" id="{DD8704A3-FD21-45EB-ABB2-E870AA0203D4}"/>
               </a:ext>
             </a:extLst>
           </p:cNvPr>
@@ -4520,7 +6560,7 @@
     </p:spTree>
     <p:extLst>
       <p:ext uri="{BB962C8B-B14F-4D97-AF65-F5344CB8AC3E}">
-        <p14:creationId xmlns:p14="http://schemas.microsoft.com/office/powerpoint/2010/main" val="976452735"/>
+        <p14:creationId xmlns:p14="http://schemas.microsoft.com/office/powerpoint/2010/main" val="2135846794"/>
       </p:ext>
     </p:extLst>
   </p:cSld>
@@ -4551,7 +6591,7 @@
           <p:cNvPr id="21" name="">
             <a:extLst xmlns:a="http://schemas.openxmlformats.org/drawingml/2006/main">
               <a:ext uri="{FF2B5EF4-FFF2-40B4-BE49-F238E27FC236}">
-                <a16:creationId xmlns:a16="http://schemas.microsoft.com/office/drawing/2014/main" id="{731A4270-C340-49DC-B93C-166053AFED07}"/>
+                <a16:creationId xmlns:a16="http://schemas.microsoft.com/office/drawing/2014/main" id="{E81C6CE9-0489-4AB2-BD11-B07230E85775}"/>
               </a:ext>
             </a:extLst>
           </p:cNvPr>
@@ -4582,7 +6622,7 @@
           <p:cNvPr id="2" name="">
             <a:extLst xmlns:a="http://schemas.openxmlformats.org/drawingml/2006/main">
               <a:ext uri="{FF2B5EF4-FFF2-40B4-BE49-F238E27FC236}">
-                <a16:creationId xmlns:a16="http://schemas.microsoft.com/office/drawing/2014/main" id="{3E8078A4-9288-48CC-A13C-F3EC9210785E}"/>
+                <a16:creationId xmlns:a16="http://schemas.microsoft.com/office/drawing/2014/main" id="{35324FFA-BA4A-4901-86D9-400B695ED26C}"/>
               </a:ext>
             </a:extLst>
           </p:cNvPr>
@@ -4651,7 +6691,7 @@
           <p:cNvPr id="3" name="">
             <a:extLst xmlns:a="http://schemas.openxmlformats.org/drawingml/2006/main">
               <a:ext uri="{FF2B5EF4-FFF2-40B4-BE49-F238E27FC236}">
-                <a16:creationId xmlns:a16="http://schemas.microsoft.com/office/drawing/2014/main" id="{71BEA450-95F0-452F-A264-7AA67CF01513}"/>
+                <a16:creationId xmlns:a16="http://schemas.microsoft.com/office/drawing/2014/main" id="{7F69CFC1-6BDB-41DA-9BFE-D2CAE547845C}"/>
               </a:ext>
             </a:extLst>
           </p:cNvPr>
@@ -4720,7 +6760,7 @@
           <p:cNvPr id="4" name="">
             <a:extLst xmlns:a="http://schemas.openxmlformats.org/drawingml/2006/main">
               <a:ext uri="{FF2B5EF4-FFF2-40B4-BE49-F238E27FC236}">
-                <a16:creationId xmlns:a16="http://schemas.microsoft.com/office/drawing/2014/main" id="{CE17B123-9884-48B7-B09B-629B4D442BDB}"/>
+                <a16:creationId xmlns:a16="http://schemas.microsoft.com/office/drawing/2014/main" id="{A29BBAEB-EC59-433E-9395-A3D91A77476F}"/>
               </a:ext>
             </a:extLst>
           </p:cNvPr>
@@ -4751,7 +6791,7 @@
           <p:cNvPr id="5" name="">
             <a:extLst xmlns:a="http://schemas.openxmlformats.org/drawingml/2006/main">
               <a:ext uri="{FF2B5EF4-FFF2-40B4-BE49-F238E27FC236}">
-                <a16:creationId xmlns:a16="http://schemas.microsoft.com/office/drawing/2014/main" id="{A08FDA50-54AA-40DF-8367-2D9BB47679F8}"/>
+                <a16:creationId xmlns:a16="http://schemas.microsoft.com/office/drawing/2014/main" id="{04F023B7-44E7-4D9A-8EF1-FF5901E83CEC}"/>
               </a:ext>
             </a:extLst>
           </p:cNvPr>
@@ -4820,7 +6860,7 @@
           <p:cNvPr id="6" name="">
             <a:extLst xmlns:a="http://schemas.openxmlformats.org/drawingml/2006/main">
               <a:ext uri="{FF2B5EF4-FFF2-40B4-BE49-F238E27FC236}">
-                <a16:creationId xmlns:a16="http://schemas.microsoft.com/office/drawing/2014/main" id="{E46B11F0-5552-47ED-B61E-AF2B5E0E4334}"/>
+                <a16:creationId xmlns:a16="http://schemas.microsoft.com/office/drawing/2014/main" id="{C507ABF1-B557-4972-8808-474AF5C9BBB4}"/>
               </a:ext>
             </a:extLst>
           </p:cNvPr>
@@ -4889,7 +6929,7 @@
           <p:cNvPr id="7" name="">
             <a:extLst xmlns:a="http://schemas.openxmlformats.org/drawingml/2006/main">
               <a:ext uri="{FF2B5EF4-FFF2-40B4-BE49-F238E27FC236}">
-                <a16:creationId xmlns:a16="http://schemas.microsoft.com/office/drawing/2014/main" id="{8FA54B6E-2DD0-41ED-933B-CC3F837D4FA1}"/>
+                <a16:creationId xmlns:a16="http://schemas.microsoft.com/office/drawing/2014/main" id="{3208E8D3-3C0A-4930-9298-347B02D36397}"/>
               </a:ext>
             </a:extLst>
           </p:cNvPr>
@@ -4948,7 +6988,7 @@
                 <a:ea typeface="Arial"/>
                 <a:cs typeface="Arial"/>
               </a:rPr>
-              <a:t>Three desks work on the same encounter. FastAPI checks each write before PostgreSQL stores it.</a:t>
+              <a:t>Four desks work on the same encounter. FastAPI checks each write before PostgreSQL stores it.</a:t>
             </a:r>
           </a:p>
         </p:txBody>
@@ -4958,7 +6998,7 @@
           <p:cNvPr id="8" name="">
             <a:extLst xmlns:a="http://schemas.openxmlformats.org/drawingml/2006/main">
               <a:ext uri="{FF2B5EF4-FFF2-40B4-BE49-F238E27FC236}">
-                <a16:creationId xmlns:a16="http://schemas.microsoft.com/office/drawing/2014/main" id="{20D88961-90FA-404C-AEFA-4EBE3735EC67}"/>
+                <a16:creationId xmlns:a16="http://schemas.microsoft.com/office/drawing/2014/main" id="{4127D757-C18C-4AD5-9F30-17C0AEB5B032}"/>
               </a:ext>
             </a:extLst>
           </p:cNvPr>
@@ -4991,7 +7031,7 @@
           <p:cNvPr id="9" name="">
             <a:extLst xmlns:a="http://schemas.openxmlformats.org/drawingml/2006/main">
               <a:ext uri="{FF2B5EF4-FFF2-40B4-BE49-F238E27FC236}">
-                <a16:creationId xmlns:a16="http://schemas.microsoft.com/office/drawing/2014/main" id="{D723DC5B-64FD-4E65-BB33-AC8171FBA981}"/>
+                <a16:creationId xmlns:a16="http://schemas.microsoft.com/office/drawing/2014/main" id="{E9EE5AF9-2ABD-4B6E-9539-DC4B78FCBC5F}"/>
               </a:ext>
             </a:extLst>
           </p:cNvPr>
@@ -5060,7 +7100,7 @@
           <p:cNvPr id="10" name="">
             <a:extLst xmlns:a="http://schemas.openxmlformats.org/drawingml/2006/main">
               <a:ext uri="{FF2B5EF4-FFF2-40B4-BE49-F238E27FC236}">
-                <a16:creationId xmlns:a16="http://schemas.microsoft.com/office/drawing/2014/main" id="{830A676A-1F7A-4B99-B7D0-9E26C82C8F37}"/>
+                <a16:creationId xmlns:a16="http://schemas.microsoft.com/office/drawing/2014/main" id="{09306CD5-4A15-4487-9EBC-B8B5CFAFA037}"/>
               </a:ext>
             </a:extLst>
           </p:cNvPr>
@@ -5129,7 +7169,7 @@
           <p:cNvPr id="11" name="">
             <a:extLst xmlns:a="http://schemas.openxmlformats.org/drawingml/2006/main">
               <a:ext uri="{FF2B5EF4-FFF2-40B4-BE49-F238E27FC236}">
-                <a16:creationId xmlns:a16="http://schemas.microsoft.com/office/drawing/2014/main" id="{2BF5F901-2BEB-4CFA-B6BA-D74BF7474003}"/>
+                <a16:creationId xmlns:a16="http://schemas.microsoft.com/office/drawing/2014/main" id="{1EDB749C-1CEB-4968-95A1-868627E3622D}"/>
               </a:ext>
             </a:extLst>
           </p:cNvPr>
@@ -5162,7 +7202,7 @@
           <p:cNvPr id="12" name="">
             <a:extLst xmlns:a="http://schemas.openxmlformats.org/drawingml/2006/main">
               <a:ext uri="{FF2B5EF4-FFF2-40B4-BE49-F238E27FC236}">
-                <a16:creationId xmlns:a16="http://schemas.microsoft.com/office/drawing/2014/main" id="{FD8907EA-65DB-449B-BA63-C0635A94F2A0}"/>
+                <a16:creationId xmlns:a16="http://schemas.microsoft.com/office/drawing/2014/main" id="{4813277B-943E-4221-B12F-DFD8A1E1D0A5}"/>
               </a:ext>
             </a:extLst>
           </p:cNvPr>
@@ -5231,7 +7271,7 @@
           <p:cNvPr id="13" name="">
             <a:extLst xmlns:a="http://schemas.openxmlformats.org/drawingml/2006/main">
               <a:ext uri="{FF2B5EF4-FFF2-40B4-BE49-F238E27FC236}">
-                <a16:creationId xmlns:a16="http://schemas.microsoft.com/office/drawing/2014/main" id="{059C49F3-32B5-4539-9F5D-2FA27183F05F}"/>
+                <a16:creationId xmlns:a16="http://schemas.microsoft.com/office/drawing/2014/main" id="{1E260CBF-21FC-4816-9FB7-34AD52DCDD9E}"/>
               </a:ext>
             </a:extLst>
           </p:cNvPr>
@@ -5300,7 +7340,7 @@
           <p:cNvPr id="14" name="">
             <a:extLst xmlns:a="http://schemas.openxmlformats.org/drawingml/2006/main">
               <a:ext uri="{FF2B5EF4-FFF2-40B4-BE49-F238E27FC236}">
-                <a16:creationId xmlns:a16="http://schemas.microsoft.com/office/drawing/2014/main" id="{B7E11BDE-AE0A-44B4-97D8-D89A2120097E}"/>
+                <a16:creationId xmlns:a16="http://schemas.microsoft.com/office/drawing/2014/main" id="{685D6B4A-6D0B-4BA0-B4E2-F9F8430AC66B}"/>
               </a:ext>
             </a:extLst>
           </p:cNvPr>
@@ -5333,7 +7373,7 @@
           <p:cNvPr id="15" name="">
             <a:extLst xmlns:a="http://schemas.openxmlformats.org/drawingml/2006/main">
               <a:ext uri="{FF2B5EF4-FFF2-40B4-BE49-F238E27FC236}">
-                <a16:creationId xmlns:a16="http://schemas.microsoft.com/office/drawing/2014/main" id="{75A01AEB-DC82-481E-91C1-24892B88C787}"/>
+                <a16:creationId xmlns:a16="http://schemas.microsoft.com/office/drawing/2014/main" id="{7BB6E5C2-9027-44AB-9C53-BE127C6E35EA}"/>
               </a:ext>
             </a:extLst>
           </p:cNvPr>
@@ -5402,7 +7442,7 @@
           <p:cNvPr id="16" name="">
             <a:extLst xmlns:a="http://schemas.openxmlformats.org/drawingml/2006/main">
               <a:ext uri="{FF2B5EF4-FFF2-40B4-BE49-F238E27FC236}">
-                <a16:creationId xmlns:a16="http://schemas.microsoft.com/office/drawing/2014/main" id="{82DDBA77-62AB-4223-B834-182901AB63CB}"/>
+                <a16:creationId xmlns:a16="http://schemas.microsoft.com/office/drawing/2014/main" id="{8B6247DB-C5F2-496D-A6F2-324EE19A86C8}"/>
               </a:ext>
             </a:extLst>
           </p:cNvPr>
@@ -5471,7 +7511,7 @@
           <p:cNvPr id="17" name="">
             <a:extLst xmlns:a="http://schemas.openxmlformats.org/drawingml/2006/main">
               <a:ext uri="{FF2B5EF4-FFF2-40B4-BE49-F238E27FC236}">
-                <a16:creationId xmlns:a16="http://schemas.microsoft.com/office/drawing/2014/main" id="{D5C8138D-BBB8-4091-8213-C077BB7F51F6}"/>
+                <a16:creationId xmlns:a16="http://schemas.microsoft.com/office/drawing/2014/main" id="{63F7C73A-2B38-4B27-9409-934B08E480BC}"/>
               </a:ext>
             </a:extLst>
           </p:cNvPr>
@@ -5504,7 +7544,7 @@
           <p:cNvPr id="18" name="">
             <a:extLst xmlns:a="http://schemas.openxmlformats.org/drawingml/2006/main">
               <a:ext uri="{FF2B5EF4-FFF2-40B4-BE49-F238E27FC236}">
-                <a16:creationId xmlns:a16="http://schemas.microsoft.com/office/drawing/2014/main" id="{35F84F46-9232-492C-98A2-3075AD6CCC34}"/>
+                <a16:creationId xmlns:a16="http://schemas.microsoft.com/office/drawing/2014/main" id="{906DACD2-E710-451B-A9F2-AE383CEC63ED}"/>
               </a:ext>
             </a:extLst>
           </p:cNvPr>
@@ -5573,7 +7613,7 @@
           <p:cNvPr id="19" name="">
             <a:extLst xmlns:a="http://schemas.openxmlformats.org/drawingml/2006/main">
               <a:ext uri="{FF2B5EF4-FFF2-40B4-BE49-F238E27FC236}">
-                <a16:creationId xmlns:a16="http://schemas.microsoft.com/office/drawing/2014/main" id="{F0FCA722-B857-4685-89A2-D5907EC564F4}"/>
+                <a16:creationId xmlns:a16="http://schemas.microsoft.com/office/drawing/2014/main" id="{6D7B5A29-8E34-4AAE-9CAD-68C872D79E19}"/>
               </a:ext>
             </a:extLst>
           </p:cNvPr>
@@ -5606,7 +7646,7 @@
           <p:cNvPr id="20" name="">
             <a:extLst xmlns:a="http://schemas.openxmlformats.org/drawingml/2006/main">
               <a:ext uri="{FF2B5EF4-FFF2-40B4-BE49-F238E27FC236}">
-                <a16:creationId xmlns:a16="http://schemas.microsoft.com/office/drawing/2014/main" id="{81E61327-55E7-4890-9B9D-9ED1D0762D5C}"/>
+                <a16:creationId xmlns:a16="http://schemas.microsoft.com/office/drawing/2014/main" id="{43899A48-59C0-40E5-83B2-882305391EBE}"/>
               </a:ext>
             </a:extLst>
           </p:cNvPr>
@@ -5673,7 +7713,7 @@
     </p:spTree>
     <p:extLst>
       <p:ext uri="{BB962C8B-B14F-4D97-AF65-F5344CB8AC3E}">
-        <p14:creationId xmlns:p14="http://schemas.microsoft.com/office/powerpoint/2010/main" val="1093294458"/>
+        <p14:creationId xmlns:p14="http://schemas.microsoft.com/office/powerpoint/2010/main" val="524226264"/>
       </p:ext>
     </p:extLst>
   </p:cSld>
@@ -5704,7 +7744,7 @@
           <p:cNvPr id="48" name="">
             <a:extLst xmlns:a="http://schemas.openxmlformats.org/drawingml/2006/main">
               <a:ext uri="{FF2B5EF4-FFF2-40B4-BE49-F238E27FC236}">
-                <a16:creationId xmlns:a16="http://schemas.microsoft.com/office/drawing/2014/main" id="{A892B05B-259B-4689-AFB6-3D2B6BAA36B9}"/>
+                <a16:creationId xmlns:a16="http://schemas.microsoft.com/office/drawing/2014/main" id="{AD347E7C-5105-49F3-947B-820BB5D61639}"/>
               </a:ext>
             </a:extLst>
           </p:cNvPr>
@@ -5735,7 +7775,7 @@
           <p:cNvPr id="2" name="">
             <a:extLst xmlns:a="http://schemas.openxmlformats.org/drawingml/2006/main">
               <a:ext uri="{FF2B5EF4-FFF2-40B4-BE49-F238E27FC236}">
-                <a16:creationId xmlns:a16="http://schemas.microsoft.com/office/drawing/2014/main" id="{897079FD-7E80-4E93-8062-0559DC64C788}"/>
+                <a16:creationId xmlns:a16="http://schemas.microsoft.com/office/drawing/2014/main" id="{A85A10C7-9BA2-4C28-9C0C-ACC08A8AFFAF}"/>
               </a:ext>
             </a:extLst>
           </p:cNvPr>
@@ -5804,7 +7844,7 @@
           <p:cNvPr id="3" name="">
             <a:extLst xmlns:a="http://schemas.openxmlformats.org/drawingml/2006/main">
               <a:ext uri="{FF2B5EF4-FFF2-40B4-BE49-F238E27FC236}">
-                <a16:creationId xmlns:a16="http://schemas.microsoft.com/office/drawing/2014/main" id="{7FAEA884-A64A-4886-B4B1-96EBB8BF3806}"/>
+                <a16:creationId xmlns:a16="http://schemas.microsoft.com/office/drawing/2014/main" id="{9A6FB9BC-2A77-41B4-9144-18D02AC09AE4}"/>
               </a:ext>
             </a:extLst>
           </p:cNvPr>
@@ -5873,7 +7913,7 @@
           <p:cNvPr id="4" name="">
             <a:extLst xmlns:a="http://schemas.openxmlformats.org/drawingml/2006/main">
               <a:ext uri="{FF2B5EF4-FFF2-40B4-BE49-F238E27FC236}">
-                <a16:creationId xmlns:a16="http://schemas.microsoft.com/office/drawing/2014/main" id="{1E5824D5-1382-48B8-B6E1-485228FB6E0D}"/>
+                <a16:creationId xmlns:a16="http://schemas.microsoft.com/office/drawing/2014/main" id="{5DEFDD81-CCBD-4132-8A9F-F4217D4AFB75}"/>
               </a:ext>
             </a:extLst>
           </p:cNvPr>
@@ -5904,7 +7944,7 @@
           <p:cNvPr id="5" name="">
             <a:extLst xmlns:a="http://schemas.openxmlformats.org/drawingml/2006/main">
               <a:ext uri="{FF2B5EF4-FFF2-40B4-BE49-F238E27FC236}">
-                <a16:creationId xmlns:a16="http://schemas.microsoft.com/office/drawing/2014/main" id="{51679D25-272E-4DC3-9105-D2FED7DE8791}"/>
+                <a16:creationId xmlns:a16="http://schemas.microsoft.com/office/drawing/2014/main" id="{41C1FAB1-05B9-4629-AEBE-DA3C0B33AEE4}"/>
               </a:ext>
             </a:extLst>
           </p:cNvPr>
@@ -5973,7 +8013,7 @@
           <p:cNvPr id="6" name="">
             <a:extLst xmlns:a="http://schemas.openxmlformats.org/drawingml/2006/main">
               <a:ext uri="{FF2B5EF4-FFF2-40B4-BE49-F238E27FC236}">
-                <a16:creationId xmlns:a16="http://schemas.microsoft.com/office/drawing/2014/main" id="{CD9C83E2-8CEB-4B03-AA84-DEAA63FB2F0D}"/>
+                <a16:creationId xmlns:a16="http://schemas.microsoft.com/office/drawing/2014/main" id="{3ADADCFA-E515-4CD9-88BA-D03F3B3C66D7}"/>
               </a:ext>
             </a:extLst>
           </p:cNvPr>
@@ -6042,7 +8082,7 @@
           <p:cNvPr id="7" name="">
             <a:extLst xmlns:a="http://schemas.openxmlformats.org/drawingml/2006/main">
               <a:ext uri="{FF2B5EF4-FFF2-40B4-BE49-F238E27FC236}">
-                <a16:creationId xmlns:a16="http://schemas.microsoft.com/office/drawing/2014/main" id="{9A6B7973-9F39-46E3-93F2-3E8DF268944A}"/>
+                <a16:creationId xmlns:a16="http://schemas.microsoft.com/office/drawing/2014/main" id="{16700098-7BE9-4210-9C25-9A359BCB91D8}"/>
               </a:ext>
             </a:extLst>
           </p:cNvPr>
@@ -6111,7 +8151,7 @@
           <p:cNvPr id="8" name="">
             <a:extLst xmlns:a="http://schemas.openxmlformats.org/drawingml/2006/main">
               <a:ext uri="{FF2B5EF4-FFF2-40B4-BE49-F238E27FC236}">
-                <a16:creationId xmlns:a16="http://schemas.microsoft.com/office/drawing/2014/main" id="{6E9165E4-BD1B-4309-BA49-7C312BCC2008}"/>
+                <a16:creationId xmlns:a16="http://schemas.microsoft.com/office/drawing/2014/main" id="{8D5871FB-4135-4C5E-A35D-2D91A221D518}"/>
               </a:ext>
             </a:extLst>
           </p:cNvPr>
@@ -6144,7 +8184,7 @@
           <p:cNvPr id="9" name="">
             <a:extLst xmlns:a="http://schemas.openxmlformats.org/drawingml/2006/main">
               <a:ext uri="{FF2B5EF4-FFF2-40B4-BE49-F238E27FC236}">
-                <a16:creationId xmlns:a16="http://schemas.microsoft.com/office/drawing/2014/main" id="{F52AE468-C0CC-47E1-8871-7288A00F4387}"/>
+                <a16:creationId xmlns:a16="http://schemas.microsoft.com/office/drawing/2014/main" id="{BCE1A468-6084-4756-BAA6-E63417670F62}"/>
               </a:ext>
             </a:extLst>
           </p:cNvPr>
@@ -6213,7 +8253,7 @@
           <p:cNvPr id="10" name="">
             <a:extLst xmlns:a="http://schemas.openxmlformats.org/drawingml/2006/main">
               <a:ext uri="{FF2B5EF4-FFF2-40B4-BE49-F238E27FC236}">
-                <a16:creationId xmlns:a16="http://schemas.microsoft.com/office/drawing/2014/main" id="{36ECAE2B-A2E4-4BD3-8992-1FFAEB9131DE}"/>
+                <a16:creationId xmlns:a16="http://schemas.microsoft.com/office/drawing/2014/main" id="{5B8800D1-F9A7-4D03-82F9-EB10B0F5F2A0}"/>
               </a:ext>
             </a:extLst>
           </p:cNvPr>
@@ -6282,7 +8322,7 @@
           <p:cNvPr id="11" name="">
             <a:extLst xmlns:a="http://schemas.openxmlformats.org/drawingml/2006/main">
               <a:ext uri="{FF2B5EF4-FFF2-40B4-BE49-F238E27FC236}">
-                <a16:creationId xmlns:a16="http://schemas.microsoft.com/office/drawing/2014/main" id="{AEBC0E87-085B-45C8-962A-4DFE8295BE7B}"/>
+                <a16:creationId xmlns:a16="http://schemas.microsoft.com/office/drawing/2014/main" id="{2B473115-C276-449A-A566-88728C6B2081}"/>
               </a:ext>
             </a:extLst>
           </p:cNvPr>
@@ -6315,7 +8355,7 @@
           <p:cNvPr id="12" name="">
             <a:extLst xmlns:a="http://schemas.openxmlformats.org/drawingml/2006/main">
               <a:ext uri="{FF2B5EF4-FFF2-40B4-BE49-F238E27FC236}">
-                <a16:creationId xmlns:a16="http://schemas.microsoft.com/office/drawing/2014/main" id="{C3FE1F9B-1E12-4990-A3C4-6D3A5C539F02}"/>
+                <a16:creationId xmlns:a16="http://schemas.microsoft.com/office/drawing/2014/main" id="{9CF3FA1D-57D0-46C2-B393-4A49BA0B4FFC}"/>
               </a:ext>
             </a:extLst>
           </p:cNvPr>
@@ -6384,7 +8424,7 @@
           <p:cNvPr id="13" name="">
             <a:extLst xmlns:a="http://schemas.openxmlformats.org/drawingml/2006/main">
               <a:ext uri="{FF2B5EF4-FFF2-40B4-BE49-F238E27FC236}">
-                <a16:creationId xmlns:a16="http://schemas.microsoft.com/office/drawing/2014/main" id="{87EF9CC5-59BE-4051-A3CD-FAA172B4213C}"/>
+                <a16:creationId xmlns:a16="http://schemas.microsoft.com/office/drawing/2014/main" id="{8E94CCE2-E818-4347-95A1-7D0EB66FDBEE}"/>
               </a:ext>
             </a:extLst>
           </p:cNvPr>
@@ -6453,7 +8493,7 @@
           <p:cNvPr id="14" name="">
             <a:extLst xmlns:a="http://schemas.openxmlformats.org/drawingml/2006/main">
               <a:ext uri="{FF2B5EF4-FFF2-40B4-BE49-F238E27FC236}">
-                <a16:creationId xmlns:a16="http://schemas.microsoft.com/office/drawing/2014/main" id="{5B238885-AD64-44BD-8F5F-742FFA6F2A82}"/>
+                <a16:creationId xmlns:a16="http://schemas.microsoft.com/office/drawing/2014/main" id="{35CCD583-3DE2-4960-B84D-2BDB2B23EE75}"/>
               </a:ext>
             </a:extLst>
           </p:cNvPr>
@@ -6486,7 +8526,7 @@
           <p:cNvPr id="15" name="">
             <a:extLst xmlns:a="http://schemas.openxmlformats.org/drawingml/2006/main">
               <a:ext uri="{FF2B5EF4-FFF2-40B4-BE49-F238E27FC236}">
-                <a16:creationId xmlns:a16="http://schemas.microsoft.com/office/drawing/2014/main" id="{845C1C33-DC81-4941-8F24-828999C3B075}"/>
+                <a16:creationId xmlns:a16="http://schemas.microsoft.com/office/drawing/2014/main" id="{2D04F137-ED3E-41B3-955F-69B8F59BB5FD}"/>
               </a:ext>
             </a:extLst>
           </p:cNvPr>
@@ -6555,7 +8595,7 @@
           <p:cNvPr id="16" name="">
             <a:extLst xmlns:a="http://schemas.openxmlformats.org/drawingml/2006/main">
               <a:ext uri="{FF2B5EF4-FFF2-40B4-BE49-F238E27FC236}">
-                <a16:creationId xmlns:a16="http://schemas.microsoft.com/office/drawing/2014/main" id="{0391104F-F504-40DD-A3FE-02710C2354E9}"/>
+                <a16:creationId xmlns:a16="http://schemas.microsoft.com/office/drawing/2014/main" id="{A3675ABC-4D7C-4C7D-A2BE-F9C2526FA5AA}"/>
               </a:ext>
             </a:extLst>
           </p:cNvPr>
@@ -6624,7 +8664,7 @@
           <p:cNvPr id="17" name="">
             <a:extLst xmlns:a="http://schemas.openxmlformats.org/drawingml/2006/main">
               <a:ext uri="{FF2B5EF4-FFF2-40B4-BE49-F238E27FC236}">
-                <a16:creationId xmlns:a16="http://schemas.microsoft.com/office/drawing/2014/main" id="{86A350BB-7C9F-4C4C-8F26-AEB0530931E9}"/>
+                <a16:creationId xmlns:a16="http://schemas.microsoft.com/office/drawing/2014/main" id="{57039573-2D47-416B-B9CC-62405C5EBE82}"/>
               </a:ext>
             </a:extLst>
           </p:cNvPr>
@@ -6657,7 +8697,7 @@
           <p:cNvPr id="18" name="">
             <a:extLst xmlns:a="http://schemas.openxmlformats.org/drawingml/2006/main">
               <a:ext uri="{FF2B5EF4-FFF2-40B4-BE49-F238E27FC236}">
-                <a16:creationId xmlns:a16="http://schemas.microsoft.com/office/drawing/2014/main" id="{81454D72-658D-49B4-9D7E-EF29E50A95EA}"/>
+                <a16:creationId xmlns:a16="http://schemas.microsoft.com/office/drawing/2014/main" id="{BA7C541B-0B8C-4D17-ADF2-938D209AC5C5}"/>
               </a:ext>
             </a:extLst>
           </p:cNvPr>
@@ -6726,7 +8766,7 @@
           <p:cNvPr id="19" name="">
             <a:extLst xmlns:a="http://schemas.openxmlformats.org/drawingml/2006/main">
               <a:ext uri="{FF2B5EF4-FFF2-40B4-BE49-F238E27FC236}">
-                <a16:creationId xmlns:a16="http://schemas.microsoft.com/office/drawing/2014/main" id="{0C548CF0-57EC-4E88-82DB-719AE1DFB260}"/>
+                <a16:creationId xmlns:a16="http://schemas.microsoft.com/office/drawing/2014/main" id="{3106BC75-86CC-41F0-BDF2-DCF3D14937FA}"/>
               </a:ext>
             </a:extLst>
           </p:cNvPr>
@@ -6795,7 +8835,7 @@
           <p:cNvPr id="20" name="">
             <a:extLst xmlns:a="http://schemas.openxmlformats.org/drawingml/2006/main">
               <a:ext uri="{FF2B5EF4-FFF2-40B4-BE49-F238E27FC236}">
-                <a16:creationId xmlns:a16="http://schemas.microsoft.com/office/drawing/2014/main" id="{4A546CFF-1AB2-4C69-8BEB-BF8A75985BE4}"/>
+                <a16:creationId xmlns:a16="http://schemas.microsoft.com/office/drawing/2014/main" id="{9276363E-2C10-4BB9-80B3-E11454E7CC7A}"/>
               </a:ext>
             </a:extLst>
           </p:cNvPr>
@@ -6864,7 +8904,7 @@
           <p:cNvPr id="21" name="">
             <a:extLst xmlns:a="http://schemas.openxmlformats.org/drawingml/2006/main">
               <a:ext uri="{FF2B5EF4-FFF2-40B4-BE49-F238E27FC236}">
-                <a16:creationId xmlns:a16="http://schemas.microsoft.com/office/drawing/2014/main" id="{2807BF9A-2928-47E9-90F6-E1473AD111D8}"/>
+                <a16:creationId xmlns:a16="http://schemas.microsoft.com/office/drawing/2014/main" id="{E0186415-F3C0-41D6-95AD-8106A74CCF5A}"/>
               </a:ext>
             </a:extLst>
           </p:cNvPr>
@@ -6897,7 +8937,7 @@
           <p:cNvPr id="22" name="">
             <a:extLst xmlns:a="http://schemas.openxmlformats.org/drawingml/2006/main">
               <a:ext uri="{FF2B5EF4-FFF2-40B4-BE49-F238E27FC236}">
-                <a16:creationId xmlns:a16="http://schemas.microsoft.com/office/drawing/2014/main" id="{8F159904-FE24-492E-9957-B897D7A74AD7}"/>
+                <a16:creationId xmlns:a16="http://schemas.microsoft.com/office/drawing/2014/main" id="{DD90B851-AF2B-4FCD-9941-B691A88EC4C4}"/>
               </a:ext>
             </a:extLst>
           </p:cNvPr>
@@ -6966,7 +9006,7 @@
           <p:cNvPr id="23" name="">
             <a:extLst xmlns:a="http://schemas.openxmlformats.org/drawingml/2006/main">
               <a:ext uri="{FF2B5EF4-FFF2-40B4-BE49-F238E27FC236}">
-                <a16:creationId xmlns:a16="http://schemas.microsoft.com/office/drawing/2014/main" id="{56466D89-9445-4599-8200-5BAC9F997D4E}"/>
+                <a16:creationId xmlns:a16="http://schemas.microsoft.com/office/drawing/2014/main" id="{53315F86-D2E6-4CF9-80E7-543D8463D0EF}"/>
               </a:ext>
             </a:extLst>
           </p:cNvPr>
@@ -7035,7 +9075,7 @@
           <p:cNvPr id="24" name="">
             <a:extLst xmlns:a="http://schemas.openxmlformats.org/drawingml/2006/main">
               <a:ext uri="{FF2B5EF4-FFF2-40B4-BE49-F238E27FC236}">
-                <a16:creationId xmlns:a16="http://schemas.microsoft.com/office/drawing/2014/main" id="{96B1779A-DD96-47A3-8072-FE94BA161453}"/>
+                <a16:creationId xmlns:a16="http://schemas.microsoft.com/office/drawing/2014/main" id="{2635BFAD-86CA-4360-BCAA-ABDF3090A9C0}"/>
               </a:ext>
             </a:extLst>
           </p:cNvPr>
@@ -7068,7 +9108,7 @@
           <p:cNvPr id="25" name="">
             <a:extLst xmlns:a="http://schemas.openxmlformats.org/drawingml/2006/main">
               <a:ext uri="{FF2B5EF4-FFF2-40B4-BE49-F238E27FC236}">
-                <a16:creationId xmlns:a16="http://schemas.microsoft.com/office/drawing/2014/main" id="{C39F6B51-0611-43A6-B92B-007E7D464461}"/>
+                <a16:creationId xmlns:a16="http://schemas.microsoft.com/office/drawing/2014/main" id="{D6C3D6C9-95C0-465E-9E7A-70128E942690}"/>
               </a:ext>
             </a:extLst>
           </p:cNvPr>
@@ -7137,7 +9177,7 @@
           <p:cNvPr id="26" name="">
             <a:extLst xmlns:a="http://schemas.openxmlformats.org/drawingml/2006/main">
               <a:ext uri="{FF2B5EF4-FFF2-40B4-BE49-F238E27FC236}">
-                <a16:creationId xmlns:a16="http://schemas.microsoft.com/office/drawing/2014/main" id="{12A0D3B0-D87B-4C6D-A464-7E63381BCB8E}"/>
+                <a16:creationId xmlns:a16="http://schemas.microsoft.com/office/drawing/2014/main" id="{E9411B5C-A3BA-4486-82A5-6257016DCD98}"/>
               </a:ext>
             </a:extLst>
           </p:cNvPr>
@@ -7206,7 +9246,7 @@
           <p:cNvPr id="27" name="">
             <a:extLst xmlns:a="http://schemas.openxmlformats.org/drawingml/2006/main">
               <a:ext uri="{FF2B5EF4-FFF2-40B4-BE49-F238E27FC236}">
-                <a16:creationId xmlns:a16="http://schemas.microsoft.com/office/drawing/2014/main" id="{4FF1BF6B-3621-421F-A50B-D6CCD5A2698F}"/>
+                <a16:creationId xmlns:a16="http://schemas.microsoft.com/office/drawing/2014/main" id="{BD14435A-988E-4521-81C8-485E1C217E05}"/>
               </a:ext>
             </a:extLst>
           </p:cNvPr>
@@ -7239,7 +9279,7 @@
           <p:cNvPr id="28" name="">
             <a:extLst xmlns:a="http://schemas.openxmlformats.org/drawingml/2006/main">
               <a:ext uri="{FF2B5EF4-FFF2-40B4-BE49-F238E27FC236}">
-                <a16:creationId xmlns:a16="http://schemas.microsoft.com/office/drawing/2014/main" id="{AE078999-E009-4549-A3F8-D8336D913AD6}"/>
+                <a16:creationId xmlns:a16="http://schemas.microsoft.com/office/drawing/2014/main" id="{2645D3ED-D4EE-4B62-BDBF-091F74125A6D}"/>
               </a:ext>
             </a:extLst>
           </p:cNvPr>
@@ -7308,7 +9348,7 @@
           <p:cNvPr id="29" name="">
             <a:extLst xmlns:a="http://schemas.openxmlformats.org/drawingml/2006/main">
               <a:ext uri="{FF2B5EF4-FFF2-40B4-BE49-F238E27FC236}">
-                <a16:creationId xmlns:a16="http://schemas.microsoft.com/office/drawing/2014/main" id="{64A4073E-1967-47CA-8C87-543B62BDA4B5}"/>
+                <a16:creationId xmlns:a16="http://schemas.microsoft.com/office/drawing/2014/main" id="{21E70D7E-5BCA-4BF2-9D4B-F0DFE6B919E0}"/>
               </a:ext>
             </a:extLst>
           </p:cNvPr>
@@ -7377,7 +9417,7 @@
           <p:cNvPr id="30" name="">
             <a:extLst xmlns:a="http://schemas.openxmlformats.org/drawingml/2006/main">
               <a:ext uri="{FF2B5EF4-FFF2-40B4-BE49-F238E27FC236}">
-                <a16:creationId xmlns:a16="http://schemas.microsoft.com/office/drawing/2014/main" id="{A33ADE69-F4ED-40A7-9ED5-127C1B9D996C}"/>
+                <a16:creationId xmlns:a16="http://schemas.microsoft.com/office/drawing/2014/main" id="{BB28389C-1674-4730-B93D-F560758D8575}"/>
               </a:ext>
             </a:extLst>
           </p:cNvPr>
@@ -7410,7 +9450,7 @@
           <p:cNvPr id="31" name="">
             <a:extLst xmlns:a="http://schemas.openxmlformats.org/drawingml/2006/main">
               <a:ext uri="{FF2B5EF4-FFF2-40B4-BE49-F238E27FC236}">
-                <a16:creationId xmlns:a16="http://schemas.microsoft.com/office/drawing/2014/main" id="{A4DFBE1B-80AE-4028-8644-5B42E53925E5}"/>
+                <a16:creationId xmlns:a16="http://schemas.microsoft.com/office/drawing/2014/main" id="{4518C7E2-E62C-40D6-80BF-6A34E8FA713E}"/>
               </a:ext>
             </a:extLst>
           </p:cNvPr>
@@ -7479,7 +9519,7 @@
           <p:cNvPr id="32" name="">
             <a:extLst xmlns:a="http://schemas.openxmlformats.org/drawingml/2006/main">
               <a:ext uri="{FF2B5EF4-FFF2-40B4-BE49-F238E27FC236}">
-                <a16:creationId xmlns:a16="http://schemas.microsoft.com/office/drawing/2014/main" id="{8F114DDF-D231-4675-9012-9C0C20E7E648}"/>
+                <a16:creationId xmlns:a16="http://schemas.microsoft.com/office/drawing/2014/main" id="{15BD0DB9-B284-4D28-B9FC-3470CFBD43E9}"/>
               </a:ext>
             </a:extLst>
           </p:cNvPr>
@@ -7548,7 +9588,7 @@
           <p:cNvPr id="33" name="">
             <a:extLst xmlns:a="http://schemas.openxmlformats.org/drawingml/2006/main">
               <a:ext uri="{FF2B5EF4-FFF2-40B4-BE49-F238E27FC236}">
-                <a16:creationId xmlns:a16="http://schemas.microsoft.com/office/drawing/2014/main" id="{7B8BD32B-2277-40A4-882B-DD10EC1B5038}"/>
+                <a16:creationId xmlns:a16="http://schemas.microsoft.com/office/drawing/2014/main" id="{04AA6EEF-AA38-4BD5-A466-0B4AF6CE2EC6}"/>
               </a:ext>
             </a:extLst>
           </p:cNvPr>
@@ -7617,7 +9657,7 @@
           <p:cNvPr id="34" name="">
             <a:extLst xmlns:a="http://schemas.openxmlformats.org/drawingml/2006/main">
               <a:ext uri="{FF2B5EF4-FFF2-40B4-BE49-F238E27FC236}">
-                <a16:creationId xmlns:a16="http://schemas.microsoft.com/office/drawing/2014/main" id="{A9A91BA0-5EA8-4AE5-9A4C-75EFC432FC52}"/>
+                <a16:creationId xmlns:a16="http://schemas.microsoft.com/office/drawing/2014/main" id="{F54CF264-6DAE-4B7B-92D4-BC3F882698BF}"/>
               </a:ext>
             </a:extLst>
           </p:cNvPr>
@@ -7650,7 +9690,7 @@
           <p:cNvPr id="35" name="">
             <a:extLst xmlns:a="http://schemas.openxmlformats.org/drawingml/2006/main">
               <a:ext uri="{FF2B5EF4-FFF2-40B4-BE49-F238E27FC236}">
-                <a16:creationId xmlns:a16="http://schemas.microsoft.com/office/drawing/2014/main" id="{94F56C94-1473-40CD-B4A9-5259D5E98A4E}"/>
+                <a16:creationId xmlns:a16="http://schemas.microsoft.com/office/drawing/2014/main" id="{60F25D78-C9EB-42F6-AF0E-302428720A8F}"/>
               </a:ext>
             </a:extLst>
           </p:cNvPr>
@@ -7719,7 +9759,7 @@
           <p:cNvPr id="36" name="">
             <a:extLst xmlns:a="http://schemas.openxmlformats.org/drawingml/2006/main">
               <a:ext uri="{FF2B5EF4-FFF2-40B4-BE49-F238E27FC236}">
-                <a16:creationId xmlns:a16="http://schemas.microsoft.com/office/drawing/2014/main" id="{2D7B9C76-F449-4A8C-BFFB-03205C11D92E}"/>
+                <a16:creationId xmlns:a16="http://schemas.microsoft.com/office/drawing/2014/main" id="{FCDA02F7-43AC-494A-B7CB-74415F6DDF2E}"/>
               </a:ext>
             </a:extLst>
           </p:cNvPr>
@@ -7788,7 +9828,7 @@
           <p:cNvPr id="37" name="">
             <a:extLst xmlns:a="http://schemas.openxmlformats.org/drawingml/2006/main">
               <a:ext uri="{FF2B5EF4-FFF2-40B4-BE49-F238E27FC236}">
-                <a16:creationId xmlns:a16="http://schemas.microsoft.com/office/drawing/2014/main" id="{9BFB3FF7-F1DF-48FB-86C5-9F4558398AA7}"/>
+                <a16:creationId xmlns:a16="http://schemas.microsoft.com/office/drawing/2014/main" id="{DAA764BE-D448-4139-81FB-206D602CA939}"/>
               </a:ext>
             </a:extLst>
           </p:cNvPr>
@@ -7821,7 +9861,7 @@
           <p:cNvPr id="38" name="">
             <a:extLst xmlns:a="http://schemas.openxmlformats.org/drawingml/2006/main">
               <a:ext uri="{FF2B5EF4-FFF2-40B4-BE49-F238E27FC236}">
-                <a16:creationId xmlns:a16="http://schemas.microsoft.com/office/drawing/2014/main" id="{8E9432A3-5CCA-4B43-A5EE-909FEC2F6176}"/>
+                <a16:creationId xmlns:a16="http://schemas.microsoft.com/office/drawing/2014/main" id="{DACE15F8-39E8-4452-A7CA-FDA91AD08FB2}"/>
               </a:ext>
             </a:extLst>
           </p:cNvPr>
@@ -7890,7 +9930,7 @@
           <p:cNvPr id="39" name="">
             <a:extLst xmlns:a="http://schemas.openxmlformats.org/drawingml/2006/main">
               <a:ext uri="{FF2B5EF4-FFF2-40B4-BE49-F238E27FC236}">
-                <a16:creationId xmlns:a16="http://schemas.microsoft.com/office/drawing/2014/main" id="{368760C3-5BF2-4C85-9E35-D85B77361116}"/>
+                <a16:creationId xmlns:a16="http://schemas.microsoft.com/office/drawing/2014/main" id="{BFE53AD2-1B6F-4FC7-B899-BDC671E5197E}"/>
               </a:ext>
             </a:extLst>
           </p:cNvPr>
@@ -7959,7 +9999,7 @@
           <p:cNvPr id="40" name="">
             <a:extLst xmlns:a="http://schemas.openxmlformats.org/drawingml/2006/main">
               <a:ext uri="{FF2B5EF4-FFF2-40B4-BE49-F238E27FC236}">
-                <a16:creationId xmlns:a16="http://schemas.microsoft.com/office/drawing/2014/main" id="{02719CED-2195-4ECF-8A37-4C83863C1A1E}"/>
+                <a16:creationId xmlns:a16="http://schemas.microsoft.com/office/drawing/2014/main" id="{A715AA9E-C520-46EC-80E4-CC4D1F7ABF86}"/>
               </a:ext>
             </a:extLst>
           </p:cNvPr>
@@ -7992,7 +10032,7 @@
           <p:cNvPr id="41" name="">
             <a:extLst xmlns:a="http://schemas.openxmlformats.org/drawingml/2006/main">
               <a:ext uri="{FF2B5EF4-FFF2-40B4-BE49-F238E27FC236}">
-                <a16:creationId xmlns:a16="http://schemas.microsoft.com/office/drawing/2014/main" id="{C40479C5-F859-423A-96C5-932620987352}"/>
+                <a16:creationId xmlns:a16="http://schemas.microsoft.com/office/drawing/2014/main" id="{A6C23493-7DB8-44B1-A6FE-4CA70067BF69}"/>
               </a:ext>
             </a:extLst>
           </p:cNvPr>
@@ -8061,7 +10101,7 @@
           <p:cNvPr id="42" name="">
             <a:extLst xmlns:a="http://schemas.openxmlformats.org/drawingml/2006/main">
               <a:ext uri="{FF2B5EF4-FFF2-40B4-BE49-F238E27FC236}">
-                <a16:creationId xmlns:a16="http://schemas.microsoft.com/office/drawing/2014/main" id="{A17FDC35-3818-4574-9C21-6BBE3BD80227}"/>
+                <a16:creationId xmlns:a16="http://schemas.microsoft.com/office/drawing/2014/main" id="{32A019EA-96E4-4B75-832B-7A8015596D2E}"/>
               </a:ext>
             </a:extLst>
           </p:cNvPr>
@@ -8130,7 +10170,7 @@
           <p:cNvPr id="43" name="">
             <a:extLst xmlns:a="http://schemas.openxmlformats.org/drawingml/2006/main">
               <a:ext uri="{FF2B5EF4-FFF2-40B4-BE49-F238E27FC236}">
-                <a16:creationId xmlns:a16="http://schemas.microsoft.com/office/drawing/2014/main" id="{364D7508-E8D9-4CD3-8017-B61B9BF517DF}"/>
+                <a16:creationId xmlns:a16="http://schemas.microsoft.com/office/drawing/2014/main" id="{7F4B080C-6823-4737-ACE2-3C1DD8D9CCD0}"/>
               </a:ext>
             </a:extLst>
           </p:cNvPr>
@@ -8163,7 +10203,7 @@
           <p:cNvPr id="44" name="">
             <a:extLst xmlns:a="http://schemas.openxmlformats.org/drawingml/2006/main">
               <a:ext uri="{FF2B5EF4-FFF2-40B4-BE49-F238E27FC236}">
-                <a16:creationId xmlns:a16="http://schemas.microsoft.com/office/drawing/2014/main" id="{390E9186-B589-4223-B08D-CECB31A7CCFD}"/>
+                <a16:creationId xmlns:a16="http://schemas.microsoft.com/office/drawing/2014/main" id="{0EE9D917-7B0B-48A0-AB1E-91315A09938E}"/>
               </a:ext>
             </a:extLst>
           </p:cNvPr>
@@ -8232,7 +10272,7 @@
           <p:cNvPr id="45" name="">
             <a:extLst xmlns:a="http://schemas.openxmlformats.org/drawingml/2006/main">
               <a:ext uri="{FF2B5EF4-FFF2-40B4-BE49-F238E27FC236}">
-                <a16:creationId xmlns:a16="http://schemas.microsoft.com/office/drawing/2014/main" id="{739A5AC9-1DC4-423C-A252-76FC0CC2E786}"/>
+                <a16:creationId xmlns:a16="http://schemas.microsoft.com/office/drawing/2014/main" id="{2434D01A-73AB-4A3A-8783-4ABC4A8188F3}"/>
               </a:ext>
             </a:extLst>
           </p:cNvPr>
@@ -8301,7 +10341,7 @@
           <p:cNvPr id="46" name="">
             <a:extLst xmlns:a="http://schemas.openxmlformats.org/drawingml/2006/main">
               <a:ext uri="{FF2B5EF4-FFF2-40B4-BE49-F238E27FC236}">
-                <a16:creationId xmlns:a16="http://schemas.microsoft.com/office/drawing/2014/main" id="{C3C07F0F-EAE7-4C84-B163-D33CC0A3B207}"/>
+                <a16:creationId xmlns:a16="http://schemas.microsoft.com/office/drawing/2014/main" id="{78F83772-4001-4913-992B-B95B2D2DAE6D}"/>
               </a:ext>
             </a:extLst>
           </p:cNvPr>
@@ -8334,7 +10374,7 @@
           <p:cNvPr id="47" name="">
             <a:extLst xmlns:a="http://schemas.openxmlformats.org/drawingml/2006/main">
               <a:ext uri="{FF2B5EF4-FFF2-40B4-BE49-F238E27FC236}">
-                <a16:creationId xmlns:a16="http://schemas.microsoft.com/office/drawing/2014/main" id="{D1839DD5-2334-4A78-BE00-B66DD0198DB3}"/>
+                <a16:creationId xmlns:a16="http://schemas.microsoft.com/office/drawing/2014/main" id="{8A744B0E-17ED-43E7-B741-DC267662098D}"/>
               </a:ext>
             </a:extLst>
           </p:cNvPr>
@@ -8401,7 +10441,7 @@
     </p:spTree>
     <p:extLst>
       <p:ext uri="{BB962C8B-B14F-4D97-AF65-F5344CB8AC3E}">
-        <p14:creationId xmlns:p14="http://schemas.microsoft.com/office/powerpoint/2010/main" val="1094494579"/>
+        <p14:creationId xmlns:p14="http://schemas.microsoft.com/office/powerpoint/2010/main" val="1639597314"/>
       </p:ext>
     </p:extLst>
   </p:cSld>
@@ -8432,7 +10472,7 @@
           <p:cNvPr id="9" name="">
             <a:extLst xmlns:a="http://schemas.openxmlformats.org/drawingml/2006/main">
               <a:ext uri="{FF2B5EF4-FFF2-40B4-BE49-F238E27FC236}">
-                <a16:creationId xmlns:a16="http://schemas.microsoft.com/office/drawing/2014/main" id="{89751567-0890-463F-863E-CBAE821E29A8}"/>
+                <a16:creationId xmlns:a16="http://schemas.microsoft.com/office/drawing/2014/main" id="{D2A42BB6-C37F-46F0-BF64-3D7A17D68F34}"/>
               </a:ext>
             </a:extLst>
           </p:cNvPr>
@@ -8463,7 +10503,7 @@
           <p:cNvPr id="2" name="">
             <a:extLst xmlns:a="http://schemas.openxmlformats.org/drawingml/2006/main">
               <a:ext uri="{FF2B5EF4-FFF2-40B4-BE49-F238E27FC236}">
-                <a16:creationId xmlns:a16="http://schemas.microsoft.com/office/drawing/2014/main" id="{976D68FD-1EC1-4CD3-999E-DBA443E981AA}"/>
+                <a16:creationId xmlns:a16="http://schemas.microsoft.com/office/drawing/2014/main" id="{0C8E79AB-D870-440D-8DD7-CE25436C0DBA}"/>
               </a:ext>
             </a:extLst>
           </p:cNvPr>
@@ -8532,7 +10572,7 @@
           <p:cNvPr id="3" name="">
             <a:extLst xmlns:a="http://schemas.openxmlformats.org/drawingml/2006/main">
               <a:ext uri="{FF2B5EF4-FFF2-40B4-BE49-F238E27FC236}">
-                <a16:creationId xmlns:a16="http://schemas.microsoft.com/office/drawing/2014/main" id="{ECC10185-D525-4981-B242-EC37A28A3BF5}"/>
+                <a16:creationId xmlns:a16="http://schemas.microsoft.com/office/drawing/2014/main" id="{AF1F00E5-3E8F-4D2B-BB85-D3998DBEF03D}"/>
               </a:ext>
             </a:extLst>
           </p:cNvPr>
@@ -8601,7 +10641,7 @@
           <p:cNvPr id="4" name="">
             <a:extLst xmlns:a="http://schemas.openxmlformats.org/drawingml/2006/main">
               <a:ext uri="{FF2B5EF4-FFF2-40B4-BE49-F238E27FC236}">
-                <a16:creationId xmlns:a16="http://schemas.microsoft.com/office/drawing/2014/main" id="{E28A37A4-93EA-4100-A0F1-C403E9AF7DE4}"/>
+                <a16:creationId xmlns:a16="http://schemas.microsoft.com/office/drawing/2014/main" id="{259756C0-D19D-41DB-90A7-08FB605CF6D0}"/>
               </a:ext>
             </a:extLst>
           </p:cNvPr>
@@ -8632,7 +10672,7 @@
           <p:cNvPr id="5" name="">
             <a:extLst xmlns:a="http://schemas.openxmlformats.org/drawingml/2006/main">
               <a:ext uri="{FF2B5EF4-FFF2-40B4-BE49-F238E27FC236}">
-                <a16:creationId xmlns:a16="http://schemas.microsoft.com/office/drawing/2014/main" id="{647BAFD6-CF47-4C72-BD80-3E4E7DBE6701}"/>
+                <a16:creationId xmlns:a16="http://schemas.microsoft.com/office/drawing/2014/main" id="{0AE2D485-5326-48C2-8D03-3ECC89CAAA4A}"/>
               </a:ext>
             </a:extLst>
           </p:cNvPr>
@@ -8701,7 +10741,7 @@
           <p:cNvPr id="6" name="">
             <a:extLst xmlns:a="http://schemas.openxmlformats.org/drawingml/2006/main">
               <a:ext uri="{FF2B5EF4-FFF2-40B4-BE49-F238E27FC236}">
-                <a16:creationId xmlns:a16="http://schemas.microsoft.com/office/drawing/2014/main" id="{636783A5-9FEA-4BA2-B39C-00EB6E31EEA2}"/>
+                <a16:creationId xmlns:a16="http://schemas.microsoft.com/office/drawing/2014/main" id="{E63C07E9-DB2C-4C34-8660-BCDF6C2BEBD3}"/>
               </a:ext>
             </a:extLst>
           </p:cNvPr>
@@ -8770,7 +10810,7 @@
           <p:cNvPr id="7" name="">
             <a:extLst xmlns:a="http://schemas.openxmlformats.org/drawingml/2006/main">
               <a:ext uri="{FF2B5EF4-FFF2-40B4-BE49-F238E27FC236}">
-                <a16:creationId xmlns:a16="http://schemas.microsoft.com/office/drawing/2014/main" id="{3BB16640-7D51-4BAD-9A71-46D7BB80445A}"/>
+                <a16:creationId xmlns:a16="http://schemas.microsoft.com/office/drawing/2014/main" id="{7CECE7D4-3C77-452B-B02D-CEA6CA9BD933}"/>
               </a:ext>
             </a:extLst>
           </p:cNvPr>
@@ -8780,7 +10820,7 @@
           <p:nvPr/>
         </p:nvPicPr>
         <p:blipFill>
-          <a:blip xmlns:r="http://schemas.openxmlformats.org/officeDocument/2006/relationships" xmlns:a="http://schemas.openxmlformats.org/drawingml/2006/main" r:embed="Ra6bdbd3c3c5d4d1a"/>
+          <a:blip xmlns:r="http://schemas.openxmlformats.org/officeDocument/2006/relationships" xmlns:a="http://schemas.openxmlformats.org/drawingml/2006/main" r:embed="R2d5b9e4373d74ee5"/>
           <a:stretch xmlns:a="http://schemas.openxmlformats.org/drawingml/2006/main"/>
         </p:blipFill>
         <p:spPr>
@@ -8798,7 +10838,7 @@
           <p:cNvPr id="8" name="">
             <a:extLst xmlns:a="http://schemas.openxmlformats.org/drawingml/2006/main">
               <a:ext uri="{FF2B5EF4-FFF2-40B4-BE49-F238E27FC236}">
-                <a16:creationId xmlns:a16="http://schemas.microsoft.com/office/drawing/2014/main" id="{19784968-5095-4491-B2FD-3791483B1E98}"/>
+                <a16:creationId xmlns:a16="http://schemas.microsoft.com/office/drawing/2014/main" id="{FF153517-9609-4EDF-94C8-CC979897F581}"/>
               </a:ext>
             </a:extLst>
           </p:cNvPr>
@@ -8865,7 +10905,7 @@
     </p:spTree>
     <p:extLst>
       <p:ext uri="{BB962C8B-B14F-4D97-AF65-F5344CB8AC3E}">
-        <p14:creationId xmlns:p14="http://schemas.microsoft.com/office/powerpoint/2010/main" val="141575696"/>
+        <p14:creationId xmlns:p14="http://schemas.microsoft.com/office/powerpoint/2010/main" val="275768541"/>
       </p:ext>
     </p:extLst>
   </p:cSld>
@@ -8896,7 +10936,7 @@
           <p:cNvPr id="9" name="">
             <a:extLst xmlns:a="http://schemas.openxmlformats.org/drawingml/2006/main">
               <a:ext uri="{FF2B5EF4-FFF2-40B4-BE49-F238E27FC236}">
-                <a16:creationId xmlns:a16="http://schemas.microsoft.com/office/drawing/2014/main" id="{8257DBF2-FB8A-4511-BE25-F2181C3E6B44}"/>
+                <a16:creationId xmlns:a16="http://schemas.microsoft.com/office/drawing/2014/main" id="{F0BD014F-8CF6-4670-AC6F-57BEC25C409A}"/>
               </a:ext>
             </a:extLst>
           </p:cNvPr>
@@ -8927,7 +10967,7 @@
           <p:cNvPr id="2" name="">
             <a:extLst xmlns:a="http://schemas.openxmlformats.org/drawingml/2006/main">
               <a:ext uri="{FF2B5EF4-FFF2-40B4-BE49-F238E27FC236}">
-                <a16:creationId xmlns:a16="http://schemas.microsoft.com/office/drawing/2014/main" id="{9E9E2156-2A1F-492A-AA26-4ACBE48799D0}"/>
+                <a16:creationId xmlns:a16="http://schemas.microsoft.com/office/drawing/2014/main" id="{54760F61-F332-4EE8-B44F-7EDA302F1514}"/>
               </a:ext>
             </a:extLst>
           </p:cNvPr>
@@ -8996,7 +11036,7 @@
           <p:cNvPr id="3" name="">
             <a:extLst xmlns:a="http://schemas.openxmlformats.org/drawingml/2006/main">
               <a:ext uri="{FF2B5EF4-FFF2-40B4-BE49-F238E27FC236}">
-                <a16:creationId xmlns:a16="http://schemas.microsoft.com/office/drawing/2014/main" id="{EE3E7F0A-9BC7-40FD-91C0-9B8687439E9F}"/>
+                <a16:creationId xmlns:a16="http://schemas.microsoft.com/office/drawing/2014/main" id="{10FBDC6E-49EE-4E74-80B0-FD53F3C15818}"/>
               </a:ext>
             </a:extLst>
           </p:cNvPr>
@@ -9065,7 +11105,7 @@
           <p:cNvPr id="4" name="">
             <a:extLst xmlns:a="http://schemas.openxmlformats.org/drawingml/2006/main">
               <a:ext uri="{FF2B5EF4-FFF2-40B4-BE49-F238E27FC236}">
-                <a16:creationId xmlns:a16="http://schemas.microsoft.com/office/drawing/2014/main" id="{CCA18948-D934-4B3F-B167-704CAA3539E2}"/>
+                <a16:creationId xmlns:a16="http://schemas.microsoft.com/office/drawing/2014/main" id="{397FCA6C-4839-4939-899E-2B85CD5BB1CB}"/>
               </a:ext>
             </a:extLst>
           </p:cNvPr>
@@ -9096,7 +11136,7 @@
           <p:cNvPr id="5" name="">
             <a:extLst xmlns:a="http://schemas.openxmlformats.org/drawingml/2006/main">
               <a:ext uri="{FF2B5EF4-FFF2-40B4-BE49-F238E27FC236}">
-                <a16:creationId xmlns:a16="http://schemas.microsoft.com/office/drawing/2014/main" id="{2902ED35-6C57-4498-9F84-8F74C8F8657A}"/>
+                <a16:creationId xmlns:a16="http://schemas.microsoft.com/office/drawing/2014/main" id="{04F21264-DEA1-4627-956A-9313D16CD3EA}"/>
               </a:ext>
             </a:extLst>
           </p:cNvPr>
@@ -9165,7 +11205,7 @@
           <p:cNvPr id="6" name="">
             <a:extLst xmlns:a="http://schemas.openxmlformats.org/drawingml/2006/main">
               <a:ext uri="{FF2B5EF4-FFF2-40B4-BE49-F238E27FC236}">
-                <a16:creationId xmlns:a16="http://schemas.microsoft.com/office/drawing/2014/main" id="{F8CC70BE-D597-44B9-8A89-06D69553AF3B}"/>
+                <a16:creationId xmlns:a16="http://schemas.microsoft.com/office/drawing/2014/main" id="{B72E7BF5-F294-419E-870F-DEC7004D751D}"/>
               </a:ext>
             </a:extLst>
           </p:cNvPr>
@@ -9234,7 +11274,7 @@
           <p:cNvPr id="7" name="">
             <a:extLst xmlns:a="http://schemas.openxmlformats.org/drawingml/2006/main">
               <a:ext uri="{FF2B5EF4-FFF2-40B4-BE49-F238E27FC236}">
-                <a16:creationId xmlns:a16="http://schemas.microsoft.com/office/drawing/2014/main" id="{0200609F-5E47-4E3F-BBCF-AA2290B87BF3}"/>
+                <a16:creationId xmlns:a16="http://schemas.microsoft.com/office/drawing/2014/main" id="{977E8E97-3DDF-4E18-B515-19A52A2B1306}"/>
               </a:ext>
             </a:extLst>
           </p:cNvPr>
@@ -9244,7 +11284,7 @@
           <p:nvPr/>
         </p:nvPicPr>
         <p:blipFill>
-          <a:blip xmlns:r="http://schemas.openxmlformats.org/officeDocument/2006/relationships" xmlns:a="http://schemas.openxmlformats.org/drawingml/2006/main" r:embed="Ra219be0ba5ed4553"/>
+          <a:blip xmlns:r="http://schemas.openxmlformats.org/officeDocument/2006/relationships" xmlns:a="http://schemas.openxmlformats.org/drawingml/2006/main" r:embed="R65763df475254aa5"/>
           <a:stretch xmlns:a="http://schemas.openxmlformats.org/drawingml/2006/main"/>
         </p:blipFill>
         <p:spPr>
@@ -9262,7 +11302,7 @@
           <p:cNvPr id="8" name="">
             <a:extLst xmlns:a="http://schemas.openxmlformats.org/drawingml/2006/main">
               <a:ext uri="{FF2B5EF4-FFF2-40B4-BE49-F238E27FC236}">
-                <a16:creationId xmlns:a16="http://schemas.microsoft.com/office/drawing/2014/main" id="{C475E714-8D45-494B-A8EF-8A1CF7F2AA42}"/>
+                <a16:creationId xmlns:a16="http://schemas.microsoft.com/office/drawing/2014/main" id="{61557981-157A-4E90-9219-FD93A7C5A413}"/>
               </a:ext>
             </a:extLst>
           </p:cNvPr>
@@ -9329,7 +11369,7 @@
     </p:spTree>
     <p:extLst>
       <p:ext uri="{BB962C8B-B14F-4D97-AF65-F5344CB8AC3E}">
-        <p14:creationId xmlns:p14="http://schemas.microsoft.com/office/powerpoint/2010/main" val="1548842025"/>
+        <p14:creationId xmlns:p14="http://schemas.microsoft.com/office/powerpoint/2010/main" val="790015421"/>
       </p:ext>
     </p:extLst>
   </p:cSld>
@@ -9360,7 +11400,7 @@
           <p:cNvPr id="9" name="">
             <a:extLst xmlns:a="http://schemas.openxmlformats.org/drawingml/2006/main">
               <a:ext uri="{FF2B5EF4-FFF2-40B4-BE49-F238E27FC236}">
-                <a16:creationId xmlns:a16="http://schemas.microsoft.com/office/drawing/2014/main" id="{393A7951-E79C-477D-A3D8-3262F508A055}"/>
+                <a16:creationId xmlns:a16="http://schemas.microsoft.com/office/drawing/2014/main" id="{34018B1A-45C9-41BD-BF33-2496B5DE0728}"/>
               </a:ext>
             </a:extLst>
           </p:cNvPr>
@@ -9391,7 +11431,7 @@
           <p:cNvPr id="2" name="">
             <a:extLst xmlns:a="http://schemas.openxmlformats.org/drawingml/2006/main">
               <a:ext uri="{FF2B5EF4-FFF2-40B4-BE49-F238E27FC236}">
-                <a16:creationId xmlns:a16="http://schemas.microsoft.com/office/drawing/2014/main" id="{08AB2AFA-2B58-4858-A0B7-DE6ED4688D9F}"/>
+                <a16:creationId xmlns:a16="http://schemas.microsoft.com/office/drawing/2014/main" id="{EB427C70-52C5-4D5C-8578-AC49DB049A76}"/>
               </a:ext>
             </a:extLst>
           </p:cNvPr>
@@ -9460,7 +11500,7 @@
           <p:cNvPr id="3" name="">
             <a:extLst xmlns:a="http://schemas.openxmlformats.org/drawingml/2006/main">
               <a:ext uri="{FF2B5EF4-FFF2-40B4-BE49-F238E27FC236}">
-                <a16:creationId xmlns:a16="http://schemas.microsoft.com/office/drawing/2014/main" id="{3F436B15-7FFD-41FF-A5F6-EBC6F524D253}"/>
+                <a16:creationId xmlns:a16="http://schemas.microsoft.com/office/drawing/2014/main" id="{5AE19195-B7EE-4998-983C-50A227F1F91A}"/>
               </a:ext>
             </a:extLst>
           </p:cNvPr>
@@ -9529,7 +11569,7 @@
           <p:cNvPr id="4" name="">
             <a:extLst xmlns:a="http://schemas.openxmlformats.org/drawingml/2006/main">
               <a:ext uri="{FF2B5EF4-FFF2-40B4-BE49-F238E27FC236}">
-                <a16:creationId xmlns:a16="http://schemas.microsoft.com/office/drawing/2014/main" id="{0A9B1801-BE5E-4257-8C8C-4499A4DCD24F}"/>
+                <a16:creationId xmlns:a16="http://schemas.microsoft.com/office/drawing/2014/main" id="{8A5D0D0A-74CB-43AE-9B1E-DA1BB36FAB08}"/>
               </a:ext>
             </a:extLst>
           </p:cNvPr>
@@ -9560,7 +11600,7 @@
           <p:cNvPr id="5" name="">
             <a:extLst xmlns:a="http://schemas.openxmlformats.org/drawingml/2006/main">
               <a:ext uri="{FF2B5EF4-FFF2-40B4-BE49-F238E27FC236}">
-                <a16:creationId xmlns:a16="http://schemas.microsoft.com/office/drawing/2014/main" id="{CF21FE5E-4681-438C-B236-E4F5657AB5A0}"/>
+                <a16:creationId xmlns:a16="http://schemas.microsoft.com/office/drawing/2014/main" id="{8D70E8C6-B68D-4506-A02D-37D48F7BE14D}"/>
               </a:ext>
             </a:extLst>
           </p:cNvPr>
@@ -9629,7 +11669,7 @@
           <p:cNvPr id="6" name="">
             <a:extLst xmlns:a="http://schemas.openxmlformats.org/drawingml/2006/main">
               <a:ext uri="{FF2B5EF4-FFF2-40B4-BE49-F238E27FC236}">
-                <a16:creationId xmlns:a16="http://schemas.microsoft.com/office/drawing/2014/main" id="{5881B9BC-8897-43B4-87D7-BF8BF883AD25}"/>
+                <a16:creationId xmlns:a16="http://schemas.microsoft.com/office/drawing/2014/main" id="{3F2D46A2-76A5-43ED-B555-AAE4127AFDDF}"/>
               </a:ext>
             </a:extLst>
           </p:cNvPr>
@@ -9698,7 +11738,7 @@
           <p:cNvPr id="7" name="">
             <a:extLst xmlns:a="http://schemas.openxmlformats.org/drawingml/2006/main">
               <a:ext uri="{FF2B5EF4-FFF2-40B4-BE49-F238E27FC236}">
-                <a16:creationId xmlns:a16="http://schemas.microsoft.com/office/drawing/2014/main" id="{F8479B05-ABB0-4AD8-A5CF-DEAF5543A4A7}"/>
+                <a16:creationId xmlns:a16="http://schemas.microsoft.com/office/drawing/2014/main" id="{4C12F428-2247-4CB1-96BC-3CB2988FAF9A}"/>
               </a:ext>
             </a:extLst>
           </p:cNvPr>
@@ -9708,7 +11748,7 @@
           <p:nvPr/>
         </p:nvPicPr>
         <p:blipFill>
-          <a:blip xmlns:r="http://schemas.openxmlformats.org/officeDocument/2006/relationships" xmlns:a="http://schemas.openxmlformats.org/drawingml/2006/main" r:embed="Rb27ddb7bc9674a1a"/>
+          <a:blip xmlns:r="http://schemas.openxmlformats.org/officeDocument/2006/relationships" xmlns:a="http://schemas.openxmlformats.org/drawingml/2006/main" r:embed="Rbe281fb26eda4858"/>
           <a:stretch xmlns:a="http://schemas.openxmlformats.org/drawingml/2006/main"/>
         </p:blipFill>
         <p:spPr>
@@ -9726,7 +11766,7 @@
           <p:cNvPr id="8" name="">
             <a:extLst xmlns:a="http://schemas.openxmlformats.org/drawingml/2006/main">
               <a:ext uri="{FF2B5EF4-FFF2-40B4-BE49-F238E27FC236}">
-                <a16:creationId xmlns:a16="http://schemas.microsoft.com/office/drawing/2014/main" id="{5364A293-3191-41CC-9D46-5465FD96C88B}"/>
+                <a16:creationId xmlns:a16="http://schemas.microsoft.com/office/drawing/2014/main" id="{8D3E43A8-8212-4F4D-A3A4-20DE70107FBB}"/>
               </a:ext>
             </a:extLst>
           </p:cNvPr>
@@ -9793,7 +11833,7 @@
     </p:spTree>
     <p:extLst>
       <p:ext uri="{BB962C8B-B14F-4D97-AF65-F5344CB8AC3E}">
-        <p14:creationId xmlns:p14="http://schemas.microsoft.com/office/powerpoint/2010/main" val="1378873355"/>
+        <p14:creationId xmlns:p14="http://schemas.microsoft.com/office/powerpoint/2010/main" val="13038207"/>
       </p:ext>
     </p:extLst>
   </p:cSld>
@@ -9824,7 +11864,7 @@
           <p:cNvPr id="32" name="">
             <a:extLst xmlns:a="http://schemas.openxmlformats.org/drawingml/2006/main">
               <a:ext uri="{FF2B5EF4-FFF2-40B4-BE49-F238E27FC236}">
-                <a16:creationId xmlns:a16="http://schemas.microsoft.com/office/drawing/2014/main" id="{D8F8516C-59DD-484D-8C80-9D5D8EAFB74B}"/>
+                <a16:creationId xmlns:a16="http://schemas.microsoft.com/office/drawing/2014/main" id="{E380AB32-117B-49A3-A4B1-A1DF904D4DBE}"/>
               </a:ext>
             </a:extLst>
           </p:cNvPr>
@@ -9855,7 +11895,7 @@
           <p:cNvPr id="2" name="">
             <a:extLst xmlns:a="http://schemas.openxmlformats.org/drawingml/2006/main">
               <a:ext uri="{FF2B5EF4-FFF2-40B4-BE49-F238E27FC236}">
-                <a16:creationId xmlns:a16="http://schemas.microsoft.com/office/drawing/2014/main" id="{A9BFF3A3-BC72-4037-ADBA-6C13FBC7865D}"/>
+                <a16:creationId xmlns:a16="http://schemas.microsoft.com/office/drawing/2014/main" id="{89E7F98B-3978-4A39-BED1-AF94A41F853E}"/>
               </a:ext>
             </a:extLst>
           </p:cNvPr>
@@ -9924,7 +11964,7 @@
           <p:cNvPr id="3" name="">
             <a:extLst xmlns:a="http://schemas.openxmlformats.org/drawingml/2006/main">
               <a:ext uri="{FF2B5EF4-FFF2-40B4-BE49-F238E27FC236}">
-                <a16:creationId xmlns:a16="http://schemas.microsoft.com/office/drawing/2014/main" id="{A3CA679A-050F-460D-8F30-E5834FA1430C}"/>
+                <a16:creationId xmlns:a16="http://schemas.microsoft.com/office/drawing/2014/main" id="{192261F7-522C-47F1-A345-FE60B5462B78}"/>
               </a:ext>
             </a:extLst>
           </p:cNvPr>
@@ -9993,7 +12033,7 @@
           <p:cNvPr id="4" name="">
             <a:extLst xmlns:a="http://schemas.openxmlformats.org/drawingml/2006/main">
               <a:ext uri="{FF2B5EF4-FFF2-40B4-BE49-F238E27FC236}">
-                <a16:creationId xmlns:a16="http://schemas.microsoft.com/office/drawing/2014/main" id="{F05588FA-ADB9-4783-AEDF-E8A9BDE5125B}"/>
+                <a16:creationId xmlns:a16="http://schemas.microsoft.com/office/drawing/2014/main" id="{B6B52286-0452-4DCF-ACD8-D1812BA89F9C}"/>
               </a:ext>
             </a:extLst>
           </p:cNvPr>
@@ -10024,7 +12064,7 @@
           <p:cNvPr id="5" name="">
             <a:extLst xmlns:a="http://schemas.openxmlformats.org/drawingml/2006/main">
               <a:ext uri="{FF2B5EF4-FFF2-40B4-BE49-F238E27FC236}">
-                <a16:creationId xmlns:a16="http://schemas.microsoft.com/office/drawing/2014/main" id="{78676A12-5417-4ECB-BCD2-15515C7E84BB}"/>
+                <a16:creationId xmlns:a16="http://schemas.microsoft.com/office/drawing/2014/main" id="{93F0D191-52F6-4CA9-8CBE-ED1139473527}"/>
               </a:ext>
             </a:extLst>
           </p:cNvPr>
@@ -10093,7 +12133,7 @@
           <p:cNvPr id="6" name="">
             <a:extLst xmlns:a="http://schemas.openxmlformats.org/drawingml/2006/main">
               <a:ext uri="{FF2B5EF4-FFF2-40B4-BE49-F238E27FC236}">
-                <a16:creationId xmlns:a16="http://schemas.microsoft.com/office/drawing/2014/main" id="{37A112AF-AFC2-485D-92D9-9BEB05B18955}"/>
+                <a16:creationId xmlns:a16="http://schemas.microsoft.com/office/drawing/2014/main" id="{08E574FA-ACF5-4557-B570-08EC13D096B2}"/>
               </a:ext>
             </a:extLst>
           </p:cNvPr>
@@ -10162,7 +12202,7 @@
           <p:cNvPr id="7" name="">
             <a:extLst xmlns:a="http://schemas.openxmlformats.org/drawingml/2006/main">
               <a:ext uri="{FF2B5EF4-FFF2-40B4-BE49-F238E27FC236}">
-                <a16:creationId xmlns:a16="http://schemas.microsoft.com/office/drawing/2014/main" id="{37B5EB49-0ABE-484E-8BAA-59CAA91C9B0C}"/>
+                <a16:creationId xmlns:a16="http://schemas.microsoft.com/office/drawing/2014/main" id="{946767FA-EE98-4B09-8E07-DCFFA8416FE3}"/>
               </a:ext>
             </a:extLst>
           </p:cNvPr>
@@ -10193,7 +12233,7 @@
           <p:cNvPr id="8" name="">
             <a:extLst xmlns:a="http://schemas.openxmlformats.org/drawingml/2006/main">
               <a:ext uri="{FF2B5EF4-FFF2-40B4-BE49-F238E27FC236}">
-                <a16:creationId xmlns:a16="http://schemas.microsoft.com/office/drawing/2014/main" id="{7A2FF16E-E2ED-4486-A6E9-3C85870EB15D}"/>
+                <a16:creationId xmlns:a16="http://schemas.microsoft.com/office/drawing/2014/main" id="{B4BED269-C9E1-43FC-B5C3-19004629E961}"/>
               </a:ext>
             </a:extLst>
           </p:cNvPr>
@@ -10262,7 +12302,7 @@
           <p:cNvPr id="9" name="">
             <a:extLst xmlns:a="http://schemas.openxmlformats.org/drawingml/2006/main">
               <a:ext uri="{FF2B5EF4-FFF2-40B4-BE49-F238E27FC236}">
-                <a16:creationId xmlns:a16="http://schemas.microsoft.com/office/drawing/2014/main" id="{D35C3352-A597-4E19-8762-E01AC8DC5B7A}"/>
+                <a16:creationId xmlns:a16="http://schemas.microsoft.com/office/drawing/2014/main" id="{182451DE-FE9C-4C06-B432-4BA540481D9B}"/>
               </a:ext>
             </a:extLst>
           </p:cNvPr>
@@ -10295,7 +12335,7 @@
           <p:cNvPr id="10" name="">
             <a:extLst xmlns:a="http://schemas.openxmlformats.org/drawingml/2006/main">
               <a:ext uri="{FF2B5EF4-FFF2-40B4-BE49-F238E27FC236}">
-                <a16:creationId xmlns:a16="http://schemas.microsoft.com/office/drawing/2014/main" id="{820A8E11-F936-4376-A2BD-87341AAAAF8B}"/>
+                <a16:creationId xmlns:a16="http://schemas.microsoft.com/office/drawing/2014/main" id="{CC8F9510-CEE3-4DE0-A574-2E57D662F192}"/>
               </a:ext>
             </a:extLst>
           </p:cNvPr>
@@ -10364,7 +12404,7 @@
           <p:cNvPr id="11" name="">
             <a:extLst xmlns:a="http://schemas.openxmlformats.org/drawingml/2006/main">
               <a:ext uri="{FF2B5EF4-FFF2-40B4-BE49-F238E27FC236}">
-                <a16:creationId xmlns:a16="http://schemas.microsoft.com/office/drawing/2014/main" id="{462CE301-3E5D-4F47-AA25-C8002CD06294}"/>
+                <a16:creationId xmlns:a16="http://schemas.microsoft.com/office/drawing/2014/main" id="{3D21BC95-4B1C-4859-80E5-E8F883607165}"/>
               </a:ext>
             </a:extLst>
           </p:cNvPr>
@@ -10433,7 +12473,7 @@
           <p:cNvPr id="12" name="">
             <a:extLst xmlns:a="http://schemas.openxmlformats.org/drawingml/2006/main">
               <a:ext uri="{FF2B5EF4-FFF2-40B4-BE49-F238E27FC236}">
-                <a16:creationId xmlns:a16="http://schemas.microsoft.com/office/drawing/2014/main" id="{8B5F72D1-3414-4F48-88B7-B59F00E282E9}"/>
+                <a16:creationId xmlns:a16="http://schemas.microsoft.com/office/drawing/2014/main" id="{D950462E-F485-4977-9C59-3F80C51FBE3D}"/>
               </a:ext>
             </a:extLst>
           </p:cNvPr>
@@ -10464,7 +12504,7 @@
           <p:cNvPr id="13" name="">
             <a:extLst xmlns:a="http://schemas.openxmlformats.org/drawingml/2006/main">
               <a:ext uri="{FF2B5EF4-FFF2-40B4-BE49-F238E27FC236}">
-                <a16:creationId xmlns:a16="http://schemas.microsoft.com/office/drawing/2014/main" id="{35FBCFB7-034B-4250-8F14-781D70CE6287}"/>
+                <a16:creationId xmlns:a16="http://schemas.microsoft.com/office/drawing/2014/main" id="{1ABC9905-1B9C-4225-B1D1-DF6992D54167}"/>
               </a:ext>
             </a:extLst>
           </p:cNvPr>
@@ -10533,7 +12573,7 @@
           <p:cNvPr id="14" name="">
             <a:extLst xmlns:a="http://schemas.openxmlformats.org/drawingml/2006/main">
               <a:ext uri="{FF2B5EF4-FFF2-40B4-BE49-F238E27FC236}">
-                <a16:creationId xmlns:a16="http://schemas.microsoft.com/office/drawing/2014/main" id="{756C0322-B156-4FB9-AF34-625A90AEFD7B}"/>
+                <a16:creationId xmlns:a16="http://schemas.microsoft.com/office/drawing/2014/main" id="{6A503A9D-9CBB-4D54-8F0A-18854D0D6C8C}"/>
               </a:ext>
             </a:extLst>
           </p:cNvPr>
@@ -10566,7 +12606,7 @@
           <p:cNvPr id="15" name="">
             <a:extLst xmlns:a="http://schemas.openxmlformats.org/drawingml/2006/main">
               <a:ext uri="{FF2B5EF4-FFF2-40B4-BE49-F238E27FC236}">
-                <a16:creationId xmlns:a16="http://schemas.microsoft.com/office/drawing/2014/main" id="{542451D5-3821-448E-939D-6338BE6E58F3}"/>
+                <a16:creationId xmlns:a16="http://schemas.microsoft.com/office/drawing/2014/main" id="{AC9C311F-307F-4B40-BFC2-72C827455486}"/>
               </a:ext>
             </a:extLst>
           </p:cNvPr>
@@ -10635,7 +12675,7 @@
           <p:cNvPr id="16" name="">
             <a:extLst xmlns:a="http://schemas.openxmlformats.org/drawingml/2006/main">
               <a:ext uri="{FF2B5EF4-FFF2-40B4-BE49-F238E27FC236}">
-                <a16:creationId xmlns:a16="http://schemas.microsoft.com/office/drawing/2014/main" id="{BE91F9BF-8355-4ED5-9A45-EBED2F97F23C}"/>
+                <a16:creationId xmlns:a16="http://schemas.microsoft.com/office/drawing/2014/main" id="{38D0919A-FA9E-41BA-843F-24FAEAF7C3BF}"/>
               </a:ext>
             </a:extLst>
           </p:cNvPr>
@@ -10704,7 +12744,7 @@
           <p:cNvPr id="17" name="">
             <a:extLst xmlns:a="http://schemas.openxmlformats.org/drawingml/2006/main">
               <a:ext uri="{FF2B5EF4-FFF2-40B4-BE49-F238E27FC236}">
-                <a16:creationId xmlns:a16="http://schemas.microsoft.com/office/drawing/2014/main" id="{CCA245EF-E1A6-4B2F-ABFA-D551DEAB52D2}"/>
+                <a16:creationId xmlns:a16="http://schemas.microsoft.com/office/drawing/2014/main" id="{CF1404FB-51BF-40C6-A664-7F3F05835A6F}"/>
               </a:ext>
             </a:extLst>
           </p:cNvPr>
@@ -10735,7 +12775,7 @@
           <p:cNvPr id="18" name="">
             <a:extLst xmlns:a="http://schemas.openxmlformats.org/drawingml/2006/main">
               <a:ext uri="{FF2B5EF4-FFF2-40B4-BE49-F238E27FC236}">
-                <a16:creationId xmlns:a16="http://schemas.microsoft.com/office/drawing/2014/main" id="{C53BDE05-8792-44A6-BF32-607925627CE3}"/>
+                <a16:creationId xmlns:a16="http://schemas.microsoft.com/office/drawing/2014/main" id="{1E0BE5AF-F103-4564-99FC-CB2A529AC69A}"/>
               </a:ext>
             </a:extLst>
           </p:cNvPr>
@@ -10804,7 +12844,7 @@
           <p:cNvPr id="19" name="">
             <a:extLst xmlns:a="http://schemas.openxmlformats.org/drawingml/2006/main">
               <a:ext uri="{FF2B5EF4-FFF2-40B4-BE49-F238E27FC236}">
-                <a16:creationId xmlns:a16="http://schemas.microsoft.com/office/drawing/2014/main" id="{E815A3DA-C9BD-4667-A535-68CA9F75A603}"/>
+                <a16:creationId xmlns:a16="http://schemas.microsoft.com/office/drawing/2014/main" id="{C57B609D-AF7A-4F2B-8C2C-E289F3B24AF7}"/>
               </a:ext>
             </a:extLst>
           </p:cNvPr>
@@ -10837,7 +12877,7 @@
           <p:cNvPr id="20" name="">
             <a:extLst xmlns:a="http://schemas.openxmlformats.org/drawingml/2006/main">
               <a:ext uri="{FF2B5EF4-FFF2-40B4-BE49-F238E27FC236}">
-                <a16:creationId xmlns:a16="http://schemas.microsoft.com/office/drawing/2014/main" id="{0F500D23-B999-4210-89ED-A8AC173988D7}"/>
+                <a16:creationId xmlns:a16="http://schemas.microsoft.com/office/drawing/2014/main" id="{C39A0918-DFF8-4323-BB48-EFE0187F8F59}"/>
               </a:ext>
             </a:extLst>
           </p:cNvPr>
@@ -10906,7 +12946,7 @@
           <p:cNvPr id="21" name="">
             <a:extLst xmlns:a="http://schemas.openxmlformats.org/drawingml/2006/main">
               <a:ext uri="{FF2B5EF4-FFF2-40B4-BE49-F238E27FC236}">
-                <a16:creationId xmlns:a16="http://schemas.microsoft.com/office/drawing/2014/main" id="{8B0E2F21-A104-4EE1-A7E7-022E8FDA00F6}"/>
+                <a16:creationId xmlns:a16="http://schemas.microsoft.com/office/drawing/2014/main" id="{1F1DFD93-770D-4AC4-91FE-C1789B845330}"/>
               </a:ext>
             </a:extLst>
           </p:cNvPr>
@@ -10975,7 +13015,7 @@
           <p:cNvPr id="22" name="">
             <a:extLst xmlns:a="http://schemas.openxmlformats.org/drawingml/2006/main">
               <a:ext uri="{FF2B5EF4-FFF2-40B4-BE49-F238E27FC236}">
-                <a16:creationId xmlns:a16="http://schemas.microsoft.com/office/drawing/2014/main" id="{B33E01BC-6ED1-420D-85B3-77975CAA41D1}"/>
+                <a16:creationId xmlns:a16="http://schemas.microsoft.com/office/drawing/2014/main" id="{73FC665C-ABCF-48A1-9F83-B3A7189212C3}"/>
               </a:ext>
             </a:extLst>
           </p:cNvPr>
@@ -11006,7 +13046,7 @@
           <p:cNvPr id="23" name="">
             <a:extLst xmlns:a="http://schemas.openxmlformats.org/drawingml/2006/main">
               <a:ext uri="{FF2B5EF4-FFF2-40B4-BE49-F238E27FC236}">
-                <a16:creationId xmlns:a16="http://schemas.microsoft.com/office/drawing/2014/main" id="{63775283-E050-41DA-825D-535F14038403}"/>
+                <a16:creationId xmlns:a16="http://schemas.microsoft.com/office/drawing/2014/main" id="{13E3ECBD-AABD-4B86-B268-69441E62E4CB}"/>
               </a:ext>
             </a:extLst>
           </p:cNvPr>
@@ -11075,7 +13115,7 @@
           <p:cNvPr id="24" name="">
             <a:extLst xmlns:a="http://schemas.openxmlformats.org/drawingml/2006/main">
               <a:ext uri="{FF2B5EF4-FFF2-40B4-BE49-F238E27FC236}">
-                <a16:creationId xmlns:a16="http://schemas.microsoft.com/office/drawing/2014/main" id="{BFF06B32-CC0B-4CF6-AA4A-47602992AA85}"/>
+                <a16:creationId xmlns:a16="http://schemas.microsoft.com/office/drawing/2014/main" id="{B1807897-9FC1-4F8C-8738-7389873DB965}"/>
               </a:ext>
             </a:extLst>
           </p:cNvPr>
@@ -11108,7 +13148,7 @@
           <p:cNvPr id="25" name="">
             <a:extLst xmlns:a="http://schemas.openxmlformats.org/drawingml/2006/main">
               <a:ext uri="{FF2B5EF4-FFF2-40B4-BE49-F238E27FC236}">
-                <a16:creationId xmlns:a16="http://schemas.microsoft.com/office/drawing/2014/main" id="{D996A93D-AE35-4EB5-BBD6-59C2E130D9AB}"/>
+                <a16:creationId xmlns:a16="http://schemas.microsoft.com/office/drawing/2014/main" id="{E74E8E8C-14B4-4831-B909-1267A824E8EA}"/>
               </a:ext>
             </a:extLst>
           </p:cNvPr>
@@ -11177,7 +13217,7 @@
           <p:cNvPr id="26" name="">
             <a:extLst xmlns:a="http://schemas.openxmlformats.org/drawingml/2006/main">
               <a:ext uri="{FF2B5EF4-FFF2-40B4-BE49-F238E27FC236}">
-                <a16:creationId xmlns:a16="http://schemas.microsoft.com/office/drawing/2014/main" id="{8B1CC844-BCBC-4A60-93CC-3700C6F30979}"/>
+                <a16:creationId xmlns:a16="http://schemas.microsoft.com/office/drawing/2014/main" id="{C90BF5CD-02A2-44D0-B5C6-DB1EC9AFA19B}"/>
               </a:ext>
             </a:extLst>
           </p:cNvPr>
@@ -11246,7 +13286,7 @@
           <p:cNvPr id="27" name="">
             <a:extLst xmlns:a="http://schemas.openxmlformats.org/drawingml/2006/main">
               <a:ext uri="{FF2B5EF4-FFF2-40B4-BE49-F238E27FC236}">
-                <a16:creationId xmlns:a16="http://schemas.microsoft.com/office/drawing/2014/main" id="{B558127B-BD43-4F81-AC67-A0259AAADEB7}"/>
+                <a16:creationId xmlns:a16="http://schemas.microsoft.com/office/drawing/2014/main" id="{23A39592-9D53-43A5-8403-DAB25482E488}"/>
               </a:ext>
             </a:extLst>
           </p:cNvPr>
@@ -11277,7 +13317,7 @@
           <p:cNvPr id="28" name="">
             <a:extLst xmlns:a="http://schemas.openxmlformats.org/drawingml/2006/main">
               <a:ext uri="{FF2B5EF4-FFF2-40B4-BE49-F238E27FC236}">
-                <a16:creationId xmlns:a16="http://schemas.microsoft.com/office/drawing/2014/main" id="{CEE5B620-53CC-4D1C-89FB-51494AD5DE85}"/>
+                <a16:creationId xmlns:a16="http://schemas.microsoft.com/office/drawing/2014/main" id="{38121804-E0BA-497E-97AF-3537C012C5B2}"/>
               </a:ext>
             </a:extLst>
           </p:cNvPr>
@@ -11346,7 +13386,7 @@
           <p:cNvPr id="29" name="">
             <a:extLst xmlns:a="http://schemas.openxmlformats.org/drawingml/2006/main">
               <a:ext uri="{FF2B5EF4-FFF2-40B4-BE49-F238E27FC236}">
-                <a16:creationId xmlns:a16="http://schemas.microsoft.com/office/drawing/2014/main" id="{6B35B9A8-2BD1-49EE-9D90-FBF7C2D7751C}"/>
+                <a16:creationId xmlns:a16="http://schemas.microsoft.com/office/drawing/2014/main" id="{07A94F47-93C6-445D-835E-18BC71DED140}"/>
               </a:ext>
             </a:extLst>
           </p:cNvPr>
@@ -11379,7 +13419,7 @@
           <p:cNvPr id="30" name="">
             <a:extLst xmlns:a="http://schemas.openxmlformats.org/drawingml/2006/main">
               <a:ext uri="{FF2B5EF4-FFF2-40B4-BE49-F238E27FC236}">
-                <a16:creationId xmlns:a16="http://schemas.microsoft.com/office/drawing/2014/main" id="{316FECD5-2BEF-4DDE-BE08-CFCBE81A3D93}"/>
+                <a16:creationId xmlns:a16="http://schemas.microsoft.com/office/drawing/2014/main" id="{72B01922-0CEB-47DC-B6F5-EE7584C3A458}"/>
               </a:ext>
             </a:extLst>
           </p:cNvPr>
@@ -11448,7 +13488,7 @@
           <p:cNvPr id="31" name="">
             <a:extLst xmlns:a="http://schemas.openxmlformats.org/drawingml/2006/main">
               <a:ext uri="{FF2B5EF4-FFF2-40B4-BE49-F238E27FC236}">
-                <a16:creationId xmlns:a16="http://schemas.microsoft.com/office/drawing/2014/main" id="{95B033D0-B41D-440F-85B9-E69EE751F81A}"/>
+                <a16:creationId xmlns:a16="http://schemas.microsoft.com/office/drawing/2014/main" id="{84121F2D-6191-4B5D-A8B2-C1B561963BC5}"/>
               </a:ext>
             </a:extLst>
           </p:cNvPr>
@@ -11515,7 +13555,7 @@
     </p:spTree>
     <p:extLst>
       <p:ext uri="{BB962C8B-B14F-4D97-AF65-F5344CB8AC3E}">
-        <p14:creationId xmlns:p14="http://schemas.microsoft.com/office/powerpoint/2010/main" val="619878185"/>
+        <p14:creationId xmlns:p14="http://schemas.microsoft.com/office/powerpoint/2010/main" val="2046671430"/>
       </p:ext>
     </p:extLst>
   </p:cSld>
@@ -11543,10 +13583,10 @@
       </p:grpSpPr>
       <p:sp>
         <p:nvSpPr>
-          <p:cNvPr id="35" name="">
-            <a:extLst xmlns:a="http://schemas.openxmlformats.org/drawingml/2006/main">
-              <a:ext uri="{FF2B5EF4-FFF2-40B4-BE49-F238E27FC236}">
-                <a16:creationId xmlns:a16="http://schemas.microsoft.com/office/drawing/2014/main" id="{C674539A-48BA-4E30-9999-94BBFA981045}"/>
+          <p:cNvPr id="37" name="">
+            <a:extLst xmlns:a="http://schemas.openxmlformats.org/drawingml/2006/main">
+              <a:ext uri="{FF2B5EF4-FFF2-40B4-BE49-F238E27FC236}">
+                <a16:creationId xmlns:a16="http://schemas.microsoft.com/office/drawing/2014/main" id="{1525E31B-8C2D-47AC-AACA-33A6FCEC0115}"/>
               </a:ext>
             </a:extLst>
           </p:cNvPr>
@@ -11577,7 +13617,7 @@
           <p:cNvPr id="2" name="">
             <a:extLst xmlns:a="http://schemas.openxmlformats.org/drawingml/2006/main">
               <a:ext uri="{FF2B5EF4-FFF2-40B4-BE49-F238E27FC236}">
-                <a16:creationId xmlns:a16="http://schemas.microsoft.com/office/drawing/2014/main" id="{5A9BAC3D-0FA0-4029-93F9-E9BDE19FD519}"/>
+                <a16:creationId xmlns:a16="http://schemas.microsoft.com/office/drawing/2014/main" id="{DD3F11CF-E5C3-4AD2-B754-8E62823B58CE}"/>
               </a:ext>
             </a:extLst>
           </p:cNvPr>
@@ -11646,7 +13686,7 @@
           <p:cNvPr id="3" name="">
             <a:extLst xmlns:a="http://schemas.openxmlformats.org/drawingml/2006/main">
               <a:ext uri="{FF2B5EF4-FFF2-40B4-BE49-F238E27FC236}">
-                <a16:creationId xmlns:a16="http://schemas.microsoft.com/office/drawing/2014/main" id="{F62D2D5D-0014-4242-8430-2EF54F138D2E}"/>
+                <a16:creationId xmlns:a16="http://schemas.microsoft.com/office/drawing/2014/main" id="{A630E40E-B75D-463F-AF70-E8308EEF7108}"/>
               </a:ext>
             </a:extLst>
           </p:cNvPr>
@@ -11715,7 +13755,7 @@
           <p:cNvPr id="4" name="">
             <a:extLst xmlns:a="http://schemas.openxmlformats.org/drawingml/2006/main">
               <a:ext uri="{FF2B5EF4-FFF2-40B4-BE49-F238E27FC236}">
-                <a16:creationId xmlns:a16="http://schemas.microsoft.com/office/drawing/2014/main" id="{1714F4A9-5EBD-4473-8390-8E1BDF1E2314}"/>
+                <a16:creationId xmlns:a16="http://schemas.microsoft.com/office/drawing/2014/main" id="{58E9CF5F-DADB-470A-8FA7-804189CA6F0B}"/>
               </a:ext>
             </a:extLst>
           </p:cNvPr>
@@ -11746,7 +13786,7 @@
           <p:cNvPr id="5" name="">
             <a:extLst xmlns:a="http://schemas.openxmlformats.org/drawingml/2006/main">
               <a:ext uri="{FF2B5EF4-FFF2-40B4-BE49-F238E27FC236}">
-                <a16:creationId xmlns:a16="http://schemas.microsoft.com/office/drawing/2014/main" id="{2C1EA7AD-6674-49D0-8F0A-569620B6E890}"/>
+                <a16:creationId xmlns:a16="http://schemas.microsoft.com/office/drawing/2014/main" id="{1C81814C-1C54-4D00-BFDA-05709062553F}"/>
               </a:ext>
             </a:extLst>
           </p:cNvPr>
@@ -11815,7 +13855,7 @@
           <p:cNvPr id="6" name="">
             <a:extLst xmlns:a="http://schemas.openxmlformats.org/drawingml/2006/main">
               <a:ext uri="{FF2B5EF4-FFF2-40B4-BE49-F238E27FC236}">
-                <a16:creationId xmlns:a16="http://schemas.microsoft.com/office/drawing/2014/main" id="{857764F6-81E4-4EED-AA59-BEAABDFD48EC}"/>
+                <a16:creationId xmlns:a16="http://schemas.microsoft.com/office/drawing/2014/main" id="{4B53A52E-BE82-4134-A41E-C53798971184}"/>
               </a:ext>
             </a:extLst>
           </p:cNvPr>
@@ -11884,7 +13924,7 @@
           <p:cNvPr id="7" name="">
             <a:extLst xmlns:a="http://schemas.openxmlformats.org/drawingml/2006/main">
               <a:ext uri="{FF2B5EF4-FFF2-40B4-BE49-F238E27FC236}">
-                <a16:creationId xmlns:a16="http://schemas.microsoft.com/office/drawing/2014/main" id="{63EC644E-BF2B-46FC-8A0F-F571F0D69EA6}"/>
+                <a16:creationId xmlns:a16="http://schemas.microsoft.com/office/drawing/2014/main" id="{9DAE2AA9-ADF4-4942-95FA-B3BA7A8573C5}"/>
               </a:ext>
             </a:extLst>
           </p:cNvPr>
@@ -11917,7 +13957,7 @@
           <p:cNvPr id="8" name="">
             <a:extLst xmlns:a="http://schemas.openxmlformats.org/drawingml/2006/main">
               <a:ext uri="{FF2B5EF4-FFF2-40B4-BE49-F238E27FC236}">
-                <a16:creationId xmlns:a16="http://schemas.microsoft.com/office/drawing/2014/main" id="{5680C30C-E8C1-4B23-85D5-DA2879D7690A}"/>
+                <a16:creationId xmlns:a16="http://schemas.microsoft.com/office/drawing/2014/main" id="{4FF67059-393D-4703-B0E9-9573EB57CA08}"/>
               </a:ext>
             </a:extLst>
           </p:cNvPr>
@@ -11948,7 +13988,7 @@
           <p:cNvPr id="9" name="">
             <a:extLst xmlns:a="http://schemas.openxmlformats.org/drawingml/2006/main">
               <a:ext uri="{FF2B5EF4-FFF2-40B4-BE49-F238E27FC236}">
-                <a16:creationId xmlns:a16="http://schemas.microsoft.com/office/drawing/2014/main" id="{0AFAF7EC-619E-4093-A1C9-2353CDBE8446}"/>
+                <a16:creationId xmlns:a16="http://schemas.microsoft.com/office/drawing/2014/main" id="{9317BF05-7881-4682-8B9E-F2B197C69128}"/>
               </a:ext>
             </a:extLst>
           </p:cNvPr>
@@ -12017,7 +14057,7 @@
           <p:cNvPr id="10" name="">
             <a:extLst xmlns:a="http://schemas.openxmlformats.org/drawingml/2006/main">
               <a:ext uri="{FF2B5EF4-FFF2-40B4-BE49-F238E27FC236}">
-                <a16:creationId xmlns:a16="http://schemas.microsoft.com/office/drawing/2014/main" id="{30637745-9D12-4776-BAD5-3D070775B7EF}"/>
+                <a16:creationId xmlns:a16="http://schemas.microsoft.com/office/drawing/2014/main" id="{270E1F81-7C05-457A-9311-8FEFF4159E61}"/>
               </a:ext>
             </a:extLst>
           </p:cNvPr>
@@ -12086,7 +14126,7 @@
           <p:cNvPr id="11" name="">
             <a:extLst xmlns:a="http://schemas.openxmlformats.org/drawingml/2006/main">
               <a:ext uri="{FF2B5EF4-FFF2-40B4-BE49-F238E27FC236}">
-                <a16:creationId xmlns:a16="http://schemas.microsoft.com/office/drawing/2014/main" id="{1A043377-7159-4CD9-9F48-974896EB0165}"/>
+                <a16:creationId xmlns:a16="http://schemas.microsoft.com/office/drawing/2014/main" id="{C3A3AD82-6601-49AB-ACC1-3A50E9AF274D}"/>
               </a:ext>
             </a:extLst>
           </p:cNvPr>
@@ -12155,7 +14195,7 @@
           <p:cNvPr id="12" name="">
             <a:extLst xmlns:a="http://schemas.openxmlformats.org/drawingml/2006/main">
               <a:ext uri="{FF2B5EF4-FFF2-40B4-BE49-F238E27FC236}">
-                <a16:creationId xmlns:a16="http://schemas.microsoft.com/office/drawing/2014/main" id="{A0970DDE-965B-4870-A038-BD86D1DFC152}"/>
+                <a16:creationId xmlns:a16="http://schemas.microsoft.com/office/drawing/2014/main" id="{526F020C-DE5F-43D3-BB83-888F3CEB1C29}"/>
               </a:ext>
             </a:extLst>
           </p:cNvPr>
@@ -12188,7 +14228,7 @@
           <p:cNvPr id="13" name="">
             <a:extLst xmlns:a="http://schemas.openxmlformats.org/drawingml/2006/main">
               <a:ext uri="{FF2B5EF4-FFF2-40B4-BE49-F238E27FC236}">
-                <a16:creationId xmlns:a16="http://schemas.microsoft.com/office/drawing/2014/main" id="{DAB030B9-9777-4738-A748-F33150AF4BED}"/>
+                <a16:creationId xmlns:a16="http://schemas.microsoft.com/office/drawing/2014/main" id="{444ED382-726F-49CE-980A-A90B5E00154D}"/>
               </a:ext>
             </a:extLst>
           </p:cNvPr>
@@ -12219,7 +14259,7 @@
           <p:cNvPr id="14" name="">
             <a:extLst xmlns:a="http://schemas.openxmlformats.org/drawingml/2006/main">
               <a:ext uri="{FF2B5EF4-FFF2-40B4-BE49-F238E27FC236}">
-                <a16:creationId xmlns:a16="http://schemas.microsoft.com/office/drawing/2014/main" id="{8680A554-49B9-4F95-AD07-6EC90AA0BA5E}"/>
+                <a16:creationId xmlns:a16="http://schemas.microsoft.com/office/drawing/2014/main" id="{A0DEB1FD-6F32-4D3E-B40E-FB3E0683C2D2}"/>
               </a:ext>
             </a:extLst>
           </p:cNvPr>
@@ -12288,7 +14328,7 @@
           <p:cNvPr id="15" name="">
             <a:extLst xmlns:a="http://schemas.openxmlformats.org/drawingml/2006/main">
               <a:ext uri="{FF2B5EF4-FFF2-40B4-BE49-F238E27FC236}">
-                <a16:creationId xmlns:a16="http://schemas.microsoft.com/office/drawing/2014/main" id="{29E73F2D-4DC4-403C-8097-60C207480F07}"/>
+                <a16:creationId xmlns:a16="http://schemas.microsoft.com/office/drawing/2014/main" id="{F6EBD326-E832-45F6-9414-FDDB6E48589F}"/>
               </a:ext>
             </a:extLst>
           </p:cNvPr>
@@ -12357,7 +14397,7 @@
           <p:cNvPr id="16" name="">
             <a:extLst xmlns:a="http://schemas.openxmlformats.org/drawingml/2006/main">
               <a:ext uri="{FF2B5EF4-FFF2-40B4-BE49-F238E27FC236}">
-                <a16:creationId xmlns:a16="http://schemas.microsoft.com/office/drawing/2014/main" id="{A39535C1-7FAA-4AE7-9B71-FF52536F72FF}"/>
+                <a16:creationId xmlns:a16="http://schemas.microsoft.com/office/drawing/2014/main" id="{CE72FB40-877D-4761-82DE-2C4DA18F3F98}"/>
               </a:ext>
             </a:extLst>
           </p:cNvPr>
@@ -12426,7 +14466,7 @@
           <p:cNvPr id="17" name="">
             <a:extLst xmlns:a="http://schemas.openxmlformats.org/drawingml/2006/main">
               <a:ext uri="{FF2B5EF4-FFF2-40B4-BE49-F238E27FC236}">
-                <a16:creationId xmlns:a16="http://schemas.microsoft.com/office/drawing/2014/main" id="{7985E0AE-567C-4464-B824-BD2DB39F9BD4}"/>
+                <a16:creationId xmlns:a16="http://schemas.microsoft.com/office/drawing/2014/main" id="{24357557-C1A2-4AF0-BCE8-AE4A8C72779B}"/>
               </a:ext>
             </a:extLst>
           </p:cNvPr>
@@ -12459,7 +14499,7 @@
           <p:cNvPr id="18" name="">
             <a:extLst xmlns:a="http://schemas.openxmlformats.org/drawingml/2006/main">
               <a:ext uri="{FF2B5EF4-FFF2-40B4-BE49-F238E27FC236}">
-                <a16:creationId xmlns:a16="http://schemas.microsoft.com/office/drawing/2014/main" id="{413768FC-2F86-4100-A0BD-F0FCD50E4D74}"/>
+                <a16:creationId xmlns:a16="http://schemas.microsoft.com/office/drawing/2014/main" id="{61955268-CED8-47CC-ABF9-A6C114474468}"/>
               </a:ext>
             </a:extLst>
           </p:cNvPr>
@@ -12490,7 +14530,7 @@
           <p:cNvPr id="19" name="">
             <a:extLst xmlns:a="http://schemas.openxmlformats.org/drawingml/2006/main">
               <a:ext uri="{FF2B5EF4-FFF2-40B4-BE49-F238E27FC236}">
-                <a16:creationId xmlns:a16="http://schemas.microsoft.com/office/drawing/2014/main" id="{97DBCCB2-3594-475A-82C0-142A06C5C43B}"/>
+                <a16:creationId xmlns:a16="http://schemas.microsoft.com/office/drawing/2014/main" id="{52BD3FD3-4102-4499-8506-AD06C197D9FF}"/>
               </a:ext>
             </a:extLst>
           </p:cNvPr>
@@ -12559,7 +14599,7 @@
           <p:cNvPr id="20" name="">
             <a:extLst xmlns:a="http://schemas.openxmlformats.org/drawingml/2006/main">
               <a:ext uri="{FF2B5EF4-FFF2-40B4-BE49-F238E27FC236}">
-                <a16:creationId xmlns:a16="http://schemas.microsoft.com/office/drawing/2014/main" id="{DD88E6E3-63D0-4262-A53D-C98B9E49DE9A}"/>
+                <a16:creationId xmlns:a16="http://schemas.microsoft.com/office/drawing/2014/main" id="{28EB6912-9749-4790-B807-D2B7900812A2}"/>
               </a:ext>
             </a:extLst>
           </p:cNvPr>
@@ -12628,7 +14668,7 @@
           <p:cNvPr id="21" name="">
             <a:extLst xmlns:a="http://schemas.openxmlformats.org/drawingml/2006/main">
               <a:ext uri="{FF2B5EF4-FFF2-40B4-BE49-F238E27FC236}">
-                <a16:creationId xmlns:a16="http://schemas.microsoft.com/office/drawing/2014/main" id="{52659DFC-83F3-448F-8BC5-AC2FCA514330}"/>
+                <a16:creationId xmlns:a16="http://schemas.microsoft.com/office/drawing/2014/main" id="{377B1F6C-0EE2-4F2B-BB06-52BBA25F714A}"/>
               </a:ext>
             </a:extLst>
           </p:cNvPr>
@@ -12697,7 +14737,7 @@
           <p:cNvPr id="22" name="">
             <a:extLst xmlns:a="http://schemas.openxmlformats.org/drawingml/2006/main">
               <a:ext uri="{FF2B5EF4-FFF2-40B4-BE49-F238E27FC236}">
-                <a16:creationId xmlns:a16="http://schemas.microsoft.com/office/drawing/2014/main" id="{4C543A91-B288-40CD-BB17-B37CC7A58026}"/>
+                <a16:creationId xmlns:a16="http://schemas.microsoft.com/office/drawing/2014/main" id="{BC3FC9E7-2EA9-4590-ADD0-61AADAB5EA47}"/>
               </a:ext>
             </a:extLst>
           </p:cNvPr>
@@ -12766,7 +14806,7 @@
           <p:cNvPr id="23" name="">
             <a:extLst xmlns:a="http://schemas.openxmlformats.org/drawingml/2006/main">
               <a:ext uri="{FF2B5EF4-FFF2-40B4-BE49-F238E27FC236}">
-                <a16:creationId xmlns:a16="http://schemas.microsoft.com/office/drawing/2014/main" id="{3099B07E-E023-442C-B42C-F9E6054BB915}"/>
+                <a16:creationId xmlns:a16="http://schemas.microsoft.com/office/drawing/2014/main" id="{0821F822-0952-4331-A69C-F241483ED91C}"/>
               </a:ext>
             </a:extLst>
           </p:cNvPr>
@@ -12835,7 +14875,7 @@
           <p:cNvPr id="24" name="">
             <a:extLst xmlns:a="http://schemas.openxmlformats.org/drawingml/2006/main">
               <a:ext uri="{FF2B5EF4-FFF2-40B4-BE49-F238E27FC236}">
-                <a16:creationId xmlns:a16="http://schemas.microsoft.com/office/drawing/2014/main" id="{5DB97147-F54F-4D92-9222-7D802ADEF7F6}"/>
+                <a16:creationId xmlns:a16="http://schemas.microsoft.com/office/drawing/2014/main" id="{58A5E998-156B-43BD-A508-9A6A9B257844}"/>
               </a:ext>
             </a:extLst>
           </p:cNvPr>
@@ -12904,7 +14944,7 @@
           <p:cNvPr id="25" name="">
             <a:extLst xmlns:a="http://schemas.openxmlformats.org/drawingml/2006/main">
               <a:ext uri="{FF2B5EF4-FFF2-40B4-BE49-F238E27FC236}">
-                <a16:creationId xmlns:a16="http://schemas.microsoft.com/office/drawing/2014/main" id="{154EB114-46D9-4E8F-A755-2DE355378D51}"/>
+                <a16:creationId xmlns:a16="http://schemas.microsoft.com/office/drawing/2014/main" id="{4197D95E-1BDE-4E27-BD13-9CB1F69FD66C}"/>
               </a:ext>
             </a:extLst>
           </p:cNvPr>
@@ -12973,7 +15013,7 @@
           <p:cNvPr id="26" name="">
             <a:extLst xmlns:a="http://schemas.openxmlformats.org/drawingml/2006/main">
               <a:ext uri="{FF2B5EF4-FFF2-40B4-BE49-F238E27FC236}">
-                <a16:creationId xmlns:a16="http://schemas.microsoft.com/office/drawing/2014/main" id="{665D1E20-A4FD-4F74-9BC1-12F777CEC526}"/>
+                <a16:creationId xmlns:a16="http://schemas.microsoft.com/office/drawing/2014/main" id="{C765C847-72EC-4B36-B385-FA90D03359E1}"/>
               </a:ext>
             </a:extLst>
           </p:cNvPr>
@@ -13042,7 +15082,7 @@
           <p:cNvPr id="27" name="">
             <a:extLst xmlns:a="http://schemas.openxmlformats.org/drawingml/2006/main">
               <a:ext uri="{FF2B5EF4-FFF2-40B4-BE49-F238E27FC236}">
-                <a16:creationId xmlns:a16="http://schemas.microsoft.com/office/drawing/2014/main" id="{7C51ED60-57E9-4B3A-B4BE-A8DC3113D6BB}"/>
+                <a16:creationId xmlns:a16="http://schemas.microsoft.com/office/drawing/2014/main" id="{D1575759-EEB4-404A-AF9C-26C70882DC6A}"/>
               </a:ext>
             </a:extLst>
           </p:cNvPr>
@@ -13111,7 +15151,7 @@
           <p:cNvPr id="28" name="">
             <a:extLst xmlns:a="http://schemas.openxmlformats.org/drawingml/2006/main">
               <a:ext uri="{FF2B5EF4-FFF2-40B4-BE49-F238E27FC236}">
-                <a16:creationId xmlns:a16="http://schemas.microsoft.com/office/drawing/2014/main" id="{7BC8E50C-C47C-465B-943E-90938A0C9CDB}"/>
+                <a16:creationId xmlns:a16="http://schemas.microsoft.com/office/drawing/2014/main" id="{C9A85847-B071-400A-8457-6AC497206EA5}"/>
               </a:ext>
             </a:extLst>
           </p:cNvPr>
@@ -13180,7 +15220,7 @@
           <p:cNvPr id="29" name="">
             <a:extLst xmlns:a="http://schemas.openxmlformats.org/drawingml/2006/main">
               <a:ext uri="{FF2B5EF4-FFF2-40B4-BE49-F238E27FC236}">
-                <a16:creationId xmlns:a16="http://schemas.microsoft.com/office/drawing/2014/main" id="{D3F3E0C5-8EA5-4300-B3EE-C3B521F52B87}"/>
+                <a16:creationId xmlns:a16="http://schemas.microsoft.com/office/drawing/2014/main" id="{5346E8A5-D660-46E2-A50C-F5F03BAA0991}"/>
               </a:ext>
             </a:extLst>
           </p:cNvPr>
@@ -13239,7 +15279,7 @@
                 <a:ea typeface="Arial"/>
                 <a:cs typeface="Arial"/>
               </a:rPr>
-              <a:t>POST /api/invoices</a:t>
+              <a:t>POST /api/encounters/{id}/room-stays</a:t>
             </a:r>
           </a:p>
         </p:txBody>
@@ -13249,7 +15289,7 @@
           <p:cNvPr id="30" name="">
             <a:extLst xmlns:a="http://schemas.openxmlformats.org/drawingml/2006/main">
               <a:ext uri="{FF2B5EF4-FFF2-40B4-BE49-F238E27FC236}">
-                <a16:creationId xmlns:a16="http://schemas.microsoft.com/office/drawing/2014/main" id="{E74EEC5E-FFE5-4D9D-B5DC-5B14ABFD3010}"/>
+                <a16:creationId xmlns:a16="http://schemas.microsoft.com/office/drawing/2014/main" id="{BDF314B4-9A27-4133-B88B-32DC48E2BB0E}"/>
               </a:ext>
             </a:extLst>
           </p:cNvPr>
@@ -13308,7 +15348,7 @@
                 <a:ea typeface="Arial"/>
                 <a:cs typeface="Arial"/>
               </a:rPr>
-              <a:t>one final bill</a:t>
+              <a:t>bed stay plus charge</a:t>
             </a:r>
           </a:p>
         </p:txBody>
@@ -13318,7 +15358,7 @@
           <p:cNvPr id="31" name="">
             <a:extLst xmlns:a="http://schemas.openxmlformats.org/drawingml/2006/main">
               <a:ext uri="{FF2B5EF4-FFF2-40B4-BE49-F238E27FC236}">
-                <a16:creationId xmlns:a16="http://schemas.microsoft.com/office/drawing/2014/main" id="{44DD44B8-3860-4ABA-836C-3CF34A3FD6C7}"/>
+                <a16:creationId xmlns:a16="http://schemas.microsoft.com/office/drawing/2014/main" id="{A658223C-13FF-444B-8215-2AB4C816982B}"/>
               </a:ext>
             </a:extLst>
           </p:cNvPr>
@@ -13377,7 +15417,7 @@
                 <a:ea typeface="Arial"/>
                 <a:cs typeface="Arial"/>
               </a:rPr>
-              <a:t>POST /api/claims</a:t>
+              <a:t>POST /api/invoices</a:t>
             </a:r>
           </a:p>
         </p:txBody>
@@ -13387,7 +15427,7 @@
           <p:cNvPr id="32" name="">
             <a:extLst xmlns:a="http://schemas.openxmlformats.org/drawingml/2006/main">
               <a:ext uri="{FF2B5EF4-FFF2-40B4-BE49-F238E27FC236}">
-                <a16:creationId xmlns:a16="http://schemas.microsoft.com/office/drawing/2014/main" id="{896D4073-AA4B-4384-82E5-6D44690318ED}"/>
+                <a16:creationId xmlns:a16="http://schemas.microsoft.com/office/drawing/2014/main" id="{A86C5048-4C1C-4507-A142-631C8EAA0161}"/>
               </a:ext>
             </a:extLst>
           </p:cNvPr>
@@ -13446,7 +15486,7 @@
                 <a:ea typeface="Arial"/>
                 <a:cs typeface="Arial"/>
               </a:rPr>
-              <a:t>payer submission</a:t>
+              <a:t>one final bill</a:t>
             </a:r>
           </a:p>
         </p:txBody>
@@ -13456,7 +15496,7 @@
           <p:cNvPr id="33" name="">
             <a:extLst xmlns:a="http://schemas.openxmlformats.org/drawingml/2006/main">
               <a:ext uri="{FF2B5EF4-FFF2-40B4-BE49-F238E27FC236}">
-                <a16:creationId xmlns:a16="http://schemas.microsoft.com/office/drawing/2014/main" id="{B106BD41-6E72-413B-8612-B4D78D80D4F5}"/>
+                <a16:creationId xmlns:a16="http://schemas.microsoft.com/office/drawing/2014/main" id="{3FD8385F-D229-4FD1-9E7B-776F37475CBC}"/>
               </a:ext>
             </a:extLst>
           </p:cNvPr>
@@ -13515,6 +15555,144 @@
                 <a:ea typeface="Arial"/>
                 <a:cs typeface="Arial"/>
               </a:rPr>
+              <a:t>POST /api/claims</a:t>
+            </a:r>
+          </a:p>
+        </p:txBody>
+      </p:sp>
+      <p:sp>
+        <p:nvSpPr>
+          <p:cNvPr id="34" name="">
+            <a:extLst xmlns:a="http://schemas.openxmlformats.org/drawingml/2006/main">
+              <a:ext uri="{FF2B5EF4-FFF2-40B4-BE49-F238E27FC236}">
+                <a16:creationId xmlns:a16="http://schemas.microsoft.com/office/drawing/2014/main" id="{30846B4C-8F1F-4222-B3A5-67BA752FDEC6}"/>
+              </a:ext>
+            </a:extLst>
+          </p:cNvPr>
+          <p:cNvSpPr>
+            <a:spLocks xmlns:a="http://schemas.openxmlformats.org/drawingml/2006/main" noGrp="1"/>
+          </p:cNvSpPr>
+          <p:nvPr/>
+        </p:nvSpPr>
+        <p:spPr>
+          <a:xfrm xmlns:a="http://schemas.openxmlformats.org/drawingml/2006/main">
+            <a:off x="5210175" y="5753100"/>
+            <a:ext cx="5210175" cy="266700"/>
+          </a:xfrm>
+          <a:prstGeom xmlns:a="http://schemas.openxmlformats.org/drawingml/2006/main" prst="rect">
+            <a:avLst/>
+          </a:prstGeom>
+          <a:noFill xmlns:a="http://schemas.openxmlformats.org/drawingml/2006/main"/>
+          <a:ln xmlns:a="http://schemas.openxmlformats.org/drawingml/2006/main" w="0">
+            <a:noFill/>
+            <a:prstDash val="solid"/>
+          </a:ln>
+        </p:spPr>
+        <p:txBody>
+          <a:bodyPr xmlns:a="http://schemas.openxmlformats.org/drawingml/2006/main" lIns="0" tIns="0" rIns="0" bIns="0" anchor="t">
+            <a:normAutofit fontScale="100000"/>
+          </a:bodyPr>
+          <a:lstStyle xmlns:a="http://schemas.openxmlformats.org/drawingml/2006/main">
+            <a:defPPr algn="l">
+              <a:defRPr sz="1200" b="0">
+                <a:solidFill>
+                  <a:srgbClr val="1D303A"/>
+                </a:solidFill>
+                <a:latin typeface="Arial"/>
+                <a:ea typeface="Arial"/>
+                <a:cs typeface="Arial"/>
+              </a:defRPr>
+            </a:defPPr>
+          </a:lstStyle>
+          <a:p xmlns:a="http://schemas.openxmlformats.org/drawingml/2006/main">
+            <a:pPr algn="l">
+              <a:defRPr sz="1200" b="0">
+                <a:solidFill>
+                  <a:srgbClr val="1D303A"/>
+                </a:solidFill>
+                <a:latin typeface="Arial"/>
+                <a:ea typeface="Arial"/>
+                <a:cs typeface="Arial"/>
+              </a:defRPr>
+            </a:pPr>
+            <a:r>
+              <a:rPr sz="1200" b="0">
+                <a:solidFill>
+                  <a:srgbClr val="1D303A"/>
+                </a:solidFill>
+                <a:latin typeface="Arial"/>
+                <a:ea typeface="Arial"/>
+                <a:cs typeface="Arial"/>
+              </a:rPr>
+              <a:t>payer submission</a:t>
+            </a:r>
+          </a:p>
+        </p:txBody>
+      </p:sp>
+      <p:sp>
+        <p:nvSpPr>
+          <p:cNvPr id="35" name="">
+            <a:extLst xmlns:a="http://schemas.openxmlformats.org/drawingml/2006/main">
+              <a:ext uri="{FF2B5EF4-FFF2-40B4-BE49-F238E27FC236}">
+                <a16:creationId xmlns:a16="http://schemas.microsoft.com/office/drawing/2014/main" id="{CF05C527-A4E4-4DC3-8C15-534A6A67BD2A}"/>
+              </a:ext>
+            </a:extLst>
+          </p:cNvPr>
+          <p:cNvSpPr>
+            <a:spLocks xmlns:a="http://schemas.openxmlformats.org/drawingml/2006/main" noGrp="1"/>
+          </p:cNvSpPr>
+          <p:nvPr/>
+        </p:nvSpPr>
+        <p:spPr>
+          <a:xfrm xmlns:a="http://schemas.openxmlformats.org/drawingml/2006/main">
+            <a:off x="752475" y="6048375"/>
+            <a:ext cx="4333875" cy="266700"/>
+          </a:xfrm>
+          <a:prstGeom xmlns:a="http://schemas.openxmlformats.org/drawingml/2006/main" prst="rect">
+            <a:avLst/>
+          </a:prstGeom>
+          <a:noFill xmlns:a="http://schemas.openxmlformats.org/drawingml/2006/main"/>
+          <a:ln xmlns:a="http://schemas.openxmlformats.org/drawingml/2006/main" w="0">
+            <a:noFill/>
+            <a:prstDash val="solid"/>
+          </a:ln>
+        </p:spPr>
+        <p:txBody>
+          <a:bodyPr xmlns:a="http://schemas.openxmlformats.org/drawingml/2006/main" lIns="0" tIns="0" rIns="0" bIns="0" anchor="t">
+            <a:normAutofit fontScale="100000"/>
+          </a:bodyPr>
+          <a:lstStyle xmlns:a="http://schemas.openxmlformats.org/drawingml/2006/main">
+            <a:defPPr algn="l">
+              <a:defRPr sz="1200" b="1">
+                <a:solidFill>
+                  <a:srgbClr val="17323E"/>
+                </a:solidFill>
+                <a:latin typeface="Arial"/>
+                <a:ea typeface="Arial"/>
+                <a:cs typeface="Arial"/>
+              </a:defRPr>
+            </a:defPPr>
+          </a:lstStyle>
+          <a:p xmlns:a="http://schemas.openxmlformats.org/drawingml/2006/main">
+            <a:pPr algn="l">
+              <a:defRPr sz="1200" b="1">
+                <a:solidFill>
+                  <a:srgbClr val="17323E"/>
+                </a:solidFill>
+                <a:latin typeface="Arial"/>
+                <a:ea typeface="Arial"/>
+                <a:cs typeface="Arial"/>
+              </a:defRPr>
+            </a:pPr>
+            <a:r>
+              <a:rPr sz="1200" b="1">
+                <a:solidFill>
+                  <a:srgbClr val="17323E"/>
+                </a:solidFill>
+                <a:latin typeface="Arial"/>
+                <a:ea typeface="Arial"/>
+                <a:cs typeface="Arial"/>
+              </a:rPr>
               <a:t>POST /api/receipts</a:t>
             </a:r>
           </a:p>
@@ -13522,21 +15700,21 @@
       </p:sp>
       <p:sp>
         <p:nvSpPr>
-          <p:cNvPr id="34" name="">
-            <a:extLst xmlns:a="http://schemas.openxmlformats.org/drawingml/2006/main">
-              <a:ext uri="{FF2B5EF4-FFF2-40B4-BE49-F238E27FC236}">
-                <a16:creationId xmlns:a16="http://schemas.microsoft.com/office/drawing/2014/main" id="{0E4A3A2E-6C15-4C0C-AECC-5EB193CEB76C}"/>
-              </a:ext>
-            </a:extLst>
-          </p:cNvPr>
-          <p:cNvSpPr>
-            <a:spLocks xmlns:a="http://schemas.openxmlformats.org/drawingml/2006/main" noGrp="1"/>
-          </p:cNvSpPr>
-          <p:nvPr/>
-        </p:nvSpPr>
-        <p:spPr>
-          <a:xfrm xmlns:a="http://schemas.openxmlformats.org/drawingml/2006/main">
-            <a:off x="5210175" y="5753100"/>
+          <p:cNvPr id="36" name="">
+            <a:extLst xmlns:a="http://schemas.openxmlformats.org/drawingml/2006/main">
+              <a:ext uri="{FF2B5EF4-FFF2-40B4-BE49-F238E27FC236}">
+                <a16:creationId xmlns:a16="http://schemas.microsoft.com/office/drawing/2014/main" id="{DE5DE6B9-CCB8-4A05-B081-D508D982FC98}"/>
+              </a:ext>
+            </a:extLst>
+          </p:cNvPr>
+          <p:cNvSpPr>
+            <a:spLocks xmlns:a="http://schemas.openxmlformats.org/drawingml/2006/main" noGrp="1"/>
+          </p:cNvSpPr>
+          <p:nvPr/>
+        </p:nvSpPr>
+        <p:spPr>
+          <a:xfrm xmlns:a="http://schemas.openxmlformats.org/drawingml/2006/main">
+            <a:off x="5210175" y="6048375"/>
             <a:ext cx="5210175" cy="266700"/>
           </a:xfrm>
           <a:prstGeom xmlns:a="http://schemas.openxmlformats.org/drawingml/2006/main" prst="rect">
@@ -13592,7 +15770,7 @@
     </p:spTree>
     <p:extLst>
       <p:ext uri="{BB962C8B-B14F-4D97-AF65-F5344CB8AC3E}">
-        <p14:creationId xmlns:p14="http://schemas.microsoft.com/office/powerpoint/2010/main" val="330201898"/>
+        <p14:creationId xmlns:p14="http://schemas.microsoft.com/office/powerpoint/2010/main" val="1935377757"/>
       </p:ext>
     </p:extLst>
   </p:cSld>
@@ -13623,7 +15801,7 @@
           <p:cNvPr id="32" name="">
             <a:extLst xmlns:a="http://schemas.openxmlformats.org/drawingml/2006/main">
               <a:ext uri="{FF2B5EF4-FFF2-40B4-BE49-F238E27FC236}">
-                <a16:creationId xmlns:a16="http://schemas.microsoft.com/office/drawing/2014/main" id="{D3D698EC-89F9-4305-A6AF-007D719AC575}"/>
+                <a16:creationId xmlns:a16="http://schemas.microsoft.com/office/drawing/2014/main" id="{5B0102B9-E404-4CBF-860C-3E0330DAD05F}"/>
               </a:ext>
             </a:extLst>
           </p:cNvPr>
@@ -13654,7 +15832,7 @@
           <p:cNvPr id="2" name="">
             <a:extLst xmlns:a="http://schemas.openxmlformats.org/drawingml/2006/main">
               <a:ext uri="{FF2B5EF4-FFF2-40B4-BE49-F238E27FC236}">
-                <a16:creationId xmlns:a16="http://schemas.microsoft.com/office/drawing/2014/main" id="{91134837-493E-4DA5-B71E-0FDE5E6C75FA}"/>
+                <a16:creationId xmlns:a16="http://schemas.microsoft.com/office/drawing/2014/main" id="{403E1696-FAC7-4C79-B661-1690170677D5}"/>
               </a:ext>
             </a:extLst>
           </p:cNvPr>
@@ -13723,7 +15901,7 @@
           <p:cNvPr id="3" name="">
             <a:extLst xmlns:a="http://schemas.openxmlformats.org/drawingml/2006/main">
               <a:ext uri="{FF2B5EF4-FFF2-40B4-BE49-F238E27FC236}">
-                <a16:creationId xmlns:a16="http://schemas.microsoft.com/office/drawing/2014/main" id="{7975DAB0-11AE-4CF4-A561-3595884E6034}"/>
+                <a16:creationId xmlns:a16="http://schemas.microsoft.com/office/drawing/2014/main" id="{C096501C-3319-413D-A8D6-3C1A4C4FF0AC}"/>
               </a:ext>
             </a:extLst>
           </p:cNvPr>
@@ -13792,7 +15970,7 @@
           <p:cNvPr id="4" name="">
             <a:extLst xmlns:a="http://schemas.openxmlformats.org/drawingml/2006/main">
               <a:ext uri="{FF2B5EF4-FFF2-40B4-BE49-F238E27FC236}">
-                <a16:creationId xmlns:a16="http://schemas.microsoft.com/office/drawing/2014/main" id="{123BA439-947B-4A8A-86A2-2C5DD48D153A}"/>
+                <a16:creationId xmlns:a16="http://schemas.microsoft.com/office/drawing/2014/main" id="{08264F9D-4CAD-4B3A-8F44-69C52119DAAF}"/>
               </a:ext>
             </a:extLst>
           </p:cNvPr>
@@ -13823,7 +16001,7 @@
           <p:cNvPr id="5" name="">
             <a:extLst xmlns:a="http://schemas.openxmlformats.org/drawingml/2006/main">
               <a:ext uri="{FF2B5EF4-FFF2-40B4-BE49-F238E27FC236}">
-                <a16:creationId xmlns:a16="http://schemas.microsoft.com/office/drawing/2014/main" id="{6DAD9225-C1F5-4467-A8FC-08531E41E87F}"/>
+                <a16:creationId xmlns:a16="http://schemas.microsoft.com/office/drawing/2014/main" id="{F8350F04-D79E-4275-9855-FCC305A5F167}"/>
               </a:ext>
             </a:extLst>
           </p:cNvPr>
@@ -13892,7 +16070,7 @@
           <p:cNvPr id="6" name="">
             <a:extLst xmlns:a="http://schemas.openxmlformats.org/drawingml/2006/main">
               <a:ext uri="{FF2B5EF4-FFF2-40B4-BE49-F238E27FC236}">
-                <a16:creationId xmlns:a16="http://schemas.microsoft.com/office/drawing/2014/main" id="{F12B7E83-E97B-4A0B-B8FE-E2082919685E}"/>
+                <a16:creationId xmlns:a16="http://schemas.microsoft.com/office/drawing/2014/main" id="{15565D34-1E5A-4A90-BDAC-78F4F65DBBA5}"/>
               </a:ext>
             </a:extLst>
           </p:cNvPr>
@@ -13961,7 +16139,7 @@
           <p:cNvPr id="7" name="">
             <a:extLst xmlns:a="http://schemas.openxmlformats.org/drawingml/2006/main">
               <a:ext uri="{FF2B5EF4-FFF2-40B4-BE49-F238E27FC236}">
-                <a16:creationId xmlns:a16="http://schemas.microsoft.com/office/drawing/2014/main" id="{7E5561BC-06E5-46E3-875E-933E9DA01BA3}"/>
+                <a16:creationId xmlns:a16="http://schemas.microsoft.com/office/drawing/2014/main" id="{F09F584B-A866-4ECB-9105-D3B39EE94393}"/>
               </a:ext>
             </a:extLst>
           </p:cNvPr>
@@ -13992,7 +16170,7 @@
           <p:cNvPr id="8" name="">
             <a:extLst xmlns:a="http://schemas.openxmlformats.org/drawingml/2006/main">
               <a:ext uri="{FF2B5EF4-FFF2-40B4-BE49-F238E27FC236}">
-                <a16:creationId xmlns:a16="http://schemas.microsoft.com/office/drawing/2014/main" id="{74C02EB1-60AD-4DA4-9EA0-C3272A5DBE89}"/>
+                <a16:creationId xmlns:a16="http://schemas.microsoft.com/office/drawing/2014/main" id="{6CDC7EA9-C305-4130-AED3-E665A33DF7DC}"/>
               </a:ext>
             </a:extLst>
           </p:cNvPr>
@@ -14061,7 +16239,7 @@
           <p:cNvPr id="9" name="">
             <a:extLst xmlns:a="http://schemas.openxmlformats.org/drawingml/2006/main">
               <a:ext uri="{FF2B5EF4-FFF2-40B4-BE49-F238E27FC236}">
-                <a16:creationId xmlns:a16="http://schemas.microsoft.com/office/drawing/2014/main" id="{9EC7E7B3-6209-4DC5-BD1F-29607A5BF1CC}"/>
+                <a16:creationId xmlns:a16="http://schemas.microsoft.com/office/drawing/2014/main" id="{2B6EF6BB-4E7A-4334-99D3-93F47EB45CF9}"/>
               </a:ext>
             </a:extLst>
           </p:cNvPr>
@@ -14094,7 +16272,7 @@
           <p:cNvPr id="10" name="">
             <a:extLst xmlns:a="http://schemas.openxmlformats.org/drawingml/2006/main">
               <a:ext uri="{FF2B5EF4-FFF2-40B4-BE49-F238E27FC236}">
-                <a16:creationId xmlns:a16="http://schemas.microsoft.com/office/drawing/2014/main" id="{DEF68CC5-5A38-40C1-A9BC-696664B72D92}"/>
+                <a16:creationId xmlns:a16="http://schemas.microsoft.com/office/drawing/2014/main" id="{6F1A9665-E4C6-451F-87CE-3535DF2D628F}"/>
               </a:ext>
             </a:extLst>
           </p:cNvPr>
@@ -14163,7 +16341,7 @@
           <p:cNvPr id="11" name="">
             <a:extLst xmlns:a="http://schemas.openxmlformats.org/drawingml/2006/main">
               <a:ext uri="{FF2B5EF4-FFF2-40B4-BE49-F238E27FC236}">
-                <a16:creationId xmlns:a16="http://schemas.microsoft.com/office/drawing/2014/main" id="{DFF9C033-838E-43AB-81E8-F74A7F1E5BB0}"/>
+                <a16:creationId xmlns:a16="http://schemas.microsoft.com/office/drawing/2014/main" id="{4873F047-CB96-4A24-B183-9B78C9E33E0A}"/>
               </a:ext>
             </a:extLst>
           </p:cNvPr>
@@ -14232,7 +16410,7 @@
           <p:cNvPr id="12" name="">
             <a:extLst xmlns:a="http://schemas.openxmlformats.org/drawingml/2006/main">
               <a:ext uri="{FF2B5EF4-FFF2-40B4-BE49-F238E27FC236}">
-                <a16:creationId xmlns:a16="http://schemas.microsoft.com/office/drawing/2014/main" id="{AA43FF37-DD63-4066-ABDB-8D70A09A7646}"/>
+                <a16:creationId xmlns:a16="http://schemas.microsoft.com/office/drawing/2014/main" id="{C19D9BD4-4701-4D11-94FA-D17990BA425F}"/>
               </a:ext>
             </a:extLst>
           </p:cNvPr>
@@ -14263,7 +16441,7 @@
           <p:cNvPr id="13" name="">
             <a:extLst xmlns:a="http://schemas.openxmlformats.org/drawingml/2006/main">
               <a:ext uri="{FF2B5EF4-FFF2-40B4-BE49-F238E27FC236}">
-                <a16:creationId xmlns:a16="http://schemas.microsoft.com/office/drawing/2014/main" id="{7CB1A74C-F48D-46E4-805F-20215D1F4D74}"/>
+                <a16:creationId xmlns:a16="http://schemas.microsoft.com/office/drawing/2014/main" id="{C486A8DE-73F5-4CE8-ADBA-99FD54F78DAD}"/>
               </a:ext>
             </a:extLst>
           </p:cNvPr>
@@ -14332,7 +16510,7 @@
           <p:cNvPr id="14" name="">
             <a:extLst xmlns:a="http://schemas.openxmlformats.org/drawingml/2006/main">
               <a:ext uri="{FF2B5EF4-FFF2-40B4-BE49-F238E27FC236}">
-                <a16:creationId xmlns:a16="http://schemas.microsoft.com/office/drawing/2014/main" id="{E431D6F7-5EA0-4918-AC4C-F82A01F4C849}"/>
+                <a16:creationId xmlns:a16="http://schemas.microsoft.com/office/drawing/2014/main" id="{6CCBD33A-6153-4344-B09F-68541FB994CA}"/>
               </a:ext>
             </a:extLst>
           </p:cNvPr>
@@ -14365,7 +16543,7 @@
           <p:cNvPr id="15" name="">
             <a:extLst xmlns:a="http://schemas.openxmlformats.org/drawingml/2006/main">
               <a:ext uri="{FF2B5EF4-FFF2-40B4-BE49-F238E27FC236}">
-                <a16:creationId xmlns:a16="http://schemas.microsoft.com/office/drawing/2014/main" id="{E053328A-85E8-45C0-8D89-CCDCEBF535F1}"/>
+                <a16:creationId xmlns:a16="http://schemas.microsoft.com/office/drawing/2014/main" id="{E4B3682F-CA71-4FE9-A5AD-C33BAEA37784}"/>
               </a:ext>
             </a:extLst>
           </p:cNvPr>
@@ -14434,7 +16612,7 @@
           <p:cNvPr id="16" name="">
             <a:extLst xmlns:a="http://schemas.openxmlformats.org/drawingml/2006/main">
               <a:ext uri="{FF2B5EF4-FFF2-40B4-BE49-F238E27FC236}">
-                <a16:creationId xmlns:a16="http://schemas.microsoft.com/office/drawing/2014/main" id="{30460420-3346-4603-9761-39BFD6923EF2}"/>
+                <a16:creationId xmlns:a16="http://schemas.microsoft.com/office/drawing/2014/main" id="{F9E9EA6D-1280-4F31-9418-04E71A9E7215}"/>
               </a:ext>
             </a:extLst>
           </p:cNvPr>
@@ -14503,7 +16681,7 @@
           <p:cNvPr id="17" name="">
             <a:extLst xmlns:a="http://schemas.openxmlformats.org/drawingml/2006/main">
               <a:ext uri="{FF2B5EF4-FFF2-40B4-BE49-F238E27FC236}">
-                <a16:creationId xmlns:a16="http://schemas.microsoft.com/office/drawing/2014/main" id="{8F85C0E7-CC11-4C3E-B714-F8CB17CFA85E}"/>
+                <a16:creationId xmlns:a16="http://schemas.microsoft.com/office/drawing/2014/main" id="{F3EAFD01-E3A2-494D-8FAB-8817ECD2EBAC}"/>
               </a:ext>
             </a:extLst>
           </p:cNvPr>
@@ -14534,7 +16712,7 @@
           <p:cNvPr id="18" name="">
             <a:extLst xmlns:a="http://schemas.openxmlformats.org/drawingml/2006/main">
               <a:ext uri="{FF2B5EF4-FFF2-40B4-BE49-F238E27FC236}">
-                <a16:creationId xmlns:a16="http://schemas.microsoft.com/office/drawing/2014/main" id="{22DF467E-F1F1-4EFA-B77A-805C0911DAD9}"/>
+                <a16:creationId xmlns:a16="http://schemas.microsoft.com/office/drawing/2014/main" id="{F456C563-0D35-4842-8370-BC88BDF3F71A}"/>
               </a:ext>
             </a:extLst>
           </p:cNvPr>
@@ -14603,7 +16781,7 @@
           <p:cNvPr id="19" name="">
             <a:extLst xmlns:a="http://schemas.openxmlformats.org/drawingml/2006/main">
               <a:ext uri="{FF2B5EF4-FFF2-40B4-BE49-F238E27FC236}">
-                <a16:creationId xmlns:a16="http://schemas.microsoft.com/office/drawing/2014/main" id="{B791D953-2FE0-4186-83C0-22D5A7830867}"/>
+                <a16:creationId xmlns:a16="http://schemas.microsoft.com/office/drawing/2014/main" id="{75D495E5-7621-422A-9628-293C2C983D3B}"/>
               </a:ext>
             </a:extLst>
           </p:cNvPr>
@@ -14636,7 +16814,7 @@
           <p:cNvPr id="20" name="">
             <a:extLst xmlns:a="http://schemas.openxmlformats.org/drawingml/2006/main">
               <a:ext uri="{FF2B5EF4-FFF2-40B4-BE49-F238E27FC236}">
-                <a16:creationId xmlns:a16="http://schemas.microsoft.com/office/drawing/2014/main" id="{CC8888D6-8BC8-42C2-94EA-D297A15593A3}"/>
+                <a16:creationId xmlns:a16="http://schemas.microsoft.com/office/drawing/2014/main" id="{39080088-65FA-421B-BF41-87C0E6227AF1}"/>
               </a:ext>
             </a:extLst>
           </p:cNvPr>
@@ -14705,7 +16883,7 @@
           <p:cNvPr id="21" name="">
             <a:extLst xmlns:a="http://schemas.openxmlformats.org/drawingml/2006/main">
               <a:ext uri="{FF2B5EF4-FFF2-40B4-BE49-F238E27FC236}">
-                <a16:creationId xmlns:a16="http://schemas.microsoft.com/office/drawing/2014/main" id="{E8CE1B0A-BC13-4A3E-B657-B108F55BA3AF}"/>
+                <a16:creationId xmlns:a16="http://schemas.microsoft.com/office/drawing/2014/main" id="{ADEC1E77-CC88-4C56-B0BC-32F4D3704587}"/>
               </a:ext>
             </a:extLst>
           </p:cNvPr>
@@ -14774,7 +16952,7 @@
           <p:cNvPr id="22" name="">
             <a:extLst xmlns:a="http://schemas.openxmlformats.org/drawingml/2006/main">
               <a:ext uri="{FF2B5EF4-FFF2-40B4-BE49-F238E27FC236}">
-                <a16:creationId xmlns:a16="http://schemas.microsoft.com/office/drawing/2014/main" id="{D735BF92-9EDA-4AD8-91D2-1FF15BFB8608}"/>
+                <a16:creationId xmlns:a16="http://schemas.microsoft.com/office/drawing/2014/main" id="{F31772D0-145F-40B9-AB34-3B4877DA8164}"/>
               </a:ext>
             </a:extLst>
           </p:cNvPr>
@@ -14805,7 +16983,7 @@
           <p:cNvPr id="23" name="">
             <a:extLst xmlns:a="http://schemas.openxmlformats.org/drawingml/2006/main">
               <a:ext uri="{FF2B5EF4-FFF2-40B4-BE49-F238E27FC236}">
-                <a16:creationId xmlns:a16="http://schemas.microsoft.com/office/drawing/2014/main" id="{5A58C466-3A69-45BB-BA56-913806E6AAC4}"/>
+                <a16:creationId xmlns:a16="http://schemas.microsoft.com/office/drawing/2014/main" id="{DD760D20-ADC2-490B-8C6E-FC39E5275444}"/>
               </a:ext>
             </a:extLst>
           </p:cNvPr>
@@ -14874,7 +17052,7 @@
           <p:cNvPr id="24" name="">
             <a:extLst xmlns:a="http://schemas.openxmlformats.org/drawingml/2006/main">
               <a:ext uri="{FF2B5EF4-FFF2-40B4-BE49-F238E27FC236}">
-                <a16:creationId xmlns:a16="http://schemas.microsoft.com/office/drawing/2014/main" id="{AEB0468C-65A7-4F3E-A0B4-75C815419734}"/>
+                <a16:creationId xmlns:a16="http://schemas.microsoft.com/office/drawing/2014/main" id="{E24F617E-757E-450B-A439-70C4A662E479}"/>
               </a:ext>
             </a:extLst>
           </p:cNvPr>
@@ -14907,7 +17085,7 @@
           <p:cNvPr id="25" name="">
             <a:extLst xmlns:a="http://schemas.openxmlformats.org/drawingml/2006/main">
               <a:ext uri="{FF2B5EF4-FFF2-40B4-BE49-F238E27FC236}">
-                <a16:creationId xmlns:a16="http://schemas.microsoft.com/office/drawing/2014/main" id="{8B5DC1AC-2E05-471C-B535-E2302E1345B5}"/>
+                <a16:creationId xmlns:a16="http://schemas.microsoft.com/office/drawing/2014/main" id="{051A24A8-5DF8-4A0E-9B5D-D0612928CB89}"/>
               </a:ext>
             </a:extLst>
           </p:cNvPr>
@@ -14976,7 +17154,7 @@
           <p:cNvPr id="26" name="">
             <a:extLst xmlns:a="http://schemas.openxmlformats.org/drawingml/2006/main">
               <a:ext uri="{FF2B5EF4-FFF2-40B4-BE49-F238E27FC236}">
-                <a16:creationId xmlns:a16="http://schemas.microsoft.com/office/drawing/2014/main" id="{9088442D-A4E8-40EE-A141-835826EBD24A}"/>
+                <a16:creationId xmlns:a16="http://schemas.microsoft.com/office/drawing/2014/main" id="{8F1B491F-C111-41E3-B234-55C58F774761}"/>
               </a:ext>
             </a:extLst>
           </p:cNvPr>
@@ -15045,7 +17223,7 @@
           <p:cNvPr id="27" name="">
             <a:extLst xmlns:a="http://schemas.openxmlformats.org/drawingml/2006/main">
               <a:ext uri="{FF2B5EF4-FFF2-40B4-BE49-F238E27FC236}">
-                <a16:creationId xmlns:a16="http://schemas.microsoft.com/office/drawing/2014/main" id="{75421915-C7C8-4992-A1CD-511C3796A39C}"/>
+                <a16:creationId xmlns:a16="http://schemas.microsoft.com/office/drawing/2014/main" id="{922ABA0E-3E08-4A1F-86F1-1AAF94126AEB}"/>
               </a:ext>
             </a:extLst>
           </p:cNvPr>
@@ -15076,7 +17254,7 @@
           <p:cNvPr id="28" name="">
             <a:extLst xmlns:a="http://schemas.openxmlformats.org/drawingml/2006/main">
               <a:ext uri="{FF2B5EF4-FFF2-40B4-BE49-F238E27FC236}">
-                <a16:creationId xmlns:a16="http://schemas.microsoft.com/office/drawing/2014/main" id="{D8C5570C-25F8-409E-BBD6-B89366C74483}"/>
+                <a16:creationId xmlns:a16="http://schemas.microsoft.com/office/drawing/2014/main" id="{FDE8906C-B4E1-4F5C-BFCF-3BAE5731341A}"/>
               </a:ext>
             </a:extLst>
           </p:cNvPr>
@@ -15145,7 +17323,7 @@
           <p:cNvPr id="29" name="">
             <a:extLst xmlns:a="http://schemas.openxmlformats.org/drawingml/2006/main">
               <a:ext uri="{FF2B5EF4-FFF2-40B4-BE49-F238E27FC236}">
-                <a16:creationId xmlns:a16="http://schemas.microsoft.com/office/drawing/2014/main" id="{59F1E083-76B3-4440-909E-D822B3EC8541}"/>
+                <a16:creationId xmlns:a16="http://schemas.microsoft.com/office/drawing/2014/main" id="{39D8AF33-7121-47E9-8F0C-23D53D44FFFA}"/>
               </a:ext>
             </a:extLst>
           </p:cNvPr>
@@ -15178,7 +17356,7 @@
           <p:cNvPr id="30" name="">
             <a:extLst xmlns:a="http://schemas.openxmlformats.org/drawingml/2006/main">
               <a:ext uri="{FF2B5EF4-FFF2-40B4-BE49-F238E27FC236}">
-                <a16:creationId xmlns:a16="http://schemas.microsoft.com/office/drawing/2014/main" id="{84BBEC7E-1101-4570-8408-FC3A4F242B2D}"/>
+                <a16:creationId xmlns:a16="http://schemas.microsoft.com/office/drawing/2014/main" id="{51F4BBD6-426B-4A6C-994F-9C4158D55DE4}"/>
               </a:ext>
             </a:extLst>
           </p:cNvPr>
@@ -15247,7 +17425,7 @@
           <p:cNvPr id="31" name="">
             <a:extLst xmlns:a="http://schemas.openxmlformats.org/drawingml/2006/main">
               <a:ext uri="{FF2B5EF4-FFF2-40B4-BE49-F238E27FC236}">
-                <a16:creationId xmlns:a16="http://schemas.microsoft.com/office/drawing/2014/main" id="{6EA35408-D142-4BA2-975F-D2173B723BBE}"/>
+                <a16:creationId xmlns:a16="http://schemas.microsoft.com/office/drawing/2014/main" id="{4A048CA4-4B57-479D-8528-7DD9AB84EAB9}"/>
               </a:ext>
             </a:extLst>
           </p:cNvPr>
@@ -15314,7 +17492,7 @@
     </p:spTree>
     <p:extLst>
       <p:ext uri="{BB962C8B-B14F-4D97-AF65-F5344CB8AC3E}">
-        <p14:creationId xmlns:p14="http://schemas.microsoft.com/office/powerpoint/2010/main" val="1004719897"/>
+        <p14:creationId xmlns:p14="http://schemas.microsoft.com/office/powerpoint/2010/main" val="1596751274"/>
       </p:ext>
     </p:extLst>
   </p:cSld>
@@ -15342,10 +17520,10 @@
       </p:grpSpPr>
       <p:sp>
         <p:nvSpPr>
-          <p:cNvPr id="29" name="">
-            <a:extLst xmlns:a="http://schemas.openxmlformats.org/drawingml/2006/main">
-              <a:ext uri="{FF2B5EF4-FFF2-40B4-BE49-F238E27FC236}">
-                <a16:creationId xmlns:a16="http://schemas.microsoft.com/office/drawing/2014/main" id="{5EEB24FB-A4D6-4B00-9270-D9CB4CD85A29}"/>
+          <p:cNvPr id="34" name="">
+            <a:extLst xmlns:a="http://schemas.openxmlformats.org/drawingml/2006/main">
+              <a:ext uri="{FF2B5EF4-FFF2-40B4-BE49-F238E27FC236}">
+                <a16:creationId xmlns:a16="http://schemas.microsoft.com/office/drawing/2014/main" id="{347650DD-EB9D-48F2-A2DD-D7FF383DBB0A}"/>
               </a:ext>
             </a:extLst>
           </p:cNvPr>
@@ -15376,7 +17554,7 @@
           <p:cNvPr id="2" name="">
             <a:extLst xmlns:a="http://schemas.openxmlformats.org/drawingml/2006/main">
               <a:ext uri="{FF2B5EF4-FFF2-40B4-BE49-F238E27FC236}">
-                <a16:creationId xmlns:a16="http://schemas.microsoft.com/office/drawing/2014/main" id="{CB02AF2B-C136-4239-94AB-4F7E445348F0}"/>
+                <a16:creationId xmlns:a16="http://schemas.microsoft.com/office/drawing/2014/main" id="{1FE8EB2C-6907-4241-B703-1F1496ED50C3}"/>
               </a:ext>
             </a:extLst>
           </p:cNvPr>
@@ -15445,7 +17623,7 @@
           <p:cNvPr id="3" name="">
             <a:extLst xmlns:a="http://schemas.openxmlformats.org/drawingml/2006/main">
               <a:ext uri="{FF2B5EF4-FFF2-40B4-BE49-F238E27FC236}">
-                <a16:creationId xmlns:a16="http://schemas.microsoft.com/office/drawing/2014/main" id="{F0701D6E-608A-4509-9E3F-E3D84EAD7724}"/>
+                <a16:creationId xmlns:a16="http://schemas.microsoft.com/office/drawing/2014/main" id="{1D86E214-B8E5-4095-95CF-65B22D9306BF}"/>
               </a:ext>
             </a:extLst>
           </p:cNvPr>
@@ -15504,7 +17682,7 @@
                 <a:ea typeface="Arial"/>
                 <a:cs typeface="Arial"/>
               </a:rPr>
-              <a:t>OPD example: Asha Kulkarni</a:t>
+              <a:t>Admission example: Asha Kulkarni</a:t>
             </a:r>
           </a:p>
         </p:txBody>
@@ -15514,7 +17692,7 @@
           <p:cNvPr id="4" name="">
             <a:extLst xmlns:a="http://schemas.openxmlformats.org/drawingml/2006/main">
               <a:ext uri="{FF2B5EF4-FFF2-40B4-BE49-F238E27FC236}">
-                <a16:creationId xmlns:a16="http://schemas.microsoft.com/office/drawing/2014/main" id="{1ACE254D-5B44-4541-8A11-1C6E4A19948F}"/>
+                <a16:creationId xmlns:a16="http://schemas.microsoft.com/office/drawing/2014/main" id="{E43AAB7C-2D0D-4F67-B06B-AD73DA78AA7A}"/>
               </a:ext>
             </a:extLst>
           </p:cNvPr>
@@ -15545,7 +17723,7 @@
           <p:cNvPr id="5" name="">
             <a:extLst xmlns:a="http://schemas.openxmlformats.org/drawingml/2006/main">
               <a:ext uri="{FF2B5EF4-FFF2-40B4-BE49-F238E27FC236}">
-                <a16:creationId xmlns:a16="http://schemas.microsoft.com/office/drawing/2014/main" id="{4B9F28E1-76CE-42BC-8C06-5B621B73975E}"/>
+                <a16:creationId xmlns:a16="http://schemas.microsoft.com/office/drawing/2014/main" id="{E5383E78-71C6-41E2-AC1B-96219264DC97}"/>
               </a:ext>
             </a:extLst>
           </p:cNvPr>
@@ -15614,7 +17792,7 @@
           <p:cNvPr id="6" name="">
             <a:extLst xmlns:a="http://schemas.openxmlformats.org/drawingml/2006/main">
               <a:ext uri="{FF2B5EF4-FFF2-40B4-BE49-F238E27FC236}">
-                <a16:creationId xmlns:a16="http://schemas.microsoft.com/office/drawing/2014/main" id="{12D52A7B-F107-4C79-8488-6CD13354BED1}"/>
+                <a16:creationId xmlns:a16="http://schemas.microsoft.com/office/drawing/2014/main" id="{F4E2719E-1801-4EF9-9940-77AD0704C93C}"/>
               </a:ext>
             </a:extLst>
           </p:cNvPr>
@@ -15683,19 +17861,19 @@
           <p:cNvPr id="7" name="">
             <a:extLst xmlns:a="http://schemas.openxmlformats.org/drawingml/2006/main">
               <a:ext uri="{FF2B5EF4-FFF2-40B4-BE49-F238E27FC236}">
-                <a16:creationId xmlns:a16="http://schemas.microsoft.com/office/drawing/2014/main" id="{012ADF13-458E-4E18-9D19-AD56721DCF8D}"/>
-              </a:ext>
-            </a:extLst>
-          </p:cNvPr>
-          <p:cNvSpPr>
-            <a:spLocks xmlns:a="http://schemas.openxmlformats.org/drawingml/2006/main" noGrp="1"/>
-          </p:cNvSpPr>
-          <p:nvPr/>
-        </p:nvSpPr>
-        <p:spPr>
-          <a:xfrm xmlns:a="http://schemas.openxmlformats.org/drawingml/2006/main">
-            <a:off x="733425" y="1552575"/>
-            <a:ext cx="10210800" cy="600075"/>
+                <a16:creationId xmlns:a16="http://schemas.microsoft.com/office/drawing/2014/main" id="{83A29CF9-A166-48A8-AC5C-2CC4960176FD}"/>
+              </a:ext>
+            </a:extLst>
+          </p:cNvPr>
+          <p:cNvSpPr>
+            <a:spLocks xmlns:a="http://schemas.openxmlformats.org/drawingml/2006/main" noGrp="1"/>
+          </p:cNvSpPr>
+          <p:nvPr/>
+        </p:nvSpPr>
+        <p:spPr>
+          <a:xfrm xmlns:a="http://schemas.openxmlformats.org/drawingml/2006/main">
+            <a:off x="733425" y="1504950"/>
+            <a:ext cx="10210800" cy="504825"/>
           </a:xfrm>
           <a:prstGeom xmlns:a="http://schemas.openxmlformats.org/drawingml/2006/main" prst="rect">
             <a:avLst/>
@@ -15742,7 +17920,7 @@
                 <a:ea typeface="Arial"/>
                 <a:cs typeface="Arial"/>
               </a:rPr>
-              <a:t>One invented follow-up visit shows how completed work becomes a bill.</a:t>
+              <a:t>A short admission links clinical work and one room day to the final bill.</a:t>
             </a:r>
           </a:p>
         </p:txBody>
@@ -15752,23 +17930,23 @@
           <p:cNvPr id="8" name="">
             <a:extLst xmlns:a="http://schemas.openxmlformats.org/drawingml/2006/main">
               <a:ext uri="{FF2B5EF4-FFF2-40B4-BE49-F238E27FC236}">
-                <a16:creationId xmlns:a16="http://schemas.microsoft.com/office/drawing/2014/main" id="{0D71B622-EE88-4597-8792-F1EA13B4BC94}"/>
-              </a:ext>
-            </a:extLst>
-          </p:cNvPr>
-          <p:cNvSpPr>
-            <a:spLocks xmlns:a="http://schemas.openxmlformats.org/drawingml/2006/main" noGrp="1"/>
-          </p:cNvSpPr>
-          <p:nvPr/>
-        </p:nvSpPr>
-        <p:spPr>
-          <a:xfrm xmlns:a="http://schemas.openxmlformats.org/drawingml/2006/main">
-            <a:off x="723900" y="2447925"/>
-            <a:ext cx="10734675" cy="657225"/>
+                <a16:creationId xmlns:a16="http://schemas.microsoft.com/office/drawing/2014/main" id="{1E346B31-4FB0-42CE-B96B-16FE543EB386}"/>
+              </a:ext>
+            </a:extLst>
+          </p:cNvPr>
+          <p:cNvSpPr>
+            <a:spLocks xmlns:a="http://schemas.openxmlformats.org/drawingml/2006/main" noGrp="1"/>
+          </p:cNvSpPr>
+          <p:nvPr/>
+        </p:nvSpPr>
+        <p:spPr>
+          <a:xfrm xmlns:a="http://schemas.openxmlformats.org/drawingml/2006/main">
+            <a:off x="723900" y="2143125"/>
+            <a:ext cx="10734675" cy="600075"/>
           </a:xfrm>
           <a:prstGeom xmlns:a="http://schemas.openxmlformats.org/drawingml/2006/main" prst="roundRect">
             <a:avLst>
-              <a:gd name="adj" fmla="val 10145"/>
+              <a:gd name="adj" fmla="val 11111"/>
             </a:avLst>
           </a:prstGeom>
           <a:solidFill xmlns:a="http://schemas.openxmlformats.org/drawingml/2006/main">
@@ -15785,18 +17963,18 @@
           <p:cNvPr id="9" name="">
             <a:extLst xmlns:a="http://schemas.openxmlformats.org/drawingml/2006/main">
               <a:ext uri="{FF2B5EF4-FFF2-40B4-BE49-F238E27FC236}">
-                <a16:creationId xmlns:a16="http://schemas.microsoft.com/office/drawing/2014/main" id="{09B20A92-0A3B-4002-9787-65DB42083E7C}"/>
-              </a:ext>
-            </a:extLst>
-          </p:cNvPr>
-          <p:cNvSpPr>
-            <a:spLocks xmlns:a="http://schemas.openxmlformats.org/drawingml/2006/main" noGrp="1"/>
-          </p:cNvSpPr>
-          <p:nvPr/>
-        </p:nvSpPr>
-        <p:spPr>
-          <a:xfrm xmlns:a="http://schemas.openxmlformats.org/drawingml/2006/main">
-            <a:off x="866775" y="2590800"/>
+                <a16:creationId xmlns:a16="http://schemas.microsoft.com/office/drawing/2014/main" id="{A10E72F7-5BFD-4B94-9CEB-4EE81A670BCC}"/>
+              </a:ext>
+            </a:extLst>
+          </p:cNvPr>
+          <p:cNvSpPr>
+            <a:spLocks xmlns:a="http://schemas.openxmlformats.org/drawingml/2006/main" noGrp="1"/>
+          </p:cNvSpPr>
+          <p:nvPr/>
+        </p:nvSpPr>
+        <p:spPr>
+          <a:xfrm xmlns:a="http://schemas.openxmlformats.org/drawingml/2006/main">
+            <a:off x="866775" y="2257425"/>
             <a:ext cx="381000" cy="381000"/>
           </a:xfrm>
           <a:prstGeom xmlns:a="http://schemas.openxmlformats.org/drawingml/2006/main" prst="ellipse">
@@ -15816,18 +17994,18 @@
           <p:cNvPr id="10" name="">
             <a:extLst xmlns:a="http://schemas.openxmlformats.org/drawingml/2006/main">
               <a:ext uri="{FF2B5EF4-FFF2-40B4-BE49-F238E27FC236}">
-                <a16:creationId xmlns:a16="http://schemas.microsoft.com/office/drawing/2014/main" id="{ACE74641-6B15-4835-ABD9-2A5305496CE4}"/>
-              </a:ext>
-            </a:extLst>
-          </p:cNvPr>
-          <p:cNvSpPr>
-            <a:spLocks xmlns:a="http://schemas.openxmlformats.org/drawingml/2006/main" noGrp="1"/>
-          </p:cNvSpPr>
-          <p:nvPr/>
-        </p:nvSpPr>
-        <p:spPr>
-          <a:xfrm xmlns:a="http://schemas.openxmlformats.org/drawingml/2006/main">
-            <a:off x="866775" y="2667000"/>
+                <a16:creationId xmlns:a16="http://schemas.microsoft.com/office/drawing/2014/main" id="{55AEE501-B39C-4AF5-BFE1-2ADE3F25E266}"/>
+              </a:ext>
+            </a:extLst>
+          </p:cNvPr>
+          <p:cNvSpPr>
+            <a:spLocks xmlns:a="http://schemas.openxmlformats.org/drawingml/2006/main" noGrp="1"/>
+          </p:cNvSpPr>
+          <p:nvPr/>
+        </p:nvSpPr>
+        <p:spPr>
+          <a:xfrm xmlns:a="http://schemas.openxmlformats.org/drawingml/2006/main">
+            <a:off x="866775" y="2333625"/>
             <a:ext cx="381000" cy="190500"/>
           </a:xfrm>
           <a:prstGeom xmlns:a="http://schemas.openxmlformats.org/drawingml/2006/main" prst="rect">
@@ -15885,18 +18063,18 @@
           <p:cNvPr id="11" name="">
             <a:extLst xmlns:a="http://schemas.openxmlformats.org/drawingml/2006/main">
               <a:ext uri="{FF2B5EF4-FFF2-40B4-BE49-F238E27FC236}">
-                <a16:creationId xmlns:a16="http://schemas.microsoft.com/office/drawing/2014/main" id="{47EBB989-5468-4F37-A00A-D49DC99E3DDA}"/>
-              </a:ext>
-            </a:extLst>
-          </p:cNvPr>
-          <p:cNvSpPr>
-            <a:spLocks xmlns:a="http://schemas.openxmlformats.org/drawingml/2006/main" noGrp="1"/>
-          </p:cNvSpPr>
-          <p:nvPr/>
-        </p:nvSpPr>
-        <p:spPr>
-          <a:xfrm xmlns:a="http://schemas.openxmlformats.org/drawingml/2006/main">
-            <a:off x="1419225" y="2590800"/>
+                <a16:creationId xmlns:a16="http://schemas.microsoft.com/office/drawing/2014/main" id="{B69C12A3-34B9-44BE-B0BE-351FB437E98C}"/>
+              </a:ext>
+            </a:extLst>
+          </p:cNvPr>
+          <p:cNvSpPr>
+            <a:spLocks xmlns:a="http://schemas.openxmlformats.org/drawingml/2006/main" noGrp="1"/>
+          </p:cNvSpPr>
+          <p:nvPr/>
+        </p:nvSpPr>
+        <p:spPr>
+          <a:xfrm xmlns:a="http://schemas.openxmlformats.org/drawingml/2006/main">
+            <a:off x="1419225" y="2266950"/>
             <a:ext cx="2590800" cy="361950"/>
           </a:xfrm>
           <a:prstGeom xmlns:a="http://schemas.openxmlformats.org/drawingml/2006/main" prst="rect">
@@ -15954,18 +18132,18 @@
           <p:cNvPr id="12" name="">
             <a:extLst xmlns:a="http://schemas.openxmlformats.org/drawingml/2006/main">
               <a:ext uri="{FF2B5EF4-FFF2-40B4-BE49-F238E27FC236}">
-                <a16:creationId xmlns:a16="http://schemas.microsoft.com/office/drawing/2014/main" id="{DA86836C-9217-456E-8E1E-502D5D70DCE6}"/>
-              </a:ext>
-            </a:extLst>
-          </p:cNvPr>
-          <p:cNvSpPr>
-            <a:spLocks xmlns:a="http://schemas.openxmlformats.org/drawingml/2006/main" noGrp="1"/>
-          </p:cNvSpPr>
-          <p:nvPr/>
-        </p:nvSpPr>
-        <p:spPr>
-          <a:xfrm xmlns:a="http://schemas.openxmlformats.org/drawingml/2006/main">
-            <a:off x="4076700" y="2590800"/>
+                <a16:creationId xmlns:a16="http://schemas.microsoft.com/office/drawing/2014/main" id="{97E643B1-AE77-4174-A15B-D5420132B7CF}"/>
+              </a:ext>
+            </a:extLst>
+          </p:cNvPr>
+          <p:cNvSpPr>
+            <a:spLocks xmlns:a="http://schemas.openxmlformats.org/drawingml/2006/main" noGrp="1"/>
+          </p:cNvSpPr>
+          <p:nvPr/>
+        </p:nvSpPr>
+        <p:spPr>
+          <a:xfrm xmlns:a="http://schemas.openxmlformats.org/drawingml/2006/main">
+            <a:off x="4076700" y="2266950"/>
             <a:ext cx="7010400" cy="361950"/>
           </a:xfrm>
           <a:prstGeom xmlns:a="http://schemas.openxmlformats.org/drawingml/2006/main" prst="rect">
@@ -16013,7 +18191,7 @@
                 <a:ea typeface="Arial"/>
                 <a:cs typeface="Arial"/>
               </a:rPr>
-              <a:t>Confirms ICD-10 E11.9; consultation ₹500</a:t>
+              <a:t>ICD-10 E11.9; assessment ₹500</a:t>
             </a:r>
           </a:p>
         </p:txBody>
@@ -16023,23 +18201,23 @@
           <p:cNvPr id="13" name="">
             <a:extLst xmlns:a="http://schemas.openxmlformats.org/drawingml/2006/main">
               <a:ext uri="{FF2B5EF4-FFF2-40B4-BE49-F238E27FC236}">
-                <a16:creationId xmlns:a16="http://schemas.microsoft.com/office/drawing/2014/main" id="{1D297DD5-4C15-4256-A535-98AFA9BBBE50}"/>
-              </a:ext>
-            </a:extLst>
-          </p:cNvPr>
-          <p:cNvSpPr>
-            <a:spLocks xmlns:a="http://schemas.openxmlformats.org/drawingml/2006/main" noGrp="1"/>
-          </p:cNvSpPr>
-          <p:nvPr/>
-        </p:nvSpPr>
-        <p:spPr>
-          <a:xfrm xmlns:a="http://schemas.openxmlformats.org/drawingml/2006/main">
-            <a:off x="723900" y="3257550"/>
-            <a:ext cx="10734675" cy="657225"/>
+                <a16:creationId xmlns:a16="http://schemas.microsoft.com/office/drawing/2014/main" id="{6E368958-A7DA-4B67-8340-63183280F7ED}"/>
+              </a:ext>
+            </a:extLst>
+          </p:cNvPr>
+          <p:cNvSpPr>
+            <a:spLocks xmlns:a="http://schemas.openxmlformats.org/drawingml/2006/main" noGrp="1"/>
+          </p:cNvSpPr>
+          <p:nvPr/>
+        </p:nvSpPr>
+        <p:spPr>
+          <a:xfrm xmlns:a="http://schemas.openxmlformats.org/drawingml/2006/main">
+            <a:off x="723900" y="2857500"/>
+            <a:ext cx="10734675" cy="600075"/>
           </a:xfrm>
           <a:prstGeom xmlns:a="http://schemas.openxmlformats.org/drawingml/2006/main" prst="roundRect">
             <a:avLst>
-              <a:gd name="adj" fmla="val 10145"/>
+              <a:gd name="adj" fmla="val 11111"/>
             </a:avLst>
           </a:prstGeom>
           <a:solidFill xmlns:a="http://schemas.openxmlformats.org/drawingml/2006/main">
@@ -16056,18 +18234,18 @@
           <p:cNvPr id="14" name="">
             <a:extLst xmlns:a="http://schemas.openxmlformats.org/drawingml/2006/main">
               <a:ext uri="{FF2B5EF4-FFF2-40B4-BE49-F238E27FC236}">
-                <a16:creationId xmlns:a16="http://schemas.microsoft.com/office/drawing/2014/main" id="{165D118D-2298-4691-A19B-2F6FD7F6E397}"/>
-              </a:ext>
-            </a:extLst>
-          </p:cNvPr>
-          <p:cNvSpPr>
-            <a:spLocks xmlns:a="http://schemas.openxmlformats.org/drawingml/2006/main" noGrp="1"/>
-          </p:cNvSpPr>
-          <p:nvPr/>
-        </p:nvSpPr>
-        <p:spPr>
-          <a:xfrm xmlns:a="http://schemas.openxmlformats.org/drawingml/2006/main">
-            <a:off x="866775" y="3400425"/>
+                <a16:creationId xmlns:a16="http://schemas.microsoft.com/office/drawing/2014/main" id="{3DA05131-20C4-4AC2-ABBE-0D78D49ED4BE}"/>
+              </a:ext>
+            </a:extLst>
+          </p:cNvPr>
+          <p:cNvSpPr>
+            <a:spLocks xmlns:a="http://schemas.openxmlformats.org/drawingml/2006/main" noGrp="1"/>
+          </p:cNvSpPr>
+          <p:nvPr/>
+        </p:nvSpPr>
+        <p:spPr>
+          <a:xfrm xmlns:a="http://schemas.openxmlformats.org/drawingml/2006/main">
+            <a:off x="866775" y="2971800"/>
             <a:ext cx="381000" cy="381000"/>
           </a:xfrm>
           <a:prstGeom xmlns:a="http://schemas.openxmlformats.org/drawingml/2006/main" prst="ellipse">
@@ -16087,18 +18265,18 @@
           <p:cNvPr id="15" name="">
             <a:extLst xmlns:a="http://schemas.openxmlformats.org/drawingml/2006/main">
               <a:ext uri="{FF2B5EF4-FFF2-40B4-BE49-F238E27FC236}">
-                <a16:creationId xmlns:a16="http://schemas.microsoft.com/office/drawing/2014/main" id="{9489C768-4E22-408B-8426-5E758A8FD8F6}"/>
-              </a:ext>
-            </a:extLst>
-          </p:cNvPr>
-          <p:cNvSpPr>
-            <a:spLocks xmlns:a="http://schemas.openxmlformats.org/drawingml/2006/main" noGrp="1"/>
-          </p:cNvSpPr>
-          <p:nvPr/>
-        </p:nvSpPr>
-        <p:spPr>
-          <a:xfrm xmlns:a="http://schemas.openxmlformats.org/drawingml/2006/main">
-            <a:off x="866775" y="3476625"/>
+                <a16:creationId xmlns:a16="http://schemas.microsoft.com/office/drawing/2014/main" id="{EED74A90-6B54-47DD-BB58-81E1869B598E}"/>
+              </a:ext>
+            </a:extLst>
+          </p:cNvPr>
+          <p:cNvSpPr>
+            <a:spLocks xmlns:a="http://schemas.openxmlformats.org/drawingml/2006/main" noGrp="1"/>
+          </p:cNvSpPr>
+          <p:nvPr/>
+        </p:nvSpPr>
+        <p:spPr>
+          <a:xfrm xmlns:a="http://schemas.openxmlformats.org/drawingml/2006/main">
+            <a:off x="866775" y="3048000"/>
             <a:ext cx="381000" cy="190500"/>
           </a:xfrm>
           <a:prstGeom xmlns:a="http://schemas.openxmlformats.org/drawingml/2006/main" prst="rect">
@@ -16156,18 +18334,18 @@
           <p:cNvPr id="16" name="">
             <a:extLst xmlns:a="http://schemas.openxmlformats.org/drawingml/2006/main">
               <a:ext uri="{FF2B5EF4-FFF2-40B4-BE49-F238E27FC236}">
-                <a16:creationId xmlns:a16="http://schemas.microsoft.com/office/drawing/2014/main" id="{F781C38E-D782-4149-A7A9-EE40FD7196AA}"/>
-              </a:ext>
-            </a:extLst>
-          </p:cNvPr>
-          <p:cNvSpPr>
-            <a:spLocks xmlns:a="http://schemas.openxmlformats.org/drawingml/2006/main" noGrp="1"/>
-          </p:cNvSpPr>
-          <p:nvPr/>
-        </p:nvSpPr>
-        <p:spPr>
-          <a:xfrm xmlns:a="http://schemas.openxmlformats.org/drawingml/2006/main">
-            <a:off x="1419225" y="3400425"/>
+                <a16:creationId xmlns:a16="http://schemas.microsoft.com/office/drawing/2014/main" id="{86CB8655-10B0-4233-8CD4-C57F5311A777}"/>
+              </a:ext>
+            </a:extLst>
+          </p:cNvPr>
+          <p:cNvSpPr>
+            <a:spLocks xmlns:a="http://schemas.openxmlformats.org/drawingml/2006/main" noGrp="1"/>
+          </p:cNvSpPr>
+          <p:nvPr/>
+        </p:nvSpPr>
+        <p:spPr>
+          <a:xfrm xmlns:a="http://schemas.openxmlformats.org/drawingml/2006/main">
+            <a:off x="1419225" y="2981325"/>
             <a:ext cx="2590800" cy="361950"/>
           </a:xfrm>
           <a:prstGeom xmlns:a="http://schemas.openxmlformats.org/drawingml/2006/main" prst="rect">
@@ -16225,18 +18403,18 @@
           <p:cNvPr id="17" name="">
             <a:extLst xmlns:a="http://schemas.openxmlformats.org/drawingml/2006/main">
               <a:ext uri="{FF2B5EF4-FFF2-40B4-BE49-F238E27FC236}">
-                <a16:creationId xmlns:a16="http://schemas.microsoft.com/office/drawing/2014/main" id="{1E1E6B3F-08F8-418F-B5B5-2AF79606B14C}"/>
-              </a:ext>
-            </a:extLst>
-          </p:cNvPr>
-          <p:cNvSpPr>
-            <a:spLocks xmlns:a="http://schemas.openxmlformats.org/drawingml/2006/main" noGrp="1"/>
-          </p:cNvSpPr>
-          <p:nvPr/>
-        </p:nvSpPr>
-        <p:spPr>
-          <a:xfrm xmlns:a="http://schemas.openxmlformats.org/drawingml/2006/main">
-            <a:off x="4076700" y="3400425"/>
+                <a16:creationId xmlns:a16="http://schemas.microsoft.com/office/drawing/2014/main" id="{A225C573-742B-4C8B-B40E-232C7445C2FF}"/>
+              </a:ext>
+            </a:extLst>
+          </p:cNvPr>
+          <p:cNvSpPr>
+            <a:spLocks xmlns:a="http://schemas.openxmlformats.org/drawingml/2006/main" noGrp="1"/>
+          </p:cNvSpPr>
+          <p:nvPr/>
+        </p:nvSpPr>
+        <p:spPr>
+          <a:xfrm xmlns:a="http://schemas.openxmlformats.org/drawingml/2006/main">
+            <a:off x="4076700" y="2981325"/>
             <a:ext cx="7010400" cy="361950"/>
           </a:xfrm>
           <a:prstGeom xmlns:a="http://schemas.openxmlformats.org/drawingml/2006/main" prst="rect">
@@ -16284,7 +18462,7 @@
                 <a:ea typeface="Arial"/>
                 <a:cs typeface="Arial"/>
               </a:rPr>
-              <a:t>HbA1c result, LOINC 4548-4; test ₹650</a:t>
+              <a:t>HbA1c, LOINC 4548-4; test ₹650</a:t>
             </a:r>
           </a:p>
         </p:txBody>
@@ -16294,23 +18472,23 @@
           <p:cNvPr id="18" name="">
             <a:extLst xmlns:a="http://schemas.openxmlformats.org/drawingml/2006/main">
               <a:ext uri="{FF2B5EF4-FFF2-40B4-BE49-F238E27FC236}">
-                <a16:creationId xmlns:a16="http://schemas.microsoft.com/office/drawing/2014/main" id="{955EE284-33D2-4728-B8F0-E5BD97D4E4D0}"/>
-              </a:ext>
-            </a:extLst>
-          </p:cNvPr>
-          <p:cNvSpPr>
-            <a:spLocks xmlns:a="http://schemas.openxmlformats.org/drawingml/2006/main" noGrp="1"/>
-          </p:cNvSpPr>
-          <p:nvPr/>
-        </p:nvSpPr>
-        <p:spPr>
-          <a:xfrm xmlns:a="http://schemas.openxmlformats.org/drawingml/2006/main">
-            <a:off x="723900" y="4067175"/>
-            <a:ext cx="10734675" cy="657225"/>
+                <a16:creationId xmlns:a16="http://schemas.microsoft.com/office/drawing/2014/main" id="{9054F49E-3341-44B0-811F-93FECDB73530}"/>
+              </a:ext>
+            </a:extLst>
+          </p:cNvPr>
+          <p:cNvSpPr>
+            <a:spLocks xmlns:a="http://schemas.openxmlformats.org/drawingml/2006/main" noGrp="1"/>
+          </p:cNvSpPr>
+          <p:nvPr/>
+        </p:nvSpPr>
+        <p:spPr>
+          <a:xfrm xmlns:a="http://schemas.openxmlformats.org/drawingml/2006/main">
+            <a:off x="723900" y="3571875"/>
+            <a:ext cx="10734675" cy="600075"/>
           </a:xfrm>
           <a:prstGeom xmlns:a="http://schemas.openxmlformats.org/drawingml/2006/main" prst="roundRect">
             <a:avLst>
-              <a:gd name="adj" fmla="val 10145"/>
+              <a:gd name="adj" fmla="val 11111"/>
             </a:avLst>
           </a:prstGeom>
           <a:solidFill xmlns:a="http://schemas.openxmlformats.org/drawingml/2006/main">
@@ -16327,18 +18505,18 @@
           <p:cNvPr id="19" name="">
             <a:extLst xmlns:a="http://schemas.openxmlformats.org/drawingml/2006/main">
               <a:ext uri="{FF2B5EF4-FFF2-40B4-BE49-F238E27FC236}">
-                <a16:creationId xmlns:a16="http://schemas.microsoft.com/office/drawing/2014/main" id="{38B0C181-3B07-42D9-B24D-26B3FD8E1544}"/>
-              </a:ext>
-            </a:extLst>
-          </p:cNvPr>
-          <p:cNvSpPr>
-            <a:spLocks xmlns:a="http://schemas.openxmlformats.org/drawingml/2006/main" noGrp="1"/>
-          </p:cNvSpPr>
-          <p:nvPr/>
-        </p:nvSpPr>
-        <p:spPr>
-          <a:xfrm xmlns:a="http://schemas.openxmlformats.org/drawingml/2006/main">
-            <a:off x="866775" y="4210050"/>
+                <a16:creationId xmlns:a16="http://schemas.microsoft.com/office/drawing/2014/main" id="{E371DDBF-66A8-4F62-9AD9-12AFE96D2921}"/>
+              </a:ext>
+            </a:extLst>
+          </p:cNvPr>
+          <p:cNvSpPr>
+            <a:spLocks xmlns:a="http://schemas.openxmlformats.org/drawingml/2006/main" noGrp="1"/>
+          </p:cNvSpPr>
+          <p:nvPr/>
+        </p:nvSpPr>
+        <p:spPr>
+          <a:xfrm xmlns:a="http://schemas.openxmlformats.org/drawingml/2006/main">
+            <a:off x="866775" y="3686175"/>
             <a:ext cx="381000" cy="381000"/>
           </a:xfrm>
           <a:prstGeom xmlns:a="http://schemas.openxmlformats.org/drawingml/2006/main" prst="ellipse">
@@ -16358,18 +18536,18 @@
           <p:cNvPr id="20" name="">
             <a:extLst xmlns:a="http://schemas.openxmlformats.org/drawingml/2006/main">
               <a:ext uri="{FF2B5EF4-FFF2-40B4-BE49-F238E27FC236}">
-                <a16:creationId xmlns:a16="http://schemas.microsoft.com/office/drawing/2014/main" id="{71C652B9-7F96-402C-977E-32A2C4ED5CE5}"/>
-              </a:ext>
-            </a:extLst>
-          </p:cNvPr>
-          <p:cNvSpPr>
-            <a:spLocks xmlns:a="http://schemas.openxmlformats.org/drawingml/2006/main" noGrp="1"/>
-          </p:cNvSpPr>
-          <p:nvPr/>
-        </p:nvSpPr>
-        <p:spPr>
-          <a:xfrm xmlns:a="http://schemas.openxmlformats.org/drawingml/2006/main">
-            <a:off x="866775" y="4286250"/>
+                <a16:creationId xmlns:a16="http://schemas.microsoft.com/office/drawing/2014/main" id="{4D883433-D1C2-452D-B926-87AFB6CCCBFE}"/>
+              </a:ext>
+            </a:extLst>
+          </p:cNvPr>
+          <p:cNvSpPr>
+            <a:spLocks xmlns:a="http://schemas.openxmlformats.org/drawingml/2006/main" noGrp="1"/>
+          </p:cNvSpPr>
+          <p:nvPr/>
+        </p:nvSpPr>
+        <p:spPr>
+          <a:xfrm xmlns:a="http://schemas.openxmlformats.org/drawingml/2006/main">
+            <a:off x="866775" y="3762375"/>
             <a:ext cx="381000" cy="190500"/>
           </a:xfrm>
           <a:prstGeom xmlns:a="http://schemas.openxmlformats.org/drawingml/2006/main" prst="rect">
@@ -16427,18 +18605,18 @@
           <p:cNvPr id="21" name="">
             <a:extLst xmlns:a="http://schemas.openxmlformats.org/drawingml/2006/main">
               <a:ext uri="{FF2B5EF4-FFF2-40B4-BE49-F238E27FC236}">
-                <a16:creationId xmlns:a16="http://schemas.microsoft.com/office/drawing/2014/main" id="{5BA8B20C-E7CD-46C4-B409-02C90060F23F}"/>
-              </a:ext>
-            </a:extLst>
-          </p:cNvPr>
-          <p:cNvSpPr>
-            <a:spLocks xmlns:a="http://schemas.openxmlformats.org/drawingml/2006/main" noGrp="1"/>
-          </p:cNvSpPr>
-          <p:nvPr/>
-        </p:nvSpPr>
-        <p:spPr>
-          <a:xfrm xmlns:a="http://schemas.openxmlformats.org/drawingml/2006/main">
-            <a:off x="1419225" y="4210050"/>
+                <a16:creationId xmlns:a16="http://schemas.microsoft.com/office/drawing/2014/main" id="{383D15A7-D6A6-42A5-9079-8B5BBD3AC9CD}"/>
+              </a:ext>
+            </a:extLst>
+          </p:cNvPr>
+          <p:cNvSpPr>
+            <a:spLocks xmlns:a="http://schemas.openxmlformats.org/drawingml/2006/main" noGrp="1"/>
+          </p:cNvSpPr>
+          <p:nvPr/>
+        </p:nvSpPr>
+        <p:spPr>
+          <a:xfrm xmlns:a="http://schemas.openxmlformats.org/drawingml/2006/main">
+            <a:off x="1419225" y="3695700"/>
             <a:ext cx="2590800" cy="361950"/>
           </a:xfrm>
           <a:prstGeom xmlns:a="http://schemas.openxmlformats.org/drawingml/2006/main" prst="rect">
@@ -16496,18 +18674,18 @@
           <p:cNvPr id="22" name="">
             <a:extLst xmlns:a="http://schemas.openxmlformats.org/drawingml/2006/main">
               <a:ext uri="{FF2B5EF4-FFF2-40B4-BE49-F238E27FC236}">
-                <a16:creationId xmlns:a16="http://schemas.microsoft.com/office/drawing/2014/main" id="{010AFCBD-F3F5-430B-8867-31DDF2197FE2}"/>
-              </a:ext>
-            </a:extLst>
-          </p:cNvPr>
-          <p:cNvSpPr>
-            <a:spLocks xmlns:a="http://schemas.openxmlformats.org/drawingml/2006/main" noGrp="1"/>
-          </p:cNvSpPr>
-          <p:nvPr/>
-        </p:nvSpPr>
-        <p:spPr>
-          <a:xfrm xmlns:a="http://schemas.openxmlformats.org/drawingml/2006/main">
-            <a:off x="4076700" y="4210050"/>
+                <a16:creationId xmlns:a16="http://schemas.microsoft.com/office/drawing/2014/main" id="{C4953DE9-4194-4E48-8E28-2AAC60BF54B5}"/>
+              </a:ext>
+            </a:extLst>
+          </p:cNvPr>
+          <p:cNvSpPr>
+            <a:spLocks xmlns:a="http://schemas.openxmlformats.org/drawingml/2006/main" noGrp="1"/>
+          </p:cNvSpPr>
+          <p:nvPr/>
+        </p:nvSpPr>
+        <p:spPr>
+          <a:xfrm xmlns:a="http://schemas.openxmlformats.org/drawingml/2006/main">
+            <a:off x="4076700" y="3695700"/>
             <a:ext cx="7010400" cy="361950"/>
           </a:xfrm>
           <a:prstGeom xmlns:a="http://schemas.openxmlformats.org/drawingml/2006/main" prst="rect">
@@ -16555,7 +18733,7 @@
                 <a:ea typeface="Arial"/>
                 <a:cs typeface="Arial"/>
               </a:rPr>
-              <a:t>10 training tablets × ₹6; GST ₹3</a:t>
+              <a:t>10 tablets × ₹6; ₹60 in the inpatient care bill</a:t>
             </a:r>
           </a:p>
         </p:txBody>
@@ -16565,23 +18743,23 @@
           <p:cNvPr id="23" name="">
             <a:extLst xmlns:a="http://schemas.openxmlformats.org/drawingml/2006/main">
               <a:ext uri="{FF2B5EF4-FFF2-40B4-BE49-F238E27FC236}">
-                <a16:creationId xmlns:a16="http://schemas.microsoft.com/office/drawing/2014/main" id="{3104A145-0EA0-446B-AFD0-EBBD99C1AAEC}"/>
-              </a:ext>
-            </a:extLst>
-          </p:cNvPr>
-          <p:cNvSpPr>
-            <a:spLocks xmlns:a="http://schemas.openxmlformats.org/drawingml/2006/main" noGrp="1"/>
-          </p:cNvSpPr>
-          <p:nvPr/>
-        </p:nvSpPr>
-        <p:spPr>
-          <a:xfrm xmlns:a="http://schemas.openxmlformats.org/drawingml/2006/main">
-            <a:off x="723900" y="4876800"/>
-            <a:ext cx="10734675" cy="657225"/>
+                <a16:creationId xmlns:a16="http://schemas.microsoft.com/office/drawing/2014/main" id="{49B2104B-C14A-4AB0-B3D7-DAFACA9E33B2}"/>
+              </a:ext>
+            </a:extLst>
+          </p:cNvPr>
+          <p:cNvSpPr>
+            <a:spLocks xmlns:a="http://schemas.openxmlformats.org/drawingml/2006/main" noGrp="1"/>
+          </p:cNvSpPr>
+          <p:nvPr/>
+        </p:nvSpPr>
+        <p:spPr>
+          <a:xfrm xmlns:a="http://schemas.openxmlformats.org/drawingml/2006/main">
+            <a:off x="723900" y="4286250"/>
+            <a:ext cx="10734675" cy="600075"/>
           </a:xfrm>
           <a:prstGeom xmlns:a="http://schemas.openxmlformats.org/drawingml/2006/main" prst="roundRect">
             <a:avLst>
-              <a:gd name="adj" fmla="val 10145"/>
+              <a:gd name="adj" fmla="val 11111"/>
             </a:avLst>
           </a:prstGeom>
           <a:solidFill xmlns:a="http://schemas.openxmlformats.org/drawingml/2006/main">
@@ -16598,18 +18776,18 @@
           <p:cNvPr id="24" name="">
             <a:extLst xmlns:a="http://schemas.openxmlformats.org/drawingml/2006/main">
               <a:ext uri="{FF2B5EF4-FFF2-40B4-BE49-F238E27FC236}">
-                <a16:creationId xmlns:a16="http://schemas.microsoft.com/office/drawing/2014/main" id="{ED2C1EDD-434C-4792-95DF-96AE00B3932C}"/>
-              </a:ext>
-            </a:extLst>
-          </p:cNvPr>
-          <p:cNvSpPr>
-            <a:spLocks xmlns:a="http://schemas.openxmlformats.org/drawingml/2006/main" noGrp="1"/>
-          </p:cNvSpPr>
-          <p:nvPr/>
-        </p:nvSpPr>
-        <p:spPr>
-          <a:xfrm xmlns:a="http://schemas.openxmlformats.org/drawingml/2006/main">
-            <a:off x="866775" y="5019675"/>
+                <a16:creationId xmlns:a16="http://schemas.microsoft.com/office/drawing/2014/main" id="{BC0F19C4-788F-430E-9556-37BAEB20B345}"/>
+              </a:ext>
+            </a:extLst>
+          </p:cNvPr>
+          <p:cNvSpPr>
+            <a:spLocks xmlns:a="http://schemas.openxmlformats.org/drawingml/2006/main" noGrp="1"/>
+          </p:cNvSpPr>
+          <p:nvPr/>
+        </p:nvSpPr>
+        <p:spPr>
+          <a:xfrm xmlns:a="http://schemas.openxmlformats.org/drawingml/2006/main">
+            <a:off x="866775" y="4400550"/>
             <a:ext cx="381000" cy="381000"/>
           </a:xfrm>
           <a:prstGeom xmlns:a="http://schemas.openxmlformats.org/drawingml/2006/main" prst="ellipse">
@@ -16629,18 +18807,18 @@
           <p:cNvPr id="25" name="">
             <a:extLst xmlns:a="http://schemas.openxmlformats.org/drawingml/2006/main">
               <a:ext uri="{FF2B5EF4-FFF2-40B4-BE49-F238E27FC236}">
-                <a16:creationId xmlns:a16="http://schemas.microsoft.com/office/drawing/2014/main" id="{694E4685-A15D-46F9-B345-85C3240215E6}"/>
-              </a:ext>
-            </a:extLst>
-          </p:cNvPr>
-          <p:cNvSpPr>
-            <a:spLocks xmlns:a="http://schemas.openxmlformats.org/drawingml/2006/main" noGrp="1"/>
-          </p:cNvSpPr>
-          <p:nvPr/>
-        </p:nvSpPr>
-        <p:spPr>
-          <a:xfrm xmlns:a="http://schemas.openxmlformats.org/drawingml/2006/main">
-            <a:off x="866775" y="5095875"/>
+                <a16:creationId xmlns:a16="http://schemas.microsoft.com/office/drawing/2014/main" id="{E7CF19AE-8524-4264-931C-EE9E1885CBC1}"/>
+              </a:ext>
+            </a:extLst>
+          </p:cNvPr>
+          <p:cNvSpPr>
+            <a:spLocks xmlns:a="http://schemas.openxmlformats.org/drawingml/2006/main" noGrp="1"/>
+          </p:cNvSpPr>
+          <p:nvPr/>
+        </p:nvSpPr>
+        <p:spPr>
+          <a:xfrm xmlns:a="http://schemas.openxmlformats.org/drawingml/2006/main">
+            <a:off x="866775" y="4476750"/>
             <a:ext cx="381000" cy="190500"/>
           </a:xfrm>
           <a:prstGeom xmlns:a="http://schemas.openxmlformats.org/drawingml/2006/main" prst="rect">
@@ -16698,18 +18876,18 @@
           <p:cNvPr id="26" name="">
             <a:extLst xmlns:a="http://schemas.openxmlformats.org/drawingml/2006/main">
               <a:ext uri="{FF2B5EF4-FFF2-40B4-BE49-F238E27FC236}">
-                <a16:creationId xmlns:a16="http://schemas.microsoft.com/office/drawing/2014/main" id="{3EE6F20C-A5BB-4637-8067-7D3AF3F534B7}"/>
-              </a:ext>
-            </a:extLst>
-          </p:cNvPr>
-          <p:cNvSpPr>
-            <a:spLocks xmlns:a="http://schemas.openxmlformats.org/drawingml/2006/main" noGrp="1"/>
-          </p:cNvSpPr>
-          <p:nvPr/>
-        </p:nvSpPr>
-        <p:spPr>
-          <a:xfrm xmlns:a="http://schemas.openxmlformats.org/drawingml/2006/main">
-            <a:off x="1419225" y="5019675"/>
+                <a16:creationId xmlns:a16="http://schemas.microsoft.com/office/drawing/2014/main" id="{443D262C-8E6B-4C26-B0D2-167A372B44AF}"/>
+              </a:ext>
+            </a:extLst>
+          </p:cNvPr>
+          <p:cNvSpPr>
+            <a:spLocks xmlns:a="http://schemas.openxmlformats.org/drawingml/2006/main" noGrp="1"/>
+          </p:cNvSpPr>
+          <p:nvPr/>
+        </p:nvSpPr>
+        <p:spPr>
+          <a:xfrm xmlns:a="http://schemas.openxmlformats.org/drawingml/2006/main">
+            <a:off x="1419225" y="4410075"/>
             <a:ext cx="2590800" cy="361950"/>
           </a:xfrm>
           <a:prstGeom xmlns:a="http://schemas.openxmlformats.org/drawingml/2006/main" prst="rect">
@@ -16757,7 +18935,7 @@
                 <a:ea typeface="Arial"/>
                 <a:cs typeface="Arial"/>
               </a:rPr>
-              <a:t>Invoice</a:t>
+              <a:t>Bed</a:t>
             </a:r>
           </a:p>
         </p:txBody>
@@ -16767,18 +18945,18 @@
           <p:cNvPr id="27" name="">
             <a:extLst xmlns:a="http://schemas.openxmlformats.org/drawingml/2006/main">
               <a:ext uri="{FF2B5EF4-FFF2-40B4-BE49-F238E27FC236}">
-                <a16:creationId xmlns:a16="http://schemas.microsoft.com/office/drawing/2014/main" id="{0E5B9694-A78C-4881-B038-6372CE789E94}"/>
-              </a:ext>
-            </a:extLst>
-          </p:cNvPr>
-          <p:cNvSpPr>
-            <a:spLocks xmlns:a="http://schemas.openxmlformats.org/drawingml/2006/main" noGrp="1"/>
-          </p:cNvSpPr>
-          <p:nvPr/>
-        </p:nvSpPr>
-        <p:spPr>
-          <a:xfrm xmlns:a="http://schemas.openxmlformats.org/drawingml/2006/main">
-            <a:off x="4076700" y="5019675"/>
+                <a16:creationId xmlns:a16="http://schemas.microsoft.com/office/drawing/2014/main" id="{FDDE8B4C-A83E-4EFC-BF12-DE3D08529485}"/>
+              </a:ext>
+            </a:extLst>
+          </p:cNvPr>
+          <p:cNvSpPr>
+            <a:spLocks xmlns:a="http://schemas.openxmlformats.org/drawingml/2006/main" noGrp="1"/>
+          </p:cNvSpPr>
+          <p:nvPr/>
+        </p:nvSpPr>
+        <p:spPr>
+          <a:xfrm xmlns:a="http://schemas.openxmlformats.org/drawingml/2006/main">
+            <a:off x="4076700" y="4410075"/>
             <a:ext cx="7010400" cy="361950"/>
           </a:xfrm>
           <a:prstGeom xmlns:a="http://schemas.openxmlformats.org/drawingml/2006/main" prst="rect">
@@ -16826,7 +19004,7 @@
                 <a:ea typeface="Arial"/>
                 <a:cs typeface="Arial"/>
               </a:rPr>
-              <a:t>₹500 + ₹650 + ₹60 + ₹3 = ₹1,213</a:t>
+              <a:t>Private non-ICU room ₹6,000; GST ₹300</a:t>
             </a:r>
           </a:p>
         </p:txBody>
@@ -16836,19 +19014,152 @@
           <p:cNvPr id="28" name="">
             <a:extLst xmlns:a="http://schemas.openxmlformats.org/drawingml/2006/main">
               <a:ext uri="{FF2B5EF4-FFF2-40B4-BE49-F238E27FC236}">
-                <a16:creationId xmlns:a16="http://schemas.microsoft.com/office/drawing/2014/main" id="{26B234E9-7DE5-48C8-B7AA-5DFAD4467DE6}"/>
-              </a:ext>
-            </a:extLst>
-          </p:cNvPr>
-          <p:cNvSpPr>
-            <a:spLocks xmlns:a="http://schemas.openxmlformats.org/drawingml/2006/main" noGrp="1"/>
-          </p:cNvSpPr>
-          <p:nvPr/>
-        </p:nvSpPr>
-        <p:spPr>
-          <a:xfrm xmlns:a="http://schemas.openxmlformats.org/drawingml/2006/main">
-            <a:off x="742950" y="5886450"/>
-            <a:ext cx="10477500" cy="304800"/>
+                <a16:creationId xmlns:a16="http://schemas.microsoft.com/office/drawing/2014/main" id="{870CA6B5-3206-47CD-9906-72773DC09652}"/>
+              </a:ext>
+            </a:extLst>
+          </p:cNvPr>
+          <p:cNvSpPr>
+            <a:spLocks xmlns:a="http://schemas.openxmlformats.org/drawingml/2006/main" noGrp="1"/>
+          </p:cNvSpPr>
+          <p:nvPr/>
+        </p:nvSpPr>
+        <p:spPr>
+          <a:xfrm xmlns:a="http://schemas.openxmlformats.org/drawingml/2006/main">
+            <a:off x="723900" y="5000625"/>
+            <a:ext cx="10734675" cy="600075"/>
+          </a:xfrm>
+          <a:prstGeom xmlns:a="http://schemas.openxmlformats.org/drawingml/2006/main" prst="roundRect">
+            <a:avLst>
+              <a:gd name="adj" fmla="val 11111"/>
+            </a:avLst>
+          </a:prstGeom>
+          <a:solidFill xmlns:a="http://schemas.openxmlformats.org/drawingml/2006/main">
+            <a:srgbClr val="F2F6F5"/>
+          </a:solidFill>
+          <a:ln xmlns:a="http://schemas.openxmlformats.org/drawingml/2006/main" w="0">
+            <a:noFill/>
+            <a:prstDash val="solid"/>
+          </a:ln>
+        </p:spPr>
+      </p:sp>
+      <p:sp>
+        <p:nvSpPr>
+          <p:cNvPr id="29" name="">
+            <a:extLst xmlns:a="http://schemas.openxmlformats.org/drawingml/2006/main">
+              <a:ext uri="{FF2B5EF4-FFF2-40B4-BE49-F238E27FC236}">
+                <a16:creationId xmlns:a16="http://schemas.microsoft.com/office/drawing/2014/main" id="{C18CB34F-E633-44B2-A980-B5966A9C7977}"/>
+              </a:ext>
+            </a:extLst>
+          </p:cNvPr>
+          <p:cNvSpPr>
+            <a:spLocks xmlns:a="http://schemas.openxmlformats.org/drawingml/2006/main" noGrp="1"/>
+          </p:cNvSpPr>
+          <p:nvPr/>
+        </p:nvSpPr>
+        <p:spPr>
+          <a:xfrm xmlns:a="http://schemas.openxmlformats.org/drawingml/2006/main">
+            <a:off x="866775" y="5114925"/>
+            <a:ext cx="381000" cy="381000"/>
+          </a:xfrm>
+          <a:prstGeom xmlns:a="http://schemas.openxmlformats.org/drawingml/2006/main" prst="ellipse">
+            <a:avLst/>
+          </a:prstGeom>
+          <a:solidFill xmlns:a="http://schemas.openxmlformats.org/drawingml/2006/main">
+            <a:srgbClr val="267C82"/>
+          </a:solidFill>
+          <a:ln xmlns:a="http://schemas.openxmlformats.org/drawingml/2006/main" w="0">
+            <a:noFill/>
+            <a:prstDash val="solid"/>
+          </a:ln>
+        </p:spPr>
+      </p:sp>
+      <p:sp>
+        <p:nvSpPr>
+          <p:cNvPr id="30" name="">
+            <a:extLst xmlns:a="http://schemas.openxmlformats.org/drawingml/2006/main">
+              <a:ext uri="{FF2B5EF4-FFF2-40B4-BE49-F238E27FC236}">
+                <a16:creationId xmlns:a16="http://schemas.microsoft.com/office/drawing/2014/main" id="{25B05C3D-2763-4D29-9FB7-2253D7574C7E}"/>
+              </a:ext>
+            </a:extLst>
+          </p:cNvPr>
+          <p:cNvSpPr>
+            <a:spLocks xmlns:a="http://schemas.openxmlformats.org/drawingml/2006/main" noGrp="1"/>
+          </p:cNvSpPr>
+          <p:nvPr/>
+        </p:nvSpPr>
+        <p:spPr>
+          <a:xfrm xmlns:a="http://schemas.openxmlformats.org/drawingml/2006/main">
+            <a:off x="866775" y="5191125"/>
+            <a:ext cx="381000" cy="190500"/>
+          </a:xfrm>
+          <a:prstGeom xmlns:a="http://schemas.openxmlformats.org/drawingml/2006/main" prst="rect">
+            <a:avLst/>
+          </a:prstGeom>
+          <a:noFill xmlns:a="http://schemas.openxmlformats.org/drawingml/2006/main"/>
+          <a:ln xmlns:a="http://schemas.openxmlformats.org/drawingml/2006/main" w="0">
+            <a:noFill/>
+            <a:prstDash val="solid"/>
+          </a:ln>
+        </p:spPr>
+        <p:txBody>
+          <a:bodyPr xmlns:a="http://schemas.openxmlformats.org/drawingml/2006/main" lIns="0" tIns="0" rIns="0" bIns="0" anchor="t">
+            <a:normAutofit fontScale="100000"/>
+          </a:bodyPr>
+          <a:lstStyle xmlns:a="http://schemas.openxmlformats.org/drawingml/2006/main">
+            <a:defPPr algn="ctr">
+              <a:defRPr sz="1125" b="1">
+                <a:solidFill>
+                  <a:srgbClr val="FFFFFF"/>
+                </a:solidFill>
+                <a:latin typeface="Arial"/>
+                <a:ea typeface="Arial"/>
+                <a:cs typeface="Arial"/>
+              </a:defRPr>
+            </a:defPPr>
+          </a:lstStyle>
+          <a:p xmlns:a="http://schemas.openxmlformats.org/drawingml/2006/main">
+            <a:pPr algn="ctr">
+              <a:defRPr sz="1125" b="1">
+                <a:solidFill>
+                  <a:srgbClr val="FFFFFF"/>
+                </a:solidFill>
+                <a:latin typeface="Arial"/>
+                <a:ea typeface="Arial"/>
+                <a:cs typeface="Arial"/>
+              </a:defRPr>
+            </a:pPr>
+            <a:r>
+              <a:rPr sz="1125" b="1">
+                <a:solidFill>
+                  <a:srgbClr val="FFFFFF"/>
+                </a:solidFill>
+                <a:latin typeface="Arial"/>
+                <a:ea typeface="Arial"/>
+                <a:cs typeface="Arial"/>
+              </a:rPr>
+              <a:t>05</a:t>
+            </a:r>
+          </a:p>
+        </p:txBody>
+      </p:sp>
+      <p:sp>
+        <p:nvSpPr>
+          <p:cNvPr id="31" name="">
+            <a:extLst xmlns:a="http://schemas.openxmlformats.org/drawingml/2006/main">
+              <a:ext uri="{FF2B5EF4-FFF2-40B4-BE49-F238E27FC236}">
+                <a16:creationId xmlns:a16="http://schemas.microsoft.com/office/drawing/2014/main" id="{55E84219-9F4F-47AC-ACD7-252CD349C247}"/>
+              </a:ext>
+            </a:extLst>
+          </p:cNvPr>
+          <p:cNvSpPr>
+            <a:spLocks xmlns:a="http://schemas.openxmlformats.org/drawingml/2006/main" noGrp="1"/>
+          </p:cNvSpPr>
+          <p:nvPr/>
+        </p:nvSpPr>
+        <p:spPr>
+          <a:xfrm xmlns:a="http://schemas.openxmlformats.org/drawingml/2006/main">
+            <a:off x="1419225" y="5124450"/>
+            <a:ext cx="2590800" cy="361950"/>
           </a:xfrm>
           <a:prstGeom xmlns:a="http://schemas.openxmlformats.org/drawingml/2006/main" prst="rect">
             <a:avLst/>
@@ -16865,7 +19176,145 @@
           </a:bodyPr>
           <a:lstStyle xmlns:a="http://schemas.openxmlformats.org/drawingml/2006/main">
             <a:defPPr algn="l">
-              <a:defRPr sz="1425" b="1">
+              <a:defRPr sz="1575" b="1">
+                <a:solidFill>
+                  <a:srgbClr val="17323E"/>
+                </a:solidFill>
+                <a:latin typeface="Arial"/>
+                <a:ea typeface="Arial"/>
+                <a:cs typeface="Arial"/>
+              </a:defRPr>
+            </a:defPPr>
+          </a:lstStyle>
+          <a:p xmlns:a="http://schemas.openxmlformats.org/drawingml/2006/main">
+            <a:pPr algn="l">
+              <a:defRPr sz="1575" b="1">
+                <a:solidFill>
+                  <a:srgbClr val="17323E"/>
+                </a:solidFill>
+                <a:latin typeface="Arial"/>
+                <a:ea typeface="Arial"/>
+                <a:cs typeface="Arial"/>
+              </a:defRPr>
+            </a:pPr>
+            <a:r>
+              <a:rPr sz="1575" b="1">
+                <a:solidFill>
+                  <a:srgbClr val="17323E"/>
+                </a:solidFill>
+                <a:latin typeface="Arial"/>
+                <a:ea typeface="Arial"/>
+                <a:cs typeface="Arial"/>
+              </a:rPr>
+              <a:t>Invoice</a:t>
+            </a:r>
+          </a:p>
+        </p:txBody>
+      </p:sp>
+      <p:sp>
+        <p:nvSpPr>
+          <p:cNvPr id="32" name="">
+            <a:extLst xmlns:a="http://schemas.openxmlformats.org/drawingml/2006/main">
+              <a:ext uri="{FF2B5EF4-FFF2-40B4-BE49-F238E27FC236}">
+                <a16:creationId xmlns:a16="http://schemas.microsoft.com/office/drawing/2014/main" id="{05BB1211-3B94-41FE-A46D-7AAF6868669E}"/>
+              </a:ext>
+            </a:extLst>
+          </p:cNvPr>
+          <p:cNvSpPr>
+            <a:spLocks xmlns:a="http://schemas.openxmlformats.org/drawingml/2006/main" noGrp="1"/>
+          </p:cNvSpPr>
+          <p:nvPr/>
+        </p:nvSpPr>
+        <p:spPr>
+          <a:xfrm xmlns:a="http://schemas.openxmlformats.org/drawingml/2006/main">
+            <a:off x="4076700" y="5124450"/>
+            <a:ext cx="7010400" cy="361950"/>
+          </a:xfrm>
+          <a:prstGeom xmlns:a="http://schemas.openxmlformats.org/drawingml/2006/main" prst="rect">
+            <a:avLst/>
+          </a:prstGeom>
+          <a:noFill xmlns:a="http://schemas.openxmlformats.org/drawingml/2006/main"/>
+          <a:ln xmlns:a="http://schemas.openxmlformats.org/drawingml/2006/main" w="0">
+            <a:noFill/>
+            <a:prstDash val="solid"/>
+          </a:ln>
+        </p:spPr>
+        <p:txBody>
+          <a:bodyPr xmlns:a="http://schemas.openxmlformats.org/drawingml/2006/main" lIns="0" tIns="0" rIns="0" bIns="0" anchor="t">
+            <a:normAutofit fontScale="100000"/>
+          </a:bodyPr>
+          <a:lstStyle xmlns:a="http://schemas.openxmlformats.org/drawingml/2006/main">
+            <a:defPPr algn="l">
+              <a:defRPr sz="1500" b="0">
+                <a:solidFill>
+                  <a:srgbClr val="1D303A"/>
+                </a:solidFill>
+                <a:latin typeface="Arial"/>
+                <a:ea typeface="Arial"/>
+                <a:cs typeface="Arial"/>
+              </a:defRPr>
+            </a:defPPr>
+          </a:lstStyle>
+          <a:p xmlns:a="http://schemas.openxmlformats.org/drawingml/2006/main">
+            <a:pPr algn="l">
+              <a:defRPr sz="1500" b="0">
+                <a:solidFill>
+                  <a:srgbClr val="1D303A"/>
+                </a:solidFill>
+                <a:latin typeface="Arial"/>
+                <a:ea typeface="Arial"/>
+                <a:cs typeface="Arial"/>
+              </a:defRPr>
+            </a:pPr>
+            <a:r>
+              <a:rPr sz="1500" b="0">
+                <a:solidFill>
+                  <a:srgbClr val="1D303A"/>
+                </a:solidFill>
+                <a:latin typeface="Arial"/>
+                <a:ea typeface="Arial"/>
+                <a:cs typeface="Arial"/>
+              </a:rPr>
+              <a:t>₹500 + ₹650 + ₹60 + ₹6,000 + ₹300 = ₹7,510</a:t>
+            </a:r>
+          </a:p>
+        </p:txBody>
+      </p:sp>
+      <p:sp>
+        <p:nvSpPr>
+          <p:cNvPr id="33" name="">
+            <a:extLst xmlns:a="http://schemas.openxmlformats.org/drawingml/2006/main">
+              <a:ext uri="{FF2B5EF4-FFF2-40B4-BE49-F238E27FC236}">
+                <a16:creationId xmlns:a16="http://schemas.microsoft.com/office/drawing/2014/main" id="{1B591D6D-38F2-4007-91AF-EB37D5EBD169}"/>
+              </a:ext>
+            </a:extLst>
+          </p:cNvPr>
+          <p:cNvSpPr>
+            <a:spLocks xmlns:a="http://schemas.openxmlformats.org/drawingml/2006/main" noGrp="1"/>
+          </p:cNvSpPr>
+          <p:nvPr/>
+        </p:nvSpPr>
+        <p:spPr>
+          <a:xfrm xmlns:a="http://schemas.openxmlformats.org/drawingml/2006/main">
+            <a:off x="742950" y="5848350"/>
+            <a:ext cx="10477500" cy="333375"/>
+          </a:xfrm>
+          <a:prstGeom xmlns:a="http://schemas.openxmlformats.org/drawingml/2006/main" prst="rect">
+            <a:avLst/>
+          </a:prstGeom>
+          <a:noFill xmlns:a="http://schemas.openxmlformats.org/drawingml/2006/main"/>
+          <a:ln xmlns:a="http://schemas.openxmlformats.org/drawingml/2006/main" w="0">
+            <a:noFill/>
+            <a:prstDash val="solid"/>
+          </a:ln>
+        </p:spPr>
+        <p:txBody>
+          <a:bodyPr xmlns:a="http://schemas.openxmlformats.org/drawingml/2006/main" lIns="0" tIns="0" rIns="0" bIns="0" anchor="t">
+            <a:normAutofit fontScale="100000"/>
+          </a:bodyPr>
+          <a:lstStyle xmlns:a="http://schemas.openxmlformats.org/drawingml/2006/main">
+            <a:defPPr algn="l">
+              <a:defRPr sz="1275" b="1">
                 <a:solidFill>
                   <a:srgbClr val="1C5B66"/>
                 </a:solidFill>
@@ -16877,7 +19326,7 @@
           </a:lstStyle>
           <a:p xmlns:a="http://schemas.openxmlformats.org/drawingml/2006/main">
             <a:pPr algn="l">
-              <a:defRPr sz="1425" b="1">
+              <a:defRPr sz="1275" b="1">
                 <a:solidFill>
                   <a:srgbClr val="1C5B66"/>
                 </a:solidFill>
@@ -16887,7 +19336,7 @@
               </a:defRPr>
             </a:pPr>
             <a:r>
-              <a:rPr sz="1425" b="1">
+              <a:rPr sz="1275" b="1">
                 <a:solidFill>
                   <a:srgbClr val="1C5B66"/>
                 </a:solidFill>
@@ -16895,7 +19344,7 @@
                 <a:ea typeface="Arial"/>
                 <a:cs typeface="Arial"/>
               </a:rPr>
-              <a:t>CPT 83036 is an optional reference. HBA1C is the hospital code that sets the lab price.</a:t>
+              <a:t>CPT 83036 is optional. The hospital HBA1C code sets the lab price. The room rule is a training assumption.</a:t>
             </a:r>
           </a:p>
         </p:txBody>
@@ -16903,7 +19352,7 @@
     </p:spTree>
     <p:extLst>
       <p:ext uri="{BB962C8B-B14F-4D97-AF65-F5344CB8AC3E}">
-        <p14:creationId xmlns:p14="http://schemas.microsoft.com/office/powerpoint/2010/main" val="1730278814"/>
+        <p14:creationId xmlns:p14="http://schemas.microsoft.com/office/powerpoint/2010/main" val="426662762"/>
       </p:ext>
     </p:extLst>
   </p:cSld>
@@ -16934,7 +19383,7 @@
           <p:cNvPr id="30" name="">
             <a:extLst xmlns:a="http://schemas.openxmlformats.org/drawingml/2006/main">
               <a:ext uri="{FF2B5EF4-FFF2-40B4-BE49-F238E27FC236}">
-                <a16:creationId xmlns:a16="http://schemas.microsoft.com/office/drawing/2014/main" id="{2E4806B8-53BE-4087-B634-C21D0B3C3563}"/>
+                <a16:creationId xmlns:a16="http://schemas.microsoft.com/office/drawing/2014/main" id="{BF5B1E2C-8AF4-42F9-A27E-78A145706D2B}"/>
               </a:ext>
             </a:extLst>
           </p:cNvPr>
@@ -16965,7 +19414,7 @@
           <p:cNvPr id="2" name="">
             <a:extLst xmlns:a="http://schemas.openxmlformats.org/drawingml/2006/main">
               <a:ext uri="{FF2B5EF4-FFF2-40B4-BE49-F238E27FC236}">
-                <a16:creationId xmlns:a16="http://schemas.microsoft.com/office/drawing/2014/main" id="{29C5B0A2-C5D2-4010-BEB9-471E5E52C5CF}"/>
+                <a16:creationId xmlns:a16="http://schemas.microsoft.com/office/drawing/2014/main" id="{C9A36AB5-1BDF-4D81-A46F-E15AAB01A397}"/>
               </a:ext>
             </a:extLst>
           </p:cNvPr>
@@ -17034,7 +19483,7 @@
           <p:cNvPr id="3" name="">
             <a:extLst xmlns:a="http://schemas.openxmlformats.org/drawingml/2006/main">
               <a:ext uri="{FF2B5EF4-FFF2-40B4-BE49-F238E27FC236}">
-                <a16:creationId xmlns:a16="http://schemas.microsoft.com/office/drawing/2014/main" id="{978D3C67-D00E-4041-9697-BAAD13F498E2}"/>
+                <a16:creationId xmlns:a16="http://schemas.microsoft.com/office/drawing/2014/main" id="{2EDE15AF-C1F7-4CD7-A0CF-B58F55F672E6}"/>
               </a:ext>
             </a:extLst>
           </p:cNvPr>
@@ -17103,7 +19552,7 @@
           <p:cNvPr id="4" name="">
             <a:extLst xmlns:a="http://schemas.openxmlformats.org/drawingml/2006/main">
               <a:ext uri="{FF2B5EF4-FFF2-40B4-BE49-F238E27FC236}">
-                <a16:creationId xmlns:a16="http://schemas.microsoft.com/office/drawing/2014/main" id="{55D871CC-EF41-486F-993D-634BF74AC484}"/>
+                <a16:creationId xmlns:a16="http://schemas.microsoft.com/office/drawing/2014/main" id="{80339EA7-814B-4519-9BC8-FA05EF74E073}"/>
               </a:ext>
             </a:extLst>
           </p:cNvPr>
@@ -17134,7 +19583,7 @@
           <p:cNvPr id="5" name="">
             <a:extLst xmlns:a="http://schemas.openxmlformats.org/drawingml/2006/main">
               <a:ext uri="{FF2B5EF4-FFF2-40B4-BE49-F238E27FC236}">
-                <a16:creationId xmlns:a16="http://schemas.microsoft.com/office/drawing/2014/main" id="{0E60F374-28DC-4636-8BFC-ADA355E2406C}"/>
+                <a16:creationId xmlns:a16="http://schemas.microsoft.com/office/drawing/2014/main" id="{885AEE80-C4AD-4085-B9FD-3E8E20A5856D}"/>
               </a:ext>
             </a:extLst>
           </p:cNvPr>
@@ -17203,7 +19652,7 @@
           <p:cNvPr id="6" name="">
             <a:extLst xmlns:a="http://schemas.openxmlformats.org/drawingml/2006/main">
               <a:ext uri="{FF2B5EF4-FFF2-40B4-BE49-F238E27FC236}">
-                <a16:creationId xmlns:a16="http://schemas.microsoft.com/office/drawing/2014/main" id="{C9CAA2D3-B235-46A9-A0AB-2DF6A934DC06}"/>
+                <a16:creationId xmlns:a16="http://schemas.microsoft.com/office/drawing/2014/main" id="{73985F3D-4BBE-41CE-8D0A-5780E8233A2D}"/>
               </a:ext>
             </a:extLst>
           </p:cNvPr>
@@ -17272,7 +19721,7 @@
           <p:cNvPr id="7" name="">
             <a:extLst xmlns:a="http://schemas.openxmlformats.org/drawingml/2006/main">
               <a:ext uri="{FF2B5EF4-FFF2-40B4-BE49-F238E27FC236}">
-                <a16:creationId xmlns:a16="http://schemas.microsoft.com/office/drawing/2014/main" id="{8E99F27D-58D8-4D25-AB08-905BE301BD7F}"/>
+                <a16:creationId xmlns:a16="http://schemas.microsoft.com/office/drawing/2014/main" id="{A829516D-0858-410F-907B-81FE6EB48E33}"/>
               </a:ext>
             </a:extLst>
           </p:cNvPr>
@@ -17341,7 +19790,7 @@
           <p:cNvPr id="8" name="">
             <a:extLst xmlns:a="http://schemas.openxmlformats.org/drawingml/2006/main">
               <a:ext uri="{FF2B5EF4-FFF2-40B4-BE49-F238E27FC236}">
-                <a16:creationId xmlns:a16="http://schemas.microsoft.com/office/drawing/2014/main" id="{A56EBC1E-6AF6-481E-AEF7-6A080D207BBF}"/>
+                <a16:creationId xmlns:a16="http://schemas.microsoft.com/office/drawing/2014/main" id="{0D8B94F2-C2E3-472C-B166-9101A451A34E}"/>
               </a:ext>
             </a:extLst>
           </p:cNvPr>
@@ -17374,7 +19823,7 @@
           <p:cNvPr id="9" name="">
             <a:extLst xmlns:a="http://schemas.openxmlformats.org/drawingml/2006/main">
               <a:ext uri="{FF2B5EF4-FFF2-40B4-BE49-F238E27FC236}">
-                <a16:creationId xmlns:a16="http://schemas.microsoft.com/office/drawing/2014/main" id="{D4F16341-34D2-4FA6-97BF-829681D847B2}"/>
+                <a16:creationId xmlns:a16="http://schemas.microsoft.com/office/drawing/2014/main" id="{45217A2A-A979-47E1-A362-B969588FA88B}"/>
               </a:ext>
             </a:extLst>
           </p:cNvPr>
@@ -17405,7 +19854,7 @@
           <p:cNvPr id="10" name="">
             <a:extLst xmlns:a="http://schemas.openxmlformats.org/drawingml/2006/main">
               <a:ext uri="{FF2B5EF4-FFF2-40B4-BE49-F238E27FC236}">
-                <a16:creationId xmlns:a16="http://schemas.microsoft.com/office/drawing/2014/main" id="{C2041151-3193-4E04-A846-C089D2F2D066}"/>
+                <a16:creationId xmlns:a16="http://schemas.microsoft.com/office/drawing/2014/main" id="{5B175877-056E-4BBC-BCC6-F774DFE62EF0}"/>
               </a:ext>
             </a:extLst>
           </p:cNvPr>
@@ -17474,7 +19923,7 @@
           <p:cNvPr id="11" name="">
             <a:extLst xmlns:a="http://schemas.openxmlformats.org/drawingml/2006/main">
               <a:ext uri="{FF2B5EF4-FFF2-40B4-BE49-F238E27FC236}">
-                <a16:creationId xmlns:a16="http://schemas.microsoft.com/office/drawing/2014/main" id="{4C1407AF-38E1-47DE-89C2-D47BEB7C4239}"/>
+                <a16:creationId xmlns:a16="http://schemas.microsoft.com/office/drawing/2014/main" id="{3F5D0D47-98CD-4851-AC6B-DD2C6BA19AF6}"/>
               </a:ext>
             </a:extLst>
           </p:cNvPr>
@@ -17543,7 +19992,7 @@
           <p:cNvPr id="12" name="">
             <a:extLst xmlns:a="http://schemas.openxmlformats.org/drawingml/2006/main">
               <a:ext uri="{FF2B5EF4-FFF2-40B4-BE49-F238E27FC236}">
-                <a16:creationId xmlns:a16="http://schemas.microsoft.com/office/drawing/2014/main" id="{DDF47B25-155C-4430-BD8B-4D803B48C02A}"/>
+                <a16:creationId xmlns:a16="http://schemas.microsoft.com/office/drawing/2014/main" id="{B32B1D56-E5DB-4A1A-9932-4A76775FF838}"/>
               </a:ext>
             </a:extLst>
           </p:cNvPr>
@@ -17602,7 +20051,7 @@
                 <a:ea typeface="Arial"/>
                 <a:cs typeface="Arial"/>
               </a:rPr>
-              <a:t>Records the encounter, diagnosis and orders.</a:t>
+              <a:t>Records the admission, diagnosis and orders.</a:t>
             </a:r>
           </a:p>
         </p:txBody>
@@ -17612,7 +20061,7 @@
           <p:cNvPr id="13" name="">
             <a:extLst xmlns:a="http://schemas.openxmlformats.org/drawingml/2006/main">
               <a:ext uri="{FF2B5EF4-FFF2-40B4-BE49-F238E27FC236}">
-                <a16:creationId xmlns:a16="http://schemas.microsoft.com/office/drawing/2014/main" id="{CFA7DCD6-05DD-4B81-BCAA-22A266C3AB61}"/>
+                <a16:creationId xmlns:a16="http://schemas.microsoft.com/office/drawing/2014/main" id="{39C65C4D-E50B-49D1-BB23-214FC35F0FB6}"/>
               </a:ext>
             </a:extLst>
           </p:cNvPr>
@@ -17645,7 +20094,7 @@
           <p:cNvPr id="14" name="">
             <a:extLst xmlns:a="http://schemas.openxmlformats.org/drawingml/2006/main">
               <a:ext uri="{FF2B5EF4-FFF2-40B4-BE49-F238E27FC236}">
-                <a16:creationId xmlns:a16="http://schemas.microsoft.com/office/drawing/2014/main" id="{111C1476-AC31-44BE-AB10-30EF595F1CC9}"/>
+                <a16:creationId xmlns:a16="http://schemas.microsoft.com/office/drawing/2014/main" id="{F69C1CFF-29FD-422D-890A-BFB21A62D7F8}"/>
               </a:ext>
             </a:extLst>
           </p:cNvPr>
@@ -17676,7 +20125,7 @@
           <p:cNvPr id="15" name="">
             <a:extLst xmlns:a="http://schemas.openxmlformats.org/drawingml/2006/main">
               <a:ext uri="{FF2B5EF4-FFF2-40B4-BE49-F238E27FC236}">
-                <a16:creationId xmlns:a16="http://schemas.microsoft.com/office/drawing/2014/main" id="{EDC86763-014D-4BCE-9555-05FE6AF16F8B}"/>
+                <a16:creationId xmlns:a16="http://schemas.microsoft.com/office/drawing/2014/main" id="{6F50C3E5-461D-4824-B33E-6AF7C479DA9F}"/>
               </a:ext>
             </a:extLst>
           </p:cNvPr>
@@ -17745,7 +20194,7 @@
           <p:cNvPr id="16" name="">
             <a:extLst xmlns:a="http://schemas.openxmlformats.org/drawingml/2006/main">
               <a:ext uri="{FF2B5EF4-FFF2-40B4-BE49-F238E27FC236}">
-                <a16:creationId xmlns:a16="http://schemas.microsoft.com/office/drawing/2014/main" id="{2D0776E2-8140-4119-8A7B-E5642D5CE79B}"/>
+                <a16:creationId xmlns:a16="http://schemas.microsoft.com/office/drawing/2014/main" id="{8209782C-2825-4C0F-BE26-C19571B46831}"/>
               </a:ext>
             </a:extLst>
           </p:cNvPr>
@@ -17814,7 +20263,7 @@
           <p:cNvPr id="17" name="">
             <a:extLst xmlns:a="http://schemas.openxmlformats.org/drawingml/2006/main">
               <a:ext uri="{FF2B5EF4-FFF2-40B4-BE49-F238E27FC236}">
-                <a16:creationId xmlns:a16="http://schemas.microsoft.com/office/drawing/2014/main" id="{2A07135C-74C1-4B33-B0D3-54498A91ED99}"/>
+                <a16:creationId xmlns:a16="http://schemas.microsoft.com/office/drawing/2014/main" id="{500650F8-C1CA-49BF-A09E-3CD63D645D7F}"/>
               </a:ext>
             </a:extLst>
           </p:cNvPr>
@@ -17883,7 +20332,7 @@
           <p:cNvPr id="18" name="">
             <a:extLst xmlns:a="http://schemas.openxmlformats.org/drawingml/2006/main">
               <a:ext uri="{FF2B5EF4-FFF2-40B4-BE49-F238E27FC236}">
-                <a16:creationId xmlns:a16="http://schemas.microsoft.com/office/drawing/2014/main" id="{0071FF70-98F1-47B9-9BB8-A5F8FAE62A6E}"/>
+                <a16:creationId xmlns:a16="http://schemas.microsoft.com/office/drawing/2014/main" id="{0523A29F-A4B1-4C73-9EE3-623E6D918543}"/>
               </a:ext>
             </a:extLst>
           </p:cNvPr>
@@ -17916,7 +20365,7 @@
           <p:cNvPr id="19" name="">
             <a:extLst xmlns:a="http://schemas.openxmlformats.org/drawingml/2006/main">
               <a:ext uri="{FF2B5EF4-FFF2-40B4-BE49-F238E27FC236}">
-                <a16:creationId xmlns:a16="http://schemas.microsoft.com/office/drawing/2014/main" id="{4BD70653-9F66-4595-A60D-2804165E952B}"/>
+                <a16:creationId xmlns:a16="http://schemas.microsoft.com/office/drawing/2014/main" id="{DB0E674F-9E50-4C37-A1AC-1D1C1D8E436E}"/>
               </a:ext>
             </a:extLst>
           </p:cNvPr>
@@ -17947,7 +20396,7 @@
           <p:cNvPr id="20" name="">
             <a:extLst xmlns:a="http://schemas.openxmlformats.org/drawingml/2006/main">
               <a:ext uri="{FF2B5EF4-FFF2-40B4-BE49-F238E27FC236}">
-                <a16:creationId xmlns:a16="http://schemas.microsoft.com/office/drawing/2014/main" id="{E94E6C3A-91E6-495C-A9AE-4216087FB64F}"/>
+                <a16:creationId xmlns:a16="http://schemas.microsoft.com/office/drawing/2014/main" id="{E4970681-6B2D-4623-9CBF-B03173EB36A9}"/>
               </a:ext>
             </a:extLst>
           </p:cNvPr>
@@ -18016,7 +20465,7 @@
           <p:cNvPr id="21" name="">
             <a:extLst xmlns:a="http://schemas.openxmlformats.org/drawingml/2006/main">
               <a:ext uri="{FF2B5EF4-FFF2-40B4-BE49-F238E27FC236}">
-                <a16:creationId xmlns:a16="http://schemas.microsoft.com/office/drawing/2014/main" id="{FFB8FD92-3B3C-4638-B0F3-364414274C8F}"/>
+                <a16:creationId xmlns:a16="http://schemas.microsoft.com/office/drawing/2014/main" id="{AD3D1AD6-EB61-4A33-8595-A0D83ED406D0}"/>
               </a:ext>
             </a:extLst>
           </p:cNvPr>
@@ -18085,7 +20534,7 @@
           <p:cNvPr id="22" name="">
             <a:extLst xmlns:a="http://schemas.openxmlformats.org/drawingml/2006/main">
               <a:ext uri="{FF2B5EF4-FFF2-40B4-BE49-F238E27FC236}">
-                <a16:creationId xmlns:a16="http://schemas.microsoft.com/office/drawing/2014/main" id="{0D910EF3-6B5E-4333-A988-D23E11F221EA}"/>
+                <a16:creationId xmlns:a16="http://schemas.microsoft.com/office/drawing/2014/main" id="{C701B533-A0E2-4229-8D77-ACDBFE5C05BD}"/>
               </a:ext>
             </a:extLst>
           </p:cNvPr>
@@ -18154,7 +20603,7 @@
           <p:cNvPr id="23" name="">
             <a:extLst xmlns:a="http://schemas.openxmlformats.org/drawingml/2006/main">
               <a:ext uri="{FF2B5EF4-FFF2-40B4-BE49-F238E27FC236}">
-                <a16:creationId xmlns:a16="http://schemas.microsoft.com/office/drawing/2014/main" id="{1C56BA86-5120-4D31-957F-B087B032F24F}"/>
+                <a16:creationId xmlns:a16="http://schemas.microsoft.com/office/drawing/2014/main" id="{0FF2F70F-1053-49C6-9A09-D10B2C4FC833}"/>
               </a:ext>
             </a:extLst>
           </p:cNvPr>
@@ -18187,7 +20636,7 @@
           <p:cNvPr id="24" name="">
             <a:extLst xmlns:a="http://schemas.openxmlformats.org/drawingml/2006/main">
               <a:ext uri="{FF2B5EF4-FFF2-40B4-BE49-F238E27FC236}">
-                <a16:creationId xmlns:a16="http://schemas.microsoft.com/office/drawing/2014/main" id="{1EEC3FEE-9332-4E57-B259-598E03464EFD}"/>
+                <a16:creationId xmlns:a16="http://schemas.microsoft.com/office/drawing/2014/main" id="{E71DB31C-341B-4D17-A673-D08E70F5CB87}"/>
               </a:ext>
             </a:extLst>
           </p:cNvPr>
@@ -18218,7 +20667,7 @@
           <p:cNvPr id="25" name="">
             <a:extLst xmlns:a="http://schemas.openxmlformats.org/drawingml/2006/main">
               <a:ext uri="{FF2B5EF4-FFF2-40B4-BE49-F238E27FC236}">
-                <a16:creationId xmlns:a16="http://schemas.microsoft.com/office/drawing/2014/main" id="{C6D18F62-E8A8-46F2-975D-37F06BE1D0E1}"/>
+                <a16:creationId xmlns:a16="http://schemas.microsoft.com/office/drawing/2014/main" id="{E2A637F2-C9BC-41FF-9032-E46194D94A23}"/>
               </a:ext>
             </a:extLst>
           </p:cNvPr>
@@ -18287,7 +20736,7 @@
           <p:cNvPr id="26" name="">
             <a:extLst xmlns:a="http://schemas.openxmlformats.org/drawingml/2006/main">
               <a:ext uri="{FF2B5EF4-FFF2-40B4-BE49-F238E27FC236}">
-                <a16:creationId xmlns:a16="http://schemas.microsoft.com/office/drawing/2014/main" id="{F3B8B873-76FC-44AC-8432-136E04B2C524}"/>
+                <a16:creationId xmlns:a16="http://schemas.microsoft.com/office/drawing/2014/main" id="{714FE1F2-C24F-4280-A17E-B4299457F51A}"/>
               </a:ext>
             </a:extLst>
           </p:cNvPr>
@@ -18356,7 +20805,7 @@
           <p:cNvPr id="27" name="">
             <a:extLst xmlns:a="http://schemas.openxmlformats.org/drawingml/2006/main">
               <a:ext uri="{FF2B5EF4-FFF2-40B4-BE49-F238E27FC236}">
-                <a16:creationId xmlns:a16="http://schemas.microsoft.com/office/drawing/2014/main" id="{95D58246-65F1-4B3D-8809-69C6C0106919}"/>
+                <a16:creationId xmlns:a16="http://schemas.microsoft.com/office/drawing/2014/main" id="{DCEDE1C9-0825-401B-A3AA-D8217717996B}"/>
               </a:ext>
             </a:extLst>
           </p:cNvPr>
@@ -18415,7 +20864,7 @@
                 <a:ea typeface="Arial"/>
                 <a:cs typeface="Arial"/>
               </a:rPr>
-              <a:t>Prices completed work and issues one invoice.</a:t>
+              <a:t>Adds the room stay and issues one invoice.</a:t>
             </a:r>
           </a:p>
         </p:txBody>
@@ -18425,7 +20874,7 @@
           <p:cNvPr id="28" name="">
             <a:extLst xmlns:a="http://schemas.openxmlformats.org/drawingml/2006/main">
               <a:ext uri="{FF2B5EF4-FFF2-40B4-BE49-F238E27FC236}">
-                <a16:creationId xmlns:a16="http://schemas.microsoft.com/office/drawing/2014/main" id="{CE437288-33E7-4FA4-8B55-098E4DC8EF74}"/>
+                <a16:creationId xmlns:a16="http://schemas.microsoft.com/office/drawing/2014/main" id="{ECC92A81-F527-498E-94E3-D7CA4518B82D}"/>
               </a:ext>
             </a:extLst>
           </p:cNvPr>
@@ -18458,7 +20907,7 @@
           <p:cNvPr id="29" name="">
             <a:extLst xmlns:a="http://schemas.openxmlformats.org/drawingml/2006/main">
               <a:ext uri="{FF2B5EF4-FFF2-40B4-BE49-F238E27FC236}">
-                <a16:creationId xmlns:a16="http://schemas.microsoft.com/office/drawing/2014/main" id="{2EC076CE-92C0-4886-9766-8F005D8BB84B}"/>
+                <a16:creationId xmlns:a16="http://schemas.microsoft.com/office/drawing/2014/main" id="{06BD3BCA-C8BA-4698-91CC-4917CBE76898}"/>
               </a:ext>
             </a:extLst>
           </p:cNvPr>
@@ -18525,7 +20974,7 @@
     </p:spTree>
     <p:extLst>
       <p:ext uri="{BB962C8B-B14F-4D97-AF65-F5344CB8AC3E}">
-        <p14:creationId xmlns:p14="http://schemas.microsoft.com/office/powerpoint/2010/main" val="107933491"/>
+        <p14:creationId xmlns:p14="http://schemas.microsoft.com/office/powerpoint/2010/main" val="2008747373"/>
       </p:ext>
     </p:extLst>
   </p:cSld>
@@ -18556,7 +21005,7 @@
           <p:cNvPr id="42" name="">
             <a:extLst xmlns:a="http://schemas.openxmlformats.org/drawingml/2006/main">
               <a:ext uri="{FF2B5EF4-FFF2-40B4-BE49-F238E27FC236}">
-                <a16:creationId xmlns:a16="http://schemas.microsoft.com/office/drawing/2014/main" id="{AA418E37-4BA8-42EC-A0C5-B42528630957}"/>
+                <a16:creationId xmlns:a16="http://schemas.microsoft.com/office/drawing/2014/main" id="{36554F2F-0E52-4E3A-9E23-6D547E058A6E}"/>
               </a:ext>
             </a:extLst>
           </p:cNvPr>
@@ -18587,7 +21036,7 @@
           <p:cNvPr id="2" name="">
             <a:extLst xmlns:a="http://schemas.openxmlformats.org/drawingml/2006/main">
               <a:ext uri="{FF2B5EF4-FFF2-40B4-BE49-F238E27FC236}">
-                <a16:creationId xmlns:a16="http://schemas.microsoft.com/office/drawing/2014/main" id="{D7A3FBE7-9B2C-4FB6-B848-220A0B7B807B}"/>
+                <a16:creationId xmlns:a16="http://schemas.microsoft.com/office/drawing/2014/main" id="{45538265-FEC3-4769-9F9C-E3508536E304}"/>
               </a:ext>
             </a:extLst>
           </p:cNvPr>
@@ -18656,7 +21105,7 @@
           <p:cNvPr id="3" name="">
             <a:extLst xmlns:a="http://schemas.openxmlformats.org/drawingml/2006/main">
               <a:ext uri="{FF2B5EF4-FFF2-40B4-BE49-F238E27FC236}">
-                <a16:creationId xmlns:a16="http://schemas.microsoft.com/office/drawing/2014/main" id="{6D59FC39-2A80-44B0-9497-8A008FA5C3A9}"/>
+                <a16:creationId xmlns:a16="http://schemas.microsoft.com/office/drawing/2014/main" id="{AB866081-B852-4C7D-92D2-D394A9475DF0}"/>
               </a:ext>
             </a:extLst>
           </p:cNvPr>
@@ -18725,7 +21174,7 @@
           <p:cNvPr id="4" name="">
             <a:extLst xmlns:a="http://schemas.openxmlformats.org/drawingml/2006/main">
               <a:ext uri="{FF2B5EF4-FFF2-40B4-BE49-F238E27FC236}">
-                <a16:creationId xmlns:a16="http://schemas.microsoft.com/office/drawing/2014/main" id="{168E039F-B7F8-4AC5-BDE7-300D0F79201C}"/>
+                <a16:creationId xmlns:a16="http://schemas.microsoft.com/office/drawing/2014/main" id="{8041C0E7-5785-4FFB-AD7C-F61721423089}"/>
               </a:ext>
             </a:extLst>
           </p:cNvPr>
@@ -18756,7 +21205,7 @@
           <p:cNvPr id="5" name="">
             <a:extLst xmlns:a="http://schemas.openxmlformats.org/drawingml/2006/main">
               <a:ext uri="{FF2B5EF4-FFF2-40B4-BE49-F238E27FC236}">
-                <a16:creationId xmlns:a16="http://schemas.microsoft.com/office/drawing/2014/main" id="{72242D0A-529B-461C-B61D-CCB8557844A6}"/>
+                <a16:creationId xmlns:a16="http://schemas.microsoft.com/office/drawing/2014/main" id="{31DAD049-2AAC-4A7B-84DE-38FA8DD88E8A}"/>
               </a:ext>
             </a:extLst>
           </p:cNvPr>
@@ -18825,7 +21274,7 @@
           <p:cNvPr id="6" name="">
             <a:extLst xmlns:a="http://schemas.openxmlformats.org/drawingml/2006/main">
               <a:ext uri="{FF2B5EF4-FFF2-40B4-BE49-F238E27FC236}">
-                <a16:creationId xmlns:a16="http://schemas.microsoft.com/office/drawing/2014/main" id="{5F65CDCB-660C-4ECB-AD13-CE647201A5C0}"/>
+                <a16:creationId xmlns:a16="http://schemas.microsoft.com/office/drawing/2014/main" id="{2416A1A8-5C8A-4F23-8015-FBB1BD3A9BA7}"/>
               </a:ext>
             </a:extLst>
           </p:cNvPr>
@@ -18894,7 +21343,7 @@
           <p:cNvPr id="7" name="">
             <a:extLst xmlns:a="http://schemas.openxmlformats.org/drawingml/2006/main">
               <a:ext uri="{FF2B5EF4-FFF2-40B4-BE49-F238E27FC236}">
-                <a16:creationId xmlns:a16="http://schemas.microsoft.com/office/drawing/2014/main" id="{E159C7A2-9547-4E1C-96EB-F5C79A29F5E6}"/>
+                <a16:creationId xmlns:a16="http://schemas.microsoft.com/office/drawing/2014/main" id="{4B78BB04-6994-46A6-B3EE-1B251BB0EF5F}"/>
               </a:ext>
             </a:extLst>
           </p:cNvPr>
@@ -18927,7 +21376,7 @@
           <p:cNvPr id="8" name="">
             <a:extLst xmlns:a="http://schemas.openxmlformats.org/drawingml/2006/main">
               <a:ext uri="{FF2B5EF4-FFF2-40B4-BE49-F238E27FC236}">
-                <a16:creationId xmlns:a16="http://schemas.microsoft.com/office/drawing/2014/main" id="{A9D4D16F-B09A-4EF1-BD91-FEA9F71FA359}"/>
+                <a16:creationId xmlns:a16="http://schemas.microsoft.com/office/drawing/2014/main" id="{D07EBCE6-629C-4E40-BF11-1D76305AB4C9}"/>
               </a:ext>
             </a:extLst>
           </p:cNvPr>
@@ -18960,7 +21409,7 @@
           <p:cNvPr id="9" name="">
             <a:extLst xmlns:a="http://schemas.openxmlformats.org/drawingml/2006/main">
               <a:ext uri="{FF2B5EF4-FFF2-40B4-BE49-F238E27FC236}">
-                <a16:creationId xmlns:a16="http://schemas.microsoft.com/office/drawing/2014/main" id="{C48DEDD9-7B97-4B59-AC1E-122DDF81B6D4}"/>
+                <a16:creationId xmlns:a16="http://schemas.microsoft.com/office/drawing/2014/main" id="{72E32239-D8BA-4A2A-ACEA-45422CCFED45}"/>
               </a:ext>
             </a:extLst>
           </p:cNvPr>
@@ -19029,7 +21478,7 @@
           <p:cNvPr id="10" name="">
             <a:extLst xmlns:a="http://schemas.openxmlformats.org/drawingml/2006/main">
               <a:ext uri="{FF2B5EF4-FFF2-40B4-BE49-F238E27FC236}">
-                <a16:creationId xmlns:a16="http://schemas.microsoft.com/office/drawing/2014/main" id="{36565D7C-DAC7-4BF1-88DD-44D3E84593F8}"/>
+                <a16:creationId xmlns:a16="http://schemas.microsoft.com/office/drawing/2014/main" id="{723DCE89-1F5B-4A7F-9F85-739C441F8219}"/>
               </a:ext>
             </a:extLst>
           </p:cNvPr>
@@ -19098,7 +21547,7 @@
           <p:cNvPr id="11" name="">
             <a:extLst xmlns:a="http://schemas.openxmlformats.org/drawingml/2006/main">
               <a:ext uri="{FF2B5EF4-FFF2-40B4-BE49-F238E27FC236}">
-                <a16:creationId xmlns:a16="http://schemas.microsoft.com/office/drawing/2014/main" id="{606C7E4E-36E8-4868-8F00-A8969F27A844}"/>
+                <a16:creationId xmlns:a16="http://schemas.microsoft.com/office/drawing/2014/main" id="{60FF86B8-29E7-40D0-873D-6D1A99589F32}"/>
               </a:ext>
             </a:extLst>
           </p:cNvPr>
@@ -19129,7 +21578,7 @@
           <p:cNvPr id="12" name="">
             <a:extLst xmlns:a="http://schemas.openxmlformats.org/drawingml/2006/main">
               <a:ext uri="{FF2B5EF4-FFF2-40B4-BE49-F238E27FC236}">
-                <a16:creationId xmlns:a16="http://schemas.microsoft.com/office/drawing/2014/main" id="{5F54921F-1128-448D-A1A8-3C7B06F1D4AD}"/>
+                <a16:creationId xmlns:a16="http://schemas.microsoft.com/office/drawing/2014/main" id="{50C5DD75-0FC7-4718-B97B-D950383D9A67}"/>
               </a:ext>
             </a:extLst>
           </p:cNvPr>
@@ -19198,7 +21647,7 @@
           <p:cNvPr id="13" name="">
             <a:extLst xmlns:a="http://schemas.openxmlformats.org/drawingml/2006/main">
               <a:ext uri="{FF2B5EF4-FFF2-40B4-BE49-F238E27FC236}">
-                <a16:creationId xmlns:a16="http://schemas.microsoft.com/office/drawing/2014/main" id="{5D9DB564-EC14-4904-B266-023797215126}"/>
+                <a16:creationId xmlns:a16="http://schemas.microsoft.com/office/drawing/2014/main" id="{078BF584-A095-4E34-8303-3EE2A3D22E57}"/>
               </a:ext>
             </a:extLst>
           </p:cNvPr>
@@ -19267,7 +21716,7 @@
           <p:cNvPr id="14" name="">
             <a:extLst xmlns:a="http://schemas.openxmlformats.org/drawingml/2006/main">
               <a:ext uri="{FF2B5EF4-FFF2-40B4-BE49-F238E27FC236}">
-                <a16:creationId xmlns:a16="http://schemas.microsoft.com/office/drawing/2014/main" id="{AA872E9F-7F25-44F0-8041-A3FE3F8CF45F}"/>
+                <a16:creationId xmlns:a16="http://schemas.microsoft.com/office/drawing/2014/main" id="{42998714-4D18-4E49-B989-339781B2F0DD}"/>
               </a:ext>
             </a:extLst>
           </p:cNvPr>
@@ -19298,7 +21747,7 @@
           <p:cNvPr id="15" name="">
             <a:extLst xmlns:a="http://schemas.openxmlformats.org/drawingml/2006/main">
               <a:ext uri="{FF2B5EF4-FFF2-40B4-BE49-F238E27FC236}">
-                <a16:creationId xmlns:a16="http://schemas.microsoft.com/office/drawing/2014/main" id="{A59881B1-1795-4BA1-805C-DB1F626B5B43}"/>
+                <a16:creationId xmlns:a16="http://schemas.microsoft.com/office/drawing/2014/main" id="{64BE4644-6973-4FC4-846C-50A28ED290FE}"/>
               </a:ext>
             </a:extLst>
           </p:cNvPr>
@@ -19367,7 +21816,7 @@
           <p:cNvPr id="16" name="">
             <a:extLst xmlns:a="http://schemas.openxmlformats.org/drawingml/2006/main">
               <a:ext uri="{FF2B5EF4-FFF2-40B4-BE49-F238E27FC236}">
-                <a16:creationId xmlns:a16="http://schemas.microsoft.com/office/drawing/2014/main" id="{C83C49CA-27F4-47CE-85C9-43D48DA7A3AB}"/>
+                <a16:creationId xmlns:a16="http://schemas.microsoft.com/office/drawing/2014/main" id="{8BC4EA12-D8C3-4C51-B500-B5B5AA9197F5}"/>
               </a:ext>
             </a:extLst>
           </p:cNvPr>
@@ -19436,7 +21885,7 @@
           <p:cNvPr id="17" name="">
             <a:extLst xmlns:a="http://schemas.openxmlformats.org/drawingml/2006/main">
               <a:ext uri="{FF2B5EF4-FFF2-40B4-BE49-F238E27FC236}">
-                <a16:creationId xmlns:a16="http://schemas.microsoft.com/office/drawing/2014/main" id="{010CC586-BDAC-4493-9A45-940E57915C8C}"/>
+                <a16:creationId xmlns:a16="http://schemas.microsoft.com/office/drawing/2014/main" id="{87BC481F-BB81-4F50-BCB7-F6E56CCB1A8F}"/>
               </a:ext>
             </a:extLst>
           </p:cNvPr>
@@ -19467,7 +21916,7 @@
           <p:cNvPr id="18" name="">
             <a:extLst xmlns:a="http://schemas.openxmlformats.org/drawingml/2006/main">
               <a:ext uri="{FF2B5EF4-FFF2-40B4-BE49-F238E27FC236}">
-                <a16:creationId xmlns:a16="http://schemas.microsoft.com/office/drawing/2014/main" id="{E5D5FC99-837B-42C2-BA31-F21ED69CF841}"/>
+                <a16:creationId xmlns:a16="http://schemas.microsoft.com/office/drawing/2014/main" id="{746FEF1C-E114-4380-BAF5-272AE2721AE6}"/>
               </a:ext>
             </a:extLst>
           </p:cNvPr>
@@ -19536,7 +21985,7 @@
           <p:cNvPr id="19" name="">
             <a:extLst xmlns:a="http://schemas.openxmlformats.org/drawingml/2006/main">
               <a:ext uri="{FF2B5EF4-FFF2-40B4-BE49-F238E27FC236}">
-                <a16:creationId xmlns:a16="http://schemas.microsoft.com/office/drawing/2014/main" id="{85DA65A5-0BB3-465C-B593-E16B408135A4}"/>
+                <a16:creationId xmlns:a16="http://schemas.microsoft.com/office/drawing/2014/main" id="{E9FE2DE8-FAF1-419A-8110-5DEFF781C8A2}"/>
               </a:ext>
             </a:extLst>
           </p:cNvPr>
@@ -19605,7 +22054,7 @@
           <p:cNvPr id="20" name="">
             <a:extLst xmlns:a="http://schemas.openxmlformats.org/drawingml/2006/main">
               <a:ext uri="{FF2B5EF4-FFF2-40B4-BE49-F238E27FC236}">
-                <a16:creationId xmlns:a16="http://schemas.microsoft.com/office/drawing/2014/main" id="{612F5E34-EF4E-49A6-AE13-F8B6822B0AF6}"/>
+                <a16:creationId xmlns:a16="http://schemas.microsoft.com/office/drawing/2014/main" id="{5D3C5314-71FD-49F6-8553-CAFCDE4AC5E6}"/>
               </a:ext>
             </a:extLst>
           </p:cNvPr>
@@ -19636,7 +22085,7 @@
           <p:cNvPr id="21" name="">
             <a:extLst xmlns:a="http://schemas.openxmlformats.org/drawingml/2006/main">
               <a:ext uri="{FF2B5EF4-FFF2-40B4-BE49-F238E27FC236}">
-                <a16:creationId xmlns:a16="http://schemas.microsoft.com/office/drawing/2014/main" id="{F62EAF66-F068-4AE7-B503-CB051DED6752}"/>
+                <a16:creationId xmlns:a16="http://schemas.microsoft.com/office/drawing/2014/main" id="{EBC68E3A-E4C8-4773-B0C7-51DE083E42DB}"/>
               </a:ext>
             </a:extLst>
           </p:cNvPr>
@@ -19705,7 +22154,7 @@
           <p:cNvPr id="22" name="">
             <a:extLst xmlns:a="http://schemas.openxmlformats.org/drawingml/2006/main">
               <a:ext uri="{FF2B5EF4-FFF2-40B4-BE49-F238E27FC236}">
-                <a16:creationId xmlns:a16="http://schemas.microsoft.com/office/drawing/2014/main" id="{745F4DEA-27EE-44C0-8AAD-3720FD3CD4B1}"/>
+                <a16:creationId xmlns:a16="http://schemas.microsoft.com/office/drawing/2014/main" id="{917C360A-EF1E-4EEA-AEBD-1E9C53F1A9E3}"/>
               </a:ext>
             </a:extLst>
           </p:cNvPr>
@@ -19774,7 +22223,7 @@
           <p:cNvPr id="23" name="">
             <a:extLst xmlns:a="http://schemas.openxmlformats.org/drawingml/2006/main">
               <a:ext uri="{FF2B5EF4-FFF2-40B4-BE49-F238E27FC236}">
-                <a16:creationId xmlns:a16="http://schemas.microsoft.com/office/drawing/2014/main" id="{B79B778D-E51C-4C78-AFCE-B06BE1E64871}"/>
+                <a16:creationId xmlns:a16="http://schemas.microsoft.com/office/drawing/2014/main" id="{851BEB74-BE51-4428-B27F-49D66F873A99}"/>
               </a:ext>
             </a:extLst>
           </p:cNvPr>
@@ -19805,7 +22254,7 @@
           <p:cNvPr id="24" name="">
             <a:extLst xmlns:a="http://schemas.openxmlformats.org/drawingml/2006/main">
               <a:ext uri="{FF2B5EF4-FFF2-40B4-BE49-F238E27FC236}">
-                <a16:creationId xmlns:a16="http://schemas.microsoft.com/office/drawing/2014/main" id="{2272D53A-584B-4DA6-805D-49EA1E1183E3}"/>
+                <a16:creationId xmlns:a16="http://schemas.microsoft.com/office/drawing/2014/main" id="{2843FB30-90E0-4196-BD9C-63FAEA7213DF}"/>
               </a:ext>
             </a:extLst>
           </p:cNvPr>
@@ -19874,7 +22323,7 @@
           <p:cNvPr id="25" name="">
             <a:extLst xmlns:a="http://schemas.openxmlformats.org/drawingml/2006/main">
               <a:ext uri="{FF2B5EF4-FFF2-40B4-BE49-F238E27FC236}">
-                <a16:creationId xmlns:a16="http://schemas.microsoft.com/office/drawing/2014/main" id="{4EB424F8-DE57-45DB-AFF3-B33B1006A6B3}"/>
+                <a16:creationId xmlns:a16="http://schemas.microsoft.com/office/drawing/2014/main" id="{6F073AAF-3D50-4423-A19D-9325268FCAFA}"/>
               </a:ext>
             </a:extLst>
           </p:cNvPr>
@@ -19943,7 +22392,7 @@
           <p:cNvPr id="26" name="">
             <a:extLst xmlns:a="http://schemas.openxmlformats.org/drawingml/2006/main">
               <a:ext uri="{FF2B5EF4-FFF2-40B4-BE49-F238E27FC236}">
-                <a16:creationId xmlns:a16="http://schemas.microsoft.com/office/drawing/2014/main" id="{DBEDD7CD-02D1-493D-8F2A-EC3555F66BAB}"/>
+                <a16:creationId xmlns:a16="http://schemas.microsoft.com/office/drawing/2014/main" id="{92295D33-3E8F-4E51-8B17-69C6CD12BF42}"/>
               </a:ext>
             </a:extLst>
           </p:cNvPr>
@@ -19974,7 +22423,7 @@
           <p:cNvPr id="27" name="">
             <a:extLst xmlns:a="http://schemas.openxmlformats.org/drawingml/2006/main">
               <a:ext uri="{FF2B5EF4-FFF2-40B4-BE49-F238E27FC236}">
-                <a16:creationId xmlns:a16="http://schemas.microsoft.com/office/drawing/2014/main" id="{02611286-8C5B-4597-BADE-6B191AE450CC}"/>
+                <a16:creationId xmlns:a16="http://schemas.microsoft.com/office/drawing/2014/main" id="{DF076DE3-E0A2-4DEA-AA98-21E1F53B3000}"/>
               </a:ext>
             </a:extLst>
           </p:cNvPr>
@@ -20043,7 +22492,7 @@
           <p:cNvPr id="28" name="">
             <a:extLst xmlns:a="http://schemas.openxmlformats.org/drawingml/2006/main">
               <a:ext uri="{FF2B5EF4-FFF2-40B4-BE49-F238E27FC236}">
-                <a16:creationId xmlns:a16="http://schemas.microsoft.com/office/drawing/2014/main" id="{36EED71D-A37B-4CF1-BEE7-24D60B9285AC}"/>
+                <a16:creationId xmlns:a16="http://schemas.microsoft.com/office/drawing/2014/main" id="{C1E517F6-DA70-4A6A-83AD-32F20F220BBB}"/>
               </a:ext>
             </a:extLst>
           </p:cNvPr>
@@ -20112,7 +22561,7 @@
           <p:cNvPr id="29" name="">
             <a:extLst xmlns:a="http://schemas.openxmlformats.org/drawingml/2006/main">
               <a:ext uri="{FF2B5EF4-FFF2-40B4-BE49-F238E27FC236}">
-                <a16:creationId xmlns:a16="http://schemas.microsoft.com/office/drawing/2014/main" id="{30ABCE5D-3374-476F-8550-020C2F91289D}"/>
+                <a16:creationId xmlns:a16="http://schemas.microsoft.com/office/drawing/2014/main" id="{0D5BB66F-10DB-4550-8985-CF09453902BC}"/>
               </a:ext>
             </a:extLst>
           </p:cNvPr>
@@ -20143,7 +22592,7 @@
           <p:cNvPr id="30" name="">
             <a:extLst xmlns:a="http://schemas.openxmlformats.org/drawingml/2006/main">
               <a:ext uri="{FF2B5EF4-FFF2-40B4-BE49-F238E27FC236}">
-                <a16:creationId xmlns:a16="http://schemas.microsoft.com/office/drawing/2014/main" id="{673FE512-AE74-4905-90CF-F6C41D88467D}"/>
+                <a16:creationId xmlns:a16="http://schemas.microsoft.com/office/drawing/2014/main" id="{FB3CD23C-174E-4A7D-8A56-EE18655EA9C6}"/>
               </a:ext>
             </a:extLst>
           </p:cNvPr>
@@ -20212,7 +22661,7 @@
           <p:cNvPr id="31" name="">
             <a:extLst xmlns:a="http://schemas.openxmlformats.org/drawingml/2006/main">
               <a:ext uri="{FF2B5EF4-FFF2-40B4-BE49-F238E27FC236}">
-                <a16:creationId xmlns:a16="http://schemas.microsoft.com/office/drawing/2014/main" id="{8C599749-CAB3-4D9E-BA40-281B95A46642}"/>
+                <a16:creationId xmlns:a16="http://schemas.microsoft.com/office/drawing/2014/main" id="{2178324C-D776-4984-95E5-5625F9E3848D}"/>
               </a:ext>
             </a:extLst>
           </p:cNvPr>
@@ -20281,7 +22730,7 @@
           <p:cNvPr id="32" name="">
             <a:extLst xmlns:a="http://schemas.openxmlformats.org/drawingml/2006/main">
               <a:ext uri="{FF2B5EF4-FFF2-40B4-BE49-F238E27FC236}">
-                <a16:creationId xmlns:a16="http://schemas.microsoft.com/office/drawing/2014/main" id="{68AB4CA3-62CC-4CDB-8264-D51BC6BAB378}"/>
+                <a16:creationId xmlns:a16="http://schemas.microsoft.com/office/drawing/2014/main" id="{1279665C-5E47-4DEC-9B3C-33308F02EC38}"/>
               </a:ext>
             </a:extLst>
           </p:cNvPr>
@@ -20312,7 +22761,7 @@
           <p:cNvPr id="33" name="">
             <a:extLst xmlns:a="http://schemas.openxmlformats.org/drawingml/2006/main">
               <a:ext uri="{FF2B5EF4-FFF2-40B4-BE49-F238E27FC236}">
-                <a16:creationId xmlns:a16="http://schemas.microsoft.com/office/drawing/2014/main" id="{3FA4DAD6-A40E-4B58-8818-A426E1D065B1}"/>
+                <a16:creationId xmlns:a16="http://schemas.microsoft.com/office/drawing/2014/main" id="{BF2254A0-B386-4AB0-BB56-CD1DD24164B5}"/>
               </a:ext>
             </a:extLst>
           </p:cNvPr>
@@ -20381,7 +22830,7 @@
           <p:cNvPr id="34" name="">
             <a:extLst xmlns:a="http://schemas.openxmlformats.org/drawingml/2006/main">
               <a:ext uri="{FF2B5EF4-FFF2-40B4-BE49-F238E27FC236}">
-                <a16:creationId xmlns:a16="http://schemas.microsoft.com/office/drawing/2014/main" id="{BE615968-565C-4789-90EC-E6BFCF15C312}"/>
+                <a16:creationId xmlns:a16="http://schemas.microsoft.com/office/drawing/2014/main" id="{45679B8A-AA00-4C5C-AB51-E6007D90D218}"/>
               </a:ext>
             </a:extLst>
           </p:cNvPr>
@@ -20450,7 +22899,7 @@
           <p:cNvPr id="35" name="">
             <a:extLst xmlns:a="http://schemas.openxmlformats.org/drawingml/2006/main">
               <a:ext uri="{FF2B5EF4-FFF2-40B4-BE49-F238E27FC236}">
-                <a16:creationId xmlns:a16="http://schemas.microsoft.com/office/drawing/2014/main" id="{196809C3-B6F8-4AB2-AE3C-2545364A24BC}"/>
+                <a16:creationId xmlns:a16="http://schemas.microsoft.com/office/drawing/2014/main" id="{BAC342BB-97B3-4ACB-A0CD-CD6A64BE95F6}"/>
               </a:ext>
             </a:extLst>
           </p:cNvPr>
@@ -20481,7 +22930,7 @@
           <p:cNvPr id="36" name="">
             <a:extLst xmlns:a="http://schemas.openxmlformats.org/drawingml/2006/main">
               <a:ext uri="{FF2B5EF4-FFF2-40B4-BE49-F238E27FC236}">
-                <a16:creationId xmlns:a16="http://schemas.microsoft.com/office/drawing/2014/main" id="{4C4D748A-F008-40E0-9AE8-79A7C888B802}"/>
+                <a16:creationId xmlns:a16="http://schemas.microsoft.com/office/drawing/2014/main" id="{AF6C479C-2811-4765-89F5-1AEFB00C5887}"/>
               </a:ext>
             </a:extLst>
           </p:cNvPr>
@@ -20550,7 +22999,7 @@
           <p:cNvPr id="37" name="">
             <a:extLst xmlns:a="http://schemas.openxmlformats.org/drawingml/2006/main">
               <a:ext uri="{FF2B5EF4-FFF2-40B4-BE49-F238E27FC236}">
-                <a16:creationId xmlns:a16="http://schemas.microsoft.com/office/drawing/2014/main" id="{F95B42E2-E486-4008-9EEF-FC0756BA7299}"/>
+                <a16:creationId xmlns:a16="http://schemas.microsoft.com/office/drawing/2014/main" id="{59529642-5D12-4084-A409-BDDEAD1A6D8D}"/>
               </a:ext>
             </a:extLst>
           </p:cNvPr>
@@ -20619,7 +23068,7 @@
           <p:cNvPr id="38" name="">
             <a:extLst xmlns:a="http://schemas.openxmlformats.org/drawingml/2006/main">
               <a:ext uri="{FF2B5EF4-FFF2-40B4-BE49-F238E27FC236}">
-                <a16:creationId xmlns:a16="http://schemas.microsoft.com/office/drawing/2014/main" id="{BA1080CA-EB21-4078-89AE-41C4E804DD03}"/>
+                <a16:creationId xmlns:a16="http://schemas.microsoft.com/office/drawing/2014/main" id="{32F70A6F-9510-40E4-8FE3-06A987DD0050}"/>
               </a:ext>
             </a:extLst>
           </p:cNvPr>
@@ -20650,7 +23099,7 @@
           <p:cNvPr id="39" name="">
             <a:extLst xmlns:a="http://schemas.openxmlformats.org/drawingml/2006/main">
               <a:ext uri="{FF2B5EF4-FFF2-40B4-BE49-F238E27FC236}">
-                <a16:creationId xmlns:a16="http://schemas.microsoft.com/office/drawing/2014/main" id="{498E1CD3-E8D0-4C84-B69F-D23070623651}"/>
+                <a16:creationId xmlns:a16="http://schemas.microsoft.com/office/drawing/2014/main" id="{AE0D45CE-25B2-4AC8-A7BA-19C74F672A85}"/>
               </a:ext>
             </a:extLst>
           </p:cNvPr>
@@ -20719,7 +23168,7 @@
           <p:cNvPr id="40" name="">
             <a:extLst xmlns:a="http://schemas.openxmlformats.org/drawingml/2006/main">
               <a:ext uri="{FF2B5EF4-FFF2-40B4-BE49-F238E27FC236}">
-                <a16:creationId xmlns:a16="http://schemas.microsoft.com/office/drawing/2014/main" id="{C0BC1669-F497-4AEE-A70C-F2ACD02E4EE4}"/>
+                <a16:creationId xmlns:a16="http://schemas.microsoft.com/office/drawing/2014/main" id="{A519D6DE-43C4-471A-A0EF-145BB3D6818A}"/>
               </a:ext>
             </a:extLst>
           </p:cNvPr>
@@ -20788,7 +23237,7 @@
           <p:cNvPr id="41" name="">
             <a:extLst xmlns:a="http://schemas.openxmlformats.org/drawingml/2006/main">
               <a:ext uri="{FF2B5EF4-FFF2-40B4-BE49-F238E27FC236}">
-                <a16:creationId xmlns:a16="http://schemas.microsoft.com/office/drawing/2014/main" id="{AD6D84C9-39CD-409C-8A8E-6373B4A97158}"/>
+                <a16:creationId xmlns:a16="http://schemas.microsoft.com/office/drawing/2014/main" id="{8FBCCEE7-9D0D-4B2F-9361-DFBC412273EA}"/>
               </a:ext>
             </a:extLst>
           </p:cNvPr>
@@ -20855,7 +23304,7 @@
     </p:spTree>
     <p:extLst>
       <p:ext uri="{BB962C8B-B14F-4D97-AF65-F5344CB8AC3E}">
-        <p14:creationId xmlns:p14="http://schemas.microsoft.com/office/powerpoint/2010/main" val="484464768"/>
+        <p14:creationId xmlns:p14="http://schemas.microsoft.com/office/powerpoint/2010/main" val="1802650969"/>
       </p:ext>
     </p:extLst>
   </p:cSld>
@@ -20886,7 +23335,7 @@
           <p:cNvPr id="29" name="">
             <a:extLst xmlns:a="http://schemas.openxmlformats.org/drawingml/2006/main">
               <a:ext uri="{FF2B5EF4-FFF2-40B4-BE49-F238E27FC236}">
-                <a16:creationId xmlns:a16="http://schemas.microsoft.com/office/drawing/2014/main" id="{8E345442-F280-4270-ABA1-0083655F7812}"/>
+                <a16:creationId xmlns:a16="http://schemas.microsoft.com/office/drawing/2014/main" id="{AAA002C2-2492-41D0-B9F9-3BD6AFE87A85}"/>
               </a:ext>
             </a:extLst>
           </p:cNvPr>
@@ -20917,7 +23366,7 @@
           <p:cNvPr id="2" name="">
             <a:extLst xmlns:a="http://schemas.openxmlformats.org/drawingml/2006/main">
               <a:ext uri="{FF2B5EF4-FFF2-40B4-BE49-F238E27FC236}">
-                <a16:creationId xmlns:a16="http://schemas.microsoft.com/office/drawing/2014/main" id="{15B7F33E-3FA3-4770-A33D-E1047BB3B495}"/>
+                <a16:creationId xmlns:a16="http://schemas.microsoft.com/office/drawing/2014/main" id="{3FD9B940-B880-4E7F-85AB-E194387546D2}"/>
               </a:ext>
             </a:extLst>
           </p:cNvPr>
@@ -20986,7 +23435,7 @@
           <p:cNvPr id="3" name="">
             <a:extLst xmlns:a="http://schemas.openxmlformats.org/drawingml/2006/main">
               <a:ext uri="{FF2B5EF4-FFF2-40B4-BE49-F238E27FC236}">
-                <a16:creationId xmlns:a16="http://schemas.microsoft.com/office/drawing/2014/main" id="{6E3CF826-FA27-41AF-8B76-9C1215A33FE2}"/>
+                <a16:creationId xmlns:a16="http://schemas.microsoft.com/office/drawing/2014/main" id="{7D56AA92-F822-4643-8302-E2372134C117}"/>
               </a:ext>
             </a:extLst>
           </p:cNvPr>
@@ -21055,7 +23504,7 @@
           <p:cNvPr id="4" name="">
             <a:extLst xmlns:a="http://schemas.openxmlformats.org/drawingml/2006/main">
               <a:ext uri="{FF2B5EF4-FFF2-40B4-BE49-F238E27FC236}">
-                <a16:creationId xmlns:a16="http://schemas.microsoft.com/office/drawing/2014/main" id="{FE22E589-722E-4F9F-B64C-1115C1008115}"/>
+                <a16:creationId xmlns:a16="http://schemas.microsoft.com/office/drawing/2014/main" id="{04C35834-1AEE-408D-9F97-17F8558D0C4F}"/>
               </a:ext>
             </a:extLst>
           </p:cNvPr>
@@ -21086,7 +23535,7 @@
           <p:cNvPr id="5" name="">
             <a:extLst xmlns:a="http://schemas.openxmlformats.org/drawingml/2006/main">
               <a:ext uri="{FF2B5EF4-FFF2-40B4-BE49-F238E27FC236}">
-                <a16:creationId xmlns:a16="http://schemas.microsoft.com/office/drawing/2014/main" id="{6A1CA959-78FA-46C0-991E-3BD2D30F932F}"/>
+                <a16:creationId xmlns:a16="http://schemas.microsoft.com/office/drawing/2014/main" id="{F02A00B4-E467-48BD-B5A1-A745F89B0E25}"/>
               </a:ext>
             </a:extLst>
           </p:cNvPr>
@@ -21155,7 +23604,7 @@
           <p:cNvPr id="6" name="">
             <a:extLst xmlns:a="http://schemas.openxmlformats.org/drawingml/2006/main">
               <a:ext uri="{FF2B5EF4-FFF2-40B4-BE49-F238E27FC236}">
-                <a16:creationId xmlns:a16="http://schemas.microsoft.com/office/drawing/2014/main" id="{B5A1328E-84E6-42F7-8D6D-9D1A6BF3FF07}"/>
+                <a16:creationId xmlns:a16="http://schemas.microsoft.com/office/drawing/2014/main" id="{9EE0C3EC-7295-486D-B5B0-2A82EA4AE1A9}"/>
               </a:ext>
             </a:extLst>
           </p:cNvPr>
@@ -21224,7 +23673,7 @@
           <p:cNvPr id="7" name="">
             <a:extLst xmlns:a="http://schemas.openxmlformats.org/drawingml/2006/main">
               <a:ext uri="{FF2B5EF4-FFF2-40B4-BE49-F238E27FC236}">
-                <a16:creationId xmlns:a16="http://schemas.microsoft.com/office/drawing/2014/main" id="{EC92635C-3E42-424B-9F91-CB58E326DCBD}"/>
+                <a16:creationId xmlns:a16="http://schemas.microsoft.com/office/drawing/2014/main" id="{AFF20464-24EA-4A1F-B7F8-4D5ADDB9F150}"/>
               </a:ext>
             </a:extLst>
           </p:cNvPr>
@@ -21293,7 +23742,7 @@
           <p:cNvPr id="8" name="">
             <a:extLst xmlns:a="http://schemas.openxmlformats.org/drawingml/2006/main">
               <a:ext uri="{FF2B5EF4-FFF2-40B4-BE49-F238E27FC236}">
-                <a16:creationId xmlns:a16="http://schemas.microsoft.com/office/drawing/2014/main" id="{48C1989B-C502-4606-A97F-C9535F87C63D}"/>
+                <a16:creationId xmlns:a16="http://schemas.microsoft.com/office/drawing/2014/main" id="{B18137D4-173C-4260-9DE1-83C40450583B}"/>
               </a:ext>
             </a:extLst>
           </p:cNvPr>
@@ -21324,7 +23773,7 @@
           <p:cNvPr id="9" name="">
             <a:extLst xmlns:a="http://schemas.openxmlformats.org/drawingml/2006/main">
               <a:ext uri="{FF2B5EF4-FFF2-40B4-BE49-F238E27FC236}">
-                <a16:creationId xmlns:a16="http://schemas.microsoft.com/office/drawing/2014/main" id="{C4D0D824-DF3A-4C51-8BA2-FD7EDC9E1622}"/>
+                <a16:creationId xmlns:a16="http://schemas.microsoft.com/office/drawing/2014/main" id="{9620ADAB-2347-4C1F-907F-44844367CE67}"/>
               </a:ext>
             </a:extLst>
           </p:cNvPr>
@@ -21393,7 +23842,7 @@
           <p:cNvPr id="10" name="">
             <a:extLst xmlns:a="http://schemas.openxmlformats.org/drawingml/2006/main">
               <a:ext uri="{FF2B5EF4-FFF2-40B4-BE49-F238E27FC236}">
-                <a16:creationId xmlns:a16="http://schemas.microsoft.com/office/drawing/2014/main" id="{B9DA305D-D6D5-432A-9E26-0E99B7C8461E}"/>
+                <a16:creationId xmlns:a16="http://schemas.microsoft.com/office/drawing/2014/main" id="{A58BF9DE-A98A-4CA2-9183-76D53CDBF72D}"/>
               </a:ext>
             </a:extLst>
           </p:cNvPr>
@@ -21426,7 +23875,7 @@
           <p:cNvPr id="11" name="">
             <a:extLst xmlns:a="http://schemas.openxmlformats.org/drawingml/2006/main">
               <a:ext uri="{FF2B5EF4-FFF2-40B4-BE49-F238E27FC236}">
-                <a16:creationId xmlns:a16="http://schemas.microsoft.com/office/drawing/2014/main" id="{40035C74-4223-46AB-992B-3CA941B689A5}"/>
+                <a16:creationId xmlns:a16="http://schemas.microsoft.com/office/drawing/2014/main" id="{F0375753-7526-4D1A-9F22-1FFA3B1913C3}"/>
               </a:ext>
             </a:extLst>
           </p:cNvPr>
@@ -21495,7 +23944,7 @@
           <p:cNvPr id="12" name="">
             <a:extLst xmlns:a="http://schemas.openxmlformats.org/drawingml/2006/main">
               <a:ext uri="{FF2B5EF4-FFF2-40B4-BE49-F238E27FC236}">
-                <a16:creationId xmlns:a16="http://schemas.microsoft.com/office/drawing/2014/main" id="{554B1CAC-F186-41C5-83A4-75A75811B397}"/>
+                <a16:creationId xmlns:a16="http://schemas.microsoft.com/office/drawing/2014/main" id="{0056FBDE-71BC-4AE1-9B06-DEBD3B7A3927}"/>
               </a:ext>
             </a:extLst>
           </p:cNvPr>
@@ -21564,7 +24013,7 @@
           <p:cNvPr id="13" name="">
             <a:extLst xmlns:a="http://schemas.openxmlformats.org/drawingml/2006/main">
               <a:ext uri="{FF2B5EF4-FFF2-40B4-BE49-F238E27FC236}">
-                <a16:creationId xmlns:a16="http://schemas.microsoft.com/office/drawing/2014/main" id="{F32BBC9C-C3D8-4DA7-8F58-6D8A86FB14E8}"/>
+                <a16:creationId xmlns:a16="http://schemas.microsoft.com/office/drawing/2014/main" id="{F1E4840C-FF30-48EA-A409-81F4EA2F3AA0}"/>
               </a:ext>
             </a:extLst>
           </p:cNvPr>
@@ -21595,7 +24044,7 @@
           <p:cNvPr id="14" name="">
             <a:extLst xmlns:a="http://schemas.openxmlformats.org/drawingml/2006/main">
               <a:ext uri="{FF2B5EF4-FFF2-40B4-BE49-F238E27FC236}">
-                <a16:creationId xmlns:a16="http://schemas.microsoft.com/office/drawing/2014/main" id="{F78BC72F-1C13-4E68-82E4-1658CDCF533F}"/>
+                <a16:creationId xmlns:a16="http://schemas.microsoft.com/office/drawing/2014/main" id="{CC4BC518-B431-454F-B83E-1F5551DEF733}"/>
               </a:ext>
             </a:extLst>
           </p:cNvPr>
@@ -21664,7 +24113,7 @@
           <p:cNvPr id="15" name="">
             <a:extLst xmlns:a="http://schemas.openxmlformats.org/drawingml/2006/main">
               <a:ext uri="{FF2B5EF4-FFF2-40B4-BE49-F238E27FC236}">
-                <a16:creationId xmlns:a16="http://schemas.microsoft.com/office/drawing/2014/main" id="{9E8F0970-EE80-4EE1-A554-8D63255C9D6C}"/>
+                <a16:creationId xmlns:a16="http://schemas.microsoft.com/office/drawing/2014/main" id="{B5925ABC-722F-4C6B-A876-BAA1E2AFB041}"/>
               </a:ext>
             </a:extLst>
           </p:cNvPr>
@@ -21697,7 +24146,7 @@
           <p:cNvPr id="16" name="">
             <a:extLst xmlns:a="http://schemas.openxmlformats.org/drawingml/2006/main">
               <a:ext uri="{FF2B5EF4-FFF2-40B4-BE49-F238E27FC236}">
-                <a16:creationId xmlns:a16="http://schemas.microsoft.com/office/drawing/2014/main" id="{D18F20D8-6CF5-4FF9-87E0-92511E52C548}"/>
+                <a16:creationId xmlns:a16="http://schemas.microsoft.com/office/drawing/2014/main" id="{8621A335-F02F-4803-BEBF-B327FD855751}"/>
               </a:ext>
             </a:extLst>
           </p:cNvPr>
@@ -21766,7 +24215,7 @@
           <p:cNvPr id="17" name="">
             <a:extLst xmlns:a="http://schemas.openxmlformats.org/drawingml/2006/main">
               <a:ext uri="{FF2B5EF4-FFF2-40B4-BE49-F238E27FC236}">
-                <a16:creationId xmlns:a16="http://schemas.microsoft.com/office/drawing/2014/main" id="{8A80A0B8-1088-4D8F-801C-0848D0EBC2F0}"/>
+                <a16:creationId xmlns:a16="http://schemas.microsoft.com/office/drawing/2014/main" id="{4916629A-883D-4AED-BBF5-FC6EAA2633D2}"/>
               </a:ext>
             </a:extLst>
           </p:cNvPr>
@@ -21835,7 +24284,7 @@
           <p:cNvPr id="18" name="">
             <a:extLst xmlns:a="http://schemas.openxmlformats.org/drawingml/2006/main">
               <a:ext uri="{FF2B5EF4-FFF2-40B4-BE49-F238E27FC236}">
-                <a16:creationId xmlns:a16="http://schemas.microsoft.com/office/drawing/2014/main" id="{0A9DAAE2-1653-47C3-985E-3A16C3098D84}"/>
+                <a16:creationId xmlns:a16="http://schemas.microsoft.com/office/drawing/2014/main" id="{6640905C-6D90-474A-A2F0-8C2493267B0F}"/>
               </a:ext>
             </a:extLst>
           </p:cNvPr>
@@ -21866,7 +24315,7 @@
           <p:cNvPr id="19" name="">
             <a:extLst xmlns:a="http://schemas.openxmlformats.org/drawingml/2006/main">
               <a:ext uri="{FF2B5EF4-FFF2-40B4-BE49-F238E27FC236}">
-                <a16:creationId xmlns:a16="http://schemas.microsoft.com/office/drawing/2014/main" id="{95ADCEE1-41B7-4D4A-A7C5-692E536AAA73}"/>
+                <a16:creationId xmlns:a16="http://schemas.microsoft.com/office/drawing/2014/main" id="{7C3C3860-E7EF-4D9B-A877-8C439499F14B}"/>
               </a:ext>
             </a:extLst>
           </p:cNvPr>
@@ -21935,7 +24384,7 @@
           <p:cNvPr id="20" name="">
             <a:extLst xmlns:a="http://schemas.openxmlformats.org/drawingml/2006/main">
               <a:ext uri="{FF2B5EF4-FFF2-40B4-BE49-F238E27FC236}">
-                <a16:creationId xmlns:a16="http://schemas.microsoft.com/office/drawing/2014/main" id="{34F20B46-A16F-428E-9F4A-0BB7A9FC282F}"/>
+                <a16:creationId xmlns:a16="http://schemas.microsoft.com/office/drawing/2014/main" id="{E4CACFC4-CCB2-44A6-A53D-6C38A36C7CD5}"/>
               </a:ext>
             </a:extLst>
           </p:cNvPr>
@@ -21968,7 +24417,7 @@
           <p:cNvPr id="21" name="">
             <a:extLst xmlns:a="http://schemas.openxmlformats.org/drawingml/2006/main">
               <a:ext uri="{FF2B5EF4-FFF2-40B4-BE49-F238E27FC236}">
-                <a16:creationId xmlns:a16="http://schemas.microsoft.com/office/drawing/2014/main" id="{4B3481F2-23EE-43AE-A299-4FF87D5C5B44}"/>
+                <a16:creationId xmlns:a16="http://schemas.microsoft.com/office/drawing/2014/main" id="{83161F7D-834D-4FF7-94EE-095B2A6FDB68}"/>
               </a:ext>
             </a:extLst>
           </p:cNvPr>
@@ -22037,7 +24486,7 @@
           <p:cNvPr id="22" name="">
             <a:extLst xmlns:a="http://schemas.openxmlformats.org/drawingml/2006/main">
               <a:ext uri="{FF2B5EF4-FFF2-40B4-BE49-F238E27FC236}">
-                <a16:creationId xmlns:a16="http://schemas.microsoft.com/office/drawing/2014/main" id="{156C8333-B94E-4FB1-A9C7-E92C2734DBAF}"/>
+                <a16:creationId xmlns:a16="http://schemas.microsoft.com/office/drawing/2014/main" id="{51E70025-3B58-4BD0-B306-354942159681}"/>
               </a:ext>
             </a:extLst>
           </p:cNvPr>
@@ -22106,7 +24555,7 @@
           <p:cNvPr id="23" name="">
             <a:extLst xmlns:a="http://schemas.openxmlformats.org/drawingml/2006/main">
               <a:ext uri="{FF2B5EF4-FFF2-40B4-BE49-F238E27FC236}">
-                <a16:creationId xmlns:a16="http://schemas.microsoft.com/office/drawing/2014/main" id="{04921CB6-0CDB-4BB7-9FA1-E2F95D2EB2EF}"/>
+                <a16:creationId xmlns:a16="http://schemas.microsoft.com/office/drawing/2014/main" id="{B0D90A0E-92AC-4554-9DE1-BC144AA1999D}"/>
               </a:ext>
             </a:extLst>
           </p:cNvPr>
@@ -22137,7 +24586,7 @@
           <p:cNvPr id="24" name="">
             <a:extLst xmlns:a="http://schemas.openxmlformats.org/drawingml/2006/main">
               <a:ext uri="{FF2B5EF4-FFF2-40B4-BE49-F238E27FC236}">
-                <a16:creationId xmlns:a16="http://schemas.microsoft.com/office/drawing/2014/main" id="{EF830E77-BE12-4E79-ABD1-1624F703EA5E}"/>
+                <a16:creationId xmlns:a16="http://schemas.microsoft.com/office/drawing/2014/main" id="{5A0EFD45-3835-4F9F-99E7-6E42F08AF522}"/>
               </a:ext>
             </a:extLst>
           </p:cNvPr>
@@ -22206,7 +24655,7 @@
           <p:cNvPr id="25" name="">
             <a:extLst xmlns:a="http://schemas.openxmlformats.org/drawingml/2006/main">
               <a:ext uri="{FF2B5EF4-FFF2-40B4-BE49-F238E27FC236}">
-                <a16:creationId xmlns:a16="http://schemas.microsoft.com/office/drawing/2014/main" id="{10D0ADBB-5B67-4C12-8905-284E82B81592}"/>
+                <a16:creationId xmlns:a16="http://schemas.microsoft.com/office/drawing/2014/main" id="{7D6D7387-89AD-44BF-9A0A-0A81EB1F76CF}"/>
               </a:ext>
             </a:extLst>
           </p:cNvPr>
@@ -22239,7 +24688,7 @@
           <p:cNvPr id="26" name="">
             <a:extLst xmlns:a="http://schemas.openxmlformats.org/drawingml/2006/main">
               <a:ext uri="{FF2B5EF4-FFF2-40B4-BE49-F238E27FC236}">
-                <a16:creationId xmlns:a16="http://schemas.microsoft.com/office/drawing/2014/main" id="{48F71AC9-F17F-4853-AFC5-522361FB9F21}"/>
+                <a16:creationId xmlns:a16="http://schemas.microsoft.com/office/drawing/2014/main" id="{53C8F206-B132-41BB-863F-B463C2C780A9}"/>
               </a:ext>
             </a:extLst>
           </p:cNvPr>
@@ -22308,7 +24757,7 @@
           <p:cNvPr id="27" name="">
             <a:extLst xmlns:a="http://schemas.openxmlformats.org/drawingml/2006/main">
               <a:ext uri="{FF2B5EF4-FFF2-40B4-BE49-F238E27FC236}">
-                <a16:creationId xmlns:a16="http://schemas.microsoft.com/office/drawing/2014/main" id="{20427F52-165F-48A9-83CE-8F4F0E4EF106}"/>
+                <a16:creationId xmlns:a16="http://schemas.microsoft.com/office/drawing/2014/main" id="{8D8B2820-6738-4711-9654-28346BE6A703}"/>
               </a:ext>
             </a:extLst>
           </p:cNvPr>
@@ -22377,7 +24826,7 @@
           <p:cNvPr id="28" name="">
             <a:extLst xmlns:a="http://schemas.openxmlformats.org/drawingml/2006/main">
               <a:ext uri="{FF2B5EF4-FFF2-40B4-BE49-F238E27FC236}">
-                <a16:creationId xmlns:a16="http://schemas.microsoft.com/office/drawing/2014/main" id="{DEF23340-F6A8-4131-A7DF-E914ECD65383}"/>
+                <a16:creationId xmlns:a16="http://schemas.microsoft.com/office/drawing/2014/main" id="{20252E86-4C06-45BB-93F6-8A08D307D0A6}"/>
               </a:ext>
             </a:extLst>
           </p:cNvPr>
@@ -22444,7 +24893,7 @@
     </p:spTree>
     <p:extLst>
       <p:ext uri="{BB962C8B-B14F-4D97-AF65-F5344CB8AC3E}">
-        <p14:creationId xmlns:p14="http://schemas.microsoft.com/office/powerpoint/2010/main" val="1608473671"/>
+        <p14:creationId xmlns:p14="http://schemas.microsoft.com/office/powerpoint/2010/main" val="565457831"/>
       </p:ext>
     </p:extLst>
   </p:cSld>
@@ -22475,7 +24924,7 @@
           <p:cNvPr id="41" name="">
             <a:extLst xmlns:a="http://schemas.openxmlformats.org/drawingml/2006/main">
               <a:ext uri="{FF2B5EF4-FFF2-40B4-BE49-F238E27FC236}">
-                <a16:creationId xmlns:a16="http://schemas.microsoft.com/office/drawing/2014/main" id="{1B2460B7-8597-4318-9A3E-2C7A86E8F992}"/>
+                <a16:creationId xmlns:a16="http://schemas.microsoft.com/office/drawing/2014/main" id="{BB6B30E6-8200-45ED-B2AF-AA7D68E2DAB6}"/>
               </a:ext>
             </a:extLst>
           </p:cNvPr>
@@ -22506,7 +24955,7 @@
           <p:cNvPr id="2" name="">
             <a:extLst xmlns:a="http://schemas.openxmlformats.org/drawingml/2006/main">
               <a:ext uri="{FF2B5EF4-FFF2-40B4-BE49-F238E27FC236}">
-                <a16:creationId xmlns:a16="http://schemas.microsoft.com/office/drawing/2014/main" id="{1EC15267-3ABB-48F8-BE55-D8D9C8FDF16D}"/>
+                <a16:creationId xmlns:a16="http://schemas.microsoft.com/office/drawing/2014/main" id="{3B4C4251-0021-4295-A17A-915DEC455C10}"/>
               </a:ext>
             </a:extLst>
           </p:cNvPr>
@@ -22575,7 +25024,7 @@
           <p:cNvPr id="3" name="">
             <a:extLst xmlns:a="http://schemas.openxmlformats.org/drawingml/2006/main">
               <a:ext uri="{FF2B5EF4-FFF2-40B4-BE49-F238E27FC236}">
-                <a16:creationId xmlns:a16="http://schemas.microsoft.com/office/drawing/2014/main" id="{7982653C-245E-45C6-8D0F-7F84581A6D27}"/>
+                <a16:creationId xmlns:a16="http://schemas.microsoft.com/office/drawing/2014/main" id="{57A4DCA1-D81C-4E40-9246-29EE20D8CF04}"/>
               </a:ext>
             </a:extLst>
           </p:cNvPr>
@@ -22644,7 +25093,7 @@
           <p:cNvPr id="4" name="">
             <a:extLst xmlns:a="http://schemas.openxmlformats.org/drawingml/2006/main">
               <a:ext uri="{FF2B5EF4-FFF2-40B4-BE49-F238E27FC236}">
-                <a16:creationId xmlns:a16="http://schemas.microsoft.com/office/drawing/2014/main" id="{F699A082-73E0-46A7-8C6F-E554AABBEDA5}"/>
+                <a16:creationId xmlns:a16="http://schemas.microsoft.com/office/drawing/2014/main" id="{58A53D2A-F016-408C-BD36-CD1A941C5950}"/>
               </a:ext>
             </a:extLst>
           </p:cNvPr>
@@ -22675,7 +25124,7 @@
           <p:cNvPr id="5" name="">
             <a:extLst xmlns:a="http://schemas.openxmlformats.org/drawingml/2006/main">
               <a:ext uri="{FF2B5EF4-FFF2-40B4-BE49-F238E27FC236}">
-                <a16:creationId xmlns:a16="http://schemas.microsoft.com/office/drawing/2014/main" id="{5B03972D-8C0B-4001-9232-50D61233C9A1}"/>
+                <a16:creationId xmlns:a16="http://schemas.microsoft.com/office/drawing/2014/main" id="{8525AAEA-31A7-4E60-B595-60C4A5990A19}"/>
               </a:ext>
             </a:extLst>
           </p:cNvPr>
@@ -22744,7 +25193,7 @@
           <p:cNvPr id="6" name="">
             <a:extLst xmlns:a="http://schemas.openxmlformats.org/drawingml/2006/main">
               <a:ext uri="{FF2B5EF4-FFF2-40B4-BE49-F238E27FC236}">
-                <a16:creationId xmlns:a16="http://schemas.microsoft.com/office/drawing/2014/main" id="{D7B9B852-D7BE-4612-8D58-698CACFABA7A}"/>
+                <a16:creationId xmlns:a16="http://schemas.microsoft.com/office/drawing/2014/main" id="{51B8ABBA-CF68-407C-AF17-B9E0505D1118}"/>
               </a:ext>
             </a:extLst>
           </p:cNvPr>
@@ -22813,7 +25262,7 @@
           <p:cNvPr id="7" name="">
             <a:extLst xmlns:a="http://schemas.openxmlformats.org/drawingml/2006/main">
               <a:ext uri="{FF2B5EF4-FFF2-40B4-BE49-F238E27FC236}">
-                <a16:creationId xmlns:a16="http://schemas.microsoft.com/office/drawing/2014/main" id="{3A73ACF3-C315-406B-B014-808E2574BC51}"/>
+                <a16:creationId xmlns:a16="http://schemas.microsoft.com/office/drawing/2014/main" id="{21D82BEE-4943-4669-9AAF-C65A7C218690}"/>
               </a:ext>
             </a:extLst>
           </p:cNvPr>
@@ -22872,7 +25321,7 @@
                 <a:ea typeface="Arial"/>
                 <a:cs typeface="Arial"/>
               </a:rPr>
-              <a:t>The live demo follows Asha’s encounter across four staff roles.</a:t>
+              <a:t>The live demo follows Asha’s admission across four staff roles.</a:t>
             </a:r>
           </a:p>
         </p:txBody>
@@ -22882,7 +25331,7 @@
           <p:cNvPr id="8" name="">
             <a:extLst xmlns:a="http://schemas.openxmlformats.org/drawingml/2006/main">
               <a:ext uri="{FF2B5EF4-FFF2-40B4-BE49-F238E27FC236}">
-                <a16:creationId xmlns:a16="http://schemas.microsoft.com/office/drawing/2014/main" id="{914E7A72-4F86-45D4-AC0C-8BB2AEFE7D59}"/>
+                <a16:creationId xmlns:a16="http://schemas.microsoft.com/office/drawing/2014/main" id="{E63AE52B-3AE4-471E-BBDC-DFE1ED52E1A5}"/>
               </a:ext>
             </a:extLst>
           </p:cNvPr>
@@ -22915,7 +25364,7 @@
           <p:cNvPr id="9" name="">
             <a:extLst xmlns:a="http://schemas.openxmlformats.org/drawingml/2006/main">
               <a:ext uri="{FF2B5EF4-FFF2-40B4-BE49-F238E27FC236}">
-                <a16:creationId xmlns:a16="http://schemas.microsoft.com/office/drawing/2014/main" id="{5F07F762-3A5B-4BB1-9422-48C812CB32D8}"/>
+                <a16:creationId xmlns:a16="http://schemas.microsoft.com/office/drawing/2014/main" id="{AD0ECFCB-E5C6-4B70-B1BB-288BA1F46DA3}"/>
               </a:ext>
             </a:extLst>
           </p:cNvPr>
@@ -22984,7 +25433,7 @@
           <p:cNvPr id="10" name="">
             <a:extLst xmlns:a="http://schemas.openxmlformats.org/drawingml/2006/main">
               <a:ext uri="{FF2B5EF4-FFF2-40B4-BE49-F238E27FC236}">
-                <a16:creationId xmlns:a16="http://schemas.microsoft.com/office/drawing/2014/main" id="{4307443F-D7C1-4DF4-9BA2-B6E5C56F7FB2}"/>
+                <a16:creationId xmlns:a16="http://schemas.microsoft.com/office/drawing/2014/main" id="{5A4F1140-FD76-4875-82AB-0DE404D5C7F9}"/>
               </a:ext>
             </a:extLst>
           </p:cNvPr>
@@ -23053,7 +25502,7 @@
           <p:cNvPr id="11" name="">
             <a:extLst xmlns:a="http://schemas.openxmlformats.org/drawingml/2006/main">
               <a:ext uri="{FF2B5EF4-FFF2-40B4-BE49-F238E27FC236}">
-                <a16:creationId xmlns:a16="http://schemas.microsoft.com/office/drawing/2014/main" id="{88C06D15-E5EF-483D-855B-E1F7391AC4D1}"/>
+                <a16:creationId xmlns:a16="http://schemas.microsoft.com/office/drawing/2014/main" id="{C385EFEE-1025-4504-9BE5-CD8AEFB79153}"/>
               </a:ext>
             </a:extLst>
           </p:cNvPr>
@@ -23112,7 +25561,7 @@
                 <a:ea typeface="Arial"/>
                 <a:cs typeface="Arial"/>
               </a:rPr>
-              <a:t>Encounter, diagnosis, consultation charge and orders</a:t>
+              <a:t>Admission, diagnosis, assessment charge and orders</a:t>
             </a:r>
           </a:p>
         </p:txBody>
@@ -23122,7 +25571,7 @@
           <p:cNvPr id="12" name="">
             <a:extLst xmlns:a="http://schemas.openxmlformats.org/drawingml/2006/main">
               <a:ext uri="{FF2B5EF4-FFF2-40B4-BE49-F238E27FC236}">
-                <a16:creationId xmlns:a16="http://schemas.microsoft.com/office/drawing/2014/main" id="{F5F1BDD7-C428-48DB-B5A4-CD615E7A00A3}"/>
+                <a16:creationId xmlns:a16="http://schemas.microsoft.com/office/drawing/2014/main" id="{8D0A3353-B09F-48D3-8F5D-47AE0A7ECED4}"/>
               </a:ext>
             </a:extLst>
           </p:cNvPr>
@@ -23155,7 +25604,7 @@
           <p:cNvPr id="13" name="">
             <a:extLst xmlns:a="http://schemas.openxmlformats.org/drawingml/2006/main">
               <a:ext uri="{FF2B5EF4-FFF2-40B4-BE49-F238E27FC236}">
-                <a16:creationId xmlns:a16="http://schemas.microsoft.com/office/drawing/2014/main" id="{C0E99E19-6761-4D02-BF71-BCBDECC71EB4}"/>
+                <a16:creationId xmlns:a16="http://schemas.microsoft.com/office/drawing/2014/main" id="{073F918B-5959-4463-A012-A186AB9B2ADA}"/>
               </a:ext>
             </a:extLst>
           </p:cNvPr>
@@ -23224,7 +25673,7 @@
           <p:cNvPr id="14" name="">
             <a:extLst xmlns:a="http://schemas.openxmlformats.org/drawingml/2006/main">
               <a:ext uri="{FF2B5EF4-FFF2-40B4-BE49-F238E27FC236}">
-                <a16:creationId xmlns:a16="http://schemas.microsoft.com/office/drawing/2014/main" id="{4F8BDE8E-34AD-4EAF-87F8-7C41E57C82D3}"/>
+                <a16:creationId xmlns:a16="http://schemas.microsoft.com/office/drawing/2014/main" id="{845D1E2F-6878-4902-A471-02EEE68341E5}"/>
               </a:ext>
             </a:extLst>
           </p:cNvPr>
@@ -23293,7 +25742,7 @@
           <p:cNvPr id="15" name="">
             <a:extLst xmlns:a="http://schemas.openxmlformats.org/drawingml/2006/main">
               <a:ext uri="{FF2B5EF4-FFF2-40B4-BE49-F238E27FC236}">
-                <a16:creationId xmlns:a16="http://schemas.microsoft.com/office/drawing/2014/main" id="{9A4E081F-07E8-4107-804C-4E86EE1DE063}"/>
+                <a16:creationId xmlns:a16="http://schemas.microsoft.com/office/drawing/2014/main" id="{AFB1FFAD-ACA3-4557-A477-DE4B2BB16110}"/>
               </a:ext>
             </a:extLst>
           </p:cNvPr>
@@ -23362,7 +25811,7 @@
           <p:cNvPr id="16" name="">
             <a:extLst xmlns:a="http://schemas.openxmlformats.org/drawingml/2006/main">
               <a:ext uri="{FF2B5EF4-FFF2-40B4-BE49-F238E27FC236}">
-                <a16:creationId xmlns:a16="http://schemas.microsoft.com/office/drawing/2014/main" id="{1D1A93F2-0728-4C57-8529-84CDB9B4F58A}"/>
+                <a16:creationId xmlns:a16="http://schemas.microsoft.com/office/drawing/2014/main" id="{1F1E6E1A-0453-439A-B05B-D5594FD5589B}"/>
               </a:ext>
             </a:extLst>
           </p:cNvPr>
@@ -23395,7 +25844,7 @@
           <p:cNvPr id="17" name="">
             <a:extLst xmlns:a="http://schemas.openxmlformats.org/drawingml/2006/main">
               <a:ext uri="{FF2B5EF4-FFF2-40B4-BE49-F238E27FC236}">
-                <a16:creationId xmlns:a16="http://schemas.microsoft.com/office/drawing/2014/main" id="{84BCCEC3-D232-4EF3-89ED-5C452DADBAA7}"/>
+                <a16:creationId xmlns:a16="http://schemas.microsoft.com/office/drawing/2014/main" id="{CDEEE0CE-B2C1-48B3-85A7-349F00640800}"/>
               </a:ext>
             </a:extLst>
           </p:cNvPr>
@@ -23464,7 +25913,7 @@
           <p:cNvPr id="18" name="">
             <a:extLst xmlns:a="http://schemas.openxmlformats.org/drawingml/2006/main">
               <a:ext uri="{FF2B5EF4-FFF2-40B4-BE49-F238E27FC236}">
-                <a16:creationId xmlns:a16="http://schemas.microsoft.com/office/drawing/2014/main" id="{AEAF3ADF-9385-424B-AE57-E7C33D33677C}"/>
+                <a16:creationId xmlns:a16="http://schemas.microsoft.com/office/drawing/2014/main" id="{23EE980E-1432-4320-9F88-D3FFCB4D3D3B}"/>
               </a:ext>
             </a:extLst>
           </p:cNvPr>
@@ -23533,7 +25982,7 @@
           <p:cNvPr id="19" name="">
             <a:extLst xmlns:a="http://schemas.openxmlformats.org/drawingml/2006/main">
               <a:ext uri="{FF2B5EF4-FFF2-40B4-BE49-F238E27FC236}">
-                <a16:creationId xmlns:a16="http://schemas.microsoft.com/office/drawing/2014/main" id="{B28AC332-258D-4497-B1FC-373B6251684F}"/>
+                <a16:creationId xmlns:a16="http://schemas.microsoft.com/office/drawing/2014/main" id="{67364B0B-2007-4FA9-9FD5-C40346849FA1}"/>
               </a:ext>
             </a:extLst>
           </p:cNvPr>
@@ -23592,7 +26041,7 @@
                 <a:ea typeface="Arial"/>
                 <a:cs typeface="Arial"/>
               </a:rPr>
-              <a:t>Prescription, batch and expiry check, tax on separate sale</a:t>
+              <a:t>Prescription, batch and expiry check, inpatient treatment supply</a:t>
             </a:r>
           </a:p>
         </p:txBody>
@@ -23602,7 +26051,7 @@
           <p:cNvPr id="20" name="">
             <a:extLst xmlns:a="http://schemas.openxmlformats.org/drawingml/2006/main">
               <a:ext uri="{FF2B5EF4-FFF2-40B4-BE49-F238E27FC236}">
-                <a16:creationId xmlns:a16="http://schemas.microsoft.com/office/drawing/2014/main" id="{22F967E9-35EA-4907-BF4B-EBD65F4A1A21}"/>
+                <a16:creationId xmlns:a16="http://schemas.microsoft.com/office/drawing/2014/main" id="{CFBA9443-1E06-4466-9573-1C66BDE1CCDE}"/>
               </a:ext>
             </a:extLst>
           </p:cNvPr>
@@ -23635,7 +26084,7 @@
           <p:cNvPr id="21" name="">
             <a:extLst xmlns:a="http://schemas.openxmlformats.org/drawingml/2006/main">
               <a:ext uri="{FF2B5EF4-FFF2-40B4-BE49-F238E27FC236}">
-                <a16:creationId xmlns:a16="http://schemas.microsoft.com/office/drawing/2014/main" id="{CBE204A5-2A03-4982-B811-BB6E9F098D09}"/>
+                <a16:creationId xmlns:a16="http://schemas.microsoft.com/office/drawing/2014/main" id="{1146E982-7CEE-45CF-8A89-089F0A729151}"/>
               </a:ext>
             </a:extLst>
           </p:cNvPr>
@@ -23704,7 +26153,7 @@
           <p:cNvPr id="22" name="">
             <a:extLst xmlns:a="http://schemas.openxmlformats.org/drawingml/2006/main">
               <a:ext uri="{FF2B5EF4-FFF2-40B4-BE49-F238E27FC236}">
-                <a16:creationId xmlns:a16="http://schemas.microsoft.com/office/drawing/2014/main" id="{DB0E6F87-8BEC-412D-9D25-A90A386BD90E}"/>
+                <a16:creationId xmlns:a16="http://schemas.microsoft.com/office/drawing/2014/main" id="{7607448A-2EA9-4079-9F46-10BBA2E3C646}"/>
               </a:ext>
             </a:extLst>
           </p:cNvPr>
@@ -23763,7 +26212,7 @@
                 <a:ea typeface="Arial"/>
                 <a:cs typeface="Arial"/>
               </a:rPr>
-              <a:t>Billing</a:t>
+              <a:t>Bed</a:t>
             </a:r>
           </a:p>
         </p:txBody>
@@ -23773,7 +26222,7 @@
           <p:cNvPr id="23" name="">
             <a:extLst xmlns:a="http://schemas.openxmlformats.org/drawingml/2006/main">
               <a:ext uri="{FF2B5EF4-FFF2-40B4-BE49-F238E27FC236}">
-                <a16:creationId xmlns:a16="http://schemas.microsoft.com/office/drawing/2014/main" id="{E4A06791-EA69-4223-B36F-3752B2CADC92}"/>
+                <a16:creationId xmlns:a16="http://schemas.microsoft.com/office/drawing/2014/main" id="{7AFC86E1-B11C-4B69-A50F-D316ECFA75DD}"/>
               </a:ext>
             </a:extLst>
           </p:cNvPr>
@@ -23832,7 +26281,7 @@
                 <a:ea typeface="Arial"/>
                 <a:cs typeface="Arial"/>
               </a:rPr>
-              <a:t>Running account and itemised OPD invoice</a:t>
+              <a:t>One private room day at ₹6,000, plus ₹300 GST</a:t>
             </a:r>
           </a:p>
         </p:txBody>
@@ -23842,7 +26291,7 @@
           <p:cNvPr id="24" name="">
             <a:extLst xmlns:a="http://schemas.openxmlformats.org/drawingml/2006/main">
               <a:ext uri="{FF2B5EF4-FFF2-40B4-BE49-F238E27FC236}">
-                <a16:creationId xmlns:a16="http://schemas.microsoft.com/office/drawing/2014/main" id="{CFEB7319-59AC-4311-907F-14A35CD703DA}"/>
+                <a16:creationId xmlns:a16="http://schemas.microsoft.com/office/drawing/2014/main" id="{92A8E939-2029-4DDC-B436-4C8EBF0600AE}"/>
               </a:ext>
             </a:extLst>
           </p:cNvPr>
@@ -23875,7 +26324,7 @@
           <p:cNvPr id="25" name="">
             <a:extLst xmlns:a="http://schemas.openxmlformats.org/drawingml/2006/main">
               <a:ext uri="{FF2B5EF4-FFF2-40B4-BE49-F238E27FC236}">
-                <a16:creationId xmlns:a16="http://schemas.microsoft.com/office/drawing/2014/main" id="{2801C9B3-7DFE-46D9-8517-B616CE11B49C}"/>
+                <a16:creationId xmlns:a16="http://schemas.microsoft.com/office/drawing/2014/main" id="{770CE223-EDA1-43ED-BD8C-95BE6E69F8A0}"/>
               </a:ext>
             </a:extLst>
           </p:cNvPr>
@@ -23944,7 +26393,7 @@
           <p:cNvPr id="26" name="">
             <a:extLst xmlns:a="http://schemas.openxmlformats.org/drawingml/2006/main">
               <a:ext uri="{FF2B5EF4-FFF2-40B4-BE49-F238E27FC236}">
-                <a16:creationId xmlns:a16="http://schemas.microsoft.com/office/drawing/2014/main" id="{94E7100F-96AB-4886-9A21-4E173C812645}"/>
+                <a16:creationId xmlns:a16="http://schemas.microsoft.com/office/drawing/2014/main" id="{908054AA-5A0D-451E-8285-CA028FDEC807}"/>
               </a:ext>
             </a:extLst>
           </p:cNvPr>
@@ -24003,7 +26452,7 @@
                 <a:ea typeface="Arial"/>
                 <a:cs typeface="Arial"/>
               </a:rPr>
-              <a:t>IPD</a:t>
+              <a:t>Invoice</a:t>
             </a:r>
           </a:p>
         </p:txBody>
@@ -24013,7 +26462,7 @@
           <p:cNvPr id="27" name="">
             <a:extLst xmlns:a="http://schemas.openxmlformats.org/drawingml/2006/main">
               <a:ext uri="{FF2B5EF4-FFF2-40B4-BE49-F238E27FC236}">
-                <a16:creationId xmlns:a16="http://schemas.microsoft.com/office/drawing/2014/main" id="{FF7861F5-1BF5-4B05-8114-A49EAD24AC87}"/>
+                <a16:creationId xmlns:a16="http://schemas.microsoft.com/office/drawing/2014/main" id="{AEF197CF-F682-426D-BD23-F57A86E60B3C}"/>
               </a:ext>
             </a:extLst>
           </p:cNvPr>
@@ -24072,7 +26521,7 @@
                 <a:ea typeface="Arial"/>
                 <a:cs typeface="Arial"/>
               </a:rPr>
-              <a:t>Room stay, running account and discharge bill</a:t>
+              <a:t>Four lines on one itemised ₹7,510 discharge bill</a:t>
             </a:r>
           </a:p>
         </p:txBody>
@@ -24082,7 +26531,7 @@
           <p:cNvPr id="28" name="">
             <a:extLst xmlns:a="http://schemas.openxmlformats.org/drawingml/2006/main">
               <a:ext uri="{FF2B5EF4-FFF2-40B4-BE49-F238E27FC236}">
-                <a16:creationId xmlns:a16="http://schemas.microsoft.com/office/drawing/2014/main" id="{FB5EF8F1-58A3-4C04-8EE5-B6A1A1659A1B}"/>
+                <a16:creationId xmlns:a16="http://schemas.microsoft.com/office/drawing/2014/main" id="{E61E1A12-3612-4680-B3D1-A2426DD3B3CB}"/>
               </a:ext>
             </a:extLst>
           </p:cNvPr>
@@ -24115,7 +26564,7 @@
           <p:cNvPr id="29" name="">
             <a:extLst xmlns:a="http://schemas.openxmlformats.org/drawingml/2006/main">
               <a:ext uri="{FF2B5EF4-FFF2-40B4-BE49-F238E27FC236}">
-                <a16:creationId xmlns:a16="http://schemas.microsoft.com/office/drawing/2014/main" id="{45CB8680-15DD-49BC-B87E-874E89D8A7E7}"/>
+                <a16:creationId xmlns:a16="http://schemas.microsoft.com/office/drawing/2014/main" id="{E401E7DB-F9FB-4BA1-B7EF-C9CAF8BFED7E}"/>
               </a:ext>
             </a:extLst>
           </p:cNvPr>
@@ -24184,7 +26633,7 @@
           <p:cNvPr id="30" name="">
             <a:extLst xmlns:a="http://schemas.openxmlformats.org/drawingml/2006/main">
               <a:ext uri="{FF2B5EF4-FFF2-40B4-BE49-F238E27FC236}">
-                <a16:creationId xmlns:a16="http://schemas.microsoft.com/office/drawing/2014/main" id="{FFF26CED-1E32-494A-BAE1-647A4F844698}"/>
+                <a16:creationId xmlns:a16="http://schemas.microsoft.com/office/drawing/2014/main" id="{E6091EE9-94BE-4498-8191-3BFDF55676DC}"/>
               </a:ext>
             </a:extLst>
           </p:cNvPr>
@@ -24253,7 +26702,7 @@
           <p:cNvPr id="31" name="">
             <a:extLst xmlns:a="http://schemas.openxmlformats.org/drawingml/2006/main">
               <a:ext uri="{FF2B5EF4-FFF2-40B4-BE49-F238E27FC236}">
-                <a16:creationId xmlns:a16="http://schemas.microsoft.com/office/drawing/2014/main" id="{1AC4DE47-BE7E-40D1-8939-BE353E9D424B}"/>
+                <a16:creationId xmlns:a16="http://schemas.microsoft.com/office/drawing/2014/main" id="{3093E25F-E4D4-463A-AEE8-BABCAC2DB7C7}"/>
               </a:ext>
             </a:extLst>
           </p:cNvPr>
@@ -24322,7 +26771,7 @@
           <p:cNvPr id="32" name="">
             <a:extLst xmlns:a="http://schemas.openxmlformats.org/drawingml/2006/main">
               <a:ext uri="{FF2B5EF4-FFF2-40B4-BE49-F238E27FC236}">
-                <a16:creationId xmlns:a16="http://schemas.microsoft.com/office/drawing/2014/main" id="{ECDD0801-7C8A-420D-BB81-124B7540EC3E}"/>
+                <a16:creationId xmlns:a16="http://schemas.microsoft.com/office/drawing/2014/main" id="{BFB2F138-4AFD-43AC-AF62-63AEFEA48240}"/>
               </a:ext>
             </a:extLst>
           </p:cNvPr>
@@ -24355,7 +26804,7 @@
           <p:cNvPr id="33" name="">
             <a:extLst xmlns:a="http://schemas.openxmlformats.org/drawingml/2006/main">
               <a:ext uri="{FF2B5EF4-FFF2-40B4-BE49-F238E27FC236}">
-                <a16:creationId xmlns:a16="http://schemas.microsoft.com/office/drawing/2014/main" id="{97874E3F-4708-4121-9B92-3C926AF1423F}"/>
+                <a16:creationId xmlns:a16="http://schemas.microsoft.com/office/drawing/2014/main" id="{28FD6C52-0A69-44F8-BF19-116D80830924}"/>
               </a:ext>
             </a:extLst>
           </p:cNvPr>
@@ -24424,7 +26873,7 @@
           <p:cNvPr id="34" name="">
             <a:extLst xmlns:a="http://schemas.openxmlformats.org/drawingml/2006/main">
               <a:ext uri="{FF2B5EF4-FFF2-40B4-BE49-F238E27FC236}">
-                <a16:creationId xmlns:a16="http://schemas.microsoft.com/office/drawing/2014/main" id="{2E9C625C-7A6E-42A8-9957-06EF6CA15F66}"/>
+                <a16:creationId xmlns:a16="http://schemas.microsoft.com/office/drawing/2014/main" id="{AA42A339-6EA6-460B-B57E-E6F75D67A056}"/>
               </a:ext>
             </a:extLst>
           </p:cNvPr>
@@ -24493,7 +26942,7 @@
           <p:cNvPr id="35" name="">
             <a:extLst xmlns:a="http://schemas.openxmlformats.org/drawingml/2006/main">
               <a:ext uri="{FF2B5EF4-FFF2-40B4-BE49-F238E27FC236}">
-                <a16:creationId xmlns:a16="http://schemas.microsoft.com/office/drawing/2014/main" id="{BDBA5208-0645-4116-BD05-2E85CF9E71C5}"/>
+                <a16:creationId xmlns:a16="http://schemas.microsoft.com/office/drawing/2014/main" id="{F287D096-7BB2-4779-BDBA-1423B528655F}"/>
               </a:ext>
             </a:extLst>
           </p:cNvPr>
@@ -24562,7 +27011,7 @@
           <p:cNvPr id="36" name="">
             <a:extLst xmlns:a="http://schemas.openxmlformats.org/drawingml/2006/main">
               <a:ext uri="{FF2B5EF4-FFF2-40B4-BE49-F238E27FC236}">
-                <a16:creationId xmlns:a16="http://schemas.microsoft.com/office/drawing/2014/main" id="{19AB740A-52B9-47AA-AA66-48145560AC22}"/>
+                <a16:creationId xmlns:a16="http://schemas.microsoft.com/office/drawing/2014/main" id="{8A2F0C6B-BBE3-4FD2-9E18-076390773B81}"/>
               </a:ext>
             </a:extLst>
           </p:cNvPr>
@@ -24595,7 +27044,7 @@
           <p:cNvPr id="37" name="">
             <a:extLst xmlns:a="http://schemas.openxmlformats.org/drawingml/2006/main">
               <a:ext uri="{FF2B5EF4-FFF2-40B4-BE49-F238E27FC236}">
-                <a16:creationId xmlns:a16="http://schemas.microsoft.com/office/drawing/2014/main" id="{848504E4-0745-4D8D-B3DE-D90A2EA1936F}"/>
+                <a16:creationId xmlns:a16="http://schemas.microsoft.com/office/drawing/2014/main" id="{56ECAE4E-1D85-450E-B9E9-0742D837BC13}"/>
               </a:ext>
             </a:extLst>
           </p:cNvPr>
@@ -24664,7 +27113,7 @@
           <p:cNvPr id="38" name="">
             <a:extLst xmlns:a="http://schemas.openxmlformats.org/drawingml/2006/main">
               <a:ext uri="{FF2B5EF4-FFF2-40B4-BE49-F238E27FC236}">
-                <a16:creationId xmlns:a16="http://schemas.microsoft.com/office/drawing/2014/main" id="{9FEBCD4E-48F9-4CBD-B704-9965A55AF0F0}"/>
+                <a16:creationId xmlns:a16="http://schemas.microsoft.com/office/drawing/2014/main" id="{BD11D202-F827-4399-B528-8C7CCB2B18A3}"/>
               </a:ext>
             </a:extLst>
           </p:cNvPr>
@@ -24733,7 +27182,7 @@
           <p:cNvPr id="39" name="">
             <a:extLst xmlns:a="http://schemas.openxmlformats.org/drawingml/2006/main">
               <a:ext uri="{FF2B5EF4-FFF2-40B4-BE49-F238E27FC236}">
-                <a16:creationId xmlns:a16="http://schemas.microsoft.com/office/drawing/2014/main" id="{60876088-2DCD-4650-87F2-2BF896F579F8}"/>
+                <a16:creationId xmlns:a16="http://schemas.microsoft.com/office/drawing/2014/main" id="{91B624AF-6BE2-4F3F-BFAC-6D08649A57C5}"/>
               </a:ext>
             </a:extLst>
           </p:cNvPr>
@@ -24802,7 +27251,7 @@
           <p:cNvPr id="40" name="">
             <a:extLst xmlns:a="http://schemas.openxmlformats.org/drawingml/2006/main">
               <a:ext uri="{FF2B5EF4-FFF2-40B4-BE49-F238E27FC236}">
-                <a16:creationId xmlns:a16="http://schemas.microsoft.com/office/drawing/2014/main" id="{214352CC-69D0-4180-940F-BCA4980C96B8}"/>
+                <a16:creationId xmlns:a16="http://schemas.microsoft.com/office/drawing/2014/main" id="{0F20E733-5B88-4811-A5B8-2BE51A18376E}"/>
               </a:ext>
             </a:extLst>
           </p:cNvPr>
@@ -24869,7 +27318,7 @@
     </p:spTree>
     <p:extLst>
       <p:ext uri="{BB962C8B-B14F-4D97-AF65-F5344CB8AC3E}">
-        <p14:creationId xmlns:p14="http://schemas.microsoft.com/office/powerpoint/2010/main" val="1124392447"/>
+        <p14:creationId xmlns:p14="http://schemas.microsoft.com/office/powerpoint/2010/main" val="1793975359"/>
       </p:ext>
     </p:extLst>
   </p:cSld>
@@ -24900,7 +27349,7 @@
           <p:cNvPr id="27" name="">
             <a:extLst xmlns:a="http://schemas.openxmlformats.org/drawingml/2006/main">
               <a:ext uri="{FF2B5EF4-FFF2-40B4-BE49-F238E27FC236}">
-                <a16:creationId xmlns:a16="http://schemas.microsoft.com/office/drawing/2014/main" id="{45093027-032D-45BE-9E39-8E1A75EDE469}"/>
+                <a16:creationId xmlns:a16="http://schemas.microsoft.com/office/drawing/2014/main" id="{65A06181-1E17-4EF7-AFC5-C28DEA11500B}"/>
               </a:ext>
             </a:extLst>
           </p:cNvPr>
@@ -24931,7 +27380,7 @@
           <p:cNvPr id="2" name="">
             <a:extLst xmlns:a="http://schemas.openxmlformats.org/drawingml/2006/main">
               <a:ext uri="{FF2B5EF4-FFF2-40B4-BE49-F238E27FC236}">
-                <a16:creationId xmlns:a16="http://schemas.microsoft.com/office/drawing/2014/main" id="{C9CC24E3-A26D-454A-884B-60E774D4FFDA}"/>
+                <a16:creationId xmlns:a16="http://schemas.microsoft.com/office/drawing/2014/main" id="{7A21D0F0-6482-42AB-B416-EE23AD67CA45}"/>
               </a:ext>
             </a:extLst>
           </p:cNvPr>
@@ -25000,7 +27449,7 @@
           <p:cNvPr id="3" name="">
             <a:extLst xmlns:a="http://schemas.openxmlformats.org/drawingml/2006/main">
               <a:ext uri="{FF2B5EF4-FFF2-40B4-BE49-F238E27FC236}">
-                <a16:creationId xmlns:a16="http://schemas.microsoft.com/office/drawing/2014/main" id="{7E79431E-C5D1-47AF-840E-5F94DA376AA5}"/>
+                <a16:creationId xmlns:a16="http://schemas.microsoft.com/office/drawing/2014/main" id="{3D5153AC-32BE-4B0F-A641-5D691E0A28C6}"/>
               </a:ext>
             </a:extLst>
           </p:cNvPr>
@@ -25069,7 +27518,7 @@
           <p:cNvPr id="4" name="">
             <a:extLst xmlns:a="http://schemas.openxmlformats.org/drawingml/2006/main">
               <a:ext uri="{FF2B5EF4-FFF2-40B4-BE49-F238E27FC236}">
-                <a16:creationId xmlns:a16="http://schemas.microsoft.com/office/drawing/2014/main" id="{FF8B9A3E-0CE2-4A5E-91E4-C384EB551AEB}"/>
+                <a16:creationId xmlns:a16="http://schemas.microsoft.com/office/drawing/2014/main" id="{ED5B846B-AE03-4DF7-AAE5-75DB0014D8AE}"/>
               </a:ext>
             </a:extLst>
           </p:cNvPr>
@@ -25100,7 +27549,7 @@
           <p:cNvPr id="5" name="">
             <a:extLst xmlns:a="http://schemas.openxmlformats.org/drawingml/2006/main">
               <a:ext uri="{FF2B5EF4-FFF2-40B4-BE49-F238E27FC236}">
-                <a16:creationId xmlns:a16="http://schemas.microsoft.com/office/drawing/2014/main" id="{130D40F2-5BBB-4451-9593-E35FE669135E}"/>
+                <a16:creationId xmlns:a16="http://schemas.microsoft.com/office/drawing/2014/main" id="{F23C8FD9-D064-4FF8-A3CF-1394AACBB2EC}"/>
               </a:ext>
             </a:extLst>
           </p:cNvPr>
@@ -25169,7 +27618,7 @@
           <p:cNvPr id="6" name="">
             <a:extLst xmlns:a="http://schemas.openxmlformats.org/drawingml/2006/main">
               <a:ext uri="{FF2B5EF4-FFF2-40B4-BE49-F238E27FC236}">
-                <a16:creationId xmlns:a16="http://schemas.microsoft.com/office/drawing/2014/main" id="{8220AD98-A1F9-434E-9BC1-AFEB5E1142E8}"/>
+                <a16:creationId xmlns:a16="http://schemas.microsoft.com/office/drawing/2014/main" id="{22D5E6B0-879F-4033-B2C7-EA5C48A18C88}"/>
               </a:ext>
             </a:extLst>
           </p:cNvPr>
@@ -25238,7 +27687,7 @@
           <p:cNvPr id="7" name="">
             <a:extLst xmlns:a="http://schemas.openxmlformats.org/drawingml/2006/main">
               <a:ext uri="{FF2B5EF4-FFF2-40B4-BE49-F238E27FC236}">
-                <a16:creationId xmlns:a16="http://schemas.microsoft.com/office/drawing/2014/main" id="{0BA011EE-8CD9-4873-AFC4-936C887C55FD}"/>
+                <a16:creationId xmlns:a16="http://schemas.microsoft.com/office/drawing/2014/main" id="{AE2198B0-CFA8-4BC2-B611-7CC485601D11}"/>
               </a:ext>
             </a:extLst>
           </p:cNvPr>
@@ -25269,7 +27718,7 @@
           <p:cNvPr id="8" name="">
             <a:extLst xmlns:a="http://schemas.openxmlformats.org/drawingml/2006/main">
               <a:ext uri="{FF2B5EF4-FFF2-40B4-BE49-F238E27FC236}">
-                <a16:creationId xmlns:a16="http://schemas.microsoft.com/office/drawing/2014/main" id="{2732CF2B-62EB-4889-882C-ACD45F8A5CB0}"/>
+                <a16:creationId xmlns:a16="http://schemas.microsoft.com/office/drawing/2014/main" id="{1897F678-91E9-42EB-BC77-1623E999EF73}"/>
               </a:ext>
             </a:extLst>
           </p:cNvPr>
@@ -25338,7 +27787,7 @@
           <p:cNvPr id="9" name="">
             <a:extLst xmlns:a="http://schemas.openxmlformats.org/drawingml/2006/main">
               <a:ext uri="{FF2B5EF4-FFF2-40B4-BE49-F238E27FC236}">
-                <a16:creationId xmlns:a16="http://schemas.microsoft.com/office/drawing/2014/main" id="{61A1E3E8-40AA-417D-AD93-ADBA71305D0E}"/>
+                <a16:creationId xmlns:a16="http://schemas.microsoft.com/office/drawing/2014/main" id="{3D3D7A88-F406-410E-951F-ECACB2E97A63}"/>
               </a:ext>
             </a:extLst>
           </p:cNvPr>
@@ -25371,7 +27820,7 @@
           <p:cNvPr id="10" name="">
             <a:extLst xmlns:a="http://schemas.openxmlformats.org/drawingml/2006/main">
               <a:ext uri="{FF2B5EF4-FFF2-40B4-BE49-F238E27FC236}">
-                <a16:creationId xmlns:a16="http://schemas.microsoft.com/office/drawing/2014/main" id="{51F23DDB-E186-4EFF-B9A4-9ED74CA9504B}"/>
+                <a16:creationId xmlns:a16="http://schemas.microsoft.com/office/drawing/2014/main" id="{BFE4CAF4-4781-469C-84BB-359AD40BD1DA}"/>
               </a:ext>
             </a:extLst>
           </p:cNvPr>
@@ -25440,7 +27889,7 @@
           <p:cNvPr id="11" name="">
             <a:extLst xmlns:a="http://schemas.openxmlformats.org/drawingml/2006/main">
               <a:ext uri="{FF2B5EF4-FFF2-40B4-BE49-F238E27FC236}">
-                <a16:creationId xmlns:a16="http://schemas.microsoft.com/office/drawing/2014/main" id="{F69CEF46-1C70-4A2B-AD98-D903063A3AF8}"/>
+                <a16:creationId xmlns:a16="http://schemas.microsoft.com/office/drawing/2014/main" id="{64F369DF-56DF-4660-AA27-85BCBEE4DE4B}"/>
               </a:ext>
             </a:extLst>
           </p:cNvPr>
@@ -25509,7 +27958,7 @@
           <p:cNvPr id="12" name="">
             <a:extLst xmlns:a="http://schemas.openxmlformats.org/drawingml/2006/main">
               <a:ext uri="{FF2B5EF4-FFF2-40B4-BE49-F238E27FC236}">
-                <a16:creationId xmlns:a16="http://schemas.microsoft.com/office/drawing/2014/main" id="{A02D5151-06BB-4DC9-A060-2CA77C220688}"/>
+                <a16:creationId xmlns:a16="http://schemas.microsoft.com/office/drawing/2014/main" id="{529D0805-D684-4711-AD94-02C44865012E}"/>
               </a:ext>
             </a:extLst>
           </p:cNvPr>
@@ -25540,7 +27989,7 @@
           <p:cNvPr id="13" name="">
             <a:extLst xmlns:a="http://schemas.openxmlformats.org/drawingml/2006/main">
               <a:ext uri="{FF2B5EF4-FFF2-40B4-BE49-F238E27FC236}">
-                <a16:creationId xmlns:a16="http://schemas.microsoft.com/office/drawing/2014/main" id="{A28DE999-4A82-496D-BC4E-641CDB0151A6}"/>
+                <a16:creationId xmlns:a16="http://schemas.microsoft.com/office/drawing/2014/main" id="{95E070BF-A76C-43FC-B535-0641C9856090}"/>
               </a:ext>
             </a:extLst>
           </p:cNvPr>
@@ -25609,7 +28058,7 @@
           <p:cNvPr id="14" name="">
             <a:extLst xmlns:a="http://schemas.openxmlformats.org/drawingml/2006/main">
               <a:ext uri="{FF2B5EF4-FFF2-40B4-BE49-F238E27FC236}">
-                <a16:creationId xmlns:a16="http://schemas.microsoft.com/office/drawing/2014/main" id="{1C947860-22A1-4A1D-8E1C-6D4F0856526F}"/>
+                <a16:creationId xmlns:a16="http://schemas.microsoft.com/office/drawing/2014/main" id="{02AA5218-826B-4E8C-9F9B-6E7D3DB3BBCF}"/>
               </a:ext>
             </a:extLst>
           </p:cNvPr>
@@ -25642,7 +28091,7 @@
           <p:cNvPr id="15" name="">
             <a:extLst xmlns:a="http://schemas.openxmlformats.org/drawingml/2006/main">
               <a:ext uri="{FF2B5EF4-FFF2-40B4-BE49-F238E27FC236}">
-                <a16:creationId xmlns:a16="http://schemas.microsoft.com/office/drawing/2014/main" id="{C1384519-8C88-4247-BB77-0CB1EB1C8279}"/>
+                <a16:creationId xmlns:a16="http://schemas.microsoft.com/office/drawing/2014/main" id="{96FB341F-490A-4993-822B-A72971C131B8}"/>
               </a:ext>
             </a:extLst>
           </p:cNvPr>
@@ -25711,7 +28160,7 @@
           <p:cNvPr id="16" name="">
             <a:extLst xmlns:a="http://schemas.openxmlformats.org/drawingml/2006/main">
               <a:ext uri="{FF2B5EF4-FFF2-40B4-BE49-F238E27FC236}">
-                <a16:creationId xmlns:a16="http://schemas.microsoft.com/office/drawing/2014/main" id="{10DDE67C-7B9B-4E62-A776-4C9F8189DE0D}"/>
+                <a16:creationId xmlns:a16="http://schemas.microsoft.com/office/drawing/2014/main" id="{EE2A1870-9E4A-470A-A03A-D1FC8CD607EA}"/>
               </a:ext>
             </a:extLst>
           </p:cNvPr>
@@ -25780,7 +28229,7 @@
           <p:cNvPr id="17" name="">
             <a:extLst xmlns:a="http://schemas.openxmlformats.org/drawingml/2006/main">
               <a:ext uri="{FF2B5EF4-FFF2-40B4-BE49-F238E27FC236}">
-                <a16:creationId xmlns:a16="http://schemas.microsoft.com/office/drawing/2014/main" id="{5E74BC81-1395-4C1F-A75F-338822517232}"/>
+                <a16:creationId xmlns:a16="http://schemas.microsoft.com/office/drawing/2014/main" id="{E418305B-624F-4CEB-A21A-4B1FF7EE8EDE}"/>
               </a:ext>
             </a:extLst>
           </p:cNvPr>
@@ -25811,7 +28260,7 @@
           <p:cNvPr id="18" name="">
             <a:extLst xmlns:a="http://schemas.openxmlformats.org/drawingml/2006/main">
               <a:ext uri="{FF2B5EF4-FFF2-40B4-BE49-F238E27FC236}">
-                <a16:creationId xmlns:a16="http://schemas.microsoft.com/office/drawing/2014/main" id="{96133AA7-C03D-4CF1-BD2E-40585834DC66}"/>
+                <a16:creationId xmlns:a16="http://schemas.microsoft.com/office/drawing/2014/main" id="{A7732E0F-5BEE-41FC-B24E-D26FFBAAF9B0}"/>
               </a:ext>
             </a:extLst>
           </p:cNvPr>
@@ -25880,7 +28329,7 @@
           <p:cNvPr id="19" name="">
             <a:extLst xmlns:a="http://schemas.openxmlformats.org/drawingml/2006/main">
               <a:ext uri="{FF2B5EF4-FFF2-40B4-BE49-F238E27FC236}">
-                <a16:creationId xmlns:a16="http://schemas.microsoft.com/office/drawing/2014/main" id="{3DF595CE-9D3D-4E99-83C6-2286B6C62213}"/>
+                <a16:creationId xmlns:a16="http://schemas.microsoft.com/office/drawing/2014/main" id="{763CD548-F155-427B-B6D8-B025EA99251B}"/>
               </a:ext>
             </a:extLst>
           </p:cNvPr>
@@ -25913,7 +28362,7 @@
           <p:cNvPr id="20" name="">
             <a:extLst xmlns:a="http://schemas.openxmlformats.org/drawingml/2006/main">
               <a:ext uri="{FF2B5EF4-FFF2-40B4-BE49-F238E27FC236}">
-                <a16:creationId xmlns:a16="http://schemas.microsoft.com/office/drawing/2014/main" id="{EB07499A-C6A8-475F-9396-5FC669DA3ADD}"/>
+                <a16:creationId xmlns:a16="http://schemas.microsoft.com/office/drawing/2014/main" id="{B45C5CFF-E171-45B4-B84B-ACBCA655AA02}"/>
               </a:ext>
             </a:extLst>
           </p:cNvPr>
@@ -25982,7 +28431,7 @@
           <p:cNvPr id="21" name="">
             <a:extLst xmlns:a="http://schemas.openxmlformats.org/drawingml/2006/main">
               <a:ext uri="{FF2B5EF4-FFF2-40B4-BE49-F238E27FC236}">
-                <a16:creationId xmlns:a16="http://schemas.microsoft.com/office/drawing/2014/main" id="{F084F43A-4E78-4FEE-B999-29B98BB87C30}"/>
+                <a16:creationId xmlns:a16="http://schemas.microsoft.com/office/drawing/2014/main" id="{0B3E1858-A023-49F2-AE15-A88077FD7424}"/>
               </a:ext>
             </a:extLst>
           </p:cNvPr>
@@ -26051,7 +28500,7 @@
           <p:cNvPr id="22" name="">
             <a:extLst xmlns:a="http://schemas.openxmlformats.org/drawingml/2006/main">
               <a:ext uri="{FF2B5EF4-FFF2-40B4-BE49-F238E27FC236}">
-                <a16:creationId xmlns:a16="http://schemas.microsoft.com/office/drawing/2014/main" id="{23527286-FD9E-4C5A-9F7C-7728421B8FB8}"/>
+                <a16:creationId xmlns:a16="http://schemas.microsoft.com/office/drawing/2014/main" id="{4A685862-4056-4B38-9357-8AFDD2502484}"/>
               </a:ext>
             </a:extLst>
           </p:cNvPr>
@@ -26082,7 +28531,7 @@
           <p:cNvPr id="23" name="">
             <a:extLst xmlns:a="http://schemas.openxmlformats.org/drawingml/2006/main">
               <a:ext uri="{FF2B5EF4-FFF2-40B4-BE49-F238E27FC236}">
-                <a16:creationId xmlns:a16="http://schemas.microsoft.com/office/drawing/2014/main" id="{493C4918-88A8-48FE-83B3-752E8EC63AEB}"/>
+                <a16:creationId xmlns:a16="http://schemas.microsoft.com/office/drawing/2014/main" id="{5783CC44-165F-46FE-A160-B2E4403FC9F0}"/>
               </a:ext>
             </a:extLst>
           </p:cNvPr>
@@ -26151,7 +28600,7 @@
           <p:cNvPr id="24" name="">
             <a:extLst xmlns:a="http://schemas.openxmlformats.org/drawingml/2006/main">
               <a:ext uri="{FF2B5EF4-FFF2-40B4-BE49-F238E27FC236}">
-                <a16:creationId xmlns:a16="http://schemas.microsoft.com/office/drawing/2014/main" id="{7066C6EE-7347-41DE-A0B4-F92CA7CBCA9E}"/>
+                <a16:creationId xmlns:a16="http://schemas.microsoft.com/office/drawing/2014/main" id="{ADCE5E7F-F7E3-413C-97DE-C1F28C646717}"/>
               </a:ext>
             </a:extLst>
           </p:cNvPr>
@@ -26184,7 +28633,7 @@
           <p:cNvPr id="25" name="">
             <a:extLst xmlns:a="http://schemas.openxmlformats.org/drawingml/2006/main">
               <a:ext uri="{FF2B5EF4-FFF2-40B4-BE49-F238E27FC236}">
-                <a16:creationId xmlns:a16="http://schemas.microsoft.com/office/drawing/2014/main" id="{44E82B91-B66D-4CD2-80A8-371DB008BB8A}"/>
+                <a16:creationId xmlns:a16="http://schemas.microsoft.com/office/drawing/2014/main" id="{51750C4A-DFC4-4A67-9F8C-60E08221D150}"/>
               </a:ext>
             </a:extLst>
           </p:cNvPr>
@@ -26253,7 +28702,7 @@
           <p:cNvPr id="26" name="">
             <a:extLst xmlns:a="http://schemas.openxmlformats.org/drawingml/2006/main">
               <a:ext uri="{FF2B5EF4-FFF2-40B4-BE49-F238E27FC236}">
-                <a16:creationId xmlns:a16="http://schemas.microsoft.com/office/drawing/2014/main" id="{78935D54-042A-48C5-84EF-A9769A38CA66}"/>
+                <a16:creationId xmlns:a16="http://schemas.microsoft.com/office/drawing/2014/main" id="{02E4B163-48F8-444F-861E-4B9F76D3A00A}"/>
               </a:ext>
             </a:extLst>
           </p:cNvPr>
@@ -26320,7 +28769,7 @@
     </p:spTree>
     <p:extLst>
       <p:ext uri="{BB962C8B-B14F-4D97-AF65-F5344CB8AC3E}">
-        <p14:creationId xmlns:p14="http://schemas.microsoft.com/office/powerpoint/2010/main" val="927870294"/>
+        <p14:creationId xmlns:p14="http://schemas.microsoft.com/office/powerpoint/2010/main" val="631970269"/>
       </p:ext>
     </p:extLst>
   </p:cSld>
@@ -26351,7 +28800,7 @@
           <p:cNvPr id="25" name="">
             <a:extLst xmlns:a="http://schemas.openxmlformats.org/drawingml/2006/main">
               <a:ext uri="{FF2B5EF4-FFF2-40B4-BE49-F238E27FC236}">
-                <a16:creationId xmlns:a16="http://schemas.microsoft.com/office/drawing/2014/main" id="{AAC712CE-E7D8-4313-B575-7553B9331265}"/>
+                <a16:creationId xmlns:a16="http://schemas.microsoft.com/office/drawing/2014/main" id="{BD9565D5-0E28-4AAC-BED4-B3D6BAE18FC7}"/>
               </a:ext>
             </a:extLst>
           </p:cNvPr>
@@ -26382,7 +28831,7 @@
           <p:cNvPr id="2" name="">
             <a:extLst xmlns:a="http://schemas.openxmlformats.org/drawingml/2006/main">
               <a:ext uri="{FF2B5EF4-FFF2-40B4-BE49-F238E27FC236}">
-                <a16:creationId xmlns:a16="http://schemas.microsoft.com/office/drawing/2014/main" id="{02AF6E9C-E9D8-4E75-B4E9-8444A5ED2F1C}"/>
+                <a16:creationId xmlns:a16="http://schemas.microsoft.com/office/drawing/2014/main" id="{5D11061E-D04F-4228-8773-019A29C868E0}"/>
               </a:ext>
             </a:extLst>
           </p:cNvPr>
@@ -26451,7 +28900,7 @@
           <p:cNvPr id="3" name="">
             <a:extLst xmlns:a="http://schemas.openxmlformats.org/drawingml/2006/main">
               <a:ext uri="{FF2B5EF4-FFF2-40B4-BE49-F238E27FC236}">
-                <a16:creationId xmlns:a16="http://schemas.microsoft.com/office/drawing/2014/main" id="{BCF96052-F75F-4A9C-BD8D-845CA2FD90B2}"/>
+                <a16:creationId xmlns:a16="http://schemas.microsoft.com/office/drawing/2014/main" id="{59C88B29-6364-432B-94D9-0F10824C5551}"/>
               </a:ext>
             </a:extLst>
           </p:cNvPr>
@@ -26520,7 +28969,7 @@
           <p:cNvPr id="4" name="">
             <a:extLst xmlns:a="http://schemas.openxmlformats.org/drawingml/2006/main">
               <a:ext uri="{FF2B5EF4-FFF2-40B4-BE49-F238E27FC236}">
-                <a16:creationId xmlns:a16="http://schemas.microsoft.com/office/drawing/2014/main" id="{7B027F78-A0D3-4E02-8D60-5EAFE7250CBC}"/>
+                <a16:creationId xmlns:a16="http://schemas.microsoft.com/office/drawing/2014/main" id="{B7864B00-C7A0-4828-9D3D-D5B69BE46249}"/>
               </a:ext>
             </a:extLst>
           </p:cNvPr>
@@ -26551,7 +29000,7 @@
           <p:cNvPr id="5" name="">
             <a:extLst xmlns:a="http://schemas.openxmlformats.org/drawingml/2006/main">
               <a:ext uri="{FF2B5EF4-FFF2-40B4-BE49-F238E27FC236}">
-                <a16:creationId xmlns:a16="http://schemas.microsoft.com/office/drawing/2014/main" id="{BD278447-2D4B-43DF-B61D-FA6E2CA7DB10}"/>
+                <a16:creationId xmlns:a16="http://schemas.microsoft.com/office/drawing/2014/main" id="{2378B9DE-F791-46E7-A202-7036F7018DD2}"/>
               </a:ext>
             </a:extLst>
           </p:cNvPr>
@@ -26620,7 +29069,7 @@
           <p:cNvPr id="6" name="">
             <a:extLst xmlns:a="http://schemas.openxmlformats.org/drawingml/2006/main">
               <a:ext uri="{FF2B5EF4-FFF2-40B4-BE49-F238E27FC236}">
-                <a16:creationId xmlns:a16="http://schemas.microsoft.com/office/drawing/2014/main" id="{BD6AE275-8A67-479F-B1D9-62C1034AD338}"/>
+                <a16:creationId xmlns:a16="http://schemas.microsoft.com/office/drawing/2014/main" id="{8AD3F9F9-48E1-4EB0-AEF0-63402EE2C340}"/>
               </a:ext>
             </a:extLst>
           </p:cNvPr>
@@ -26689,7 +29138,7 @@
           <p:cNvPr id="7" name="">
             <a:extLst xmlns:a="http://schemas.openxmlformats.org/drawingml/2006/main">
               <a:ext uri="{FF2B5EF4-FFF2-40B4-BE49-F238E27FC236}">
-                <a16:creationId xmlns:a16="http://schemas.microsoft.com/office/drawing/2014/main" id="{732A9091-2374-4D1B-A33E-F6F3B546AD4A}"/>
+                <a16:creationId xmlns:a16="http://schemas.microsoft.com/office/drawing/2014/main" id="{9DF779F0-A3F6-44B1-86B2-73CEC9E42262}"/>
               </a:ext>
             </a:extLst>
           </p:cNvPr>
@@ -26722,7 +29171,7 @@
           <p:cNvPr id="8" name="">
             <a:extLst xmlns:a="http://schemas.openxmlformats.org/drawingml/2006/main">
               <a:ext uri="{FF2B5EF4-FFF2-40B4-BE49-F238E27FC236}">
-                <a16:creationId xmlns:a16="http://schemas.microsoft.com/office/drawing/2014/main" id="{61669D85-0FC3-46AC-8CEF-16B2D354A5D0}"/>
+                <a16:creationId xmlns:a16="http://schemas.microsoft.com/office/drawing/2014/main" id="{58D2CBDA-DC5D-45AB-B1E2-F1FE98A8AEED}"/>
               </a:ext>
             </a:extLst>
           </p:cNvPr>
@@ -26791,7 +29240,7 @@
           <p:cNvPr id="9" name="">
             <a:extLst xmlns:a="http://schemas.openxmlformats.org/drawingml/2006/main">
               <a:ext uri="{FF2B5EF4-FFF2-40B4-BE49-F238E27FC236}">
-                <a16:creationId xmlns:a16="http://schemas.microsoft.com/office/drawing/2014/main" id="{5B6726E5-FC5F-4591-AB94-E8A99D4E37D1}"/>
+                <a16:creationId xmlns:a16="http://schemas.microsoft.com/office/drawing/2014/main" id="{F58C8FCB-E772-41A8-8852-31AAE699D694}"/>
               </a:ext>
             </a:extLst>
           </p:cNvPr>
@@ -26860,7 +29309,7 @@
           <p:cNvPr id="10" name="">
             <a:extLst xmlns:a="http://schemas.openxmlformats.org/drawingml/2006/main">
               <a:ext uri="{FF2B5EF4-FFF2-40B4-BE49-F238E27FC236}">
-                <a16:creationId xmlns:a16="http://schemas.microsoft.com/office/drawing/2014/main" id="{97C481FD-3CA4-4FF7-B445-0B6187474B2A}"/>
+                <a16:creationId xmlns:a16="http://schemas.microsoft.com/office/drawing/2014/main" id="{D919C91F-A879-41BD-BD41-9D04698FA593}"/>
               </a:ext>
             </a:extLst>
           </p:cNvPr>
@@ -26893,7 +29342,7 @@
           <p:cNvPr id="11" name="">
             <a:extLst xmlns:a="http://schemas.openxmlformats.org/drawingml/2006/main">
               <a:ext uri="{FF2B5EF4-FFF2-40B4-BE49-F238E27FC236}">
-                <a16:creationId xmlns:a16="http://schemas.microsoft.com/office/drawing/2014/main" id="{ACB72F16-D93C-4B1D-B042-386650DDA836}"/>
+                <a16:creationId xmlns:a16="http://schemas.microsoft.com/office/drawing/2014/main" id="{E2788EDF-BDC5-4915-924E-7EC45FDED4F6}"/>
               </a:ext>
             </a:extLst>
           </p:cNvPr>
@@ -26924,7 +29373,7 @@
           <p:cNvPr id="12" name="">
             <a:extLst xmlns:a="http://schemas.openxmlformats.org/drawingml/2006/main">
               <a:ext uri="{FF2B5EF4-FFF2-40B4-BE49-F238E27FC236}">
-                <a16:creationId xmlns:a16="http://schemas.microsoft.com/office/drawing/2014/main" id="{D1ADF452-9A50-445D-ADF3-27AF4599B82B}"/>
+                <a16:creationId xmlns:a16="http://schemas.microsoft.com/office/drawing/2014/main" id="{0BA328D1-8AC4-4B57-9264-A198485B2AD7}"/>
               </a:ext>
             </a:extLst>
           </p:cNvPr>
@@ -26993,7 +29442,7 @@
           <p:cNvPr id="13" name="">
             <a:extLst xmlns:a="http://schemas.openxmlformats.org/drawingml/2006/main">
               <a:ext uri="{FF2B5EF4-FFF2-40B4-BE49-F238E27FC236}">
-                <a16:creationId xmlns:a16="http://schemas.microsoft.com/office/drawing/2014/main" id="{B30CBB26-0A29-4982-AB74-866F00B87351}"/>
+                <a16:creationId xmlns:a16="http://schemas.microsoft.com/office/drawing/2014/main" id="{ED00180B-5134-49D5-9B9B-ECAC4A8CF002}"/>
               </a:ext>
             </a:extLst>
           </p:cNvPr>
@@ -27062,7 +29511,7 @@
           <p:cNvPr id="14" name="">
             <a:extLst xmlns:a="http://schemas.openxmlformats.org/drawingml/2006/main">
               <a:ext uri="{FF2B5EF4-FFF2-40B4-BE49-F238E27FC236}">
-                <a16:creationId xmlns:a16="http://schemas.microsoft.com/office/drawing/2014/main" id="{50C2C8DA-0094-4D25-8776-D9BF6E3C502A}"/>
+                <a16:creationId xmlns:a16="http://schemas.microsoft.com/office/drawing/2014/main" id="{9BA3AE50-A239-4C9E-BFF8-09DBA50CF881}"/>
               </a:ext>
             </a:extLst>
           </p:cNvPr>
@@ -27131,7 +29580,7 @@
           <p:cNvPr id="15" name="">
             <a:extLst xmlns:a="http://schemas.openxmlformats.org/drawingml/2006/main">
               <a:ext uri="{FF2B5EF4-FFF2-40B4-BE49-F238E27FC236}">
-                <a16:creationId xmlns:a16="http://schemas.microsoft.com/office/drawing/2014/main" id="{28B56F83-6A81-4308-ABC5-772B64D3E99C}"/>
+                <a16:creationId xmlns:a16="http://schemas.microsoft.com/office/drawing/2014/main" id="{DBDAB1A6-41BC-40D5-A983-17F4698897F7}"/>
               </a:ext>
             </a:extLst>
           </p:cNvPr>
@@ -27164,7 +29613,7 @@
           <p:cNvPr id="16" name="">
             <a:extLst xmlns:a="http://schemas.openxmlformats.org/drawingml/2006/main">
               <a:ext uri="{FF2B5EF4-FFF2-40B4-BE49-F238E27FC236}">
-                <a16:creationId xmlns:a16="http://schemas.microsoft.com/office/drawing/2014/main" id="{B02A8684-D5BA-4385-84C1-8CA1A3652B75}"/>
+                <a16:creationId xmlns:a16="http://schemas.microsoft.com/office/drawing/2014/main" id="{578E0F78-77D2-40F9-8049-209B3641B83A}"/>
               </a:ext>
             </a:extLst>
           </p:cNvPr>
@@ -27195,7 +29644,7 @@
           <p:cNvPr id="17" name="">
             <a:extLst xmlns:a="http://schemas.openxmlformats.org/drawingml/2006/main">
               <a:ext uri="{FF2B5EF4-FFF2-40B4-BE49-F238E27FC236}">
-                <a16:creationId xmlns:a16="http://schemas.microsoft.com/office/drawing/2014/main" id="{D317A559-2D37-424C-9746-EFA9BF99E957}"/>
+                <a16:creationId xmlns:a16="http://schemas.microsoft.com/office/drawing/2014/main" id="{8A8CC9BF-D2AB-46E8-9FBE-A9DD1AD2A383}"/>
               </a:ext>
             </a:extLst>
           </p:cNvPr>
@@ -27264,7 +29713,7 @@
           <p:cNvPr id="18" name="">
             <a:extLst xmlns:a="http://schemas.openxmlformats.org/drawingml/2006/main">
               <a:ext uri="{FF2B5EF4-FFF2-40B4-BE49-F238E27FC236}">
-                <a16:creationId xmlns:a16="http://schemas.microsoft.com/office/drawing/2014/main" id="{E8940FDF-D2D2-4CB7-8473-9818E7D2ED55}"/>
+                <a16:creationId xmlns:a16="http://schemas.microsoft.com/office/drawing/2014/main" id="{84F1906F-689B-4BDE-8EC5-D38554E4CFD1}"/>
               </a:ext>
             </a:extLst>
           </p:cNvPr>
@@ -27333,7 +29782,7 @@
           <p:cNvPr id="19" name="">
             <a:extLst xmlns:a="http://schemas.openxmlformats.org/drawingml/2006/main">
               <a:ext uri="{FF2B5EF4-FFF2-40B4-BE49-F238E27FC236}">
-                <a16:creationId xmlns:a16="http://schemas.microsoft.com/office/drawing/2014/main" id="{3C0197AE-9F24-4CBA-8217-0BE121C80981}"/>
+                <a16:creationId xmlns:a16="http://schemas.microsoft.com/office/drawing/2014/main" id="{B59510A2-4247-41CD-83E5-3E7054C957D2}"/>
               </a:ext>
             </a:extLst>
           </p:cNvPr>
@@ -27402,7 +29851,7 @@
           <p:cNvPr id="20" name="">
             <a:extLst xmlns:a="http://schemas.openxmlformats.org/drawingml/2006/main">
               <a:ext uri="{FF2B5EF4-FFF2-40B4-BE49-F238E27FC236}">
-                <a16:creationId xmlns:a16="http://schemas.microsoft.com/office/drawing/2014/main" id="{1A2FAFB0-F9AF-4EC8-B99B-70D2CC6C6A6F}"/>
+                <a16:creationId xmlns:a16="http://schemas.microsoft.com/office/drawing/2014/main" id="{85AB91B6-9B04-4548-B199-7CD976E57F79}"/>
               </a:ext>
             </a:extLst>
           </p:cNvPr>
@@ -27435,7 +29884,7 @@
           <p:cNvPr id="21" name="">
             <a:extLst xmlns:a="http://schemas.openxmlformats.org/drawingml/2006/main">
               <a:ext uri="{FF2B5EF4-FFF2-40B4-BE49-F238E27FC236}">
-                <a16:creationId xmlns:a16="http://schemas.microsoft.com/office/drawing/2014/main" id="{A710533E-0F31-4C9B-B431-50A08E66AFF9}"/>
+                <a16:creationId xmlns:a16="http://schemas.microsoft.com/office/drawing/2014/main" id="{D9D770CF-E4BC-43C4-8B3A-200A16539447}"/>
               </a:ext>
             </a:extLst>
           </p:cNvPr>
@@ -27466,7 +29915,7 @@
           <p:cNvPr id="22" name="">
             <a:extLst xmlns:a="http://schemas.openxmlformats.org/drawingml/2006/main">
               <a:ext uri="{FF2B5EF4-FFF2-40B4-BE49-F238E27FC236}">
-                <a16:creationId xmlns:a16="http://schemas.microsoft.com/office/drawing/2014/main" id="{1262FCBE-DF1C-44D3-9FD0-B03811631E49}"/>
+                <a16:creationId xmlns:a16="http://schemas.microsoft.com/office/drawing/2014/main" id="{FB1DA50C-0729-4C8D-9B98-8C56A85A50A3}"/>
               </a:ext>
             </a:extLst>
           </p:cNvPr>
@@ -27535,7 +29984,7 @@
           <p:cNvPr id="23" name="">
             <a:extLst xmlns:a="http://schemas.openxmlformats.org/drawingml/2006/main">
               <a:ext uri="{FF2B5EF4-FFF2-40B4-BE49-F238E27FC236}">
-                <a16:creationId xmlns:a16="http://schemas.microsoft.com/office/drawing/2014/main" id="{C29559B5-0C74-4533-A401-B8203E32E018}"/>
+                <a16:creationId xmlns:a16="http://schemas.microsoft.com/office/drawing/2014/main" id="{C3BF4411-E0B7-47E1-A879-42C36B1C355B}"/>
               </a:ext>
             </a:extLst>
           </p:cNvPr>
@@ -27604,7 +30053,7 @@
           <p:cNvPr id="24" name="">
             <a:extLst xmlns:a="http://schemas.openxmlformats.org/drawingml/2006/main">
               <a:ext uri="{FF2B5EF4-FFF2-40B4-BE49-F238E27FC236}">
-                <a16:creationId xmlns:a16="http://schemas.microsoft.com/office/drawing/2014/main" id="{96C6656F-7C74-42D7-A3BA-A634E3EF23AB}"/>
+                <a16:creationId xmlns:a16="http://schemas.microsoft.com/office/drawing/2014/main" id="{8B1EE803-D4EC-4227-82FD-E2E6D18859A1}"/>
               </a:ext>
             </a:extLst>
           </p:cNvPr>
@@ -27671,7 +30120,7 @@
     </p:spTree>
     <p:extLst>
       <p:ext uri="{BB962C8B-B14F-4D97-AF65-F5344CB8AC3E}">
-        <p14:creationId xmlns:p14="http://schemas.microsoft.com/office/powerpoint/2010/main" val="1924819212"/>
+        <p14:creationId xmlns:p14="http://schemas.microsoft.com/office/powerpoint/2010/main" val="313485499"/>
       </p:ext>
     </p:extLst>
   </p:cSld>
@@ -27702,7 +30151,7 @@
           <p:cNvPr id="46" name="">
             <a:extLst xmlns:a="http://schemas.openxmlformats.org/drawingml/2006/main">
               <a:ext uri="{FF2B5EF4-FFF2-40B4-BE49-F238E27FC236}">
-                <a16:creationId xmlns:a16="http://schemas.microsoft.com/office/drawing/2014/main" id="{2B6FC6B5-9C96-4C75-A995-A91255E273CA}"/>
+                <a16:creationId xmlns:a16="http://schemas.microsoft.com/office/drawing/2014/main" id="{DB70FED9-111F-456B-9D27-2BD3743AC2B2}"/>
               </a:ext>
             </a:extLst>
           </p:cNvPr>
@@ -27733,7 +30182,7 @@
           <p:cNvPr id="2" name="">
             <a:extLst xmlns:a="http://schemas.openxmlformats.org/drawingml/2006/main">
               <a:ext uri="{FF2B5EF4-FFF2-40B4-BE49-F238E27FC236}">
-                <a16:creationId xmlns:a16="http://schemas.microsoft.com/office/drawing/2014/main" id="{33EB5849-671F-47DF-9ED9-696406792A01}"/>
+                <a16:creationId xmlns:a16="http://schemas.microsoft.com/office/drawing/2014/main" id="{B14D80C7-0AEE-48E3-84B9-B43359310C56}"/>
               </a:ext>
             </a:extLst>
           </p:cNvPr>
@@ -27802,7 +30251,7 @@
           <p:cNvPr id="3" name="">
             <a:extLst xmlns:a="http://schemas.openxmlformats.org/drawingml/2006/main">
               <a:ext uri="{FF2B5EF4-FFF2-40B4-BE49-F238E27FC236}">
-                <a16:creationId xmlns:a16="http://schemas.microsoft.com/office/drawing/2014/main" id="{3D85F6A7-CB21-48E3-8E1C-1FD31A28DA4E}"/>
+                <a16:creationId xmlns:a16="http://schemas.microsoft.com/office/drawing/2014/main" id="{79164060-15BF-4D74-86A5-20A3D6225F4D}"/>
               </a:ext>
             </a:extLst>
           </p:cNvPr>
@@ -27871,7 +30320,7 @@
           <p:cNvPr id="4" name="">
             <a:extLst xmlns:a="http://schemas.openxmlformats.org/drawingml/2006/main">
               <a:ext uri="{FF2B5EF4-FFF2-40B4-BE49-F238E27FC236}">
-                <a16:creationId xmlns:a16="http://schemas.microsoft.com/office/drawing/2014/main" id="{91F95A29-8DED-4171-A956-81B9BA98CF65}"/>
+                <a16:creationId xmlns:a16="http://schemas.microsoft.com/office/drawing/2014/main" id="{B1C6A78B-F4C8-4E82-98CB-8940D9ED8E12}"/>
               </a:ext>
             </a:extLst>
           </p:cNvPr>
@@ -27902,7 +30351,7 @@
           <p:cNvPr id="5" name="">
             <a:extLst xmlns:a="http://schemas.openxmlformats.org/drawingml/2006/main">
               <a:ext uri="{FF2B5EF4-FFF2-40B4-BE49-F238E27FC236}">
-                <a16:creationId xmlns:a16="http://schemas.microsoft.com/office/drawing/2014/main" id="{9C417CE0-2F9A-43E5-B8E5-7D008C93642B}"/>
+                <a16:creationId xmlns:a16="http://schemas.microsoft.com/office/drawing/2014/main" id="{0919CFEA-0D9D-46D2-9825-054A9256CDB4}"/>
               </a:ext>
             </a:extLst>
           </p:cNvPr>
@@ -27971,7 +30420,7 @@
           <p:cNvPr id="6" name="">
             <a:extLst xmlns:a="http://schemas.openxmlformats.org/drawingml/2006/main">
               <a:ext uri="{FF2B5EF4-FFF2-40B4-BE49-F238E27FC236}">
-                <a16:creationId xmlns:a16="http://schemas.microsoft.com/office/drawing/2014/main" id="{14FA1955-8BB8-44B9-902C-10E25CE939D4}"/>
+                <a16:creationId xmlns:a16="http://schemas.microsoft.com/office/drawing/2014/main" id="{01536898-3926-42FA-B546-C612692C5CB5}"/>
               </a:ext>
             </a:extLst>
           </p:cNvPr>
@@ -28040,7 +30489,7 @@
           <p:cNvPr id="7" name="">
             <a:extLst xmlns:a="http://schemas.openxmlformats.org/drawingml/2006/main">
               <a:ext uri="{FF2B5EF4-FFF2-40B4-BE49-F238E27FC236}">
-                <a16:creationId xmlns:a16="http://schemas.microsoft.com/office/drawing/2014/main" id="{9A607A8C-844F-4FF3-9103-6432E084A2C2}"/>
+                <a16:creationId xmlns:a16="http://schemas.microsoft.com/office/drawing/2014/main" id="{DA23AAD0-B423-4297-91FC-F7D6E0F9DF80}"/>
               </a:ext>
             </a:extLst>
           </p:cNvPr>
@@ -28075,7 +30524,7 @@
           <p:cNvPr id="8" name="">
             <a:extLst xmlns:a="http://schemas.openxmlformats.org/drawingml/2006/main">
               <a:ext uri="{FF2B5EF4-FFF2-40B4-BE49-F238E27FC236}">
-                <a16:creationId xmlns:a16="http://schemas.microsoft.com/office/drawing/2014/main" id="{F76939A8-5921-49B5-AC1E-EA23B4C3F3A4}"/>
+                <a16:creationId xmlns:a16="http://schemas.microsoft.com/office/drawing/2014/main" id="{EA782552-1911-4805-86FA-A29F1FD445B0}"/>
               </a:ext>
             </a:extLst>
           </p:cNvPr>
@@ -28144,7 +30593,7 @@
           <p:cNvPr id="9" name="">
             <a:extLst xmlns:a="http://schemas.openxmlformats.org/drawingml/2006/main">
               <a:ext uri="{FF2B5EF4-FFF2-40B4-BE49-F238E27FC236}">
-                <a16:creationId xmlns:a16="http://schemas.microsoft.com/office/drawing/2014/main" id="{EC384A46-95A5-4277-976D-EAC7FB28F9C9}"/>
+                <a16:creationId xmlns:a16="http://schemas.microsoft.com/office/drawing/2014/main" id="{AFC5A8B9-D1A1-4BBE-B70E-016DDC5D5CBC}"/>
               </a:ext>
             </a:extLst>
           </p:cNvPr>
@@ -28213,7 +30662,7 @@
           <p:cNvPr id="10" name="">
             <a:extLst xmlns:a="http://schemas.openxmlformats.org/drawingml/2006/main">
               <a:ext uri="{FF2B5EF4-FFF2-40B4-BE49-F238E27FC236}">
-                <a16:creationId xmlns:a16="http://schemas.microsoft.com/office/drawing/2014/main" id="{6D380F57-8229-48A1-BA35-AF306722C13F}"/>
+                <a16:creationId xmlns:a16="http://schemas.microsoft.com/office/drawing/2014/main" id="{6AD015C3-403E-4264-8A58-5DD1AB5840D5}"/>
               </a:ext>
             </a:extLst>
           </p:cNvPr>
@@ -28248,7 +30697,7 @@
           <p:cNvPr id="11" name="">
             <a:extLst xmlns:a="http://schemas.openxmlformats.org/drawingml/2006/main">
               <a:ext uri="{FF2B5EF4-FFF2-40B4-BE49-F238E27FC236}">
-                <a16:creationId xmlns:a16="http://schemas.microsoft.com/office/drawing/2014/main" id="{F6005626-72E1-4F67-B048-2C586803455F}"/>
+                <a16:creationId xmlns:a16="http://schemas.microsoft.com/office/drawing/2014/main" id="{4291ACB8-7CAE-4FD3-85CB-A6BF94125AD5}"/>
               </a:ext>
             </a:extLst>
           </p:cNvPr>
@@ -28317,7 +30766,7 @@
           <p:cNvPr id="12" name="">
             <a:extLst xmlns:a="http://schemas.openxmlformats.org/drawingml/2006/main">
               <a:ext uri="{FF2B5EF4-FFF2-40B4-BE49-F238E27FC236}">
-                <a16:creationId xmlns:a16="http://schemas.microsoft.com/office/drawing/2014/main" id="{C7C29E46-07F2-4D2F-93D3-0B68441D2F24}"/>
+                <a16:creationId xmlns:a16="http://schemas.microsoft.com/office/drawing/2014/main" id="{B08B5CC6-0FCF-452E-8737-D9A1EEEC4680}"/>
               </a:ext>
             </a:extLst>
           </p:cNvPr>
@@ -28386,7 +30835,7 @@
           <p:cNvPr id="13" name="">
             <a:extLst xmlns:a="http://schemas.openxmlformats.org/drawingml/2006/main">
               <a:ext uri="{FF2B5EF4-FFF2-40B4-BE49-F238E27FC236}">
-                <a16:creationId xmlns:a16="http://schemas.microsoft.com/office/drawing/2014/main" id="{57C010B2-E868-40C5-B97E-989D608B7D6E}"/>
+                <a16:creationId xmlns:a16="http://schemas.microsoft.com/office/drawing/2014/main" id="{539CFE14-61FB-4785-8D2E-CF2322F4DF0A}"/>
               </a:ext>
             </a:extLst>
           </p:cNvPr>
@@ -28421,7 +30870,7 @@
           <p:cNvPr id="14" name="">
             <a:extLst xmlns:a="http://schemas.openxmlformats.org/drawingml/2006/main">
               <a:ext uri="{FF2B5EF4-FFF2-40B4-BE49-F238E27FC236}">
-                <a16:creationId xmlns:a16="http://schemas.microsoft.com/office/drawing/2014/main" id="{29F6DF60-E4AB-40A9-B8BE-E1F4F35AA6FE}"/>
+                <a16:creationId xmlns:a16="http://schemas.microsoft.com/office/drawing/2014/main" id="{27C0F07D-16F6-40F4-AF5E-9DDA1BEF93B7}"/>
               </a:ext>
             </a:extLst>
           </p:cNvPr>
@@ -28490,7 +30939,7 @@
           <p:cNvPr id="15" name="">
             <a:extLst xmlns:a="http://schemas.openxmlformats.org/drawingml/2006/main">
               <a:ext uri="{FF2B5EF4-FFF2-40B4-BE49-F238E27FC236}">
-                <a16:creationId xmlns:a16="http://schemas.microsoft.com/office/drawing/2014/main" id="{75D0C242-4767-420F-8F7C-8B2FE0006CED}"/>
+                <a16:creationId xmlns:a16="http://schemas.microsoft.com/office/drawing/2014/main" id="{021C3C13-5897-40B0-BC54-EED912FC9BA8}"/>
               </a:ext>
             </a:extLst>
           </p:cNvPr>
@@ -28559,7 +31008,7 @@
           <p:cNvPr id="16" name="">
             <a:extLst xmlns:a="http://schemas.openxmlformats.org/drawingml/2006/main">
               <a:ext uri="{FF2B5EF4-FFF2-40B4-BE49-F238E27FC236}">
-                <a16:creationId xmlns:a16="http://schemas.microsoft.com/office/drawing/2014/main" id="{D2F5D7F1-07A9-45FB-9343-B2BF7E568898}"/>
+                <a16:creationId xmlns:a16="http://schemas.microsoft.com/office/drawing/2014/main" id="{C3E1692B-BA19-4F4C-BB62-A7F362AFB00E}"/>
               </a:ext>
             </a:extLst>
           </p:cNvPr>
@@ -28594,7 +31043,7 @@
           <p:cNvPr id="17" name="">
             <a:extLst xmlns:a="http://schemas.openxmlformats.org/drawingml/2006/main">
               <a:ext uri="{FF2B5EF4-FFF2-40B4-BE49-F238E27FC236}">
-                <a16:creationId xmlns:a16="http://schemas.microsoft.com/office/drawing/2014/main" id="{FB01A1E4-D661-4305-8171-AD0296C0DC70}"/>
+                <a16:creationId xmlns:a16="http://schemas.microsoft.com/office/drawing/2014/main" id="{7F16C986-AB8E-4873-96F5-402F1D3C9FD9}"/>
               </a:ext>
             </a:extLst>
           </p:cNvPr>
@@ -28663,7 +31112,7 @@
           <p:cNvPr id="18" name="">
             <a:extLst xmlns:a="http://schemas.openxmlformats.org/drawingml/2006/main">
               <a:ext uri="{FF2B5EF4-FFF2-40B4-BE49-F238E27FC236}">
-                <a16:creationId xmlns:a16="http://schemas.microsoft.com/office/drawing/2014/main" id="{E17F4AA0-407E-45CE-935C-AF57639C5CB0}"/>
+                <a16:creationId xmlns:a16="http://schemas.microsoft.com/office/drawing/2014/main" id="{54382A6B-92B8-4B31-9641-CE46240F5B2A}"/>
               </a:ext>
             </a:extLst>
           </p:cNvPr>
@@ -28732,7 +31181,7 @@
           <p:cNvPr id="19" name="">
             <a:extLst xmlns:a="http://schemas.openxmlformats.org/drawingml/2006/main">
               <a:ext uri="{FF2B5EF4-FFF2-40B4-BE49-F238E27FC236}">
-                <a16:creationId xmlns:a16="http://schemas.microsoft.com/office/drawing/2014/main" id="{5793F9DD-F2C6-41DC-A72A-2376DDA72C43}"/>
+                <a16:creationId xmlns:a16="http://schemas.microsoft.com/office/drawing/2014/main" id="{2872382B-EAB7-43F7-B6C1-56C1FD9C2C87}"/>
               </a:ext>
             </a:extLst>
           </p:cNvPr>
@@ -28767,7 +31216,7 @@
           <p:cNvPr id="20" name="">
             <a:extLst xmlns:a="http://schemas.openxmlformats.org/drawingml/2006/main">
               <a:ext uri="{FF2B5EF4-FFF2-40B4-BE49-F238E27FC236}">
-                <a16:creationId xmlns:a16="http://schemas.microsoft.com/office/drawing/2014/main" id="{2B3FE5BE-599E-4C4D-9F03-C96B186A0DBE}"/>
+                <a16:creationId xmlns:a16="http://schemas.microsoft.com/office/drawing/2014/main" id="{FB12A2C3-69E2-48D0-ADA1-D430D23226EB}"/>
               </a:ext>
             </a:extLst>
           </p:cNvPr>
@@ -28836,7 +31285,7 @@
           <p:cNvPr id="21" name="">
             <a:extLst xmlns:a="http://schemas.openxmlformats.org/drawingml/2006/main">
               <a:ext uri="{FF2B5EF4-FFF2-40B4-BE49-F238E27FC236}">
-                <a16:creationId xmlns:a16="http://schemas.microsoft.com/office/drawing/2014/main" id="{6E651FC3-1738-49F1-AB18-66DEDDE25A1E}"/>
+                <a16:creationId xmlns:a16="http://schemas.microsoft.com/office/drawing/2014/main" id="{DD99FA55-D3BA-49BC-8CB7-B8C0B069A6C1}"/>
               </a:ext>
             </a:extLst>
           </p:cNvPr>
@@ -28905,7 +31354,7 @@
           <p:cNvPr id="22" name="">
             <a:extLst xmlns:a="http://schemas.openxmlformats.org/drawingml/2006/main">
               <a:ext uri="{FF2B5EF4-FFF2-40B4-BE49-F238E27FC236}">
-                <a16:creationId xmlns:a16="http://schemas.microsoft.com/office/drawing/2014/main" id="{3199CC69-0C98-4AF2-B512-A354CB0BD873}"/>
+                <a16:creationId xmlns:a16="http://schemas.microsoft.com/office/drawing/2014/main" id="{0C1A4BF4-A4EB-41AE-9174-016DAF1C6E78}"/>
               </a:ext>
             </a:extLst>
           </p:cNvPr>
@@ -28940,7 +31389,7 @@
           <p:cNvPr id="23" name="">
             <a:extLst xmlns:a="http://schemas.openxmlformats.org/drawingml/2006/main">
               <a:ext uri="{FF2B5EF4-FFF2-40B4-BE49-F238E27FC236}">
-                <a16:creationId xmlns:a16="http://schemas.microsoft.com/office/drawing/2014/main" id="{5B0DA96B-4F34-40AD-A087-0551D2CCE806}"/>
+                <a16:creationId xmlns:a16="http://schemas.microsoft.com/office/drawing/2014/main" id="{DE006DA3-10C4-4F17-95BA-D5D0C6E588F4}"/>
               </a:ext>
             </a:extLst>
           </p:cNvPr>
@@ -29009,7 +31458,7 @@
           <p:cNvPr id="24" name="">
             <a:extLst xmlns:a="http://schemas.openxmlformats.org/drawingml/2006/main">
               <a:ext uri="{FF2B5EF4-FFF2-40B4-BE49-F238E27FC236}">
-                <a16:creationId xmlns:a16="http://schemas.microsoft.com/office/drawing/2014/main" id="{11A4B1FA-4D17-4BA2-8FDE-788B3151BC1D}"/>
+                <a16:creationId xmlns:a16="http://schemas.microsoft.com/office/drawing/2014/main" id="{ADA803A3-30F3-40D7-A73B-E9FADD37FC69}"/>
               </a:ext>
             </a:extLst>
           </p:cNvPr>
@@ -29078,7 +31527,7 @@
           <p:cNvPr id="25" name="">
             <a:extLst xmlns:a="http://schemas.openxmlformats.org/drawingml/2006/main">
               <a:ext uri="{FF2B5EF4-FFF2-40B4-BE49-F238E27FC236}">
-                <a16:creationId xmlns:a16="http://schemas.microsoft.com/office/drawing/2014/main" id="{A055AA05-8B63-4936-BE7E-ABF0D55C38E6}"/>
+                <a16:creationId xmlns:a16="http://schemas.microsoft.com/office/drawing/2014/main" id="{F31CE094-13F2-4FBC-980C-B33954360E0E}"/>
               </a:ext>
             </a:extLst>
           </p:cNvPr>
@@ -29113,7 +31562,7 @@
           <p:cNvPr id="26" name="">
             <a:extLst xmlns:a="http://schemas.openxmlformats.org/drawingml/2006/main">
               <a:ext uri="{FF2B5EF4-FFF2-40B4-BE49-F238E27FC236}">
-                <a16:creationId xmlns:a16="http://schemas.microsoft.com/office/drawing/2014/main" id="{B4D9D00E-E5C9-4F5A-8E47-34C96B9BC195}"/>
+                <a16:creationId xmlns:a16="http://schemas.microsoft.com/office/drawing/2014/main" id="{2F588D54-E06C-4061-B7EF-A95609DDA2BC}"/>
               </a:ext>
             </a:extLst>
           </p:cNvPr>
@@ -29182,7 +31631,7 @@
           <p:cNvPr id="27" name="">
             <a:extLst xmlns:a="http://schemas.openxmlformats.org/drawingml/2006/main">
               <a:ext uri="{FF2B5EF4-FFF2-40B4-BE49-F238E27FC236}">
-                <a16:creationId xmlns:a16="http://schemas.microsoft.com/office/drawing/2014/main" id="{F33D247A-F837-45E7-AA9A-4CADE50D81F6}"/>
+                <a16:creationId xmlns:a16="http://schemas.microsoft.com/office/drawing/2014/main" id="{00B45F2C-A23B-4A0A-84D0-67EC7C6CC1C8}"/>
               </a:ext>
             </a:extLst>
           </p:cNvPr>
@@ -29251,7 +31700,7 @@
           <p:cNvPr id="28" name="">
             <a:extLst xmlns:a="http://schemas.openxmlformats.org/drawingml/2006/main">
               <a:ext uri="{FF2B5EF4-FFF2-40B4-BE49-F238E27FC236}">
-                <a16:creationId xmlns:a16="http://schemas.microsoft.com/office/drawing/2014/main" id="{2C648AD2-7B8F-4332-BF8B-E078E41A6E2C}"/>
+                <a16:creationId xmlns:a16="http://schemas.microsoft.com/office/drawing/2014/main" id="{83FA9CA8-F941-4FDB-A900-C7CDA6065B05}"/>
               </a:ext>
             </a:extLst>
           </p:cNvPr>
@@ -29286,7 +31735,7 @@
           <p:cNvPr id="29" name="">
             <a:extLst xmlns:a="http://schemas.openxmlformats.org/drawingml/2006/main">
               <a:ext uri="{FF2B5EF4-FFF2-40B4-BE49-F238E27FC236}">
-                <a16:creationId xmlns:a16="http://schemas.microsoft.com/office/drawing/2014/main" id="{73A32578-04AD-4CEB-BAD3-926534FCFA43}"/>
+                <a16:creationId xmlns:a16="http://schemas.microsoft.com/office/drawing/2014/main" id="{90987BA2-7FD0-417F-8AA5-151DF94B923A}"/>
               </a:ext>
             </a:extLst>
           </p:cNvPr>
@@ -29355,7 +31804,7 @@
           <p:cNvPr id="30" name="">
             <a:extLst xmlns:a="http://schemas.openxmlformats.org/drawingml/2006/main">
               <a:ext uri="{FF2B5EF4-FFF2-40B4-BE49-F238E27FC236}">
-                <a16:creationId xmlns:a16="http://schemas.microsoft.com/office/drawing/2014/main" id="{0C8B029B-7B1D-4361-8E4D-8BCF241B6DCB}"/>
+                <a16:creationId xmlns:a16="http://schemas.microsoft.com/office/drawing/2014/main" id="{52120502-065E-4A36-948E-E3BF83313ACE}"/>
               </a:ext>
             </a:extLst>
           </p:cNvPr>
@@ -29424,7 +31873,7 @@
           <p:cNvPr id="31" name="">
             <a:extLst xmlns:a="http://schemas.openxmlformats.org/drawingml/2006/main">
               <a:ext uri="{FF2B5EF4-FFF2-40B4-BE49-F238E27FC236}">
-                <a16:creationId xmlns:a16="http://schemas.microsoft.com/office/drawing/2014/main" id="{33700715-8478-4809-ABDE-1C71724D1127}"/>
+                <a16:creationId xmlns:a16="http://schemas.microsoft.com/office/drawing/2014/main" id="{96C5F4FB-550C-42C5-ACFB-D5147DAC1BE9}"/>
               </a:ext>
             </a:extLst>
           </p:cNvPr>
@@ -29459,7 +31908,7 @@
           <p:cNvPr id="32" name="">
             <a:extLst xmlns:a="http://schemas.openxmlformats.org/drawingml/2006/main">
               <a:ext uri="{FF2B5EF4-FFF2-40B4-BE49-F238E27FC236}">
-                <a16:creationId xmlns:a16="http://schemas.microsoft.com/office/drawing/2014/main" id="{DE9427E1-239F-4765-A78E-44211F7257FE}"/>
+                <a16:creationId xmlns:a16="http://schemas.microsoft.com/office/drawing/2014/main" id="{8A1A9A39-11F7-4AFF-9385-D2E618643C9C}"/>
               </a:ext>
             </a:extLst>
           </p:cNvPr>
@@ -29528,7 +31977,7 @@
           <p:cNvPr id="33" name="">
             <a:extLst xmlns:a="http://schemas.openxmlformats.org/drawingml/2006/main">
               <a:ext uri="{FF2B5EF4-FFF2-40B4-BE49-F238E27FC236}">
-                <a16:creationId xmlns:a16="http://schemas.microsoft.com/office/drawing/2014/main" id="{4E013105-A658-4865-8F07-8665E2A87715}"/>
+                <a16:creationId xmlns:a16="http://schemas.microsoft.com/office/drawing/2014/main" id="{ADAE0E88-9658-4DC9-8971-5BD979FD47EE}"/>
               </a:ext>
             </a:extLst>
           </p:cNvPr>
@@ -29597,7 +32046,7 @@
           <p:cNvPr id="34" name="">
             <a:extLst xmlns:a="http://schemas.openxmlformats.org/drawingml/2006/main">
               <a:ext uri="{FF2B5EF4-FFF2-40B4-BE49-F238E27FC236}">
-                <a16:creationId xmlns:a16="http://schemas.microsoft.com/office/drawing/2014/main" id="{3D851D22-FCE2-4EF6-A6C9-D02FD4A54982}"/>
+                <a16:creationId xmlns:a16="http://schemas.microsoft.com/office/drawing/2014/main" id="{230979DD-78AD-4FC4-B5A3-B2BAD3F1D3B1}"/>
               </a:ext>
             </a:extLst>
           </p:cNvPr>
@@ -29632,7 +32081,7 @@
           <p:cNvPr id="35" name="">
             <a:extLst xmlns:a="http://schemas.openxmlformats.org/drawingml/2006/main">
               <a:ext uri="{FF2B5EF4-FFF2-40B4-BE49-F238E27FC236}">
-                <a16:creationId xmlns:a16="http://schemas.microsoft.com/office/drawing/2014/main" id="{34D8B3D9-E688-4A7E-86EE-D9A0D39615DC}"/>
+                <a16:creationId xmlns:a16="http://schemas.microsoft.com/office/drawing/2014/main" id="{6E2F02E0-C7B6-422A-984C-007F06EA7B12}"/>
               </a:ext>
             </a:extLst>
           </p:cNvPr>
@@ -29701,7 +32150,7 @@
           <p:cNvPr id="36" name="">
             <a:extLst xmlns:a="http://schemas.openxmlformats.org/drawingml/2006/main">
               <a:ext uri="{FF2B5EF4-FFF2-40B4-BE49-F238E27FC236}">
-                <a16:creationId xmlns:a16="http://schemas.microsoft.com/office/drawing/2014/main" id="{10B85220-58B2-4914-B245-28F6D44BDF97}"/>
+                <a16:creationId xmlns:a16="http://schemas.microsoft.com/office/drawing/2014/main" id="{0320452C-07C6-416D-9A9F-183C6AC0CFF7}"/>
               </a:ext>
             </a:extLst>
           </p:cNvPr>
@@ -29770,7 +32219,7 @@
           <p:cNvPr id="37" name="">
             <a:extLst xmlns:a="http://schemas.openxmlformats.org/drawingml/2006/main">
               <a:ext uri="{FF2B5EF4-FFF2-40B4-BE49-F238E27FC236}">
-                <a16:creationId xmlns:a16="http://schemas.microsoft.com/office/drawing/2014/main" id="{A044F7DC-21FF-4267-879B-56AD5F5AF251}"/>
+                <a16:creationId xmlns:a16="http://schemas.microsoft.com/office/drawing/2014/main" id="{778762BB-3437-45E4-ADC8-E5D2FDC0DB08}"/>
               </a:ext>
             </a:extLst>
           </p:cNvPr>
@@ -29805,7 +32254,7 @@
           <p:cNvPr id="38" name="">
             <a:extLst xmlns:a="http://schemas.openxmlformats.org/drawingml/2006/main">
               <a:ext uri="{FF2B5EF4-FFF2-40B4-BE49-F238E27FC236}">
-                <a16:creationId xmlns:a16="http://schemas.microsoft.com/office/drawing/2014/main" id="{6F054165-2796-404A-9C34-D63D665947F2}"/>
+                <a16:creationId xmlns:a16="http://schemas.microsoft.com/office/drawing/2014/main" id="{1E45EF3B-C98F-4874-A891-F2620F54CE05}"/>
               </a:ext>
             </a:extLst>
           </p:cNvPr>
@@ -29874,7 +32323,7 @@
           <p:cNvPr id="39" name="">
             <a:extLst xmlns:a="http://schemas.openxmlformats.org/drawingml/2006/main">
               <a:ext uri="{FF2B5EF4-FFF2-40B4-BE49-F238E27FC236}">
-                <a16:creationId xmlns:a16="http://schemas.microsoft.com/office/drawing/2014/main" id="{63A98728-3B0C-4473-A374-C28FC34FFF60}"/>
+                <a16:creationId xmlns:a16="http://schemas.microsoft.com/office/drawing/2014/main" id="{F80DB299-194A-4EA5-B149-8266B128D6EE}"/>
               </a:ext>
             </a:extLst>
           </p:cNvPr>
@@ -29943,7 +32392,7 @@
           <p:cNvPr id="40" name="">
             <a:extLst xmlns:a="http://schemas.openxmlformats.org/drawingml/2006/main">
               <a:ext uri="{FF2B5EF4-FFF2-40B4-BE49-F238E27FC236}">
-                <a16:creationId xmlns:a16="http://schemas.microsoft.com/office/drawing/2014/main" id="{8B1F9AC1-6AE0-4672-8F4A-AF00333EE1FF}"/>
+                <a16:creationId xmlns:a16="http://schemas.microsoft.com/office/drawing/2014/main" id="{2910B5CB-1DEC-49C2-826E-B4D625B02977}"/>
               </a:ext>
             </a:extLst>
           </p:cNvPr>
@@ -29978,7 +32427,7 @@
           <p:cNvPr id="41" name="">
             <a:extLst xmlns:a="http://schemas.openxmlformats.org/drawingml/2006/main">
               <a:ext uri="{FF2B5EF4-FFF2-40B4-BE49-F238E27FC236}">
-                <a16:creationId xmlns:a16="http://schemas.microsoft.com/office/drawing/2014/main" id="{654380E6-5EEC-4D1E-84EC-AC0582042FD0}"/>
+                <a16:creationId xmlns:a16="http://schemas.microsoft.com/office/drawing/2014/main" id="{6BF3B60D-571E-45D9-B0EC-1A2959AFB644}"/>
               </a:ext>
             </a:extLst>
           </p:cNvPr>
@@ -30047,7 +32496,7 @@
           <p:cNvPr id="42" name="">
             <a:extLst xmlns:a="http://schemas.openxmlformats.org/drawingml/2006/main">
               <a:ext uri="{FF2B5EF4-FFF2-40B4-BE49-F238E27FC236}">
-                <a16:creationId xmlns:a16="http://schemas.microsoft.com/office/drawing/2014/main" id="{B24EAC51-9F17-4197-9B14-9E11E40A0230}"/>
+                <a16:creationId xmlns:a16="http://schemas.microsoft.com/office/drawing/2014/main" id="{BA09CB00-00A4-4B66-87C6-70DE4ECB4B00}"/>
               </a:ext>
             </a:extLst>
           </p:cNvPr>
@@ -30116,7 +32565,7 @@
           <p:cNvPr id="43" name="">
             <a:extLst xmlns:a="http://schemas.openxmlformats.org/drawingml/2006/main">
               <a:ext uri="{FF2B5EF4-FFF2-40B4-BE49-F238E27FC236}">
-                <a16:creationId xmlns:a16="http://schemas.microsoft.com/office/drawing/2014/main" id="{337F8B65-26D6-498C-9FD2-E0B58101B0EE}"/>
+                <a16:creationId xmlns:a16="http://schemas.microsoft.com/office/drawing/2014/main" id="{D7FADAE7-BD0C-4EFB-B159-0E4C158034BC}"/>
               </a:ext>
             </a:extLst>
           </p:cNvPr>
@@ -30151,7 +32600,7 @@
           <p:cNvPr id="44" name="">
             <a:extLst xmlns:a="http://schemas.openxmlformats.org/drawingml/2006/main">
               <a:ext uri="{FF2B5EF4-FFF2-40B4-BE49-F238E27FC236}">
-                <a16:creationId xmlns:a16="http://schemas.microsoft.com/office/drawing/2014/main" id="{8721BEF5-D515-4CC9-987B-A38E7002282B}"/>
+                <a16:creationId xmlns:a16="http://schemas.microsoft.com/office/drawing/2014/main" id="{CBACE81A-3142-4B2D-B8A1-8E6EE70C4D0D}"/>
               </a:ext>
             </a:extLst>
           </p:cNvPr>
@@ -30220,7 +32669,7 @@
           <p:cNvPr id="45" name="">
             <a:extLst xmlns:a="http://schemas.openxmlformats.org/drawingml/2006/main">
               <a:ext uri="{FF2B5EF4-FFF2-40B4-BE49-F238E27FC236}">
-                <a16:creationId xmlns:a16="http://schemas.microsoft.com/office/drawing/2014/main" id="{F8F12A4C-F5DD-4F6B-8724-90D5BE2B25AC}"/>
+                <a16:creationId xmlns:a16="http://schemas.microsoft.com/office/drawing/2014/main" id="{0693564A-2B05-4994-9ADE-1742D22CAA93}"/>
               </a:ext>
             </a:extLst>
           </p:cNvPr>
@@ -30287,7 +32736,7 @@
     </p:spTree>
     <p:extLst>
       <p:ext uri="{BB962C8B-B14F-4D97-AF65-F5344CB8AC3E}">
-        <p14:creationId xmlns:p14="http://schemas.microsoft.com/office/powerpoint/2010/main" val="164570520"/>
+        <p14:creationId xmlns:p14="http://schemas.microsoft.com/office/powerpoint/2010/main" val="1502422748"/>
       </p:ext>
     </p:extLst>
   </p:cSld>
@@ -30318,7 +32767,7 @@
           <p:cNvPr id="18" name="">
             <a:extLst xmlns:a="http://schemas.openxmlformats.org/drawingml/2006/main">
               <a:ext uri="{FF2B5EF4-FFF2-40B4-BE49-F238E27FC236}">
-                <a16:creationId xmlns:a16="http://schemas.microsoft.com/office/drawing/2014/main" id="{D695B868-5DA7-4F6C-81D5-195CCCB1036E}"/>
+                <a16:creationId xmlns:a16="http://schemas.microsoft.com/office/drawing/2014/main" id="{EE0EAEF2-3BA7-4162-8004-2292DC8D223B}"/>
               </a:ext>
             </a:extLst>
           </p:cNvPr>
@@ -30349,7 +32798,7 @@
           <p:cNvPr id="2" name="">
             <a:extLst xmlns:a="http://schemas.openxmlformats.org/drawingml/2006/main">
               <a:ext uri="{FF2B5EF4-FFF2-40B4-BE49-F238E27FC236}">
-                <a16:creationId xmlns:a16="http://schemas.microsoft.com/office/drawing/2014/main" id="{480D4196-3F1E-40F5-9122-31CBD7113B5E}"/>
+                <a16:creationId xmlns:a16="http://schemas.microsoft.com/office/drawing/2014/main" id="{ECF7FB29-975F-403A-9751-2B1589D40947}"/>
               </a:ext>
             </a:extLst>
           </p:cNvPr>
@@ -30418,7 +32867,7 @@
           <p:cNvPr id="3" name="">
             <a:extLst xmlns:a="http://schemas.openxmlformats.org/drawingml/2006/main">
               <a:ext uri="{FF2B5EF4-FFF2-40B4-BE49-F238E27FC236}">
-                <a16:creationId xmlns:a16="http://schemas.microsoft.com/office/drawing/2014/main" id="{447E4B35-B228-469C-BB7A-2196B706B818}"/>
+                <a16:creationId xmlns:a16="http://schemas.microsoft.com/office/drawing/2014/main" id="{8C7D454F-E372-42D1-B8FF-44C3F1D6F566}"/>
               </a:ext>
             </a:extLst>
           </p:cNvPr>
@@ -30487,7 +32936,7 @@
           <p:cNvPr id="4" name="">
             <a:extLst xmlns:a="http://schemas.openxmlformats.org/drawingml/2006/main">
               <a:ext uri="{FF2B5EF4-FFF2-40B4-BE49-F238E27FC236}">
-                <a16:creationId xmlns:a16="http://schemas.microsoft.com/office/drawing/2014/main" id="{C70A4851-9F5F-4CEB-A949-E0CB17543129}"/>
+                <a16:creationId xmlns:a16="http://schemas.microsoft.com/office/drawing/2014/main" id="{AD758101-D0AA-4949-80AF-D37446B4EC6D}"/>
               </a:ext>
             </a:extLst>
           </p:cNvPr>
@@ -30518,7 +32967,7 @@
           <p:cNvPr id="5" name="">
             <a:extLst xmlns:a="http://schemas.openxmlformats.org/drawingml/2006/main">
               <a:ext uri="{FF2B5EF4-FFF2-40B4-BE49-F238E27FC236}">
-                <a16:creationId xmlns:a16="http://schemas.microsoft.com/office/drawing/2014/main" id="{2B58C903-FFC6-4B88-9625-B07A310230AE}"/>
+                <a16:creationId xmlns:a16="http://schemas.microsoft.com/office/drawing/2014/main" id="{5855FBD7-C023-4F1F-A882-822A35927F2C}"/>
               </a:ext>
             </a:extLst>
           </p:cNvPr>
@@ -30587,7 +33036,7 @@
           <p:cNvPr id="6" name="">
             <a:extLst xmlns:a="http://schemas.openxmlformats.org/drawingml/2006/main">
               <a:ext uri="{FF2B5EF4-FFF2-40B4-BE49-F238E27FC236}">
-                <a16:creationId xmlns:a16="http://schemas.microsoft.com/office/drawing/2014/main" id="{EB27648F-F325-45E4-8939-E80257AD4AD5}"/>
+                <a16:creationId xmlns:a16="http://schemas.microsoft.com/office/drawing/2014/main" id="{A032C8AF-C887-4895-82CF-39C755BAD0FC}"/>
               </a:ext>
             </a:extLst>
           </p:cNvPr>
@@ -30656,7 +33105,7 @@
           <p:cNvPr id="7" name="">
             <a:extLst xmlns:a="http://schemas.openxmlformats.org/drawingml/2006/main">
               <a:ext uri="{FF2B5EF4-FFF2-40B4-BE49-F238E27FC236}">
-                <a16:creationId xmlns:a16="http://schemas.microsoft.com/office/drawing/2014/main" id="{9B260AFF-46F1-4F33-9468-129725A06239}"/>
+                <a16:creationId xmlns:a16="http://schemas.microsoft.com/office/drawing/2014/main" id="{27A95AB5-6D06-491E-BA0E-C9B86C06078F}"/>
               </a:ext>
             </a:extLst>
           </p:cNvPr>
@@ -30725,7 +33174,7 @@
           <p:cNvPr id="8" name="">
             <a:extLst xmlns:a="http://schemas.openxmlformats.org/drawingml/2006/main">
               <a:ext uri="{FF2B5EF4-FFF2-40B4-BE49-F238E27FC236}">
-                <a16:creationId xmlns:a16="http://schemas.microsoft.com/office/drawing/2014/main" id="{0B263809-EE11-4C26-82A9-82CC05B2E019}"/>
+                <a16:creationId xmlns:a16="http://schemas.microsoft.com/office/drawing/2014/main" id="{A066B97D-9411-4D6A-976B-5799AD993A70}"/>
               </a:ext>
             </a:extLst>
           </p:cNvPr>
@@ -30794,7 +33243,7 @@
           <p:cNvPr id="9" name="">
             <a:extLst xmlns:a="http://schemas.openxmlformats.org/drawingml/2006/main">
               <a:ext uri="{FF2B5EF4-FFF2-40B4-BE49-F238E27FC236}">
-                <a16:creationId xmlns:a16="http://schemas.microsoft.com/office/drawing/2014/main" id="{E2CB03E7-14A9-428D-BABE-642A00ABA9D4}"/>
+                <a16:creationId xmlns:a16="http://schemas.microsoft.com/office/drawing/2014/main" id="{DB722DB4-E5DF-42F3-BD98-5217328F6C2E}"/>
               </a:ext>
             </a:extLst>
           </p:cNvPr>
@@ -30804,7 +33253,7 @@
           <p:nvPr/>
         </p:nvPicPr>
         <p:blipFill>
-          <a:blip xmlns:r="http://schemas.openxmlformats.org/officeDocument/2006/relationships" xmlns:a="http://schemas.openxmlformats.org/drawingml/2006/main" r:embed="R42b7f26f83fd4f1f"/>
+          <a:blip xmlns:r="http://schemas.openxmlformats.org/officeDocument/2006/relationships" xmlns:a="http://schemas.openxmlformats.org/drawingml/2006/main" r:embed="R944b090ca4bd4ec7"/>
           <a:stretch xmlns:a="http://schemas.openxmlformats.org/drawingml/2006/main"/>
         </p:blipFill>
         <p:spPr>
@@ -30822,7 +33271,7 @@
           <p:cNvPr id="10" name="">
             <a:extLst xmlns:a="http://schemas.openxmlformats.org/drawingml/2006/main">
               <a:ext uri="{FF2B5EF4-FFF2-40B4-BE49-F238E27FC236}">
-                <a16:creationId xmlns:a16="http://schemas.microsoft.com/office/drawing/2014/main" id="{55949A7F-7920-4036-BC0E-390A6481AC75}"/>
+                <a16:creationId xmlns:a16="http://schemas.microsoft.com/office/drawing/2014/main" id="{E13CD5C9-024D-452E-A205-82672BE5DAE8}"/>
               </a:ext>
             </a:extLst>
           </p:cNvPr>
@@ -30891,7 +33340,7 @@
           <p:cNvPr id="11" name="">
             <a:extLst xmlns:a="http://schemas.openxmlformats.org/drawingml/2006/main">
               <a:ext uri="{FF2B5EF4-FFF2-40B4-BE49-F238E27FC236}">
-                <a16:creationId xmlns:a16="http://schemas.microsoft.com/office/drawing/2014/main" id="{3B2914D3-DC87-4938-936B-CFF82530DFCC}"/>
+                <a16:creationId xmlns:a16="http://schemas.microsoft.com/office/drawing/2014/main" id="{80E58359-0C15-40AA-9E8C-1AAB6B5930B3}"/>
               </a:ext>
             </a:extLst>
           </p:cNvPr>
@@ -30960,7 +33409,7 @@
           <p:cNvPr id="12" name="">
             <a:extLst xmlns:a="http://schemas.openxmlformats.org/drawingml/2006/main">
               <a:ext uri="{FF2B5EF4-FFF2-40B4-BE49-F238E27FC236}">
-                <a16:creationId xmlns:a16="http://schemas.microsoft.com/office/drawing/2014/main" id="{FB1E7DF7-027A-4170-B116-06EEC55E4B53}"/>
+                <a16:creationId xmlns:a16="http://schemas.microsoft.com/office/drawing/2014/main" id="{B611AB42-BD93-4C75-BB4A-D610171C860A}"/>
               </a:ext>
             </a:extLst>
           </p:cNvPr>
@@ -31029,7 +33478,7 @@
           <p:cNvPr id="13" name="">
             <a:extLst xmlns:a="http://schemas.openxmlformats.org/drawingml/2006/main">
               <a:ext uri="{FF2B5EF4-FFF2-40B4-BE49-F238E27FC236}">
-                <a16:creationId xmlns:a16="http://schemas.microsoft.com/office/drawing/2014/main" id="{BDE32527-1EC3-4193-8665-551DDB01EF64}"/>
+                <a16:creationId xmlns:a16="http://schemas.microsoft.com/office/drawing/2014/main" id="{B6FAD1B9-EAE9-43AA-A951-B8D6B3224C1F}"/>
               </a:ext>
             </a:extLst>
           </p:cNvPr>
@@ -31060,7 +33509,7 @@
           <p:cNvPr id="14" name="">
             <a:extLst xmlns:a="http://schemas.openxmlformats.org/drawingml/2006/main">
               <a:ext uri="{FF2B5EF4-FFF2-40B4-BE49-F238E27FC236}">
-                <a16:creationId xmlns:a16="http://schemas.microsoft.com/office/drawing/2014/main" id="{E5A9DA81-00F3-4283-8253-D2F059D4C6BE}"/>
+                <a16:creationId xmlns:a16="http://schemas.microsoft.com/office/drawing/2014/main" id="{A11886FC-8854-49A3-93C4-D86B14DA7D76}"/>
               </a:ext>
             </a:extLst>
           </p:cNvPr>
@@ -31129,7 +33578,7 @@
           <p:cNvPr id="15" name="">
             <a:extLst xmlns:a="http://schemas.openxmlformats.org/drawingml/2006/main">
               <a:ext uri="{FF2B5EF4-FFF2-40B4-BE49-F238E27FC236}">
-                <a16:creationId xmlns:a16="http://schemas.microsoft.com/office/drawing/2014/main" id="{D5B3D9BE-91C0-4EB1-A9B0-FF2753C377A9}"/>
+                <a16:creationId xmlns:a16="http://schemas.microsoft.com/office/drawing/2014/main" id="{3F05E0D9-C655-4087-A1F2-35B9AAAA7917}"/>
               </a:ext>
             </a:extLst>
           </p:cNvPr>
@@ -31139,7 +33588,7 @@
           <p:nvPr/>
         </p:nvPicPr>
         <p:blipFill>
-          <a:blip xmlns:r="http://schemas.openxmlformats.org/officeDocument/2006/relationships" xmlns:a="http://schemas.openxmlformats.org/drawingml/2006/main" r:embed="R248963bc66664adf"/>
+          <a:blip xmlns:r="http://schemas.openxmlformats.org/officeDocument/2006/relationships" xmlns:a="http://schemas.openxmlformats.org/drawingml/2006/main" r:embed="R51bcb24a9a594566"/>
           <a:stretch xmlns:a="http://schemas.openxmlformats.org/drawingml/2006/main"/>
         </p:blipFill>
         <p:spPr>
@@ -31157,7 +33606,7 @@
           <p:cNvPr id="16" name="">
             <a:extLst xmlns:a="http://schemas.openxmlformats.org/drawingml/2006/main">
               <a:ext uri="{FF2B5EF4-FFF2-40B4-BE49-F238E27FC236}">
-                <a16:creationId xmlns:a16="http://schemas.microsoft.com/office/drawing/2014/main" id="{CC9B3C6B-D07D-49B6-A946-6A7E47A77C47}"/>
+                <a16:creationId xmlns:a16="http://schemas.microsoft.com/office/drawing/2014/main" id="{EFDB8F3E-53BE-4F77-8F15-EA3C8EF1351A}"/>
               </a:ext>
             </a:extLst>
           </p:cNvPr>
@@ -31226,7 +33675,7 @@
           <p:cNvPr id="17" name="">
             <a:extLst xmlns:a="http://schemas.openxmlformats.org/drawingml/2006/main">
               <a:ext uri="{FF2B5EF4-FFF2-40B4-BE49-F238E27FC236}">
-                <a16:creationId xmlns:a16="http://schemas.microsoft.com/office/drawing/2014/main" id="{B4134FD1-83AC-47C7-9803-49B0296F5D85}"/>
+                <a16:creationId xmlns:a16="http://schemas.microsoft.com/office/drawing/2014/main" id="{0FA11FA9-CAE2-400E-979D-FD0A4F5FD496}"/>
               </a:ext>
             </a:extLst>
           </p:cNvPr>
@@ -31293,7 +33742,7 @@
     </p:spTree>
     <p:extLst>
       <p:ext uri="{BB962C8B-B14F-4D97-AF65-F5344CB8AC3E}">
-        <p14:creationId xmlns:p14="http://schemas.microsoft.com/office/powerpoint/2010/main" val="441261569"/>
+        <p14:creationId xmlns:p14="http://schemas.microsoft.com/office/powerpoint/2010/main" val="146904464"/>
       </p:ext>
     </p:extLst>
   </p:cSld>
@@ -31324,7 +33773,7 @@
           <p:cNvPr id="23" name="">
             <a:extLst xmlns:a="http://schemas.openxmlformats.org/drawingml/2006/main">
               <a:ext uri="{FF2B5EF4-FFF2-40B4-BE49-F238E27FC236}">
-                <a16:creationId xmlns:a16="http://schemas.microsoft.com/office/drawing/2014/main" id="{4C122971-46D1-4A51-88BE-83B8A321F46B}"/>
+                <a16:creationId xmlns:a16="http://schemas.microsoft.com/office/drawing/2014/main" id="{F8ED5EDD-8AD7-4975-8C91-1B573C692F17}"/>
               </a:ext>
             </a:extLst>
           </p:cNvPr>
@@ -31355,7 +33804,7 @@
           <p:cNvPr id="2" name="">
             <a:extLst xmlns:a="http://schemas.openxmlformats.org/drawingml/2006/main">
               <a:ext uri="{FF2B5EF4-FFF2-40B4-BE49-F238E27FC236}">
-                <a16:creationId xmlns:a16="http://schemas.microsoft.com/office/drawing/2014/main" id="{7829991F-E9D2-4268-8482-FB4EE3F739E1}"/>
+                <a16:creationId xmlns:a16="http://schemas.microsoft.com/office/drawing/2014/main" id="{AF34A00C-C42E-44C6-9569-ED64C9935BC1}"/>
               </a:ext>
             </a:extLst>
           </p:cNvPr>
@@ -31424,7 +33873,7 @@
           <p:cNvPr id="3" name="">
             <a:extLst xmlns:a="http://schemas.openxmlformats.org/drawingml/2006/main">
               <a:ext uri="{FF2B5EF4-FFF2-40B4-BE49-F238E27FC236}">
-                <a16:creationId xmlns:a16="http://schemas.microsoft.com/office/drawing/2014/main" id="{4FDCCBC8-98FD-422E-99F5-E7B2110D6614}"/>
+                <a16:creationId xmlns:a16="http://schemas.microsoft.com/office/drawing/2014/main" id="{6C41E246-6B0E-4595-9476-15D70C81DC82}"/>
               </a:ext>
             </a:extLst>
           </p:cNvPr>
@@ -31493,7 +33942,7 @@
           <p:cNvPr id="4" name="">
             <a:extLst xmlns:a="http://schemas.openxmlformats.org/drawingml/2006/main">
               <a:ext uri="{FF2B5EF4-FFF2-40B4-BE49-F238E27FC236}">
-                <a16:creationId xmlns:a16="http://schemas.microsoft.com/office/drawing/2014/main" id="{1D3C7BE0-4333-4DA9-9EDD-881F3CE6A0FA}"/>
+                <a16:creationId xmlns:a16="http://schemas.microsoft.com/office/drawing/2014/main" id="{F26EA53B-2BAF-4843-9F32-7C9D8A0B32D4}"/>
               </a:ext>
             </a:extLst>
           </p:cNvPr>
@@ -31524,7 +33973,7 @@
           <p:cNvPr id="5" name="">
             <a:extLst xmlns:a="http://schemas.openxmlformats.org/drawingml/2006/main">
               <a:ext uri="{FF2B5EF4-FFF2-40B4-BE49-F238E27FC236}">
-                <a16:creationId xmlns:a16="http://schemas.microsoft.com/office/drawing/2014/main" id="{107C3114-3869-4507-B129-AACC7C4BEF0F}"/>
+                <a16:creationId xmlns:a16="http://schemas.microsoft.com/office/drawing/2014/main" id="{4B9D6D68-C091-4726-BE5F-5508DE1F694D}"/>
               </a:ext>
             </a:extLst>
           </p:cNvPr>
@@ -31593,7 +34042,7 @@
           <p:cNvPr id="6" name="">
             <a:extLst xmlns:a="http://schemas.openxmlformats.org/drawingml/2006/main">
               <a:ext uri="{FF2B5EF4-FFF2-40B4-BE49-F238E27FC236}">
-                <a16:creationId xmlns:a16="http://schemas.microsoft.com/office/drawing/2014/main" id="{3076DFC8-5C53-4F67-BC51-9BF827B7F1C2}"/>
+                <a16:creationId xmlns:a16="http://schemas.microsoft.com/office/drawing/2014/main" id="{EF74BFE9-2853-4B84-9A94-D815785FFA60}"/>
               </a:ext>
             </a:extLst>
           </p:cNvPr>
@@ -31662,7 +34111,7 @@
           <p:cNvPr id="7" name="">
             <a:extLst xmlns:a="http://schemas.openxmlformats.org/drawingml/2006/main">
               <a:ext uri="{FF2B5EF4-FFF2-40B4-BE49-F238E27FC236}">
-                <a16:creationId xmlns:a16="http://schemas.microsoft.com/office/drawing/2014/main" id="{97040DCC-0206-4F0B-BA1F-E873CBE8F2FD}"/>
+                <a16:creationId xmlns:a16="http://schemas.microsoft.com/office/drawing/2014/main" id="{EC44AEBD-A538-4CB6-956E-8C26689AC19B}"/>
               </a:ext>
             </a:extLst>
           </p:cNvPr>
@@ -31731,7 +34180,7 @@
           <p:cNvPr id="8" name="">
             <a:extLst xmlns:a="http://schemas.openxmlformats.org/drawingml/2006/main">
               <a:ext uri="{FF2B5EF4-FFF2-40B4-BE49-F238E27FC236}">
-                <a16:creationId xmlns:a16="http://schemas.microsoft.com/office/drawing/2014/main" id="{6EEBF4FC-781A-4F94-AC2B-D8B6EE4DA279}"/>
+                <a16:creationId xmlns:a16="http://schemas.microsoft.com/office/drawing/2014/main" id="{5BCDBFF2-0ABB-4471-966F-F147C61E1281}"/>
               </a:ext>
             </a:extLst>
           </p:cNvPr>
@@ -31766,7 +34215,7 @@
           <p:cNvPr id="9" name="">
             <a:extLst xmlns:a="http://schemas.openxmlformats.org/drawingml/2006/main">
               <a:ext uri="{FF2B5EF4-FFF2-40B4-BE49-F238E27FC236}">
-                <a16:creationId xmlns:a16="http://schemas.microsoft.com/office/drawing/2014/main" id="{75B9A0E7-FD9C-4573-AC12-37DAF4E2EFA4}"/>
+                <a16:creationId xmlns:a16="http://schemas.microsoft.com/office/drawing/2014/main" id="{D09F9D89-D64E-45BF-8A65-0C3B528F8B91}"/>
               </a:ext>
             </a:extLst>
           </p:cNvPr>
@@ -31776,7 +34225,7 @@
           <p:nvPr/>
         </p:nvPicPr>
         <p:blipFill>
-          <a:blip xmlns:r="http://schemas.openxmlformats.org/officeDocument/2006/relationships" xmlns:a="http://schemas.openxmlformats.org/drawingml/2006/main" r:embed="R8d56bc44bf144373"/>
+          <a:blip xmlns:r="http://schemas.openxmlformats.org/officeDocument/2006/relationships" xmlns:a="http://schemas.openxmlformats.org/drawingml/2006/main" r:embed="Rac6a90b0e2744ff4"/>
           <a:stretch xmlns:a="http://schemas.openxmlformats.org/drawingml/2006/main"/>
         </p:blipFill>
         <p:spPr>
@@ -31794,7 +34243,7 @@
           <p:cNvPr id="10" name="">
             <a:extLst xmlns:a="http://schemas.openxmlformats.org/drawingml/2006/main">
               <a:ext uri="{FF2B5EF4-FFF2-40B4-BE49-F238E27FC236}">
-                <a16:creationId xmlns:a16="http://schemas.microsoft.com/office/drawing/2014/main" id="{4FD610D6-7864-4B77-8A20-80A7A4E92B23}"/>
+                <a16:creationId xmlns:a16="http://schemas.microsoft.com/office/drawing/2014/main" id="{364DEC81-36F9-4873-9267-06D3333D5FAE}"/>
               </a:ext>
             </a:extLst>
           </p:cNvPr>
@@ -31863,7 +34312,7 @@
           <p:cNvPr id="11" name="">
             <a:extLst xmlns:a="http://schemas.openxmlformats.org/drawingml/2006/main">
               <a:ext uri="{FF2B5EF4-FFF2-40B4-BE49-F238E27FC236}">
-                <a16:creationId xmlns:a16="http://schemas.microsoft.com/office/drawing/2014/main" id="{E49CDF0F-1FF6-4787-8DCC-74093990660E}"/>
+                <a16:creationId xmlns:a16="http://schemas.microsoft.com/office/drawing/2014/main" id="{60D7C085-2981-4A36-BFCB-6CF02A27839B}"/>
               </a:ext>
             </a:extLst>
           </p:cNvPr>
@@ -31932,7 +34381,7 @@
           <p:cNvPr id="12" name="">
             <a:extLst xmlns:a="http://schemas.openxmlformats.org/drawingml/2006/main">
               <a:ext uri="{FF2B5EF4-FFF2-40B4-BE49-F238E27FC236}">
-                <a16:creationId xmlns:a16="http://schemas.microsoft.com/office/drawing/2014/main" id="{192BFA30-1211-47B0-B0F6-866ECBB07048}"/>
+                <a16:creationId xmlns:a16="http://schemas.microsoft.com/office/drawing/2014/main" id="{41F05C86-2889-44EF-831E-0C416777BACB}"/>
               </a:ext>
             </a:extLst>
           </p:cNvPr>
@@ -31942,7 +34391,7 @@
           <p:nvPr/>
         </p:nvPicPr>
         <p:blipFill>
-          <a:blip xmlns:r="http://schemas.openxmlformats.org/officeDocument/2006/relationships" xmlns:a="http://schemas.openxmlformats.org/drawingml/2006/main" r:embed="Rd890596953784d05"/>
+          <a:blip xmlns:r="http://schemas.openxmlformats.org/officeDocument/2006/relationships" xmlns:a="http://schemas.openxmlformats.org/drawingml/2006/main" r:embed="R137f3705ade943f4"/>
           <a:stretch xmlns:a="http://schemas.openxmlformats.org/drawingml/2006/main"/>
         </p:blipFill>
         <p:spPr>
@@ -31960,7 +34409,7 @@
           <p:cNvPr id="13" name="">
             <a:extLst xmlns:a="http://schemas.openxmlformats.org/drawingml/2006/main">
               <a:ext uri="{FF2B5EF4-FFF2-40B4-BE49-F238E27FC236}">
-                <a16:creationId xmlns:a16="http://schemas.microsoft.com/office/drawing/2014/main" id="{6B01ECCC-6B7D-4F23-A03D-7CC28DA3B0C7}"/>
+                <a16:creationId xmlns:a16="http://schemas.microsoft.com/office/drawing/2014/main" id="{E4CC3841-B73C-4117-ACC4-DF95CE4880C2}"/>
               </a:ext>
             </a:extLst>
           </p:cNvPr>
@@ -31970,7 +34419,7 @@
           <p:nvPr/>
         </p:nvPicPr>
         <p:blipFill>
-          <a:blip xmlns:r="http://schemas.openxmlformats.org/officeDocument/2006/relationships" xmlns:a="http://schemas.openxmlformats.org/drawingml/2006/main" r:embed="Re8d1bd614a7f4f97"/>
+          <a:blip xmlns:r="http://schemas.openxmlformats.org/officeDocument/2006/relationships" xmlns:a="http://schemas.openxmlformats.org/drawingml/2006/main" r:embed="Rc0e57e1b1fb649c1"/>
           <a:stretch xmlns:a="http://schemas.openxmlformats.org/drawingml/2006/main"/>
         </p:blipFill>
         <p:spPr>
@@ -31988,7 +34437,7 @@
           <p:cNvPr id="14" name="">
             <a:extLst xmlns:a="http://schemas.openxmlformats.org/drawingml/2006/main">
               <a:ext uri="{FF2B5EF4-FFF2-40B4-BE49-F238E27FC236}">
-                <a16:creationId xmlns:a16="http://schemas.microsoft.com/office/drawing/2014/main" id="{12B15D24-AB64-4B20-95B6-2127D6822689}"/>
+                <a16:creationId xmlns:a16="http://schemas.microsoft.com/office/drawing/2014/main" id="{C7425643-FD7F-42A8-8A16-B5E671C98A6B}"/>
               </a:ext>
             </a:extLst>
           </p:cNvPr>
@@ -32057,7 +34506,7 @@
           <p:cNvPr id="15" name="">
             <a:extLst xmlns:a="http://schemas.openxmlformats.org/drawingml/2006/main">
               <a:ext uri="{FF2B5EF4-FFF2-40B4-BE49-F238E27FC236}">
-                <a16:creationId xmlns:a16="http://schemas.microsoft.com/office/drawing/2014/main" id="{3AFD7A43-160C-47A4-A19E-0155D10EFAB4}"/>
+                <a16:creationId xmlns:a16="http://schemas.microsoft.com/office/drawing/2014/main" id="{29E2F85D-BDDF-482B-819D-D62F06C97147}"/>
               </a:ext>
             </a:extLst>
           </p:cNvPr>
@@ -32126,7 +34575,7 @@
           <p:cNvPr id="16" name="">
             <a:extLst xmlns:a="http://schemas.openxmlformats.org/drawingml/2006/main">
               <a:ext uri="{FF2B5EF4-FFF2-40B4-BE49-F238E27FC236}">
-                <a16:creationId xmlns:a16="http://schemas.microsoft.com/office/drawing/2014/main" id="{93EA6526-7428-4B74-A329-F310F85A0CF3}"/>
+                <a16:creationId xmlns:a16="http://schemas.microsoft.com/office/drawing/2014/main" id="{0681FA2A-F9DE-495C-B7E7-F5953D202649}"/>
               </a:ext>
             </a:extLst>
           </p:cNvPr>
@@ -32195,7 +34644,7 @@
           <p:cNvPr id="17" name="">
             <a:extLst xmlns:a="http://schemas.openxmlformats.org/drawingml/2006/main">
               <a:ext uri="{FF2B5EF4-FFF2-40B4-BE49-F238E27FC236}">
-                <a16:creationId xmlns:a16="http://schemas.microsoft.com/office/drawing/2014/main" id="{E622E47D-70BC-4B51-95B6-D9932545F25C}"/>
+                <a16:creationId xmlns:a16="http://schemas.microsoft.com/office/drawing/2014/main" id="{C15E2F0D-9F15-4F23-A739-B40F3ECFD7A7}"/>
               </a:ext>
             </a:extLst>
           </p:cNvPr>
@@ -32264,7 +34713,7 @@
           <p:cNvPr id="18" name="">
             <a:extLst xmlns:a="http://schemas.openxmlformats.org/drawingml/2006/main">
               <a:ext uri="{FF2B5EF4-FFF2-40B4-BE49-F238E27FC236}">
-                <a16:creationId xmlns:a16="http://schemas.microsoft.com/office/drawing/2014/main" id="{E5846350-4B0B-4077-B3DE-143FB82685C7}"/>
+                <a16:creationId xmlns:a16="http://schemas.microsoft.com/office/drawing/2014/main" id="{4CDF09D5-6EA8-4D81-8859-0089501E331A}"/>
               </a:ext>
             </a:extLst>
           </p:cNvPr>
@@ -32333,7 +34782,7 @@
           <p:cNvPr id="19" name="">
             <a:extLst xmlns:a="http://schemas.openxmlformats.org/drawingml/2006/main">
               <a:ext uri="{FF2B5EF4-FFF2-40B4-BE49-F238E27FC236}">
-                <a16:creationId xmlns:a16="http://schemas.microsoft.com/office/drawing/2014/main" id="{17967522-65E5-4FC6-864E-37640FDA7603}"/>
+                <a16:creationId xmlns:a16="http://schemas.microsoft.com/office/drawing/2014/main" id="{8BFA192B-59BA-482B-A2AE-62900DD82DB9}"/>
               </a:ext>
             </a:extLst>
           </p:cNvPr>
@@ -32402,7 +34851,7 @@
           <p:cNvPr id="20" name="">
             <a:extLst xmlns:a="http://schemas.openxmlformats.org/drawingml/2006/main">
               <a:ext uri="{FF2B5EF4-FFF2-40B4-BE49-F238E27FC236}">
-                <a16:creationId xmlns:a16="http://schemas.microsoft.com/office/drawing/2014/main" id="{35C1180B-D00F-4A6B-9B6A-440AB5BB0A2C}"/>
+                <a16:creationId xmlns:a16="http://schemas.microsoft.com/office/drawing/2014/main" id="{98E9C4C1-DEE6-4FB8-ABC6-147BC1A3A514}"/>
               </a:ext>
             </a:extLst>
           </p:cNvPr>
@@ -32471,7 +34920,7 @@
           <p:cNvPr id="21" name="">
             <a:extLst xmlns:a="http://schemas.openxmlformats.org/drawingml/2006/main">
               <a:ext uri="{FF2B5EF4-FFF2-40B4-BE49-F238E27FC236}">
-                <a16:creationId xmlns:a16="http://schemas.microsoft.com/office/drawing/2014/main" id="{9AABFF95-F262-491F-80E0-99DE6FDD0657}"/>
+                <a16:creationId xmlns:a16="http://schemas.microsoft.com/office/drawing/2014/main" id="{ECCF1A95-9E05-4078-8A12-477C1EBD9BB3}"/>
               </a:ext>
             </a:extLst>
           </p:cNvPr>
@@ -32540,7 +34989,7 @@
           <p:cNvPr id="22" name="">
             <a:extLst xmlns:a="http://schemas.openxmlformats.org/drawingml/2006/main">
               <a:ext uri="{FF2B5EF4-FFF2-40B4-BE49-F238E27FC236}">
-                <a16:creationId xmlns:a16="http://schemas.microsoft.com/office/drawing/2014/main" id="{8FE097AE-DAED-48AF-95E2-7A5E0EA7B925}"/>
+                <a16:creationId xmlns:a16="http://schemas.microsoft.com/office/drawing/2014/main" id="{5BB2FC0E-8617-454E-B646-BBDCBBC17F27}"/>
               </a:ext>
             </a:extLst>
           </p:cNvPr>
@@ -32607,7 +35056,7 @@
     </p:spTree>
     <p:extLst>
       <p:ext uri="{BB962C8B-B14F-4D97-AF65-F5344CB8AC3E}">
-        <p14:creationId xmlns:p14="http://schemas.microsoft.com/office/powerpoint/2010/main" val="1607111815"/>
+        <p14:creationId xmlns:p14="http://schemas.microsoft.com/office/powerpoint/2010/main" val="1851335969"/>
       </p:ext>
     </p:extLst>
   </p:cSld>
@@ -32638,7 +35087,7 @@
           <p:cNvPr id="36" name="">
             <a:extLst xmlns:a="http://schemas.openxmlformats.org/drawingml/2006/main">
               <a:ext uri="{FF2B5EF4-FFF2-40B4-BE49-F238E27FC236}">
-                <a16:creationId xmlns:a16="http://schemas.microsoft.com/office/drawing/2014/main" id="{9D3C4F63-79CB-40CC-AAC1-4A434473A74E}"/>
+                <a16:creationId xmlns:a16="http://schemas.microsoft.com/office/drawing/2014/main" id="{D9B8CEBA-EBD3-463D-9EBF-BC00F4BE94BD}"/>
               </a:ext>
             </a:extLst>
           </p:cNvPr>
@@ -32669,7 +35118,7 @@
           <p:cNvPr id="2" name="">
             <a:extLst xmlns:a="http://schemas.openxmlformats.org/drawingml/2006/main">
               <a:ext uri="{FF2B5EF4-FFF2-40B4-BE49-F238E27FC236}">
-                <a16:creationId xmlns:a16="http://schemas.microsoft.com/office/drawing/2014/main" id="{7F019709-0536-438E-8C42-807651104113}"/>
+                <a16:creationId xmlns:a16="http://schemas.microsoft.com/office/drawing/2014/main" id="{988903B1-1504-48EE-8E24-88C24A0062BC}"/>
               </a:ext>
             </a:extLst>
           </p:cNvPr>
@@ -32738,7 +35187,7 @@
           <p:cNvPr id="3" name="">
             <a:extLst xmlns:a="http://schemas.openxmlformats.org/drawingml/2006/main">
               <a:ext uri="{FF2B5EF4-FFF2-40B4-BE49-F238E27FC236}">
-                <a16:creationId xmlns:a16="http://schemas.microsoft.com/office/drawing/2014/main" id="{F148BB11-2452-47D1-A222-D40B63D308F7}"/>
+                <a16:creationId xmlns:a16="http://schemas.microsoft.com/office/drawing/2014/main" id="{60766CE8-C3E5-4610-94B7-8791AFCA269C}"/>
               </a:ext>
             </a:extLst>
           </p:cNvPr>
@@ -32807,7 +35256,7 @@
           <p:cNvPr id="4" name="">
             <a:extLst xmlns:a="http://schemas.openxmlformats.org/drawingml/2006/main">
               <a:ext uri="{FF2B5EF4-FFF2-40B4-BE49-F238E27FC236}">
-                <a16:creationId xmlns:a16="http://schemas.microsoft.com/office/drawing/2014/main" id="{31077F59-62F2-47CE-BCDA-C270B97FF173}"/>
+                <a16:creationId xmlns:a16="http://schemas.microsoft.com/office/drawing/2014/main" id="{199FB690-C986-455E-8019-905C04132787}"/>
               </a:ext>
             </a:extLst>
           </p:cNvPr>
@@ -32838,7 +35287,7 @@
           <p:cNvPr id="5" name="">
             <a:extLst xmlns:a="http://schemas.openxmlformats.org/drawingml/2006/main">
               <a:ext uri="{FF2B5EF4-FFF2-40B4-BE49-F238E27FC236}">
-                <a16:creationId xmlns:a16="http://schemas.microsoft.com/office/drawing/2014/main" id="{18B2BFB1-B1AF-41CC-AE9B-A1501D1538A4}"/>
+                <a16:creationId xmlns:a16="http://schemas.microsoft.com/office/drawing/2014/main" id="{9C614D63-B304-435A-BBE7-251560093B99}"/>
               </a:ext>
             </a:extLst>
           </p:cNvPr>
@@ -32907,7 +35356,7 @@
           <p:cNvPr id="6" name="">
             <a:extLst xmlns:a="http://schemas.openxmlformats.org/drawingml/2006/main">
               <a:ext uri="{FF2B5EF4-FFF2-40B4-BE49-F238E27FC236}">
-                <a16:creationId xmlns:a16="http://schemas.microsoft.com/office/drawing/2014/main" id="{F8C0E3B1-CA3D-476D-BEFC-47EC0631A05F}"/>
+                <a16:creationId xmlns:a16="http://schemas.microsoft.com/office/drawing/2014/main" id="{A6215EEA-8876-42BB-B046-3DCD965659A5}"/>
               </a:ext>
             </a:extLst>
           </p:cNvPr>
@@ -32976,7 +35425,7 @@
           <p:cNvPr id="7" name="">
             <a:extLst xmlns:a="http://schemas.openxmlformats.org/drawingml/2006/main">
               <a:ext uri="{FF2B5EF4-FFF2-40B4-BE49-F238E27FC236}">
-                <a16:creationId xmlns:a16="http://schemas.microsoft.com/office/drawing/2014/main" id="{501F1D1F-9323-4BA5-AA0E-0CEC68BB9248}"/>
+                <a16:creationId xmlns:a16="http://schemas.microsoft.com/office/drawing/2014/main" id="{FB248CF3-CAF3-4E6A-A50A-4B7EE52631A9}"/>
               </a:ext>
             </a:extLst>
           </p:cNvPr>
@@ -33045,7 +35494,7 @@
           <p:cNvPr id="8" name="">
             <a:extLst xmlns:a="http://schemas.openxmlformats.org/drawingml/2006/main">
               <a:ext uri="{FF2B5EF4-FFF2-40B4-BE49-F238E27FC236}">
-                <a16:creationId xmlns:a16="http://schemas.microsoft.com/office/drawing/2014/main" id="{1BA519C0-A3C0-46D3-A4BA-C346C7655506}"/>
+                <a16:creationId xmlns:a16="http://schemas.microsoft.com/office/drawing/2014/main" id="{689AAC9F-FED2-4EFB-BDE8-08454E6F88F3}"/>
               </a:ext>
             </a:extLst>
           </p:cNvPr>
@@ -33114,7 +35563,7 @@
           <p:cNvPr id="9" name="">
             <a:extLst xmlns:a="http://schemas.openxmlformats.org/drawingml/2006/main">
               <a:ext uri="{FF2B5EF4-FFF2-40B4-BE49-F238E27FC236}">
-                <a16:creationId xmlns:a16="http://schemas.microsoft.com/office/drawing/2014/main" id="{F5AA1731-F333-4823-ADC4-A543EEED7700}"/>
+                <a16:creationId xmlns:a16="http://schemas.microsoft.com/office/drawing/2014/main" id="{C65AD974-46EF-4A4B-874B-872D123BC046}"/>
               </a:ext>
             </a:extLst>
           </p:cNvPr>
@@ -33183,7 +35632,7 @@
           <p:cNvPr id="10" name="">
             <a:extLst xmlns:a="http://schemas.openxmlformats.org/drawingml/2006/main">
               <a:ext uri="{FF2B5EF4-FFF2-40B4-BE49-F238E27FC236}">
-                <a16:creationId xmlns:a16="http://schemas.microsoft.com/office/drawing/2014/main" id="{D4E1FE82-2FDD-4B23-A9AE-5D956129EC01}"/>
+                <a16:creationId xmlns:a16="http://schemas.microsoft.com/office/drawing/2014/main" id="{02624D1E-BEC8-4CF1-B25B-DE90EA27A2F1}"/>
               </a:ext>
             </a:extLst>
           </p:cNvPr>
@@ -33252,7 +35701,7 @@
           <p:cNvPr id="11" name="">
             <a:extLst xmlns:a="http://schemas.openxmlformats.org/drawingml/2006/main">
               <a:ext uri="{FF2B5EF4-FFF2-40B4-BE49-F238E27FC236}">
-                <a16:creationId xmlns:a16="http://schemas.microsoft.com/office/drawing/2014/main" id="{B72CF1EA-6B21-4864-94D4-FCD00E6FFE21}"/>
+                <a16:creationId xmlns:a16="http://schemas.microsoft.com/office/drawing/2014/main" id="{999E0DEE-9C28-4ED2-B593-88A5C0B7B8D6}"/>
               </a:ext>
             </a:extLst>
           </p:cNvPr>
@@ -33285,7 +35734,7 @@
           <p:cNvPr id="12" name="">
             <a:extLst xmlns:a="http://schemas.openxmlformats.org/drawingml/2006/main">
               <a:ext uri="{FF2B5EF4-FFF2-40B4-BE49-F238E27FC236}">
-                <a16:creationId xmlns:a16="http://schemas.microsoft.com/office/drawing/2014/main" id="{8F731D71-DD72-483E-9444-0556B31E7CF2}"/>
+                <a16:creationId xmlns:a16="http://schemas.microsoft.com/office/drawing/2014/main" id="{39044466-C804-4D9E-A412-C8BFEF457B7F}"/>
               </a:ext>
             </a:extLst>
           </p:cNvPr>
@@ -33354,7 +35803,7 @@
           <p:cNvPr id="13" name="">
             <a:extLst xmlns:a="http://schemas.openxmlformats.org/drawingml/2006/main">
               <a:ext uri="{FF2B5EF4-FFF2-40B4-BE49-F238E27FC236}">
-                <a16:creationId xmlns:a16="http://schemas.microsoft.com/office/drawing/2014/main" id="{575FA4BB-6E45-43F2-ABA5-EEF8C0BD560F}"/>
+                <a16:creationId xmlns:a16="http://schemas.microsoft.com/office/drawing/2014/main" id="{225FB2B9-68E9-4787-A933-66E7204686C0}"/>
               </a:ext>
             </a:extLst>
           </p:cNvPr>
@@ -33423,7 +35872,7 @@
           <p:cNvPr id="14" name="">
             <a:extLst xmlns:a="http://schemas.openxmlformats.org/drawingml/2006/main">
               <a:ext uri="{FF2B5EF4-FFF2-40B4-BE49-F238E27FC236}">
-                <a16:creationId xmlns:a16="http://schemas.microsoft.com/office/drawing/2014/main" id="{12EF5356-F311-4CBB-B762-B4BE051D0D9A}"/>
+                <a16:creationId xmlns:a16="http://schemas.microsoft.com/office/drawing/2014/main" id="{DC2C763F-06AA-4702-8412-61423B48482C}"/>
               </a:ext>
             </a:extLst>
           </p:cNvPr>
@@ -33492,7 +35941,7 @@
           <p:cNvPr id="15" name="">
             <a:extLst xmlns:a="http://schemas.openxmlformats.org/drawingml/2006/main">
               <a:ext uri="{FF2B5EF4-FFF2-40B4-BE49-F238E27FC236}">
-                <a16:creationId xmlns:a16="http://schemas.microsoft.com/office/drawing/2014/main" id="{0258DEA0-5D91-41FF-9AEE-81A4115D03DE}"/>
+                <a16:creationId xmlns:a16="http://schemas.microsoft.com/office/drawing/2014/main" id="{5DB5EB43-A053-413D-8095-29A27CD8B1F4}"/>
               </a:ext>
             </a:extLst>
           </p:cNvPr>
@@ -33525,7 +35974,7 @@
           <p:cNvPr id="16" name="">
             <a:extLst xmlns:a="http://schemas.openxmlformats.org/drawingml/2006/main">
               <a:ext uri="{FF2B5EF4-FFF2-40B4-BE49-F238E27FC236}">
-                <a16:creationId xmlns:a16="http://schemas.microsoft.com/office/drawing/2014/main" id="{1D30A789-8E13-4157-9A52-0A04EB354445}"/>
+                <a16:creationId xmlns:a16="http://schemas.microsoft.com/office/drawing/2014/main" id="{0826F5F2-03EA-4996-BBCA-6BF789B78AF8}"/>
               </a:ext>
             </a:extLst>
           </p:cNvPr>
@@ -33594,7 +36043,7 @@
           <p:cNvPr id="17" name="">
             <a:extLst xmlns:a="http://schemas.openxmlformats.org/drawingml/2006/main">
               <a:ext uri="{FF2B5EF4-FFF2-40B4-BE49-F238E27FC236}">
-                <a16:creationId xmlns:a16="http://schemas.microsoft.com/office/drawing/2014/main" id="{13CE1729-02DC-48F4-ACED-6996DFF222A2}"/>
+                <a16:creationId xmlns:a16="http://schemas.microsoft.com/office/drawing/2014/main" id="{697E66C3-3F52-4889-9951-8C10208D60BF}"/>
               </a:ext>
             </a:extLst>
           </p:cNvPr>
@@ -33663,7 +36112,7 @@
           <p:cNvPr id="18" name="">
             <a:extLst xmlns:a="http://schemas.openxmlformats.org/drawingml/2006/main">
               <a:ext uri="{FF2B5EF4-FFF2-40B4-BE49-F238E27FC236}">
-                <a16:creationId xmlns:a16="http://schemas.microsoft.com/office/drawing/2014/main" id="{D1450B7E-2BC1-494E-B6E5-D9B0FD1EE595}"/>
+                <a16:creationId xmlns:a16="http://schemas.microsoft.com/office/drawing/2014/main" id="{5B0543FB-07C4-4553-85E7-2BD3B5D5127D}"/>
               </a:ext>
             </a:extLst>
           </p:cNvPr>
@@ -33732,7 +36181,7 @@
           <p:cNvPr id="19" name="">
             <a:extLst xmlns:a="http://schemas.openxmlformats.org/drawingml/2006/main">
               <a:ext uri="{FF2B5EF4-FFF2-40B4-BE49-F238E27FC236}">
-                <a16:creationId xmlns:a16="http://schemas.microsoft.com/office/drawing/2014/main" id="{7E510C6F-5723-48AA-9CC7-EB3FCE41E21D}"/>
+                <a16:creationId xmlns:a16="http://schemas.microsoft.com/office/drawing/2014/main" id="{42D7F274-C5D6-4F62-B533-F2690205CEB0}"/>
               </a:ext>
             </a:extLst>
           </p:cNvPr>
@@ -33765,7 +36214,7 @@
           <p:cNvPr id="20" name="">
             <a:extLst xmlns:a="http://schemas.openxmlformats.org/drawingml/2006/main">
               <a:ext uri="{FF2B5EF4-FFF2-40B4-BE49-F238E27FC236}">
-                <a16:creationId xmlns:a16="http://schemas.microsoft.com/office/drawing/2014/main" id="{923CC396-1D7D-45B1-A84B-A0C45B5F3329}"/>
+                <a16:creationId xmlns:a16="http://schemas.microsoft.com/office/drawing/2014/main" id="{98DECC9A-8FA5-4E1F-975E-CFD0F34EF7D4}"/>
               </a:ext>
             </a:extLst>
           </p:cNvPr>
@@ -33834,7 +36283,7 @@
           <p:cNvPr id="21" name="">
             <a:extLst xmlns:a="http://schemas.openxmlformats.org/drawingml/2006/main">
               <a:ext uri="{FF2B5EF4-FFF2-40B4-BE49-F238E27FC236}">
-                <a16:creationId xmlns:a16="http://schemas.microsoft.com/office/drawing/2014/main" id="{C4F54314-F045-4066-9621-8B8755374DA1}"/>
+                <a16:creationId xmlns:a16="http://schemas.microsoft.com/office/drawing/2014/main" id="{F7401DA8-E0AF-48EE-9599-8007E80ABFA1}"/>
               </a:ext>
             </a:extLst>
           </p:cNvPr>
@@ -33903,7 +36352,7 @@
           <p:cNvPr id="22" name="">
             <a:extLst xmlns:a="http://schemas.openxmlformats.org/drawingml/2006/main">
               <a:ext uri="{FF2B5EF4-FFF2-40B4-BE49-F238E27FC236}">
-                <a16:creationId xmlns:a16="http://schemas.microsoft.com/office/drawing/2014/main" id="{9D2904DE-68EA-4583-AD81-8DBB878C0F19}"/>
+                <a16:creationId xmlns:a16="http://schemas.microsoft.com/office/drawing/2014/main" id="{A2759FA3-B06F-4B13-9FFF-86EBF9112E8F}"/>
               </a:ext>
             </a:extLst>
           </p:cNvPr>
@@ -33972,7 +36421,7 @@
           <p:cNvPr id="23" name="">
             <a:extLst xmlns:a="http://schemas.openxmlformats.org/drawingml/2006/main">
               <a:ext uri="{FF2B5EF4-FFF2-40B4-BE49-F238E27FC236}">
-                <a16:creationId xmlns:a16="http://schemas.microsoft.com/office/drawing/2014/main" id="{F035BE62-967C-4B61-B749-0C7074D58BAA}"/>
+                <a16:creationId xmlns:a16="http://schemas.microsoft.com/office/drawing/2014/main" id="{15E00511-FA87-446F-9C58-D4A95BF18C16}"/>
               </a:ext>
             </a:extLst>
           </p:cNvPr>
@@ -34005,7 +36454,7 @@
           <p:cNvPr id="24" name="">
             <a:extLst xmlns:a="http://schemas.openxmlformats.org/drawingml/2006/main">
               <a:ext uri="{FF2B5EF4-FFF2-40B4-BE49-F238E27FC236}">
-                <a16:creationId xmlns:a16="http://schemas.microsoft.com/office/drawing/2014/main" id="{9D89F00C-3DB5-43B9-B27F-55DC30A0EC2D}"/>
+                <a16:creationId xmlns:a16="http://schemas.microsoft.com/office/drawing/2014/main" id="{516E5CC5-5945-4B8E-9D9B-C7D02812CDFA}"/>
               </a:ext>
             </a:extLst>
           </p:cNvPr>
@@ -34074,7 +36523,7 @@
           <p:cNvPr id="25" name="">
             <a:extLst xmlns:a="http://schemas.openxmlformats.org/drawingml/2006/main">
               <a:ext uri="{FF2B5EF4-FFF2-40B4-BE49-F238E27FC236}">
-                <a16:creationId xmlns:a16="http://schemas.microsoft.com/office/drawing/2014/main" id="{CDF020AA-18CE-481A-94FE-E775C5F048D4}"/>
+                <a16:creationId xmlns:a16="http://schemas.microsoft.com/office/drawing/2014/main" id="{3C88F255-3AF4-4651-B394-68D7E6D7F26B}"/>
               </a:ext>
             </a:extLst>
           </p:cNvPr>
@@ -34143,7 +36592,7 @@
           <p:cNvPr id="26" name="">
             <a:extLst xmlns:a="http://schemas.openxmlformats.org/drawingml/2006/main">
               <a:ext uri="{FF2B5EF4-FFF2-40B4-BE49-F238E27FC236}">
-                <a16:creationId xmlns:a16="http://schemas.microsoft.com/office/drawing/2014/main" id="{E9F95099-EACC-4A07-B5FE-5234189C5212}"/>
+                <a16:creationId xmlns:a16="http://schemas.microsoft.com/office/drawing/2014/main" id="{9EC99C5A-4DE6-4886-BBDC-75EE2A955A4C}"/>
               </a:ext>
             </a:extLst>
           </p:cNvPr>
@@ -34212,7 +36661,7 @@
           <p:cNvPr id="27" name="">
             <a:extLst xmlns:a="http://schemas.openxmlformats.org/drawingml/2006/main">
               <a:ext uri="{FF2B5EF4-FFF2-40B4-BE49-F238E27FC236}">
-                <a16:creationId xmlns:a16="http://schemas.microsoft.com/office/drawing/2014/main" id="{EA032097-5363-4AB6-B276-1AC3EF8CD09B}"/>
+                <a16:creationId xmlns:a16="http://schemas.microsoft.com/office/drawing/2014/main" id="{408ABBE1-D93A-4493-9CEC-011E0C7BCDCC}"/>
               </a:ext>
             </a:extLst>
           </p:cNvPr>
@@ -34245,7 +36694,7 @@
           <p:cNvPr id="28" name="">
             <a:extLst xmlns:a="http://schemas.openxmlformats.org/drawingml/2006/main">
               <a:ext uri="{FF2B5EF4-FFF2-40B4-BE49-F238E27FC236}">
-                <a16:creationId xmlns:a16="http://schemas.microsoft.com/office/drawing/2014/main" id="{1E03458F-1070-4676-9E6D-61DEDA567397}"/>
+                <a16:creationId xmlns:a16="http://schemas.microsoft.com/office/drawing/2014/main" id="{E825367D-D379-43B2-8F63-DC43A6D40451}"/>
               </a:ext>
             </a:extLst>
           </p:cNvPr>
@@ -34314,7 +36763,7 @@
           <p:cNvPr id="29" name="">
             <a:extLst xmlns:a="http://schemas.openxmlformats.org/drawingml/2006/main">
               <a:ext uri="{FF2B5EF4-FFF2-40B4-BE49-F238E27FC236}">
-                <a16:creationId xmlns:a16="http://schemas.microsoft.com/office/drawing/2014/main" id="{716D4291-192E-48EA-9190-4E7D6F52C440}"/>
+                <a16:creationId xmlns:a16="http://schemas.microsoft.com/office/drawing/2014/main" id="{B3B8D8F1-4661-4F71-B190-A013C954C8A9}"/>
               </a:ext>
             </a:extLst>
           </p:cNvPr>
@@ -34383,7 +36832,7 @@
           <p:cNvPr id="30" name="">
             <a:extLst xmlns:a="http://schemas.openxmlformats.org/drawingml/2006/main">
               <a:ext uri="{FF2B5EF4-FFF2-40B4-BE49-F238E27FC236}">
-                <a16:creationId xmlns:a16="http://schemas.microsoft.com/office/drawing/2014/main" id="{8AC575BE-1E52-4BF4-AEE4-19AE5C2CB829}"/>
+                <a16:creationId xmlns:a16="http://schemas.microsoft.com/office/drawing/2014/main" id="{14FA4782-E04A-4A66-AF31-685EF9E49169}"/>
               </a:ext>
             </a:extLst>
           </p:cNvPr>
@@ -34452,7 +36901,7 @@
           <p:cNvPr id="31" name="">
             <a:extLst xmlns:a="http://schemas.openxmlformats.org/drawingml/2006/main">
               <a:ext uri="{FF2B5EF4-FFF2-40B4-BE49-F238E27FC236}">
-                <a16:creationId xmlns:a16="http://schemas.microsoft.com/office/drawing/2014/main" id="{794A9315-B9C2-485D-AB09-D4B87526774E}"/>
+                <a16:creationId xmlns:a16="http://schemas.microsoft.com/office/drawing/2014/main" id="{A9464982-F07E-44C8-AE9E-D7A86EC656BB}"/>
               </a:ext>
             </a:extLst>
           </p:cNvPr>
@@ -34485,7 +36934,7 @@
           <p:cNvPr id="32" name="">
             <a:extLst xmlns:a="http://schemas.openxmlformats.org/drawingml/2006/main">
               <a:ext uri="{FF2B5EF4-FFF2-40B4-BE49-F238E27FC236}">
-                <a16:creationId xmlns:a16="http://schemas.microsoft.com/office/drawing/2014/main" id="{DDBEBA0A-D909-47E3-92A2-C58A56009FD7}"/>
+                <a16:creationId xmlns:a16="http://schemas.microsoft.com/office/drawing/2014/main" id="{2FCEFA72-D9C9-4E30-B4F8-67FB5F32D715}"/>
               </a:ext>
             </a:extLst>
           </p:cNvPr>
@@ -34554,7 +37003,7 @@
           <p:cNvPr id="33" name="">
             <a:extLst xmlns:a="http://schemas.openxmlformats.org/drawingml/2006/main">
               <a:ext uri="{FF2B5EF4-FFF2-40B4-BE49-F238E27FC236}">
-                <a16:creationId xmlns:a16="http://schemas.microsoft.com/office/drawing/2014/main" id="{90760266-7ABF-4A2F-BD4C-A70FFF141A41}"/>
+                <a16:creationId xmlns:a16="http://schemas.microsoft.com/office/drawing/2014/main" id="{B9FDE7B3-C963-4EB4-BFA4-3BD837489A33}"/>
               </a:ext>
             </a:extLst>
           </p:cNvPr>
@@ -34623,7 +37072,7 @@
           <p:cNvPr id="34" name="">
             <a:extLst xmlns:a="http://schemas.openxmlformats.org/drawingml/2006/main">
               <a:ext uri="{FF2B5EF4-FFF2-40B4-BE49-F238E27FC236}">
-                <a16:creationId xmlns:a16="http://schemas.microsoft.com/office/drawing/2014/main" id="{F44256F4-75DB-4601-9534-43078240BC4A}"/>
+                <a16:creationId xmlns:a16="http://schemas.microsoft.com/office/drawing/2014/main" id="{F2091DCA-2062-4F56-BB10-C8EC0AAA3550}"/>
               </a:ext>
             </a:extLst>
           </p:cNvPr>
@@ -34692,7 +37141,7 @@
           <p:cNvPr id="35" name="">
             <a:extLst xmlns:a="http://schemas.openxmlformats.org/drawingml/2006/main">
               <a:ext uri="{FF2B5EF4-FFF2-40B4-BE49-F238E27FC236}">
-                <a16:creationId xmlns:a16="http://schemas.microsoft.com/office/drawing/2014/main" id="{DC5C308F-E48D-43C1-B961-DC768FF823C0}"/>
+                <a16:creationId xmlns:a16="http://schemas.microsoft.com/office/drawing/2014/main" id="{9300326A-48F4-4150-BC3B-08CDA9646401}"/>
               </a:ext>
             </a:extLst>
           </p:cNvPr>
@@ -34759,7 +37208,7 @@
     </p:spTree>
     <p:extLst>
       <p:ext uri="{BB962C8B-B14F-4D97-AF65-F5344CB8AC3E}">
-        <p14:creationId xmlns:p14="http://schemas.microsoft.com/office/powerpoint/2010/main" val="793432789"/>
+        <p14:creationId xmlns:p14="http://schemas.microsoft.com/office/powerpoint/2010/main" val="1287383123"/>
       </p:ext>
     </p:extLst>
   </p:cSld>
@@ -34790,7 +37239,7 @@
           <p:cNvPr id="30" name="">
             <a:extLst xmlns:a="http://schemas.openxmlformats.org/drawingml/2006/main">
               <a:ext uri="{FF2B5EF4-FFF2-40B4-BE49-F238E27FC236}">
-                <a16:creationId xmlns:a16="http://schemas.microsoft.com/office/drawing/2014/main" id="{4EDEFEB4-172D-4687-8EA1-F5EFC36823D4}"/>
+                <a16:creationId xmlns:a16="http://schemas.microsoft.com/office/drawing/2014/main" id="{7B63AECF-118A-4022-AAA5-C29776E358C2}"/>
               </a:ext>
             </a:extLst>
           </p:cNvPr>
@@ -34821,7 +37270,7 @@
           <p:cNvPr id="2" name="">
             <a:extLst xmlns:a="http://schemas.openxmlformats.org/drawingml/2006/main">
               <a:ext uri="{FF2B5EF4-FFF2-40B4-BE49-F238E27FC236}">
-                <a16:creationId xmlns:a16="http://schemas.microsoft.com/office/drawing/2014/main" id="{FF60940A-009D-4F91-B3AA-2F6C43A5FEE2}"/>
+                <a16:creationId xmlns:a16="http://schemas.microsoft.com/office/drawing/2014/main" id="{822570FE-D01A-4469-B668-D2972690CEF1}"/>
               </a:ext>
             </a:extLst>
           </p:cNvPr>
@@ -34890,7 +37339,7 @@
           <p:cNvPr id="3" name="">
             <a:extLst xmlns:a="http://schemas.openxmlformats.org/drawingml/2006/main">
               <a:ext uri="{FF2B5EF4-FFF2-40B4-BE49-F238E27FC236}">
-                <a16:creationId xmlns:a16="http://schemas.microsoft.com/office/drawing/2014/main" id="{81218BFB-B8F0-45C6-9966-E23C1B5F1566}"/>
+                <a16:creationId xmlns:a16="http://schemas.microsoft.com/office/drawing/2014/main" id="{ABD9DD31-5B11-4F19-966B-518C463A1ABA}"/>
               </a:ext>
             </a:extLst>
           </p:cNvPr>
@@ -34959,7 +37408,7 @@
           <p:cNvPr id="4" name="">
             <a:extLst xmlns:a="http://schemas.openxmlformats.org/drawingml/2006/main">
               <a:ext uri="{FF2B5EF4-FFF2-40B4-BE49-F238E27FC236}">
-                <a16:creationId xmlns:a16="http://schemas.microsoft.com/office/drawing/2014/main" id="{711507C4-4B41-4AA0-81AA-98C39B481178}"/>
+                <a16:creationId xmlns:a16="http://schemas.microsoft.com/office/drawing/2014/main" id="{EA7FD7B9-617D-4DC6-99C8-DFB9CB653248}"/>
               </a:ext>
             </a:extLst>
           </p:cNvPr>
@@ -34990,7 +37439,7 @@
           <p:cNvPr id="5" name="">
             <a:extLst xmlns:a="http://schemas.openxmlformats.org/drawingml/2006/main">
               <a:ext uri="{FF2B5EF4-FFF2-40B4-BE49-F238E27FC236}">
-                <a16:creationId xmlns:a16="http://schemas.microsoft.com/office/drawing/2014/main" id="{EC2C4C5B-6E43-4568-A8C5-7566CAB3D33B}"/>
+                <a16:creationId xmlns:a16="http://schemas.microsoft.com/office/drawing/2014/main" id="{44CC15CB-1737-4C6E-95B0-1D8252466EB1}"/>
               </a:ext>
             </a:extLst>
           </p:cNvPr>
@@ -35059,7 +37508,7 @@
           <p:cNvPr id="6" name="">
             <a:extLst xmlns:a="http://schemas.openxmlformats.org/drawingml/2006/main">
               <a:ext uri="{FF2B5EF4-FFF2-40B4-BE49-F238E27FC236}">
-                <a16:creationId xmlns:a16="http://schemas.microsoft.com/office/drawing/2014/main" id="{49AFFB6C-1FA6-4F2C-B96B-14DAE6B7F53F}"/>
+                <a16:creationId xmlns:a16="http://schemas.microsoft.com/office/drawing/2014/main" id="{E17E2E60-B32E-4200-9F55-12DA8373F133}"/>
               </a:ext>
             </a:extLst>
           </p:cNvPr>
@@ -35128,7 +37577,7 @@
           <p:cNvPr id="7" name="">
             <a:extLst xmlns:a="http://schemas.openxmlformats.org/drawingml/2006/main">
               <a:ext uri="{FF2B5EF4-FFF2-40B4-BE49-F238E27FC236}">
-                <a16:creationId xmlns:a16="http://schemas.microsoft.com/office/drawing/2014/main" id="{624EC95C-EF42-4AAF-9EF0-79C5F0513CB1}"/>
+                <a16:creationId xmlns:a16="http://schemas.microsoft.com/office/drawing/2014/main" id="{B004EA7C-443F-4C91-899D-8B18F3E2A641}"/>
               </a:ext>
             </a:extLst>
           </p:cNvPr>
@@ -35161,7 +37610,7 @@
           <p:cNvPr id="8" name="">
             <a:extLst xmlns:a="http://schemas.openxmlformats.org/drawingml/2006/main">
               <a:ext uri="{FF2B5EF4-FFF2-40B4-BE49-F238E27FC236}">
-                <a16:creationId xmlns:a16="http://schemas.microsoft.com/office/drawing/2014/main" id="{CF62505D-59AA-4FA9-806D-C95539110170}"/>
+                <a16:creationId xmlns:a16="http://schemas.microsoft.com/office/drawing/2014/main" id="{D987FD61-9A86-4722-A20E-1943E194CE16}"/>
               </a:ext>
             </a:extLst>
           </p:cNvPr>
@@ -35230,7 +37679,7 @@
           <p:cNvPr id="9" name="">
             <a:extLst xmlns:a="http://schemas.openxmlformats.org/drawingml/2006/main">
               <a:ext uri="{FF2B5EF4-FFF2-40B4-BE49-F238E27FC236}">
-                <a16:creationId xmlns:a16="http://schemas.microsoft.com/office/drawing/2014/main" id="{B2F85ADE-BB9F-4DCC-A6ED-7A94507DF1DF}"/>
+                <a16:creationId xmlns:a16="http://schemas.microsoft.com/office/drawing/2014/main" id="{FCFE063C-B3EF-4D42-9B54-DDAE81BE6F20}"/>
               </a:ext>
             </a:extLst>
           </p:cNvPr>
@@ -35299,7 +37748,7 @@
           <p:cNvPr id="10" name="">
             <a:extLst xmlns:a="http://schemas.openxmlformats.org/drawingml/2006/main">
               <a:ext uri="{FF2B5EF4-FFF2-40B4-BE49-F238E27FC236}">
-                <a16:creationId xmlns:a16="http://schemas.microsoft.com/office/drawing/2014/main" id="{5B134897-CF14-432E-8B11-B82770701CCF}"/>
+                <a16:creationId xmlns:a16="http://schemas.microsoft.com/office/drawing/2014/main" id="{41382B69-7F7D-4D4C-ABF1-D27C035D0E50}"/>
               </a:ext>
             </a:extLst>
           </p:cNvPr>
@@ -35330,7 +37779,7 @@
           <p:cNvPr id="11" name="">
             <a:extLst xmlns:a="http://schemas.openxmlformats.org/drawingml/2006/main">
               <a:ext uri="{FF2B5EF4-FFF2-40B4-BE49-F238E27FC236}">
-                <a16:creationId xmlns:a16="http://schemas.microsoft.com/office/drawing/2014/main" id="{7D701E75-661A-4A07-915B-D680DEDC1916}"/>
+                <a16:creationId xmlns:a16="http://schemas.microsoft.com/office/drawing/2014/main" id="{4A129698-B916-4BBF-9AE8-F5E4BEB51D9E}"/>
               </a:ext>
             </a:extLst>
           </p:cNvPr>
@@ -35399,7 +37848,7 @@
           <p:cNvPr id="12" name="">
             <a:extLst xmlns:a="http://schemas.openxmlformats.org/drawingml/2006/main">
               <a:ext uri="{FF2B5EF4-FFF2-40B4-BE49-F238E27FC236}">
-                <a16:creationId xmlns:a16="http://schemas.microsoft.com/office/drawing/2014/main" id="{66A24DC0-44AF-4F29-A426-E1A57C89B0FF}"/>
+                <a16:creationId xmlns:a16="http://schemas.microsoft.com/office/drawing/2014/main" id="{D484615F-F720-4F9D-86E0-1BEEC5B2A27B}"/>
               </a:ext>
             </a:extLst>
           </p:cNvPr>
@@ -35430,7 +37879,7 @@
           <p:cNvPr id="13" name="">
             <a:extLst xmlns:a="http://schemas.openxmlformats.org/drawingml/2006/main">
               <a:ext uri="{FF2B5EF4-FFF2-40B4-BE49-F238E27FC236}">
-                <a16:creationId xmlns:a16="http://schemas.microsoft.com/office/drawing/2014/main" id="{083FA4E3-015A-42B2-B29D-1D0EEBC17C90}"/>
+                <a16:creationId xmlns:a16="http://schemas.microsoft.com/office/drawing/2014/main" id="{43BD5004-9542-4C53-8C99-E8DBB883378D}"/>
               </a:ext>
             </a:extLst>
           </p:cNvPr>
@@ -35499,7 +37948,7 @@
           <p:cNvPr id="14" name="">
             <a:extLst xmlns:a="http://schemas.openxmlformats.org/drawingml/2006/main">
               <a:ext uri="{FF2B5EF4-FFF2-40B4-BE49-F238E27FC236}">
-                <a16:creationId xmlns:a16="http://schemas.microsoft.com/office/drawing/2014/main" id="{6A5658D8-0B28-4964-991D-3416A1DA0403}"/>
+                <a16:creationId xmlns:a16="http://schemas.microsoft.com/office/drawing/2014/main" id="{D51451E3-7FE0-4250-9844-2C6CA3F52B8D}"/>
               </a:ext>
             </a:extLst>
           </p:cNvPr>
@@ -35568,7 +38017,7 @@
           <p:cNvPr id="15" name="">
             <a:extLst xmlns:a="http://schemas.openxmlformats.org/drawingml/2006/main">
               <a:ext uri="{FF2B5EF4-FFF2-40B4-BE49-F238E27FC236}">
-                <a16:creationId xmlns:a16="http://schemas.microsoft.com/office/drawing/2014/main" id="{A177344F-702F-4886-A5C2-1031EAC132DA}"/>
+                <a16:creationId xmlns:a16="http://schemas.microsoft.com/office/drawing/2014/main" id="{6CCF8D28-47BC-4579-9183-22787ABAF786}"/>
               </a:ext>
             </a:extLst>
           </p:cNvPr>
@@ -35599,7 +38048,7 @@
           <p:cNvPr id="16" name="">
             <a:extLst xmlns:a="http://schemas.openxmlformats.org/drawingml/2006/main">
               <a:ext uri="{FF2B5EF4-FFF2-40B4-BE49-F238E27FC236}">
-                <a16:creationId xmlns:a16="http://schemas.microsoft.com/office/drawing/2014/main" id="{22DF5EB8-0D92-4234-9E36-273A4FC7AEF9}"/>
+                <a16:creationId xmlns:a16="http://schemas.microsoft.com/office/drawing/2014/main" id="{0A3E6743-F626-468F-B938-2778E2A72760}"/>
               </a:ext>
             </a:extLst>
           </p:cNvPr>
@@ -35668,7 +38117,7 @@
           <p:cNvPr id="17" name="">
             <a:extLst xmlns:a="http://schemas.openxmlformats.org/drawingml/2006/main">
               <a:ext uri="{FF2B5EF4-FFF2-40B4-BE49-F238E27FC236}">
-                <a16:creationId xmlns:a16="http://schemas.microsoft.com/office/drawing/2014/main" id="{C9871F7A-F3F6-4EB9-9C71-7A551EA66838}"/>
+                <a16:creationId xmlns:a16="http://schemas.microsoft.com/office/drawing/2014/main" id="{13FFEC93-9183-410B-ACF1-3C031F5845AF}"/>
               </a:ext>
             </a:extLst>
           </p:cNvPr>
@@ -35699,7 +38148,7 @@
           <p:cNvPr id="18" name="">
             <a:extLst xmlns:a="http://schemas.openxmlformats.org/drawingml/2006/main">
               <a:ext uri="{FF2B5EF4-FFF2-40B4-BE49-F238E27FC236}">
-                <a16:creationId xmlns:a16="http://schemas.microsoft.com/office/drawing/2014/main" id="{2D59AAB6-3928-4E19-84B2-178AA7C70676}"/>
+                <a16:creationId xmlns:a16="http://schemas.microsoft.com/office/drawing/2014/main" id="{F99227C4-37FD-4D27-90A7-010AFEE3BD99}"/>
               </a:ext>
             </a:extLst>
           </p:cNvPr>
@@ -35768,7 +38217,7 @@
           <p:cNvPr id="19" name="">
             <a:extLst xmlns:a="http://schemas.openxmlformats.org/drawingml/2006/main">
               <a:ext uri="{FF2B5EF4-FFF2-40B4-BE49-F238E27FC236}">
-                <a16:creationId xmlns:a16="http://schemas.microsoft.com/office/drawing/2014/main" id="{2091B8C0-35F5-451B-A860-749EA910EB1D}"/>
+                <a16:creationId xmlns:a16="http://schemas.microsoft.com/office/drawing/2014/main" id="{C30BFE1B-2ED4-4178-9435-E5D66010F9E0}"/>
               </a:ext>
             </a:extLst>
           </p:cNvPr>
@@ -35837,7 +38286,7 @@
           <p:cNvPr id="20" name="">
             <a:extLst xmlns:a="http://schemas.openxmlformats.org/drawingml/2006/main">
               <a:ext uri="{FF2B5EF4-FFF2-40B4-BE49-F238E27FC236}">
-                <a16:creationId xmlns:a16="http://schemas.microsoft.com/office/drawing/2014/main" id="{E594FE82-3B5A-4275-85F2-4FDC2E1532E5}"/>
+                <a16:creationId xmlns:a16="http://schemas.microsoft.com/office/drawing/2014/main" id="{9A7D6396-4150-417D-BA01-91C5F2BE7E6B}"/>
               </a:ext>
             </a:extLst>
           </p:cNvPr>
@@ -35868,7 +38317,7 @@
           <p:cNvPr id="21" name="">
             <a:extLst xmlns:a="http://schemas.openxmlformats.org/drawingml/2006/main">
               <a:ext uri="{FF2B5EF4-FFF2-40B4-BE49-F238E27FC236}">
-                <a16:creationId xmlns:a16="http://schemas.microsoft.com/office/drawing/2014/main" id="{2D5FB204-D201-490E-A74D-C1667279E626}"/>
+                <a16:creationId xmlns:a16="http://schemas.microsoft.com/office/drawing/2014/main" id="{F0660906-CA95-4817-A669-6DA3B21B43E8}"/>
               </a:ext>
             </a:extLst>
           </p:cNvPr>
@@ -35937,7 +38386,7 @@
           <p:cNvPr id="22" name="">
             <a:extLst xmlns:a="http://schemas.openxmlformats.org/drawingml/2006/main">
               <a:ext uri="{FF2B5EF4-FFF2-40B4-BE49-F238E27FC236}">
-                <a16:creationId xmlns:a16="http://schemas.microsoft.com/office/drawing/2014/main" id="{D813EBA2-E8C2-4A92-8D47-62C731A4E7C5}"/>
+                <a16:creationId xmlns:a16="http://schemas.microsoft.com/office/drawing/2014/main" id="{C54F7D20-82E7-447C-B85E-235668A0A972}"/>
               </a:ext>
             </a:extLst>
           </p:cNvPr>
@@ -35968,7 +38417,7 @@
           <p:cNvPr id="23" name="">
             <a:extLst xmlns:a="http://schemas.openxmlformats.org/drawingml/2006/main">
               <a:ext uri="{FF2B5EF4-FFF2-40B4-BE49-F238E27FC236}">
-                <a16:creationId xmlns:a16="http://schemas.microsoft.com/office/drawing/2014/main" id="{2F170D82-1E5B-4536-94D0-9C0ECC9FA012}"/>
+                <a16:creationId xmlns:a16="http://schemas.microsoft.com/office/drawing/2014/main" id="{2FF68979-A95E-46BB-8BEA-6831569C9A07}"/>
               </a:ext>
             </a:extLst>
           </p:cNvPr>
@@ -36037,7 +38486,7 @@
           <p:cNvPr id="24" name="">
             <a:extLst xmlns:a="http://schemas.openxmlformats.org/drawingml/2006/main">
               <a:ext uri="{FF2B5EF4-FFF2-40B4-BE49-F238E27FC236}">
-                <a16:creationId xmlns:a16="http://schemas.microsoft.com/office/drawing/2014/main" id="{CD2D521F-32EC-438D-ADEC-839932E24D3B}"/>
+                <a16:creationId xmlns:a16="http://schemas.microsoft.com/office/drawing/2014/main" id="{3813CEF4-6176-45E0-81F3-04DEE471D63D}"/>
               </a:ext>
             </a:extLst>
           </p:cNvPr>
@@ -36106,7 +38555,7 @@
           <p:cNvPr id="25" name="">
             <a:extLst xmlns:a="http://schemas.openxmlformats.org/drawingml/2006/main">
               <a:ext uri="{FF2B5EF4-FFF2-40B4-BE49-F238E27FC236}">
-                <a16:creationId xmlns:a16="http://schemas.microsoft.com/office/drawing/2014/main" id="{BED73FB4-30CA-4AAF-BE99-368ED4C67C9B}"/>
+                <a16:creationId xmlns:a16="http://schemas.microsoft.com/office/drawing/2014/main" id="{FE4ACF1D-9E57-407F-A1BB-953219E64945}"/>
               </a:ext>
             </a:extLst>
           </p:cNvPr>
@@ -36137,7 +38586,7 @@
           <p:cNvPr id="26" name="">
             <a:extLst xmlns:a="http://schemas.openxmlformats.org/drawingml/2006/main">
               <a:ext uri="{FF2B5EF4-FFF2-40B4-BE49-F238E27FC236}">
-                <a16:creationId xmlns:a16="http://schemas.microsoft.com/office/drawing/2014/main" id="{960F97F2-2049-461F-AF62-F2341FE6EB20}"/>
+                <a16:creationId xmlns:a16="http://schemas.microsoft.com/office/drawing/2014/main" id="{E1455125-B787-4EE4-96A8-E1C3CF2028C1}"/>
               </a:ext>
             </a:extLst>
           </p:cNvPr>
@@ -36206,7 +38655,7 @@
           <p:cNvPr id="27" name="">
             <a:extLst xmlns:a="http://schemas.openxmlformats.org/drawingml/2006/main">
               <a:ext uri="{FF2B5EF4-FFF2-40B4-BE49-F238E27FC236}">
-                <a16:creationId xmlns:a16="http://schemas.microsoft.com/office/drawing/2014/main" id="{BE6664E3-A6D8-4D79-A6A2-1EBD587D1810}"/>
+                <a16:creationId xmlns:a16="http://schemas.microsoft.com/office/drawing/2014/main" id="{58545ABC-3FEA-4BC4-8A2D-AAEA01BB352F}"/>
               </a:ext>
             </a:extLst>
           </p:cNvPr>
@@ -36237,7 +38686,7 @@
           <p:cNvPr id="28" name="">
             <a:extLst xmlns:a="http://schemas.openxmlformats.org/drawingml/2006/main">
               <a:ext uri="{FF2B5EF4-FFF2-40B4-BE49-F238E27FC236}">
-                <a16:creationId xmlns:a16="http://schemas.microsoft.com/office/drawing/2014/main" id="{27DBE71B-C5CC-4C32-A300-BD0D39728E43}"/>
+                <a16:creationId xmlns:a16="http://schemas.microsoft.com/office/drawing/2014/main" id="{A7A3A4BD-5963-421B-8317-3E0674445059}"/>
               </a:ext>
             </a:extLst>
           </p:cNvPr>
@@ -36306,7 +38755,7 @@
           <p:cNvPr id="29" name="">
             <a:extLst xmlns:a="http://schemas.openxmlformats.org/drawingml/2006/main">
               <a:ext uri="{FF2B5EF4-FFF2-40B4-BE49-F238E27FC236}">
-                <a16:creationId xmlns:a16="http://schemas.microsoft.com/office/drawing/2014/main" id="{C57FFC99-7C4F-4D47-94A2-4A4B3A8003F7}"/>
+                <a16:creationId xmlns:a16="http://schemas.microsoft.com/office/drawing/2014/main" id="{198E2A3B-5137-4770-B5C1-6AEA578F8DA9}"/>
               </a:ext>
             </a:extLst>
           </p:cNvPr>
@@ -36373,7 +38822,7 @@
     </p:spTree>
     <p:extLst>
       <p:ext uri="{BB962C8B-B14F-4D97-AF65-F5344CB8AC3E}">
-        <p14:creationId xmlns:p14="http://schemas.microsoft.com/office/powerpoint/2010/main" val="2003497742"/>
+        <p14:creationId xmlns:p14="http://schemas.microsoft.com/office/powerpoint/2010/main" val="1288539611"/>
       </p:ext>
     </p:extLst>
   </p:cSld>
@@ -36404,7 +38853,7 @@
           <p:cNvPr id="34" name="">
             <a:extLst xmlns:a="http://schemas.openxmlformats.org/drawingml/2006/main">
               <a:ext uri="{FF2B5EF4-FFF2-40B4-BE49-F238E27FC236}">
-                <a16:creationId xmlns:a16="http://schemas.microsoft.com/office/drawing/2014/main" id="{0664370D-AE72-40E0-A734-90AFB79E1028}"/>
+                <a16:creationId xmlns:a16="http://schemas.microsoft.com/office/drawing/2014/main" id="{37B17473-D588-494B-A923-CB6D815BFE5C}"/>
               </a:ext>
             </a:extLst>
           </p:cNvPr>
@@ -36435,7 +38884,7 @@
           <p:cNvPr id="2" name="">
             <a:extLst xmlns:a="http://schemas.openxmlformats.org/drawingml/2006/main">
               <a:ext uri="{FF2B5EF4-FFF2-40B4-BE49-F238E27FC236}">
-                <a16:creationId xmlns:a16="http://schemas.microsoft.com/office/drawing/2014/main" id="{4A53A0A2-A25B-419A-A124-623D13C22E9F}"/>
+                <a16:creationId xmlns:a16="http://schemas.microsoft.com/office/drawing/2014/main" id="{5AFC84FF-CC40-410E-A14D-39A934913671}"/>
               </a:ext>
             </a:extLst>
           </p:cNvPr>
@@ -36504,7 +38953,7 @@
           <p:cNvPr id="3" name="">
             <a:extLst xmlns:a="http://schemas.openxmlformats.org/drawingml/2006/main">
               <a:ext uri="{FF2B5EF4-FFF2-40B4-BE49-F238E27FC236}">
-                <a16:creationId xmlns:a16="http://schemas.microsoft.com/office/drawing/2014/main" id="{CE784C05-B551-41DC-AE99-637A9608E1C7}"/>
+                <a16:creationId xmlns:a16="http://schemas.microsoft.com/office/drawing/2014/main" id="{841C0859-46D7-4C27-94EB-C458DBDE267A}"/>
               </a:ext>
             </a:extLst>
           </p:cNvPr>
@@ -36573,7 +39022,7 @@
           <p:cNvPr id="4" name="">
             <a:extLst xmlns:a="http://schemas.openxmlformats.org/drawingml/2006/main">
               <a:ext uri="{FF2B5EF4-FFF2-40B4-BE49-F238E27FC236}">
-                <a16:creationId xmlns:a16="http://schemas.microsoft.com/office/drawing/2014/main" id="{30A3F6CD-3ECA-4747-98F4-FDBBD4A775B3}"/>
+                <a16:creationId xmlns:a16="http://schemas.microsoft.com/office/drawing/2014/main" id="{7BB04279-C70F-474F-BB17-1877840D2F7F}"/>
               </a:ext>
             </a:extLst>
           </p:cNvPr>
@@ -36604,7 +39053,7 @@
           <p:cNvPr id="5" name="">
             <a:extLst xmlns:a="http://schemas.openxmlformats.org/drawingml/2006/main">
               <a:ext uri="{FF2B5EF4-FFF2-40B4-BE49-F238E27FC236}">
-                <a16:creationId xmlns:a16="http://schemas.microsoft.com/office/drawing/2014/main" id="{818BB247-5003-4FA2-BC99-768437DBD480}"/>
+                <a16:creationId xmlns:a16="http://schemas.microsoft.com/office/drawing/2014/main" id="{0041D350-9766-4717-8F56-FC4C752D6045}"/>
               </a:ext>
             </a:extLst>
           </p:cNvPr>
@@ -36673,7 +39122,7 @@
           <p:cNvPr id="6" name="">
             <a:extLst xmlns:a="http://schemas.openxmlformats.org/drawingml/2006/main">
               <a:ext uri="{FF2B5EF4-FFF2-40B4-BE49-F238E27FC236}">
-                <a16:creationId xmlns:a16="http://schemas.microsoft.com/office/drawing/2014/main" id="{A8B85667-9A31-4017-A3CC-63EBCDDC421F}"/>
+                <a16:creationId xmlns:a16="http://schemas.microsoft.com/office/drawing/2014/main" id="{34F74815-3D8B-4131-BA91-2A988529AE10}"/>
               </a:ext>
             </a:extLst>
           </p:cNvPr>
@@ -36742,7 +39191,7 @@
           <p:cNvPr id="7" name="">
             <a:extLst xmlns:a="http://schemas.openxmlformats.org/drawingml/2006/main">
               <a:ext uri="{FF2B5EF4-FFF2-40B4-BE49-F238E27FC236}">
-                <a16:creationId xmlns:a16="http://schemas.microsoft.com/office/drawing/2014/main" id="{62B85EBB-59FB-44CD-B23E-34F1794A6F9B}"/>
+                <a16:creationId xmlns:a16="http://schemas.microsoft.com/office/drawing/2014/main" id="{5ED213F1-345F-46E7-B129-0C8C8CC89859}"/>
               </a:ext>
             </a:extLst>
           </p:cNvPr>
@@ -36811,7 +39260,7 @@
           <p:cNvPr id="8" name="">
             <a:extLst xmlns:a="http://schemas.openxmlformats.org/drawingml/2006/main">
               <a:ext uri="{FF2B5EF4-FFF2-40B4-BE49-F238E27FC236}">
-                <a16:creationId xmlns:a16="http://schemas.microsoft.com/office/drawing/2014/main" id="{16A74E76-3254-4DAA-94FE-AEEA6ECE9B7F}"/>
+                <a16:creationId xmlns:a16="http://schemas.microsoft.com/office/drawing/2014/main" id="{33B7F03A-B694-47CF-BCEE-43D357F304DF}"/>
               </a:ext>
             </a:extLst>
           </p:cNvPr>
@@ -36880,7 +39329,7 @@
           <p:cNvPr id="9" name="">
             <a:extLst xmlns:a="http://schemas.openxmlformats.org/drawingml/2006/main">
               <a:ext uri="{FF2B5EF4-FFF2-40B4-BE49-F238E27FC236}">
-                <a16:creationId xmlns:a16="http://schemas.microsoft.com/office/drawing/2014/main" id="{682AE86F-5EF4-4EEA-8AE1-3F5C7B9E90C0}"/>
+                <a16:creationId xmlns:a16="http://schemas.microsoft.com/office/drawing/2014/main" id="{A63CB456-F69C-4AE2-B8A5-E63E4E4EBEC7}"/>
               </a:ext>
             </a:extLst>
           </p:cNvPr>
@@ -36949,7 +39398,7 @@
           <p:cNvPr id="10" name="">
             <a:extLst xmlns:a="http://schemas.openxmlformats.org/drawingml/2006/main">
               <a:ext uri="{FF2B5EF4-FFF2-40B4-BE49-F238E27FC236}">
-                <a16:creationId xmlns:a16="http://schemas.microsoft.com/office/drawing/2014/main" id="{5FE494BB-C84B-45C3-BE92-46C86603A121}"/>
+                <a16:creationId xmlns:a16="http://schemas.microsoft.com/office/drawing/2014/main" id="{FA8282FD-ADB4-401A-AC26-F5825437C0D6}"/>
               </a:ext>
             </a:extLst>
           </p:cNvPr>
@@ -36982,7 +39431,7 @@
           <p:cNvPr id="11" name="">
             <a:extLst xmlns:a="http://schemas.openxmlformats.org/drawingml/2006/main">
               <a:ext uri="{FF2B5EF4-FFF2-40B4-BE49-F238E27FC236}">
-                <a16:creationId xmlns:a16="http://schemas.microsoft.com/office/drawing/2014/main" id="{3B9FE0E0-E2E9-4207-AE54-B8EC4400536C}"/>
+                <a16:creationId xmlns:a16="http://schemas.microsoft.com/office/drawing/2014/main" id="{5A11DBDA-62A7-4A39-9F69-BAECB0B685D0}"/>
               </a:ext>
             </a:extLst>
           </p:cNvPr>
@@ -37013,7 +39462,7 @@
           <p:cNvPr id="12" name="">
             <a:extLst xmlns:a="http://schemas.openxmlformats.org/drawingml/2006/main">
               <a:ext uri="{FF2B5EF4-FFF2-40B4-BE49-F238E27FC236}">
-                <a16:creationId xmlns:a16="http://schemas.microsoft.com/office/drawing/2014/main" id="{0973BA01-B5EA-45F3-A0FF-9DC3C2BD6882}"/>
+                <a16:creationId xmlns:a16="http://schemas.microsoft.com/office/drawing/2014/main" id="{05D9F4E3-B8F6-4F84-8B75-06B361EAC8EC}"/>
               </a:ext>
             </a:extLst>
           </p:cNvPr>
@@ -37082,7 +39531,7 @@
           <p:cNvPr id="13" name="">
             <a:extLst xmlns:a="http://schemas.openxmlformats.org/drawingml/2006/main">
               <a:ext uri="{FF2B5EF4-FFF2-40B4-BE49-F238E27FC236}">
-                <a16:creationId xmlns:a16="http://schemas.microsoft.com/office/drawing/2014/main" id="{0B0A42CC-F1A4-4079-8D48-96E4152F7770}"/>
+                <a16:creationId xmlns:a16="http://schemas.microsoft.com/office/drawing/2014/main" id="{F6F09980-5C47-4E25-8B52-24BB8EA04383}"/>
               </a:ext>
             </a:extLst>
           </p:cNvPr>
@@ -37151,7 +39600,7 @@
           <p:cNvPr id="14" name="">
             <a:extLst xmlns:a="http://schemas.openxmlformats.org/drawingml/2006/main">
               <a:ext uri="{FF2B5EF4-FFF2-40B4-BE49-F238E27FC236}">
-                <a16:creationId xmlns:a16="http://schemas.microsoft.com/office/drawing/2014/main" id="{2C67EBEB-3ACA-4B33-8FCA-4008669BB4D9}"/>
+                <a16:creationId xmlns:a16="http://schemas.microsoft.com/office/drawing/2014/main" id="{4908403D-69EA-4CF3-9A95-8BF3E08E084A}"/>
               </a:ext>
             </a:extLst>
           </p:cNvPr>
@@ -37220,7 +39669,7 @@
           <p:cNvPr id="15" name="">
             <a:extLst xmlns:a="http://schemas.openxmlformats.org/drawingml/2006/main">
               <a:ext uri="{FF2B5EF4-FFF2-40B4-BE49-F238E27FC236}">
-                <a16:creationId xmlns:a16="http://schemas.microsoft.com/office/drawing/2014/main" id="{317596BA-C55C-48DB-9F2C-695BDB33468D}"/>
+                <a16:creationId xmlns:a16="http://schemas.microsoft.com/office/drawing/2014/main" id="{64113118-2234-4293-9374-DE373501C93E}"/>
               </a:ext>
             </a:extLst>
           </p:cNvPr>
@@ -37289,7 +39738,7 @@
           <p:cNvPr id="16" name="">
             <a:extLst xmlns:a="http://schemas.openxmlformats.org/drawingml/2006/main">
               <a:ext uri="{FF2B5EF4-FFF2-40B4-BE49-F238E27FC236}">
-                <a16:creationId xmlns:a16="http://schemas.microsoft.com/office/drawing/2014/main" id="{E4B1BC3A-26B6-4F8D-B269-66A55077CB69}"/>
+                <a16:creationId xmlns:a16="http://schemas.microsoft.com/office/drawing/2014/main" id="{4961A080-55F2-4CF6-B69A-507FB7244633}"/>
               </a:ext>
             </a:extLst>
           </p:cNvPr>
@@ -37322,7 +39771,7 @@
           <p:cNvPr id="17" name="">
             <a:extLst xmlns:a="http://schemas.openxmlformats.org/drawingml/2006/main">
               <a:ext uri="{FF2B5EF4-FFF2-40B4-BE49-F238E27FC236}">
-                <a16:creationId xmlns:a16="http://schemas.microsoft.com/office/drawing/2014/main" id="{5CC57D5C-675C-43DC-B32F-C881D12B70D8}"/>
+                <a16:creationId xmlns:a16="http://schemas.microsoft.com/office/drawing/2014/main" id="{C6814540-8ED4-4472-8D14-994C6E9F6255}"/>
               </a:ext>
             </a:extLst>
           </p:cNvPr>
@@ -37353,7 +39802,7 @@
           <p:cNvPr id="18" name="">
             <a:extLst xmlns:a="http://schemas.openxmlformats.org/drawingml/2006/main">
               <a:ext uri="{FF2B5EF4-FFF2-40B4-BE49-F238E27FC236}">
-                <a16:creationId xmlns:a16="http://schemas.microsoft.com/office/drawing/2014/main" id="{0FA74BC9-C96E-45C7-A1D7-E8520AC9218A}"/>
+                <a16:creationId xmlns:a16="http://schemas.microsoft.com/office/drawing/2014/main" id="{1173B8E6-F0B8-493F-8CEC-89638CCCCCE5}"/>
               </a:ext>
             </a:extLst>
           </p:cNvPr>
@@ -37422,7 +39871,7 @@
           <p:cNvPr id="19" name="">
             <a:extLst xmlns:a="http://schemas.openxmlformats.org/drawingml/2006/main">
               <a:ext uri="{FF2B5EF4-FFF2-40B4-BE49-F238E27FC236}">
-                <a16:creationId xmlns:a16="http://schemas.microsoft.com/office/drawing/2014/main" id="{B4AE7B3A-4045-4BE1-8488-B8F8B888D52B}"/>
+                <a16:creationId xmlns:a16="http://schemas.microsoft.com/office/drawing/2014/main" id="{2A11CABC-1D5B-4A03-837B-CD3820CA13CF}"/>
               </a:ext>
             </a:extLst>
           </p:cNvPr>
@@ -37491,7 +39940,7 @@
           <p:cNvPr id="20" name="">
             <a:extLst xmlns:a="http://schemas.openxmlformats.org/drawingml/2006/main">
               <a:ext uri="{FF2B5EF4-FFF2-40B4-BE49-F238E27FC236}">
-                <a16:creationId xmlns:a16="http://schemas.microsoft.com/office/drawing/2014/main" id="{E1AA0EA4-3E0B-4AE8-9235-2F28C9A0EF42}"/>
+                <a16:creationId xmlns:a16="http://schemas.microsoft.com/office/drawing/2014/main" id="{5970562F-1543-41B6-B0C5-536C9BFBAE50}"/>
               </a:ext>
             </a:extLst>
           </p:cNvPr>
@@ -37560,7 +40009,7 @@
           <p:cNvPr id="21" name="">
             <a:extLst xmlns:a="http://schemas.openxmlformats.org/drawingml/2006/main">
               <a:ext uri="{FF2B5EF4-FFF2-40B4-BE49-F238E27FC236}">
-                <a16:creationId xmlns:a16="http://schemas.microsoft.com/office/drawing/2014/main" id="{D3389764-9B70-4D87-8E8A-6E2FEBBE440A}"/>
+                <a16:creationId xmlns:a16="http://schemas.microsoft.com/office/drawing/2014/main" id="{CA3722D7-1D35-4B5E-A520-CA5564BABE12}"/>
               </a:ext>
             </a:extLst>
           </p:cNvPr>
@@ -37629,7 +40078,7 @@
           <p:cNvPr id="22" name="">
             <a:extLst xmlns:a="http://schemas.openxmlformats.org/drawingml/2006/main">
               <a:ext uri="{FF2B5EF4-FFF2-40B4-BE49-F238E27FC236}">
-                <a16:creationId xmlns:a16="http://schemas.microsoft.com/office/drawing/2014/main" id="{BB3B8ED0-862A-4CC2-A677-4FAF5DECAD4B}"/>
+                <a16:creationId xmlns:a16="http://schemas.microsoft.com/office/drawing/2014/main" id="{86131E59-3053-4424-968E-48882F441E02}"/>
               </a:ext>
             </a:extLst>
           </p:cNvPr>
@@ -37662,7 +40111,7 @@
           <p:cNvPr id="23" name="">
             <a:extLst xmlns:a="http://schemas.openxmlformats.org/drawingml/2006/main">
               <a:ext uri="{FF2B5EF4-FFF2-40B4-BE49-F238E27FC236}">
-                <a16:creationId xmlns:a16="http://schemas.microsoft.com/office/drawing/2014/main" id="{1689A0D1-54C3-486E-AB0C-424B62F1963F}"/>
+                <a16:creationId xmlns:a16="http://schemas.microsoft.com/office/drawing/2014/main" id="{020FB7F8-A9A5-45D2-80C0-8487E1FBB193}"/>
               </a:ext>
             </a:extLst>
           </p:cNvPr>
@@ -37693,7 +40142,7 @@
           <p:cNvPr id="24" name="">
             <a:extLst xmlns:a="http://schemas.openxmlformats.org/drawingml/2006/main">
               <a:ext uri="{FF2B5EF4-FFF2-40B4-BE49-F238E27FC236}">
-                <a16:creationId xmlns:a16="http://schemas.microsoft.com/office/drawing/2014/main" id="{953EEC14-3F1D-46F3-8B23-C4DC0F7B2EE7}"/>
+                <a16:creationId xmlns:a16="http://schemas.microsoft.com/office/drawing/2014/main" id="{87573C95-059D-4796-867E-5DB91236468D}"/>
               </a:ext>
             </a:extLst>
           </p:cNvPr>
@@ -37762,7 +40211,7 @@
           <p:cNvPr id="25" name="">
             <a:extLst xmlns:a="http://schemas.openxmlformats.org/drawingml/2006/main">
               <a:ext uri="{FF2B5EF4-FFF2-40B4-BE49-F238E27FC236}">
-                <a16:creationId xmlns:a16="http://schemas.microsoft.com/office/drawing/2014/main" id="{2D8307F6-61EE-4B1D-8BA1-956299E38456}"/>
+                <a16:creationId xmlns:a16="http://schemas.microsoft.com/office/drawing/2014/main" id="{F50E8B9D-2C2F-4C2C-96F3-8708B32AF992}"/>
               </a:ext>
             </a:extLst>
           </p:cNvPr>
@@ -37831,7 +40280,7 @@
           <p:cNvPr id="26" name="">
             <a:extLst xmlns:a="http://schemas.openxmlformats.org/drawingml/2006/main">
               <a:ext uri="{FF2B5EF4-FFF2-40B4-BE49-F238E27FC236}">
-                <a16:creationId xmlns:a16="http://schemas.microsoft.com/office/drawing/2014/main" id="{98EAC41C-1CEB-443C-AFB3-42D08B0DC2F7}"/>
+                <a16:creationId xmlns:a16="http://schemas.microsoft.com/office/drawing/2014/main" id="{29994831-C9DF-4875-B13F-7A49E3F6BC5D}"/>
               </a:ext>
             </a:extLst>
           </p:cNvPr>
@@ -37900,7 +40349,7 @@
           <p:cNvPr id="27" name="">
             <a:extLst xmlns:a="http://schemas.openxmlformats.org/drawingml/2006/main">
               <a:ext uri="{FF2B5EF4-FFF2-40B4-BE49-F238E27FC236}">
-                <a16:creationId xmlns:a16="http://schemas.microsoft.com/office/drawing/2014/main" id="{5370C260-105F-4CEE-BA84-B6701AA2378A}"/>
+                <a16:creationId xmlns:a16="http://schemas.microsoft.com/office/drawing/2014/main" id="{7636F732-5255-415A-A835-E53E9FD8459D}"/>
               </a:ext>
             </a:extLst>
           </p:cNvPr>
@@ -37969,7 +40418,7 @@
           <p:cNvPr id="28" name="">
             <a:extLst xmlns:a="http://schemas.openxmlformats.org/drawingml/2006/main">
               <a:ext uri="{FF2B5EF4-FFF2-40B4-BE49-F238E27FC236}">
-                <a16:creationId xmlns:a16="http://schemas.microsoft.com/office/drawing/2014/main" id="{C8A78F81-1864-4E05-82DF-A41C61F9984D}"/>
+                <a16:creationId xmlns:a16="http://schemas.microsoft.com/office/drawing/2014/main" id="{5D7FA4E7-89CF-4EA7-9928-D0CF397709CA}"/>
               </a:ext>
             </a:extLst>
           </p:cNvPr>
@@ -38002,7 +40451,7 @@
           <p:cNvPr id="29" name="">
             <a:extLst xmlns:a="http://schemas.openxmlformats.org/drawingml/2006/main">
               <a:ext uri="{FF2B5EF4-FFF2-40B4-BE49-F238E27FC236}">
-                <a16:creationId xmlns:a16="http://schemas.microsoft.com/office/drawing/2014/main" id="{8A38835F-633B-4760-AF23-49508931B79A}"/>
+                <a16:creationId xmlns:a16="http://schemas.microsoft.com/office/drawing/2014/main" id="{53F9E505-C743-428C-981A-40C6EA796C39}"/>
               </a:ext>
             </a:extLst>
           </p:cNvPr>
@@ -38033,7 +40482,7 @@
           <p:cNvPr id="30" name="">
             <a:extLst xmlns:a="http://schemas.openxmlformats.org/drawingml/2006/main">
               <a:ext uri="{FF2B5EF4-FFF2-40B4-BE49-F238E27FC236}">
-                <a16:creationId xmlns:a16="http://schemas.microsoft.com/office/drawing/2014/main" id="{8A3EBACE-7980-4C9E-B7FA-2415DD268052}"/>
+                <a16:creationId xmlns:a16="http://schemas.microsoft.com/office/drawing/2014/main" id="{2A24FD2D-BAC4-4072-B816-5C5C0ED2C0A3}"/>
               </a:ext>
             </a:extLst>
           </p:cNvPr>
@@ -38102,7 +40551,7 @@
           <p:cNvPr id="31" name="">
             <a:extLst xmlns:a="http://schemas.openxmlformats.org/drawingml/2006/main">
               <a:ext uri="{FF2B5EF4-FFF2-40B4-BE49-F238E27FC236}">
-                <a16:creationId xmlns:a16="http://schemas.microsoft.com/office/drawing/2014/main" id="{12336FDF-D9C9-48C0-8FC1-1BC71B1E2E29}"/>
+                <a16:creationId xmlns:a16="http://schemas.microsoft.com/office/drawing/2014/main" id="{25E171AD-DA43-4550-A2C9-A355C3494F28}"/>
               </a:ext>
             </a:extLst>
           </p:cNvPr>
@@ -38171,7 +40620,7 @@
           <p:cNvPr id="32" name="">
             <a:extLst xmlns:a="http://schemas.openxmlformats.org/drawingml/2006/main">
               <a:ext uri="{FF2B5EF4-FFF2-40B4-BE49-F238E27FC236}">
-                <a16:creationId xmlns:a16="http://schemas.microsoft.com/office/drawing/2014/main" id="{6F5D3A18-195F-4EF4-A5B8-BBD2D7D89DBB}"/>
+                <a16:creationId xmlns:a16="http://schemas.microsoft.com/office/drawing/2014/main" id="{19503D77-9C90-42D7-A8B7-75CD5B805FBB}"/>
               </a:ext>
             </a:extLst>
           </p:cNvPr>
@@ -38240,7 +40689,7 @@
           <p:cNvPr id="33" name="">
             <a:extLst xmlns:a="http://schemas.openxmlformats.org/drawingml/2006/main">
               <a:ext uri="{FF2B5EF4-FFF2-40B4-BE49-F238E27FC236}">
-                <a16:creationId xmlns:a16="http://schemas.microsoft.com/office/drawing/2014/main" id="{AAAE3873-4EBF-40E6-A553-840F12652061}"/>
+                <a16:creationId xmlns:a16="http://schemas.microsoft.com/office/drawing/2014/main" id="{86E32B1C-F2C1-4FB9-82D6-8B5025C2DAAD}"/>
               </a:ext>
             </a:extLst>
           </p:cNvPr>
@@ -38307,7 +40756,7 @@
     </p:spTree>
     <p:extLst>
       <p:ext uri="{BB962C8B-B14F-4D97-AF65-F5344CB8AC3E}">
-        <p14:creationId xmlns:p14="http://schemas.microsoft.com/office/powerpoint/2010/main" val="970215875"/>
+        <p14:creationId xmlns:p14="http://schemas.microsoft.com/office/powerpoint/2010/main" val="844228195"/>
       </p:ext>
     </p:extLst>
   </p:cSld>
@@ -38338,7 +40787,7 @@
           <p:cNvPr id="28" name="">
             <a:extLst xmlns:a="http://schemas.openxmlformats.org/drawingml/2006/main">
               <a:ext uri="{FF2B5EF4-FFF2-40B4-BE49-F238E27FC236}">
-                <a16:creationId xmlns:a16="http://schemas.microsoft.com/office/drawing/2014/main" id="{3D4BD051-6CA3-4FB8-A457-B24F66244B5C}"/>
+                <a16:creationId xmlns:a16="http://schemas.microsoft.com/office/drawing/2014/main" id="{CB275288-DEFB-45DC-B431-485C63BAFDAB}"/>
               </a:ext>
             </a:extLst>
           </p:cNvPr>
@@ -38369,7 +40818,7 @@
           <p:cNvPr id="2" name="">
             <a:extLst xmlns:a="http://schemas.openxmlformats.org/drawingml/2006/main">
               <a:ext uri="{FF2B5EF4-FFF2-40B4-BE49-F238E27FC236}">
-                <a16:creationId xmlns:a16="http://schemas.microsoft.com/office/drawing/2014/main" id="{0116F1E0-99BC-491F-84E1-63DAD81309CB}"/>
+                <a16:creationId xmlns:a16="http://schemas.microsoft.com/office/drawing/2014/main" id="{13FF378C-48FD-41A8-92A2-222F8D8CABFD}"/>
               </a:ext>
             </a:extLst>
           </p:cNvPr>
@@ -38438,7 +40887,7 @@
           <p:cNvPr id="3" name="">
             <a:extLst xmlns:a="http://schemas.openxmlformats.org/drawingml/2006/main">
               <a:ext uri="{FF2B5EF4-FFF2-40B4-BE49-F238E27FC236}">
-                <a16:creationId xmlns:a16="http://schemas.microsoft.com/office/drawing/2014/main" id="{5F282131-777B-4479-B155-378CF1A8DA14}"/>
+                <a16:creationId xmlns:a16="http://schemas.microsoft.com/office/drawing/2014/main" id="{74189515-D114-4867-9039-7F38DCDF9FA2}"/>
               </a:ext>
             </a:extLst>
           </p:cNvPr>
@@ -38507,7 +40956,7 @@
           <p:cNvPr id="4" name="">
             <a:extLst xmlns:a="http://schemas.openxmlformats.org/drawingml/2006/main">
               <a:ext uri="{FF2B5EF4-FFF2-40B4-BE49-F238E27FC236}">
-                <a16:creationId xmlns:a16="http://schemas.microsoft.com/office/drawing/2014/main" id="{5339FB34-9673-4686-A96B-0F21255474F9}"/>
+                <a16:creationId xmlns:a16="http://schemas.microsoft.com/office/drawing/2014/main" id="{B38F1CFB-0064-4B36-8071-E46CC48AD8A3}"/>
               </a:ext>
             </a:extLst>
           </p:cNvPr>
@@ -38538,7 +40987,7 @@
           <p:cNvPr id="5" name="">
             <a:extLst xmlns:a="http://schemas.openxmlformats.org/drawingml/2006/main">
               <a:ext uri="{FF2B5EF4-FFF2-40B4-BE49-F238E27FC236}">
-                <a16:creationId xmlns:a16="http://schemas.microsoft.com/office/drawing/2014/main" id="{D7D4BCD9-A656-41EC-9A6F-3FF6B8EF6CF1}"/>
+                <a16:creationId xmlns:a16="http://schemas.microsoft.com/office/drawing/2014/main" id="{9807D18B-19BE-4243-9E9D-0B275402CD12}"/>
               </a:ext>
             </a:extLst>
           </p:cNvPr>
@@ -38607,7 +41056,7 @@
           <p:cNvPr id="6" name="">
             <a:extLst xmlns:a="http://schemas.openxmlformats.org/drawingml/2006/main">
               <a:ext uri="{FF2B5EF4-FFF2-40B4-BE49-F238E27FC236}">
-                <a16:creationId xmlns:a16="http://schemas.microsoft.com/office/drawing/2014/main" id="{76632869-FA22-4A5D-8C1B-5C9178D87870}"/>
+                <a16:creationId xmlns:a16="http://schemas.microsoft.com/office/drawing/2014/main" id="{32769609-783D-414D-9E06-766D8B3147BA}"/>
               </a:ext>
             </a:extLst>
           </p:cNvPr>
@@ -38676,7 +41125,7 @@
           <p:cNvPr id="7" name="">
             <a:extLst xmlns:a="http://schemas.openxmlformats.org/drawingml/2006/main">
               <a:ext uri="{FF2B5EF4-FFF2-40B4-BE49-F238E27FC236}">
-                <a16:creationId xmlns:a16="http://schemas.microsoft.com/office/drawing/2014/main" id="{D807B5E3-FE3B-46C1-B80C-C05817259DBB}"/>
+                <a16:creationId xmlns:a16="http://schemas.microsoft.com/office/drawing/2014/main" id="{7C149A86-1EFF-45C0-84A7-9CCDF0EDA437}"/>
               </a:ext>
             </a:extLst>
           </p:cNvPr>
@@ -38707,7 +41156,7 @@
           <p:cNvPr id="8" name="">
             <a:extLst xmlns:a="http://schemas.openxmlformats.org/drawingml/2006/main">
               <a:ext uri="{FF2B5EF4-FFF2-40B4-BE49-F238E27FC236}">
-                <a16:creationId xmlns:a16="http://schemas.microsoft.com/office/drawing/2014/main" id="{F11B595B-9CFD-4C9A-9FE4-0569252F3726}"/>
+                <a16:creationId xmlns:a16="http://schemas.microsoft.com/office/drawing/2014/main" id="{30F2CCB0-3B71-4BD3-8CD3-17366E46A1E4}"/>
               </a:ext>
             </a:extLst>
           </p:cNvPr>
@@ -38776,7 +41225,7 @@
           <p:cNvPr id="9" name="">
             <a:extLst xmlns:a="http://schemas.openxmlformats.org/drawingml/2006/main">
               <a:ext uri="{FF2B5EF4-FFF2-40B4-BE49-F238E27FC236}">
-                <a16:creationId xmlns:a16="http://schemas.microsoft.com/office/drawing/2014/main" id="{8FDB5554-2D6A-4D44-86A1-34607B0B9151}"/>
+                <a16:creationId xmlns:a16="http://schemas.microsoft.com/office/drawing/2014/main" id="{7CF4A274-69CF-4197-828B-D20C670836AB}"/>
               </a:ext>
             </a:extLst>
           </p:cNvPr>
@@ -38809,7 +41258,7 @@
           <p:cNvPr id="10" name="">
             <a:extLst xmlns:a="http://schemas.openxmlformats.org/drawingml/2006/main">
               <a:ext uri="{FF2B5EF4-FFF2-40B4-BE49-F238E27FC236}">
-                <a16:creationId xmlns:a16="http://schemas.microsoft.com/office/drawing/2014/main" id="{42077BCA-6CF5-453F-9525-C6DC58BCF4DC}"/>
+                <a16:creationId xmlns:a16="http://schemas.microsoft.com/office/drawing/2014/main" id="{BC34D454-17E9-4036-9984-D4AE7D196852}"/>
               </a:ext>
             </a:extLst>
           </p:cNvPr>
@@ -38878,7 +41327,7 @@
           <p:cNvPr id="11" name="">
             <a:extLst xmlns:a="http://schemas.openxmlformats.org/drawingml/2006/main">
               <a:ext uri="{FF2B5EF4-FFF2-40B4-BE49-F238E27FC236}">
-                <a16:creationId xmlns:a16="http://schemas.microsoft.com/office/drawing/2014/main" id="{5F87B97B-F26F-4E2A-AFA0-9E5162C89CDE}"/>
+                <a16:creationId xmlns:a16="http://schemas.microsoft.com/office/drawing/2014/main" id="{D7B2B13F-FA6D-40A4-BF2C-827353E5BA09}"/>
               </a:ext>
             </a:extLst>
           </p:cNvPr>
@@ -38947,7 +41396,7 @@
           <p:cNvPr id="12" name="">
             <a:extLst xmlns:a="http://schemas.openxmlformats.org/drawingml/2006/main">
               <a:ext uri="{FF2B5EF4-FFF2-40B4-BE49-F238E27FC236}">
-                <a16:creationId xmlns:a16="http://schemas.microsoft.com/office/drawing/2014/main" id="{7F8B4A94-81BF-4D8A-9AAF-B7896BDA6F21}"/>
+                <a16:creationId xmlns:a16="http://schemas.microsoft.com/office/drawing/2014/main" id="{7F2CB20D-5E81-4E8E-BACF-47F82623DFE4}"/>
               </a:ext>
             </a:extLst>
           </p:cNvPr>
@@ -38978,7 +41427,7 @@
           <p:cNvPr id="13" name="">
             <a:extLst xmlns:a="http://schemas.openxmlformats.org/drawingml/2006/main">
               <a:ext uri="{FF2B5EF4-FFF2-40B4-BE49-F238E27FC236}">
-                <a16:creationId xmlns:a16="http://schemas.microsoft.com/office/drawing/2014/main" id="{C8686A4E-30C4-42D4-A0CC-7E07DEBC60D9}"/>
+                <a16:creationId xmlns:a16="http://schemas.microsoft.com/office/drawing/2014/main" id="{CCBE8020-11E8-41F0-B1D7-8CED2AE91DE1}"/>
               </a:ext>
             </a:extLst>
           </p:cNvPr>
@@ -39047,7 +41496,7 @@
           <p:cNvPr id="14" name="">
             <a:extLst xmlns:a="http://schemas.openxmlformats.org/drawingml/2006/main">
               <a:ext uri="{FF2B5EF4-FFF2-40B4-BE49-F238E27FC236}">
-                <a16:creationId xmlns:a16="http://schemas.microsoft.com/office/drawing/2014/main" id="{FEF043E8-CFC1-4AE8-B4A8-BEE3B0E81377}"/>
+                <a16:creationId xmlns:a16="http://schemas.microsoft.com/office/drawing/2014/main" id="{73EA41A6-6C07-40AE-B081-D4EE44991EB8}"/>
               </a:ext>
             </a:extLst>
           </p:cNvPr>
@@ -39080,7 +41529,7 @@
           <p:cNvPr id="15" name="">
             <a:extLst xmlns:a="http://schemas.openxmlformats.org/drawingml/2006/main">
               <a:ext uri="{FF2B5EF4-FFF2-40B4-BE49-F238E27FC236}">
-                <a16:creationId xmlns:a16="http://schemas.microsoft.com/office/drawing/2014/main" id="{B7FF8D34-1C0F-4042-B814-444E06A3B4E5}"/>
+                <a16:creationId xmlns:a16="http://schemas.microsoft.com/office/drawing/2014/main" id="{4A4F8CDC-EECD-4965-AB50-0845B1F46C0B}"/>
               </a:ext>
             </a:extLst>
           </p:cNvPr>
@@ -39149,7 +41598,7 @@
           <p:cNvPr id="16" name="">
             <a:extLst xmlns:a="http://schemas.openxmlformats.org/drawingml/2006/main">
               <a:ext uri="{FF2B5EF4-FFF2-40B4-BE49-F238E27FC236}">
-                <a16:creationId xmlns:a16="http://schemas.microsoft.com/office/drawing/2014/main" id="{7A40004F-3FB4-4357-9DC9-E90EF7874C89}"/>
+                <a16:creationId xmlns:a16="http://schemas.microsoft.com/office/drawing/2014/main" id="{23DDE3AD-204D-4E4B-BD3A-A0251E6E2962}"/>
               </a:ext>
             </a:extLst>
           </p:cNvPr>
@@ -39218,7 +41667,7 @@
           <p:cNvPr id="17" name="">
             <a:extLst xmlns:a="http://schemas.openxmlformats.org/drawingml/2006/main">
               <a:ext uri="{FF2B5EF4-FFF2-40B4-BE49-F238E27FC236}">
-                <a16:creationId xmlns:a16="http://schemas.microsoft.com/office/drawing/2014/main" id="{83F5E243-18B8-415E-A94C-270963AEAB55}"/>
+                <a16:creationId xmlns:a16="http://schemas.microsoft.com/office/drawing/2014/main" id="{AF16D239-029C-4960-B57A-8E41B629598E}"/>
               </a:ext>
             </a:extLst>
           </p:cNvPr>
@@ -39249,7 +41698,7 @@
           <p:cNvPr id="18" name="">
             <a:extLst xmlns:a="http://schemas.openxmlformats.org/drawingml/2006/main">
               <a:ext uri="{FF2B5EF4-FFF2-40B4-BE49-F238E27FC236}">
-                <a16:creationId xmlns:a16="http://schemas.microsoft.com/office/drawing/2014/main" id="{8004CAB6-F137-4FC6-AFA6-E0828D0EED1A}"/>
+                <a16:creationId xmlns:a16="http://schemas.microsoft.com/office/drawing/2014/main" id="{1485C7E0-78C1-42A3-8E22-1301CBD07FBF}"/>
               </a:ext>
             </a:extLst>
           </p:cNvPr>
@@ -39318,7 +41767,7 @@
           <p:cNvPr id="19" name="">
             <a:extLst xmlns:a="http://schemas.openxmlformats.org/drawingml/2006/main">
               <a:ext uri="{FF2B5EF4-FFF2-40B4-BE49-F238E27FC236}">
-                <a16:creationId xmlns:a16="http://schemas.microsoft.com/office/drawing/2014/main" id="{B43AAD79-98B8-49B6-AEA4-226408455360}"/>
+                <a16:creationId xmlns:a16="http://schemas.microsoft.com/office/drawing/2014/main" id="{2AC4310C-5113-4EC8-A971-2C758C3F3DDF}"/>
               </a:ext>
             </a:extLst>
           </p:cNvPr>
@@ -39351,7 +41800,7 @@
           <p:cNvPr id="20" name="">
             <a:extLst xmlns:a="http://schemas.openxmlformats.org/drawingml/2006/main">
               <a:ext uri="{FF2B5EF4-FFF2-40B4-BE49-F238E27FC236}">
-                <a16:creationId xmlns:a16="http://schemas.microsoft.com/office/drawing/2014/main" id="{337D1603-D1A7-4E71-9EAA-02641C127F48}"/>
+                <a16:creationId xmlns:a16="http://schemas.microsoft.com/office/drawing/2014/main" id="{4967038A-317C-4B5F-B206-20789F5F4788}"/>
               </a:ext>
             </a:extLst>
           </p:cNvPr>
@@ -39420,7 +41869,7 @@
           <p:cNvPr id="21" name="">
             <a:extLst xmlns:a="http://schemas.openxmlformats.org/drawingml/2006/main">
               <a:ext uri="{FF2B5EF4-FFF2-40B4-BE49-F238E27FC236}">
-                <a16:creationId xmlns:a16="http://schemas.microsoft.com/office/drawing/2014/main" id="{798B1714-4A2E-49A0-BABA-A0CCE9F1FC2A}"/>
+                <a16:creationId xmlns:a16="http://schemas.microsoft.com/office/drawing/2014/main" id="{FAF3A7F2-6817-4259-A406-7E0A13DE2BF1}"/>
               </a:ext>
             </a:extLst>
           </p:cNvPr>
@@ -39489,7 +41938,7 @@
           <p:cNvPr id="22" name="">
             <a:extLst xmlns:a="http://schemas.openxmlformats.org/drawingml/2006/main">
               <a:ext uri="{FF2B5EF4-FFF2-40B4-BE49-F238E27FC236}">
-                <a16:creationId xmlns:a16="http://schemas.microsoft.com/office/drawing/2014/main" id="{B5D8AAB6-F9C6-418B-B263-30C28CE4E97D}"/>
+                <a16:creationId xmlns:a16="http://schemas.microsoft.com/office/drawing/2014/main" id="{545CF7F6-E22D-4061-9C3F-1FFA3C8BB36B}"/>
               </a:ext>
             </a:extLst>
           </p:cNvPr>
@@ -39520,7 +41969,7 @@
           <p:cNvPr id="23" name="">
             <a:extLst xmlns:a="http://schemas.openxmlformats.org/drawingml/2006/main">
               <a:ext uri="{FF2B5EF4-FFF2-40B4-BE49-F238E27FC236}">
-                <a16:creationId xmlns:a16="http://schemas.microsoft.com/office/drawing/2014/main" id="{2B0A02A2-719A-40C0-8A57-968021DB0B2B}"/>
+                <a16:creationId xmlns:a16="http://schemas.microsoft.com/office/drawing/2014/main" id="{6F0560D0-9BA6-4970-B166-59FE7BC0E543}"/>
               </a:ext>
             </a:extLst>
           </p:cNvPr>
@@ -39589,7 +42038,7 @@
           <p:cNvPr id="24" name="">
             <a:extLst xmlns:a="http://schemas.openxmlformats.org/drawingml/2006/main">
               <a:ext uri="{FF2B5EF4-FFF2-40B4-BE49-F238E27FC236}">
-                <a16:creationId xmlns:a16="http://schemas.microsoft.com/office/drawing/2014/main" id="{0A956AE8-065D-467A-9B0D-60CB1F7EECA1}"/>
+                <a16:creationId xmlns:a16="http://schemas.microsoft.com/office/drawing/2014/main" id="{B9B0C9CE-6D59-4D5D-8D33-1660D2BCF351}"/>
               </a:ext>
             </a:extLst>
           </p:cNvPr>
@@ -39622,7 +42071,7 @@
           <p:cNvPr id="25" name="">
             <a:extLst xmlns:a="http://schemas.openxmlformats.org/drawingml/2006/main">
               <a:ext uri="{FF2B5EF4-FFF2-40B4-BE49-F238E27FC236}">
-                <a16:creationId xmlns:a16="http://schemas.microsoft.com/office/drawing/2014/main" id="{1EF55DDD-2E5D-47B7-AB40-F6E60147EDEB}"/>
+                <a16:creationId xmlns:a16="http://schemas.microsoft.com/office/drawing/2014/main" id="{EB62339E-38C6-4A58-8A69-E724A2852593}"/>
               </a:ext>
             </a:extLst>
           </p:cNvPr>
@@ -39691,7 +42140,7 @@
           <p:cNvPr id="26" name="">
             <a:extLst xmlns:a="http://schemas.openxmlformats.org/drawingml/2006/main">
               <a:ext uri="{FF2B5EF4-FFF2-40B4-BE49-F238E27FC236}">
-                <a16:creationId xmlns:a16="http://schemas.microsoft.com/office/drawing/2014/main" id="{7C91CAAE-36F3-4018-BB28-94B5BA697F08}"/>
+                <a16:creationId xmlns:a16="http://schemas.microsoft.com/office/drawing/2014/main" id="{210DEC27-1A52-4761-93CF-D967F2B48241}"/>
               </a:ext>
             </a:extLst>
           </p:cNvPr>
@@ -39760,7 +42209,7 @@
           <p:cNvPr id="27" name="">
             <a:extLst xmlns:a="http://schemas.openxmlformats.org/drawingml/2006/main">
               <a:ext uri="{FF2B5EF4-FFF2-40B4-BE49-F238E27FC236}">
-                <a16:creationId xmlns:a16="http://schemas.microsoft.com/office/drawing/2014/main" id="{089FDD82-D743-441D-9812-7BAEBFE3279C}"/>
+                <a16:creationId xmlns:a16="http://schemas.microsoft.com/office/drawing/2014/main" id="{4390724A-F813-4BE6-9DF3-7F755F4B2ECD}"/>
               </a:ext>
             </a:extLst>
           </p:cNvPr>
@@ -39827,7 +42276,7 @@
     </p:spTree>
     <p:extLst>
       <p:ext uri="{BB962C8B-B14F-4D97-AF65-F5344CB8AC3E}">
-        <p14:creationId xmlns:p14="http://schemas.microsoft.com/office/powerpoint/2010/main" val="1011874277"/>
+        <p14:creationId xmlns:p14="http://schemas.microsoft.com/office/powerpoint/2010/main" val="912245905"/>
       </p:ext>
     </p:extLst>
   </p:cSld>
@@ -39858,7 +42307,7 @@
           <p:cNvPr id="36" name="">
             <a:extLst xmlns:a="http://schemas.openxmlformats.org/drawingml/2006/main">
               <a:ext uri="{FF2B5EF4-FFF2-40B4-BE49-F238E27FC236}">
-                <a16:creationId xmlns:a16="http://schemas.microsoft.com/office/drawing/2014/main" id="{393A56DB-9068-4DBE-9F30-41E235696EEF}"/>
+                <a16:creationId xmlns:a16="http://schemas.microsoft.com/office/drawing/2014/main" id="{F07417DC-B73D-4727-8958-037A61C6EAD7}"/>
               </a:ext>
             </a:extLst>
           </p:cNvPr>
@@ -39889,7 +42338,7 @@
           <p:cNvPr id="2" name="">
             <a:extLst xmlns:a="http://schemas.openxmlformats.org/drawingml/2006/main">
               <a:ext uri="{FF2B5EF4-FFF2-40B4-BE49-F238E27FC236}">
-                <a16:creationId xmlns:a16="http://schemas.microsoft.com/office/drawing/2014/main" id="{4F2D7D7D-9FEB-4A63-ADC7-E40EE5BEA85E}"/>
+                <a16:creationId xmlns:a16="http://schemas.microsoft.com/office/drawing/2014/main" id="{34CD2EF0-6E80-4873-9F27-E41991C6278E}"/>
               </a:ext>
             </a:extLst>
           </p:cNvPr>
@@ -39958,7 +42407,7 @@
           <p:cNvPr id="3" name="">
             <a:extLst xmlns:a="http://schemas.openxmlformats.org/drawingml/2006/main">
               <a:ext uri="{FF2B5EF4-FFF2-40B4-BE49-F238E27FC236}">
-                <a16:creationId xmlns:a16="http://schemas.microsoft.com/office/drawing/2014/main" id="{36AEDDAC-5516-4756-8B1F-8F9157F82FBE}"/>
+                <a16:creationId xmlns:a16="http://schemas.microsoft.com/office/drawing/2014/main" id="{7CC8B751-4796-421B-9077-8A720BA6F43E}"/>
               </a:ext>
             </a:extLst>
           </p:cNvPr>
@@ -40027,7 +42476,7 @@
           <p:cNvPr id="4" name="">
             <a:extLst xmlns:a="http://schemas.openxmlformats.org/drawingml/2006/main">
               <a:ext uri="{FF2B5EF4-FFF2-40B4-BE49-F238E27FC236}">
-                <a16:creationId xmlns:a16="http://schemas.microsoft.com/office/drawing/2014/main" id="{CD9FA8D8-8ACA-43E5-BFCF-14B868BD1B97}"/>
+                <a16:creationId xmlns:a16="http://schemas.microsoft.com/office/drawing/2014/main" id="{046E8CDC-8676-4221-81B3-11946B9945A0}"/>
               </a:ext>
             </a:extLst>
           </p:cNvPr>
@@ -40058,7 +42507,7 @@
           <p:cNvPr id="5" name="">
             <a:extLst xmlns:a="http://schemas.openxmlformats.org/drawingml/2006/main">
               <a:ext uri="{FF2B5EF4-FFF2-40B4-BE49-F238E27FC236}">
-                <a16:creationId xmlns:a16="http://schemas.microsoft.com/office/drawing/2014/main" id="{0620DC85-5191-4A63-9EF3-01589E9C9533}"/>
+                <a16:creationId xmlns:a16="http://schemas.microsoft.com/office/drawing/2014/main" id="{1596C92A-A1D0-46B8-98E6-B2BA22C78136}"/>
               </a:ext>
             </a:extLst>
           </p:cNvPr>
@@ -40127,7 +42576,7 @@
           <p:cNvPr id="6" name="">
             <a:extLst xmlns:a="http://schemas.openxmlformats.org/drawingml/2006/main">
               <a:ext uri="{FF2B5EF4-FFF2-40B4-BE49-F238E27FC236}">
-                <a16:creationId xmlns:a16="http://schemas.microsoft.com/office/drawing/2014/main" id="{C9D1A531-2279-4F41-9595-4873736924DF}"/>
+                <a16:creationId xmlns:a16="http://schemas.microsoft.com/office/drawing/2014/main" id="{D00D6BDF-327E-47C4-BA6D-95D8BAF165C0}"/>
               </a:ext>
             </a:extLst>
           </p:cNvPr>
@@ -40196,7 +42645,7 @@
           <p:cNvPr id="7" name="">
             <a:extLst xmlns:a="http://schemas.openxmlformats.org/drawingml/2006/main">
               <a:ext uri="{FF2B5EF4-FFF2-40B4-BE49-F238E27FC236}">
-                <a16:creationId xmlns:a16="http://schemas.microsoft.com/office/drawing/2014/main" id="{35EB8575-C577-4D3D-BCF0-C46335258F85}"/>
+                <a16:creationId xmlns:a16="http://schemas.microsoft.com/office/drawing/2014/main" id="{B3306CD5-3A3A-4184-8A49-5ECB03F6A90A}"/>
               </a:ext>
             </a:extLst>
           </p:cNvPr>
@@ -40265,7 +42714,7 @@
           <p:cNvPr id="8" name="">
             <a:extLst xmlns:a="http://schemas.openxmlformats.org/drawingml/2006/main">
               <a:ext uri="{FF2B5EF4-FFF2-40B4-BE49-F238E27FC236}">
-                <a16:creationId xmlns:a16="http://schemas.microsoft.com/office/drawing/2014/main" id="{F70E1F48-8F2B-4AE0-8696-0793C8579C98}"/>
+                <a16:creationId xmlns:a16="http://schemas.microsoft.com/office/drawing/2014/main" id="{804F4877-FBE2-4B67-8DDA-9938E77009F5}"/>
               </a:ext>
             </a:extLst>
           </p:cNvPr>
@@ -40334,7 +42783,7 @@
           <p:cNvPr id="9" name="">
             <a:extLst xmlns:a="http://schemas.openxmlformats.org/drawingml/2006/main">
               <a:ext uri="{FF2B5EF4-FFF2-40B4-BE49-F238E27FC236}">
-                <a16:creationId xmlns:a16="http://schemas.microsoft.com/office/drawing/2014/main" id="{FD286E9B-FABC-4169-82E0-0EE7A9F96072}"/>
+                <a16:creationId xmlns:a16="http://schemas.microsoft.com/office/drawing/2014/main" id="{B2E2116D-B277-435A-9D45-6AEA041A2414}"/>
               </a:ext>
             </a:extLst>
           </p:cNvPr>
@@ -40403,7 +42852,7 @@
           <p:cNvPr id="10" name="">
             <a:extLst xmlns:a="http://schemas.openxmlformats.org/drawingml/2006/main">
               <a:ext uri="{FF2B5EF4-FFF2-40B4-BE49-F238E27FC236}">
-                <a16:creationId xmlns:a16="http://schemas.microsoft.com/office/drawing/2014/main" id="{89A334EC-3576-48A7-A075-52854D822587}"/>
+                <a16:creationId xmlns:a16="http://schemas.microsoft.com/office/drawing/2014/main" id="{85C13670-7C47-4EA9-9DB0-5743FD489888}"/>
               </a:ext>
             </a:extLst>
           </p:cNvPr>
@@ -40472,7 +42921,7 @@
           <p:cNvPr id="11" name="">
             <a:extLst xmlns:a="http://schemas.openxmlformats.org/drawingml/2006/main">
               <a:ext uri="{FF2B5EF4-FFF2-40B4-BE49-F238E27FC236}">
-                <a16:creationId xmlns:a16="http://schemas.microsoft.com/office/drawing/2014/main" id="{636CC66E-ACC4-4B45-8E71-E278A9B6AE47}"/>
+                <a16:creationId xmlns:a16="http://schemas.microsoft.com/office/drawing/2014/main" id="{56799274-61E3-49A2-BA4E-3B867DD5B05A}"/>
               </a:ext>
             </a:extLst>
           </p:cNvPr>
@@ -40505,7 +42954,7 @@
           <p:cNvPr id="12" name="">
             <a:extLst xmlns:a="http://schemas.openxmlformats.org/drawingml/2006/main">
               <a:ext uri="{FF2B5EF4-FFF2-40B4-BE49-F238E27FC236}">
-                <a16:creationId xmlns:a16="http://schemas.microsoft.com/office/drawing/2014/main" id="{7591D4B1-50C8-4797-A025-8B701C849E59}"/>
+                <a16:creationId xmlns:a16="http://schemas.microsoft.com/office/drawing/2014/main" id="{F12F4841-BAA4-4426-BE49-16C31B812394}"/>
               </a:ext>
             </a:extLst>
           </p:cNvPr>
@@ -40574,7 +43023,7 @@
           <p:cNvPr id="13" name="">
             <a:extLst xmlns:a="http://schemas.openxmlformats.org/drawingml/2006/main">
               <a:ext uri="{FF2B5EF4-FFF2-40B4-BE49-F238E27FC236}">
-                <a16:creationId xmlns:a16="http://schemas.microsoft.com/office/drawing/2014/main" id="{250D650F-D2C7-4221-A02B-ECB9D199F374}"/>
+                <a16:creationId xmlns:a16="http://schemas.microsoft.com/office/drawing/2014/main" id="{1FC9ACFA-A0F2-4FDC-A3D5-892ECFBF305F}"/>
               </a:ext>
             </a:extLst>
           </p:cNvPr>
@@ -40643,7 +43092,7 @@
           <p:cNvPr id="14" name="">
             <a:extLst xmlns:a="http://schemas.openxmlformats.org/drawingml/2006/main">
               <a:ext uri="{FF2B5EF4-FFF2-40B4-BE49-F238E27FC236}">
-                <a16:creationId xmlns:a16="http://schemas.microsoft.com/office/drawing/2014/main" id="{648D8E2F-18B4-4038-82E1-8983796BF3EB}"/>
+                <a16:creationId xmlns:a16="http://schemas.microsoft.com/office/drawing/2014/main" id="{0FF00FE9-E544-458F-A47C-4A93B52CECB7}"/>
               </a:ext>
             </a:extLst>
           </p:cNvPr>
@@ -40712,7 +43161,7 @@
           <p:cNvPr id="15" name="">
             <a:extLst xmlns:a="http://schemas.openxmlformats.org/drawingml/2006/main">
               <a:ext uri="{FF2B5EF4-FFF2-40B4-BE49-F238E27FC236}">
-                <a16:creationId xmlns:a16="http://schemas.microsoft.com/office/drawing/2014/main" id="{14B2D94F-1B7A-441B-B636-349C8FD4F8F6}"/>
+                <a16:creationId xmlns:a16="http://schemas.microsoft.com/office/drawing/2014/main" id="{A4504871-0B5B-4DA1-9124-6E3D049B4AE7}"/>
               </a:ext>
             </a:extLst>
           </p:cNvPr>
@@ -40745,7 +43194,7 @@
           <p:cNvPr id="16" name="">
             <a:extLst xmlns:a="http://schemas.openxmlformats.org/drawingml/2006/main">
               <a:ext uri="{FF2B5EF4-FFF2-40B4-BE49-F238E27FC236}">
-                <a16:creationId xmlns:a16="http://schemas.microsoft.com/office/drawing/2014/main" id="{495EF1A0-F9C4-4037-83B2-A9EAA7EC1BA2}"/>
+                <a16:creationId xmlns:a16="http://schemas.microsoft.com/office/drawing/2014/main" id="{04C26651-A0E4-4F99-8919-404DDC5B0F33}"/>
               </a:ext>
             </a:extLst>
           </p:cNvPr>
@@ -40814,7 +43263,7 @@
           <p:cNvPr id="17" name="">
             <a:extLst xmlns:a="http://schemas.openxmlformats.org/drawingml/2006/main">
               <a:ext uri="{FF2B5EF4-FFF2-40B4-BE49-F238E27FC236}">
-                <a16:creationId xmlns:a16="http://schemas.microsoft.com/office/drawing/2014/main" id="{E0B78424-2250-4A02-BFF5-4566A5664025}"/>
+                <a16:creationId xmlns:a16="http://schemas.microsoft.com/office/drawing/2014/main" id="{4FBB6493-B639-40A5-BBF3-7A775A37E97E}"/>
               </a:ext>
             </a:extLst>
           </p:cNvPr>
@@ -40883,7 +43332,7 @@
           <p:cNvPr id="18" name="">
             <a:extLst xmlns:a="http://schemas.openxmlformats.org/drawingml/2006/main">
               <a:ext uri="{FF2B5EF4-FFF2-40B4-BE49-F238E27FC236}">
-                <a16:creationId xmlns:a16="http://schemas.microsoft.com/office/drawing/2014/main" id="{019060F1-034F-4B40-B458-AE6C791B198D}"/>
+                <a16:creationId xmlns:a16="http://schemas.microsoft.com/office/drawing/2014/main" id="{7AA5027C-58D9-44D0-8091-3A1D086D0424}"/>
               </a:ext>
             </a:extLst>
           </p:cNvPr>
@@ -40952,7 +43401,7 @@
           <p:cNvPr id="19" name="">
             <a:extLst xmlns:a="http://schemas.openxmlformats.org/drawingml/2006/main">
               <a:ext uri="{FF2B5EF4-FFF2-40B4-BE49-F238E27FC236}">
-                <a16:creationId xmlns:a16="http://schemas.microsoft.com/office/drawing/2014/main" id="{0D3CF817-4FD1-4945-B245-966F801A66FB}"/>
+                <a16:creationId xmlns:a16="http://schemas.microsoft.com/office/drawing/2014/main" id="{FBF77B78-BD63-4AC8-9345-23407137123A}"/>
               </a:ext>
             </a:extLst>
           </p:cNvPr>
@@ -40985,7 +43434,7 @@
           <p:cNvPr id="20" name="">
             <a:extLst xmlns:a="http://schemas.openxmlformats.org/drawingml/2006/main">
               <a:ext uri="{FF2B5EF4-FFF2-40B4-BE49-F238E27FC236}">
-                <a16:creationId xmlns:a16="http://schemas.microsoft.com/office/drawing/2014/main" id="{27594944-BBE6-4E26-AE01-4C120E5AE0AD}"/>
+                <a16:creationId xmlns:a16="http://schemas.microsoft.com/office/drawing/2014/main" id="{0703C59C-34D3-4AE4-B004-76E64ABDCFA6}"/>
               </a:ext>
             </a:extLst>
           </p:cNvPr>
@@ -41054,7 +43503,7 @@
           <p:cNvPr id="21" name="">
             <a:extLst xmlns:a="http://schemas.openxmlformats.org/drawingml/2006/main">
               <a:ext uri="{FF2B5EF4-FFF2-40B4-BE49-F238E27FC236}">
-                <a16:creationId xmlns:a16="http://schemas.microsoft.com/office/drawing/2014/main" id="{D925EAB0-5401-48A7-A655-29682D0F7775}"/>
+                <a16:creationId xmlns:a16="http://schemas.microsoft.com/office/drawing/2014/main" id="{545D7707-6DCF-467A-AA22-F1B2A63F45A6}"/>
               </a:ext>
             </a:extLst>
           </p:cNvPr>
@@ -41123,7 +43572,7 @@
           <p:cNvPr id="22" name="">
             <a:extLst xmlns:a="http://schemas.openxmlformats.org/drawingml/2006/main">
               <a:ext uri="{FF2B5EF4-FFF2-40B4-BE49-F238E27FC236}">
-                <a16:creationId xmlns:a16="http://schemas.microsoft.com/office/drawing/2014/main" id="{1153F156-F6B3-44BE-B3B7-1BD12276EFAD}"/>
+                <a16:creationId xmlns:a16="http://schemas.microsoft.com/office/drawing/2014/main" id="{994FF7AA-C279-4C1F-9D0A-F06B15E880E2}"/>
               </a:ext>
             </a:extLst>
           </p:cNvPr>
@@ -41192,7 +43641,7 @@
           <p:cNvPr id="23" name="">
             <a:extLst xmlns:a="http://schemas.openxmlformats.org/drawingml/2006/main">
               <a:ext uri="{FF2B5EF4-FFF2-40B4-BE49-F238E27FC236}">
-                <a16:creationId xmlns:a16="http://schemas.microsoft.com/office/drawing/2014/main" id="{523561F8-EEC8-4A30-BE6F-A111EEB80B56}"/>
+                <a16:creationId xmlns:a16="http://schemas.microsoft.com/office/drawing/2014/main" id="{68B0B6FD-F94B-44A5-B850-2264E3B43236}"/>
               </a:ext>
             </a:extLst>
           </p:cNvPr>
@@ -41225,7 +43674,7 @@
           <p:cNvPr id="24" name="">
             <a:extLst xmlns:a="http://schemas.openxmlformats.org/drawingml/2006/main">
               <a:ext uri="{FF2B5EF4-FFF2-40B4-BE49-F238E27FC236}">
-                <a16:creationId xmlns:a16="http://schemas.microsoft.com/office/drawing/2014/main" id="{87BA4BB8-A5B5-42FC-B516-90F0AB0840FF}"/>
+                <a16:creationId xmlns:a16="http://schemas.microsoft.com/office/drawing/2014/main" id="{0D077F96-1B58-4717-9CB1-C773E23E8B88}"/>
               </a:ext>
             </a:extLst>
           </p:cNvPr>
@@ -41294,7 +43743,7 @@
           <p:cNvPr id="25" name="">
             <a:extLst xmlns:a="http://schemas.openxmlformats.org/drawingml/2006/main">
               <a:ext uri="{FF2B5EF4-FFF2-40B4-BE49-F238E27FC236}">
-                <a16:creationId xmlns:a16="http://schemas.microsoft.com/office/drawing/2014/main" id="{0263D0CD-E2B9-4096-B2B4-4FA0FAE56985}"/>
+                <a16:creationId xmlns:a16="http://schemas.microsoft.com/office/drawing/2014/main" id="{1BB9DF38-383C-4E27-933F-F7CCA5F8ACF1}"/>
               </a:ext>
             </a:extLst>
           </p:cNvPr>
@@ -41363,7 +43812,7 @@
           <p:cNvPr id="26" name="">
             <a:extLst xmlns:a="http://schemas.openxmlformats.org/drawingml/2006/main">
               <a:ext uri="{FF2B5EF4-FFF2-40B4-BE49-F238E27FC236}">
-                <a16:creationId xmlns:a16="http://schemas.microsoft.com/office/drawing/2014/main" id="{ED1C8499-048E-4FC5-AC90-CD7F745AFB58}"/>
+                <a16:creationId xmlns:a16="http://schemas.microsoft.com/office/drawing/2014/main" id="{C6681A75-AFA5-4735-8B56-432945DFE023}"/>
               </a:ext>
             </a:extLst>
           </p:cNvPr>
@@ -41432,7 +43881,7 @@
           <p:cNvPr id="27" name="">
             <a:extLst xmlns:a="http://schemas.openxmlformats.org/drawingml/2006/main">
               <a:ext uri="{FF2B5EF4-FFF2-40B4-BE49-F238E27FC236}">
-                <a16:creationId xmlns:a16="http://schemas.microsoft.com/office/drawing/2014/main" id="{8DE3C7F6-07D2-4CAC-8BC8-BD5B3AA848C6}"/>
+                <a16:creationId xmlns:a16="http://schemas.microsoft.com/office/drawing/2014/main" id="{6C1DE2E9-63C4-497C-BA22-A8AFF4F2F982}"/>
               </a:ext>
             </a:extLst>
           </p:cNvPr>
@@ -41465,7 +43914,7 @@
           <p:cNvPr id="28" name="">
             <a:extLst xmlns:a="http://schemas.openxmlformats.org/drawingml/2006/main">
               <a:ext uri="{FF2B5EF4-FFF2-40B4-BE49-F238E27FC236}">
-                <a16:creationId xmlns:a16="http://schemas.microsoft.com/office/drawing/2014/main" id="{7CF2B63E-8B45-432A-892F-711C5F9CA034}"/>
+                <a16:creationId xmlns:a16="http://schemas.microsoft.com/office/drawing/2014/main" id="{E0C223F3-3382-4ED7-BE04-3A51BCFCACC5}"/>
               </a:ext>
             </a:extLst>
           </p:cNvPr>
@@ -41534,7 +43983,7 @@
           <p:cNvPr id="29" name="">
             <a:extLst xmlns:a="http://schemas.openxmlformats.org/drawingml/2006/main">
               <a:ext uri="{FF2B5EF4-FFF2-40B4-BE49-F238E27FC236}">
-                <a16:creationId xmlns:a16="http://schemas.microsoft.com/office/drawing/2014/main" id="{C0A93AB7-6AC3-44A0-B773-C748871B930E}"/>
+                <a16:creationId xmlns:a16="http://schemas.microsoft.com/office/drawing/2014/main" id="{94560911-2EAF-4645-B9F8-7F952410B2E3}"/>
               </a:ext>
             </a:extLst>
           </p:cNvPr>
@@ -41603,7 +44052,7 @@
           <p:cNvPr id="30" name="">
             <a:extLst xmlns:a="http://schemas.openxmlformats.org/drawingml/2006/main">
               <a:ext uri="{FF2B5EF4-FFF2-40B4-BE49-F238E27FC236}">
-                <a16:creationId xmlns:a16="http://schemas.microsoft.com/office/drawing/2014/main" id="{E295BC64-AD3C-463B-8EEC-0DFAC432220F}"/>
+                <a16:creationId xmlns:a16="http://schemas.microsoft.com/office/drawing/2014/main" id="{E2A9270E-FEF9-47ED-8DA1-65470F2DAEC2}"/>
               </a:ext>
             </a:extLst>
           </p:cNvPr>
@@ -41672,7 +44121,7 @@
           <p:cNvPr id="31" name="">
             <a:extLst xmlns:a="http://schemas.openxmlformats.org/drawingml/2006/main">
               <a:ext uri="{FF2B5EF4-FFF2-40B4-BE49-F238E27FC236}">
-                <a16:creationId xmlns:a16="http://schemas.microsoft.com/office/drawing/2014/main" id="{FAB558F0-B1EC-478D-8E71-0C6B732172AB}"/>
+                <a16:creationId xmlns:a16="http://schemas.microsoft.com/office/drawing/2014/main" id="{2B982250-54B6-41E7-AF05-49A2FAAC896E}"/>
               </a:ext>
             </a:extLst>
           </p:cNvPr>
@@ -41705,7 +44154,7 @@
           <p:cNvPr id="32" name="">
             <a:extLst xmlns:a="http://schemas.openxmlformats.org/drawingml/2006/main">
               <a:ext uri="{FF2B5EF4-FFF2-40B4-BE49-F238E27FC236}">
-                <a16:creationId xmlns:a16="http://schemas.microsoft.com/office/drawing/2014/main" id="{21EA145E-43B4-4231-A7D3-93505EC3C894}"/>
+                <a16:creationId xmlns:a16="http://schemas.microsoft.com/office/drawing/2014/main" id="{787E17EE-FF91-4AAB-81E8-FD34566B1ACA}"/>
               </a:ext>
             </a:extLst>
           </p:cNvPr>
@@ -41774,7 +44223,7 @@
           <p:cNvPr id="33" name="">
             <a:extLst xmlns:a="http://schemas.openxmlformats.org/drawingml/2006/main">
               <a:ext uri="{FF2B5EF4-FFF2-40B4-BE49-F238E27FC236}">
-                <a16:creationId xmlns:a16="http://schemas.microsoft.com/office/drawing/2014/main" id="{D1FC9610-8756-46A9-AD4B-FE04BF42DCC1}"/>
+                <a16:creationId xmlns:a16="http://schemas.microsoft.com/office/drawing/2014/main" id="{E0D8434C-5ED4-48B9-A3CF-BF7213D02F32}"/>
               </a:ext>
             </a:extLst>
           </p:cNvPr>
@@ -41843,7 +44292,7 @@
           <p:cNvPr id="34" name="">
             <a:extLst xmlns:a="http://schemas.openxmlformats.org/drawingml/2006/main">
               <a:ext uri="{FF2B5EF4-FFF2-40B4-BE49-F238E27FC236}">
-                <a16:creationId xmlns:a16="http://schemas.microsoft.com/office/drawing/2014/main" id="{7A2303F1-AE05-4EA3-AD9C-85FD092BC291}"/>
+                <a16:creationId xmlns:a16="http://schemas.microsoft.com/office/drawing/2014/main" id="{6DC7819C-4D4D-491B-A92A-E631F7A0C772}"/>
               </a:ext>
             </a:extLst>
           </p:cNvPr>
@@ -41912,7 +44361,7 @@
           <p:cNvPr id="35" name="">
             <a:extLst xmlns:a="http://schemas.openxmlformats.org/drawingml/2006/main">
               <a:ext uri="{FF2B5EF4-FFF2-40B4-BE49-F238E27FC236}">
-                <a16:creationId xmlns:a16="http://schemas.microsoft.com/office/drawing/2014/main" id="{36D37850-9E23-45A0-975F-BBBF5C9022AF}"/>
+                <a16:creationId xmlns:a16="http://schemas.microsoft.com/office/drawing/2014/main" id="{9B872E39-C1F3-4E8A-8C83-E465F16D7241}"/>
               </a:ext>
             </a:extLst>
           </p:cNvPr>
@@ -41979,7 +44428,7 @@
     </p:spTree>
     <p:extLst>
       <p:ext uri="{BB962C8B-B14F-4D97-AF65-F5344CB8AC3E}">
-        <p14:creationId xmlns:p14="http://schemas.microsoft.com/office/powerpoint/2010/main" val="1181985927"/>
+        <p14:creationId xmlns:p14="http://schemas.microsoft.com/office/powerpoint/2010/main" val="217814033"/>
       </p:ext>
     </p:extLst>
   </p:cSld>
